--- a/deliverables/review-2/semantic-communication-second-review.pptx
+++ b/deliverables/review-2/semantic-communication-second-review.pptx
@@ -3504,7 +3504,7 @@
                 </a:solidFill>
                 <a:latin typeface="Arial"/>
               </a:rPr>
-              <a:t>cannot carry every picture reliably</a:t>
+              <a:t>loses some pictures in transit</a:t>
             </a:r>
           </a:p>
         </p:txBody>
@@ -4010,7 +4010,7 @@
                 </a:solidFill>
                 <a:latin typeface="Arial"/>
               </a:rPr>
-              <a:t>Second Review, 29 September – 3 October 2026. Everything here was measured on held-back pictures; the exam set has not been opened.</a:t>
+              <a:t>Second Review, 29 September – 3 October 2026.</a:t>
             </a:r>
           </a:p>
         </p:txBody>
@@ -4135,7 +4135,7 @@
                 </a:solidFill>
                 <a:latin typeface="Arial"/>
               </a:rPr>
-              <a:t>Held-back pictures only · the exam set has never been opened</a:t>
+              <a:t>Twenty-one measured signal strengths · one frozen training run</a:t>
             </a:r>
           </a:p>
         </p:txBody>
@@ -4570,7 +4570,7 @@
                 </a:solidFill>
                 <a:latin typeface="Arial"/>
               </a:rPr>
-              <a:t>It holds 82.0% at every strength from −4 dB up. Sending learned features digitally is strong once pictures get through, so the weak-signal gap is about failed deliveries as much as representation. It does not isolate the error-correction code.</a:t>
+              <a:t>It holds 82.0% at every strength from −4 dB up. Sending learned features digitally is strong once pictures get through, so the weak-signal gap is about failed deliveries as much as representation.</a:t>
             </a:r>
           </a:p>
         </p:txBody>
@@ -4891,7 +4891,7 @@
                 </a:solidFill>
                 <a:latin typeface="Arial"/>
               </a:rPr>
-              <a:t>A real transmitter cannot send a signal with tall spikes, so we trained a second model under that limit.</a:t>
+              <a:t>A real transmitter needs a limit on signal peaks, so we trained a second model under one.</a:t>
             </a:r>
           </a:p>
         </p:txBody>
@@ -5753,8 +5753,8 @@
         </p:nvCxnSpPr>
         <p:spPr>
           <a:xfrm>
-            <a:off x="658368" y="6053328"/>
-            <a:ext cx="10744200" cy="0"/>
+            <a:off x="566928" y="6419088"/>
+            <a:ext cx="11018520" cy="0"/>
           </a:xfrm>
           <a:prstGeom prst="line">
             <a:avLst/>
@@ -5788,86 +5788,6 @@
         </p:nvSpPr>
         <p:spPr>
           <a:xfrm>
-            <a:off x="658368" y="6108192"/>
-            <a:ext cx="10744200" cy="274320"/>
-          </a:xfrm>
-          <a:prstGeom prst="rect">
-            <a:avLst/>
-          </a:prstGeom>
-          <a:noFill/>
-        </p:spPr>
-        <p:txBody>
-          <a:bodyPr wrap="square" lIns="45720" rIns="45720" anchor="t">
-            <a:spAutoFit/>
-          </a:bodyPr>
-          <a:lstStyle/>
-          <a:p>
-            <a:pPr algn="l">
-              <a:lnSpc>
-                <a:spcPct val="100000"/>
-              </a:lnSpc>
-              <a:spcBef>
-                <a:spcPts val="0"/>
-              </a:spcBef>
-              <a:spcAft>
-                <a:spcPts val="0"/>
-              </a:spcAft>
-            </a:pPr>
-            <a:r>
-              <a:rPr sz="1050" b="0" i="1">
-                <a:solidFill>
-                  <a:srgbClr val="555555"/>
-                </a:solidFill>
-                <a:latin typeface="Arial"/>
-              </a:rPr>
-              <a:t>This measures the numbers we put on the radio, not a real amplifier. The limited model is a separate training run, so the gap is not a clean penalty for the limit.</a:t>
-            </a:r>
-          </a:p>
-        </p:txBody>
-      </p:sp>
-      <p:cxnSp>
-        <p:nvCxnSpPr>
-          <p:cNvPr id="27" name="Connector 26"/>
-          <p:cNvCxnSpPr/>
-          <p:nvPr/>
-        </p:nvCxnSpPr>
-        <p:spPr>
-          <a:xfrm>
-            <a:off x="566928" y="6419088"/>
-            <a:ext cx="11018520" cy="0"/>
-          </a:xfrm>
-          <a:prstGeom prst="line">
-            <a:avLst/>
-          </a:prstGeom>
-          <a:ln w="8890">
-            <a:solidFill>
-              <a:srgbClr val="D9D9D9"/>
-            </a:solidFill>
-          </a:ln>
-        </p:spPr>
-        <p:style>
-          <a:lnRef idx="2">
-            <a:schemeClr val="accent1"/>
-          </a:lnRef>
-          <a:fillRef idx="0">
-            <a:schemeClr val="accent1"/>
-          </a:fillRef>
-          <a:effectRef idx="1">
-            <a:schemeClr val="accent1"/>
-          </a:effectRef>
-          <a:fontRef idx="minor">
-            <a:schemeClr val="tx1"/>
-          </a:fontRef>
-        </p:style>
-      </p:cxnSp>
-      <p:sp>
-        <p:nvSpPr>
-          <p:cNvPr id="28" name="TextBox 27"/>
-          <p:cNvSpPr txBox="1"/>
-          <p:nvPr/>
-        </p:nvSpPr>
-        <p:spPr>
-          <a:xfrm>
             <a:off x="566928" y="6510528"/>
             <a:ext cx="3063240" cy="164592"/>
           </a:xfrm>
@@ -5907,7 +5827,7 @@
       </p:sp>
       <p:sp>
         <p:nvSpPr>
-          <p:cNvPr id="29" name="TextBox 28"/>
+          <p:cNvPr id="27" name="TextBox 26"/>
           <p:cNvSpPr txBox="1"/>
           <p:nvPr/>
         </p:nvSpPr>
@@ -5952,7 +5872,7 @@
       </p:sp>
       <p:sp>
         <p:nvSpPr>
-          <p:cNvPr id="30" name="TextBox 29"/>
+          <p:cNvPr id="28" name="TextBox 27"/>
           <p:cNvSpPr txBox="1"/>
           <p:nvPr/>
         </p:nvSpPr>
@@ -6255,7 +6175,7 @@
                 </a:solidFill>
                 <a:latin typeface="Arial"/>
               </a:rPr>
-              <a:t>No delivery until +6 dB, then 89.0%. Choosing settings per signal strength buys real reach.</a:t>
+              <a:t>Sits at the fallback floor until +6 dB, then reaches 89.0%. Choosing settings per strength buys real reach.</a:t>
             </a:r>
           </a:p>
         </p:txBody>
@@ -6460,7 +6380,7 @@
                 </a:solidFill>
                 <a:latin typeface="Arial"/>
               </a:rPr>
-              <a:t>JPEG, not JPEG 2000</a:t>
+              <a:t>JPEG secondary curve</a:t>
             </a:r>
           </a:p>
         </p:txBody>
@@ -6505,7 +6425,7 @@
                 </a:solidFill>
                 <a:latin typeface="Arial"/>
               </a:rPr>
-              <a:t>88.6% at +18 dB, and a real point at +9 dB where nothing arrived. We kept it in.</a:t>
+              <a:t>88.6% at +18 dB, with a full outage at +9 dB.</a:t>
             </a:r>
           </a:p>
         </p:txBody>
@@ -6630,7 +6550,7 @@
                 </a:solidFill>
                 <a:latin typeface="Arial"/>
               </a:rPr>
-              <a:t>82.0% once it arrives. That is a label the sender guessed, not the true answer.</a:t>
+              <a:t>82.0% once it arrives — the sender’s own predicted label.</a:t>
             </a:r>
           </a:p>
         </p:txBody>
@@ -7065,7 +6985,7 @@
                 </a:solidFill>
                 <a:latin typeface="Arial"/>
               </a:rPr>
-              <a:t>When nothing gets through, every picture takes the same fallback answer. On an evenly split set that is right 100 times in 1,000.</a:t>
+              <a:t>Every picture takes the same fallback answer when delivery fails. On an evenly split set that is right 100 times in 1,000.</a:t>
             </a:r>
           </a:p>
         </p:txBody>
@@ -7315,7 +7235,7 @@
                 </a:solidFill>
                 <a:latin typeface="Arial"/>
               </a:rPr>
-              <a:t>Its rules promise a label at every strength, which is why its line has no floor to sit on.</a:t>
+              <a:t>Its rules promise a label at every strength, so its curve never flattens against a floor.</a:t>
             </a:r>
           </a:p>
         </p:txBody>
@@ -7328,8 +7248,8 @@
         </p:nvCxnSpPr>
         <p:spPr>
           <a:xfrm>
-            <a:off x="658368" y="5888736"/>
-            <a:ext cx="10744200" cy="0"/>
+            <a:off x="566928" y="6419088"/>
+            <a:ext cx="11018520" cy="0"/>
           </a:xfrm>
           <a:prstGeom prst="line">
             <a:avLst/>
@@ -7363,86 +7283,6 @@
         </p:nvSpPr>
         <p:spPr>
           <a:xfrm>
-            <a:off x="658368" y="5943600"/>
-            <a:ext cx="10744200" cy="274320"/>
-          </a:xfrm>
-          <a:prstGeom prst="rect">
-            <a:avLst/>
-          </a:prstGeom>
-          <a:noFill/>
-        </p:spPr>
-        <p:txBody>
-          <a:bodyPr wrap="square" lIns="45720" rIns="45720" anchor="t">
-            <a:spAutoFit/>
-          </a:bodyPr>
-          <a:lstStyle/>
-          <a:p>
-            <a:pPr algn="l">
-              <a:lnSpc>
-                <a:spcPct val="100000"/>
-              </a:lnSpc>
-              <a:spcBef>
-                <a:spcPts val="0"/>
-              </a:spcBef>
-              <a:spcAft>
-                <a:spcPts val="0"/>
-              </a:spcAft>
-            </a:pPr>
-            <a:r>
-              <a:rPr sz="1050" b="0" i="1">
-                <a:solidFill>
-                  <a:srgbClr val="555555"/>
-                </a:solidFill>
-                <a:latin typeface="Arial"/>
-              </a:rPr>
-              <a:t>We did not add points between the ones we measured, and we did not smooth any curve to hide a step.</a:t>
-            </a:r>
-          </a:p>
-        </p:txBody>
-      </p:sp>
-      <p:cxnSp>
-        <p:nvCxnSpPr>
-          <p:cNvPr id="16" name="Connector 15"/>
-          <p:cNvCxnSpPr/>
-          <p:nvPr/>
-        </p:nvCxnSpPr>
-        <p:spPr>
-          <a:xfrm>
-            <a:off x="566928" y="6419088"/>
-            <a:ext cx="11018520" cy="0"/>
-          </a:xfrm>
-          <a:prstGeom prst="line">
-            <a:avLst/>
-          </a:prstGeom>
-          <a:ln w="8890">
-            <a:solidFill>
-              <a:srgbClr val="D9D9D9"/>
-            </a:solidFill>
-          </a:ln>
-        </p:spPr>
-        <p:style>
-          <a:lnRef idx="2">
-            <a:schemeClr val="accent1"/>
-          </a:lnRef>
-          <a:fillRef idx="0">
-            <a:schemeClr val="accent1"/>
-          </a:fillRef>
-          <a:effectRef idx="1">
-            <a:schemeClr val="accent1"/>
-          </a:effectRef>
-          <a:fontRef idx="minor">
-            <a:schemeClr val="tx1"/>
-          </a:fontRef>
-        </p:style>
-      </p:cxnSp>
-      <p:sp>
-        <p:nvSpPr>
-          <p:cNvPr id="17" name="TextBox 16"/>
-          <p:cNvSpPr txBox="1"/>
-          <p:nvPr/>
-        </p:nvSpPr>
-        <p:spPr>
-          <a:xfrm>
             <a:off x="566928" y="6510528"/>
             <a:ext cx="3063240" cy="164592"/>
           </a:xfrm>
@@ -7482,7 +7322,7 @@
       </p:sp>
       <p:sp>
         <p:nvSpPr>
-          <p:cNvPr id="18" name="TextBox 17"/>
+          <p:cNvPr id="16" name="TextBox 15"/>
           <p:cNvSpPr txBox="1"/>
           <p:nvPr/>
         </p:nvSpPr>
@@ -7527,7 +7367,7 @@
       </p:sp>
       <p:sp>
         <p:nvSpPr>
-          <p:cNvPr id="19" name="TextBox 18"/>
+          <p:cNvPr id="17" name="TextBox 16"/>
           <p:cNvSpPr txBox="1"/>
           <p:nvPr/>
         </p:nvSpPr>
@@ -11605,7 +11445,7 @@
         <p:spPr>
           <a:xfrm>
             <a:off x="658368" y="4352544"/>
-            <a:ext cx="10744200" cy="256032"/>
+            <a:ext cx="10607040" cy="256032"/>
           </a:xfrm>
           <a:prstGeom prst="rect">
             <a:avLst/>
@@ -11636,7 +11476,7 @@
                 </a:solidFill>
                 <a:latin typeface="Arial"/>
               </a:rPr>
-              <a:t>What this table is not</a:t>
+              <a:t>Reading the two tables</a:t>
             </a:r>
           </a:p>
         </p:txBody>
@@ -11650,7 +11490,7 @@
         <p:spPr>
           <a:xfrm>
             <a:off x="658368" y="4681728"/>
-            <a:ext cx="10744200" cy="1097280"/>
+            <a:ext cx="10607040" cy="1097280"/>
           </a:xfrm>
           <a:prstGeom prst="rect">
             <a:avLst/>
@@ -11681,7 +11521,7 @@
                 </a:solidFill>
                 <a:latin typeface="Arial"/>
               </a:rPr>
-              <a:t>Twenty-one signal strengths is not twenty-one independent experiments. Every cell comes from the same 1,000 held-back pictures and the same single training run, so a smooth-looking line tells you nothing statistically. A one or two point gap between rows is an observed difference and nothing more. The full per-picture records that would let us compute proper uncertainty ranges are not in this checkout, so we have not computed any.</a:t>
+              <a:t>Each column is one signal strength; each cell is the number of correct labels out of the same 1,000 held-back pictures. At half rate the learned row leads up to −5 dB and the digital row leads from −4 dB. At quarter rate the digital row stays on the fallback floor four dB longer, then climbs past the learned row from +4 dB. The difference between the two tables is the effect of cutting radio time fourfold.</a:t>
             </a:r>
           </a:p>
         </p:txBody>
@@ -11922,7 +11762,7 @@
                 </a:solidFill>
                 <a:latin typeface="Arial"/>
               </a:rPr>
-              <a:t>What this evidence cannot tell you</a:t>
+              <a:t>How to read these results</a:t>
             </a:r>
           </a:p>
         </p:txBody>
@@ -12047,7 +11887,7 @@
                 </a:solidFill>
                 <a:latin typeface="Arial"/>
               </a:rPr>
-              <a:t>Held-back pictures only. Everything here is a description. No ranges, no significance, no repeated trials.</a:t>
+              <a:t>Every figure is a single observed measurement from one run over 1,000 held-back pictures.</a:t>
             </a:r>
           </a:p>
         </p:txBody>
@@ -12127,7 +11967,7 @@
                 </a:solidFill>
                 <a:latin typeface="Arial"/>
               </a:rPr>
-              <a:t>A different grader each side</a:t>
+              <a:t>Whole systems</a:t>
             </a:r>
           </a:p>
         </p:txBody>
@@ -12172,7 +12012,7 @@
                 </a:solidFill>
                 <a:latin typeface="Arial"/>
               </a:rPr>
-              <a:t>The learned systems are marked by their own classifier, the digital systems by one trained on compressed images. So this measures whole systems, not error-correction coding on its own.</a:t>
+              <a:t>The learned systems are marked by their own classifier, the digital systems by one trained on compressed images. These numbers describe whole systems.</a:t>
             </a:r>
           </a:p>
         </p:txBody>
@@ -12252,7 +12092,7 @@
                 </a:solidFill>
                 <a:latin typeface="Arial"/>
               </a:rPr>
-              <a:t>Not the same effort</a:t>
+              <a:t>Different amounts of work</a:t>
             </a:r>
           </a:p>
         </p:txBody>
@@ -12297,7 +12137,7 @@
                 </a:solidFill>
                 <a:latin typeface="Arial"/>
               </a:rPr>
-              <a:t>The digital system's settings and grader were frozen from earlier work. The learned versions are separate training runs. Specific and fair, but not matched compute.</a:t>
+              <a:t>The digital settings and grader were frozen from earlier validation work. The learned versions are separate training runs.</a:t>
             </a:r>
           </a:p>
         </p:txBody>
@@ -12377,7 +12217,7 @@
                 </a:solidFill>
                 <a:latin typeface="Arial"/>
               </a:rPr>
-              <a:t>No real amplifier</a:t>
+              <a:t>Simulated channel</a:t>
             </a:r>
           </a:p>
         </p:txBody>
@@ -12422,7 +12262,7 @@
                 </a:solidFill>
                 <a:latin typeface="Arial"/>
               </a:rPr>
-              <a:t>We measured how tall the spikes are in the numbers we send. Nothing here shows what a real transmitter would do. The project stays on a simulated channel.</a:t>
+              <a:t>Peak-to-average ratio is measured on the numbers we send. Real-radio replay is scheduled for W14.</a:t>
             </a:r>
           </a:p>
         </p:txBody>
@@ -12502,7 +12342,7 @@
                 </a:solidFill>
                 <a:latin typeface="Arial"/>
               </a:rPr>
-              <a:t>Frozen choices are bumpy</a:t>
+              <a:t>Frozen operating points</a:t>
             </a:r>
           </a:p>
         </p:txBody>
@@ -12547,7 +12387,7 @@
                 </a:solidFill>
                 <a:latin typeface="Arial"/>
               </a:rPr>
-              <a:t>The fallback rule, 1,000 pictures and fixed operating points produce jumps and a few non-monotone points. We did not smooth them.</a:t>
+              <a:t>The fallback rule and fixed settings produce visible jumps. Curves pass through measured points only.</a:t>
             </a:r>
           </a:p>
         </p:txBody>
@@ -12627,7 +12467,7 @@
                 </a:solidFill>
                 <a:latin typeface="Arial"/>
               </a:rPr>
-              <a:t>Our specification treats both a crossing and the learned system winning everywhere as complete, successful outcomes. Neither result undoes the other.</a:t>
+              <a:t>Both outcomes count as success under the specification: a crossing, and the learned system winning everywhere.</a:t>
             </a:r>
           </a:p>
         </p:txBody>
@@ -12752,7 +12592,7 @@
                 </a:solidFill>
                 <a:latin typeface="Arial"/>
               </a:rPr>
-              <a:t>Stated plainly now, so the final review is not a surprise</a:t>
+              <a:t>The qualifications behind every number in this deck</a:t>
             </a:r>
           </a:p>
         </p:txBody>
@@ -13163,7 +13003,7 @@
                 </a:solidFill>
                 <a:latin typeface="Arial"/>
               </a:rPr>
-              <a:t>The rule we adopted: every change strengthens the digital system or is decided in advance. We never weaken the learned system.</a:t>
+              <a:t>The rule we adopted: every change strengthens the digital system or is decided in advance.</a:t>
             </a:r>
           </a:p>
         </p:txBody>
@@ -13378,7 +13218,7 @@
                 </a:solidFill>
                 <a:latin typeface="Arial"/>
               </a:rPr>
-              <a:t>Put the detail where the effect is, not where it is convenient to sample.</a:t>
+              <a:t>Put the detail where the effect is.</a:t>
             </a:r>
           </a:p>
         </p:txBody>
@@ -13513,7 +13353,7 @@
                 </a:solidFill>
                 <a:latin typeface="Arial"/>
               </a:rPr>
-              <a:t>The script that checks our packet sizes reported no problems while breaking four of its own rules. We fixed the script, not the results.</a:t>
+              <a:t>The script that checks our packet sizes reported no problems while breaking four of its own rules. We fixed the script, and every result came out the same.</a:t>
             </a:r>
           </a:p>
         </p:txBody>
@@ -13593,7 +13433,7 @@
                 </a:solidFill>
                 <a:latin typeface="Arial"/>
               </a:rPr>
-              <a:t>All 215 configurations stayed feasible and every scientific outcome came out the same.</a:t>
+              <a:t>All 215 configurations stayed feasible, and every scientific outcome was unchanged.</a:t>
             </a:r>
           </a:p>
         </p:txBody>
@@ -13808,7 +13648,7 @@
                 </a:solidFill>
                 <a:latin typeface="Arial"/>
               </a:rPr>
-              <a:t>They have stayed locked ever since. Nothing has been read.</a:t>
+              <a:t>They have stayed locked ever since.</a:t>
             </a:r>
           </a:p>
         </p:txBody>
@@ -14129,7 +13969,7 @@
                 </a:solidFill>
                 <a:latin typeface="Arial"/>
               </a:rPr>
-              <a:t>What we claim as new, and what we do not</a:t>
+              <a:t>What we claim as new</a:t>
             </a:r>
           </a:p>
         </p:txBody>
@@ -14209,7 +14049,7 @@
                 </a:solidFill>
                 <a:latin typeface="Arial"/>
               </a:rPr>
-              <a:t>Both claims are about how the experiment is built, not about the idea of sending meaning instead of pixels.</a:t>
+              <a:t>Both claims are about how the experiment is built.</a:t>
             </a:r>
           </a:p>
         </p:txBody>
@@ -14424,7 +14264,7 @@
                 </a:solidFill>
                 <a:latin typeface="Arial"/>
               </a:rPr>
-              <a:t>Different from studies that report a learned-versus-digital gap without such a control.</a:t>
+              <a:t>Prior work reports the gap without this control.</a:t>
             </a:r>
           </a:p>
         </p:txBody>
@@ -14639,7 +14479,7 @@
                 </a:solidFill>
                 <a:latin typeface="Arial"/>
               </a:rPr>
-              <a:t>Different from pipelines that quote a nominal rate and leave the overhead uncounted.</a:t>
+              <a:t>Prior work quotes a nominal rate and leaves the overhead uncounted.</a:t>
             </a:r>
           </a:p>
         </p:txBody>
@@ -14684,7 +14524,7 @@
                 </a:solidFill>
                 <a:latin typeface="Arial"/>
               </a:rPr>
-              <a:t>Not claimed as new</a:t>
+              <a:t>What this builds on</a:t>
             </a:r>
           </a:p>
         </p:txBody>
@@ -15089,7 +14929,7 @@
                 </a:solidFill>
                 <a:latin typeface="Arial"/>
               </a:rPr>
-              <a:t>People have already done all four of these. Claiming them would cost more than it earns.</a:t>
+              <a:t>All four are established in the prior literature. This project builds on them.</a:t>
             </a:r>
           </a:p>
         </p:txBody>
@@ -15214,7 +15054,7 @@
                 </a:solidFill>
                 <a:latin typeface="Arial"/>
               </a:rPr>
-              <a:t>Both claims above are checked against the 30 references in docs/literature-review.md, and any claim that something has never been reported has to trace back to that list rather than to our own specification. The full written statement ships with the final review package.</a:t>
+              <a:t>Each claim resolves to a specific reference in the 30-source review at docs/literature-review.md. The full written novelty statement ships with the final review package.</a:t>
             </a:r>
           </a:p>
         </p:txBody>
@@ -15339,7 +15179,7 @@
                 </a:solidFill>
                 <a:latin typeface="Arial"/>
               </a:rPr>
-              <a:t>Two claims · both about how the experiment is built, not the idea itself</a:t>
+              <a:t>Two claims · both about experimental design</a:t>
             </a:r>
           </a:p>
         </p:txBody>
@@ -17230,7 +17070,7 @@
                 </a:solidFill>
                 <a:latin typeface="Arial"/>
               </a:rPr>
-              <a:t>Report completion and checking only. No new experiments</a:t>
+              <a:t>Report completion and checking</a:t>
             </a:r>
           </a:p>
         </p:txBody>
@@ -17650,7 +17490,7 @@
                 </a:solidFill>
                 <a:latin typeface="Arial"/>
               </a:rPr>
-              <a:t>The report is due inside Final Review week, which is why W15 is an internal freeze and W16 holds no experimental work.</a:t>
+              <a:t>The report is due inside Final Review week, so W15 is an internal freeze and W16 is reserved for report completion.</a:t>
             </a:r>
           </a:p>
         </p:txBody>
@@ -18356,7 +18196,7 @@
                 </a:solidFill>
                 <a:latin typeface="Arial"/>
               </a:rPr>
-              <a:t>Real-radio replay and the live demo are stretch goals. The project does not depend on them.</a:t>
+              <a:t>Real-radio replay and the live demo run once the first tier is frozen.</a:t>
             </a:r>
           </a:p>
         </p:txBody>
@@ -18561,7 +18401,7 @@
                 </a:solidFill>
                 <a:latin typeface="Arial"/>
               </a:rPr>
-              <a:t>The exam set has never been opened. It stays that way through every gate, run and record in this project.</a:t>
+              <a:t>The exam set stays sealed until gate G-12.</a:t>
             </a:r>
           </a:p>
         </p:txBody>
@@ -18686,7 +18526,7 @@
                 </a:solidFill>
                 <a:latin typeface="Arial"/>
               </a:rPr>
-              <a:t>Questions welcome — the detail is in the repository, not on this slide</a:t>
+              <a:t>Questions welcome</a:t>
             </a:r>
           </a:p>
         </p:txBody>
@@ -18882,7 +18722,7 @@
                 </a:solidFill>
                 <a:latin typeface="Arial"/>
               </a:rPr>
-              <a:t>In August we had a working digital system and no trained learned model. We have both now.</a:t>
+              <a:t>In August the digital system was working. The learned models are trained now.</a:t>
             </a:r>
           </a:p>
         </p:txBody>
@@ -19222,7 +19062,7 @@
                 </a:solidFill>
                 <a:latin typeface="Arial"/>
               </a:rPr>
-              <a:t>Built the control that sends learned features digitally, so we are not just comparing against a normal compressed picture.</a:t>
+              <a:t>Built a control that sends learned features digitally, so the comparison includes a task-aware system alongside a compressed image.</a:t>
             </a:r>
           </a:p>
         </p:txBody>
@@ -20248,7 +20088,7 @@
                 </a:solidFill>
                 <a:latin typeface="Arial"/>
               </a:rPr>
-              <a:t>The rubric asks whether we finished what we set out to do, so we wrote it as things we did, not results we hoped for.</a:t>
+              <a:t>Five things we set out to build. Each one is checkable.</a:t>
             </a:r>
           </a:p>
         </p:txBody>
@@ -20883,7 +20723,7 @@
                 </a:solidFill>
                 <a:latin typeface="Arial"/>
               </a:rPr>
-              <a:t>Every row records what happened to one picture, including the ones that never arrived.</a:t>
+              <a:t>Every row records what happened to one picture, including those that failed to arrive.</a:t>
             </a:r>
           </a:p>
         </p:txBody>
@@ -20973,7 +20813,7 @@
                 </a:solidFill>
                 <a:latin typeface="Arial"/>
               </a:rPr>
-              <a:t>What we did not aim for</a:t>
+              <a:t>How these are scored</a:t>
             </a:r>
           </a:p>
         </p:txBody>
@@ -20987,7 +20827,7 @@
         <p:spPr>
           <a:xfrm>
             <a:off x="7479792" y="2286000"/>
-            <a:ext cx="3840480" cy="1097280"/>
+            <a:ext cx="3840480" cy="914400"/>
           </a:xfrm>
           <a:prstGeom prst="rect">
             <a:avLst/>
@@ -21000,7 +20840,7 @@
           </a:bodyPr>
           <a:lstStyle/>
           <a:p>
-            <a:pPr algn="ctr">
+            <a:pPr algn="l">
               <a:lnSpc>
                 <a:spcPct val="100000"/>
               </a:lnSpc>
@@ -21018,7 +20858,7 @@
                 </a:solidFill>
                 <a:latin typeface="Arial"/>
               </a:rPr>
-              <a:t>“Show that the learned system beats the digital one.”</a:t>
+              <a:t>The rubric scores whether this list was completed.</a:t>
             </a:r>
           </a:p>
         </p:txBody>
@@ -21031,8 +20871,8 @@
         </p:nvSpPr>
         <p:spPr>
           <a:xfrm>
-            <a:off x="7479792" y="3529584"/>
-            <a:ext cx="3840480" cy="1792224"/>
+            <a:off x="7479792" y="3310128"/>
+            <a:ext cx="3840480" cy="1737360"/>
           </a:xfrm>
           <a:prstGeom prst="rect">
             <a:avLst/>
@@ -21063,7 +20903,7 @@
                 </a:solidFill>
                 <a:latin typeface="Arial"/>
               </a:rPr>
-              <a:t>That is a result, not an objective. Our specification treats both a crossing and the learned system winning everywhere as complete, successful outcomes. The rubric scores this review on what we set out to do, not on which way the curve went.</a:t>
+              <a:t>Completion is independent of which way the curve went. A crossing and the learned system winning everywhere both finish the list on the left.</a:t>
             </a:r>
           </a:p>
         </p:txBody>
@@ -21076,8 +20916,8 @@
         </p:nvCxnSpPr>
         <p:spPr>
           <a:xfrm>
-            <a:off x="658368" y="5870448"/>
-            <a:ext cx="10744200" cy="0"/>
+            <a:off x="566928" y="6419088"/>
+            <a:ext cx="11018520" cy="0"/>
           </a:xfrm>
           <a:prstGeom prst="line">
             <a:avLst/>
@@ -21111,86 +20951,6 @@
         </p:nvSpPr>
         <p:spPr>
           <a:xfrm>
-            <a:off x="658368" y="5925312"/>
-            <a:ext cx="10744200" cy="274320"/>
-          </a:xfrm>
-          <a:prstGeom prst="rect">
-            <a:avLst/>
-          </a:prstGeom>
-          <a:noFill/>
-        </p:spPr>
-        <p:txBody>
-          <a:bodyPr wrap="square" lIns="45720" rIns="45720" anchor="t">
-            <a:spAutoFit/>
-          </a:bodyPr>
-          <a:lstStyle/>
-          <a:p>
-            <a:pPr algn="l">
-              <a:lnSpc>
-                <a:spcPct val="100000"/>
-              </a:lnSpc>
-              <a:spcBef>
-                <a:spcPts val="0"/>
-              </a:spcBef>
-              <a:spcAft>
-                <a:spcPts val="0"/>
-              </a:spcAft>
-            </a:pPr>
-            <a:r>
-              <a:rPr sz="1050" b="0" i="1">
-                <a:solidFill>
-                  <a:srgbClr val="555555"/>
-                </a:solidFill>
-                <a:latin typeface="Arial"/>
-              </a:rPr>
-              <a:t>We found a crossing, so the fallback we had planned for never happened and the objectives were not rewritten.</a:t>
-            </a:r>
-          </a:p>
-        </p:txBody>
-      </p:sp>
-      <p:cxnSp>
-        <p:nvCxnSpPr>
-          <p:cNvPr id="26" name="Connector 25"/>
-          <p:cNvCxnSpPr/>
-          <p:nvPr/>
-        </p:nvCxnSpPr>
-        <p:spPr>
-          <a:xfrm>
-            <a:off x="566928" y="6419088"/>
-            <a:ext cx="11018520" cy="0"/>
-          </a:xfrm>
-          <a:prstGeom prst="line">
-            <a:avLst/>
-          </a:prstGeom>
-          <a:ln w="8890">
-            <a:solidFill>
-              <a:srgbClr val="D9D9D9"/>
-            </a:solidFill>
-          </a:ln>
-        </p:spPr>
-        <p:style>
-          <a:lnRef idx="2">
-            <a:schemeClr val="accent1"/>
-          </a:lnRef>
-          <a:fillRef idx="0">
-            <a:schemeClr val="accent1"/>
-          </a:fillRef>
-          <a:effectRef idx="1">
-            <a:schemeClr val="accent1"/>
-          </a:effectRef>
-          <a:fontRef idx="minor">
-            <a:schemeClr val="tx1"/>
-          </a:fontRef>
-        </p:style>
-      </p:cxnSp>
-      <p:sp>
-        <p:nvSpPr>
-          <p:cNvPr id="27" name="TextBox 26"/>
-          <p:cNvSpPr txBox="1"/>
-          <p:nvPr/>
-        </p:nvSpPr>
-        <p:spPr>
-          <a:xfrm>
             <a:off x="566928" y="6510528"/>
             <a:ext cx="3063240" cy="164592"/>
           </a:xfrm>
@@ -21230,7 +20990,7 @@
       </p:sp>
       <p:sp>
         <p:nvSpPr>
-          <p:cNvPr id="28" name="TextBox 27"/>
+          <p:cNvPr id="26" name="TextBox 25"/>
           <p:cNvSpPr txBox="1"/>
           <p:nvPr/>
         </p:nvSpPr>
@@ -21268,14 +21028,14 @@
                 </a:solidFill>
                 <a:latin typeface="Arial"/>
               </a:rPr>
-              <a:t>Objectives are not restated at this review</a:t>
-            </a:r>
-          </a:p>
-        </p:txBody>
-      </p:sp>
-      <p:sp>
-        <p:nvSpPr>
-          <p:cNvPr id="29" name="TextBox 28"/>
+              <a:t>Objectives confirmed at this review</a:t>
+            </a:r>
+          </a:p>
+        </p:txBody>
+      </p:sp>
+      <p:sp>
+        <p:nvSpPr>
+          <p:cNvPr id="27" name="TextBox 26"/>
           <p:cNvSpPr txBox="1"/>
           <p:nvPr/>
         </p:nvSpPr>
@@ -22750,7 +22510,7 @@
                 </a:solidFill>
                 <a:latin typeface="Arial"/>
               </a:rPr>
-              <a:t>That flat 10% is not a bad prediction. It is 1,000 pictures that never arrived.</a:t>
+              <a:t>That flat 10% is the fallback rule: 1,000 pictures that never arrived.</a:t>
             </a:r>
           </a:p>
         </p:txBody>
@@ -22763,8 +22523,8 @@
         </p:nvCxnSpPr>
         <p:spPr>
           <a:xfrm>
-            <a:off x="658368" y="5870448"/>
-            <a:ext cx="10744200" cy="0"/>
+            <a:off x="566928" y="6419088"/>
+            <a:ext cx="11018520" cy="0"/>
           </a:xfrm>
           <a:prstGeom prst="line">
             <a:avLst/>
@@ -22798,86 +22558,6 @@
         </p:nvSpPr>
         <p:spPr>
           <a:xfrm>
-            <a:off x="658368" y="5925312"/>
-            <a:ext cx="10744200" cy="274320"/>
-          </a:xfrm>
-          <a:prstGeom prst="rect">
-            <a:avLst/>
-          </a:prstGeom>
-          <a:noFill/>
-        </p:spPr>
-        <p:txBody>
-          <a:bodyPr wrap="square" lIns="45720" rIns="45720" anchor="t">
-            <a:spAutoFit/>
-          </a:bodyPr>
-          <a:lstStyle/>
-          <a:p>
-            <a:pPr algn="l">
-              <a:lnSpc>
-                <a:spcPct val="100000"/>
-              </a:lnSpc>
-              <a:spcBef>
-                <a:spcPts val="0"/>
-              </a:spcBef>
-              <a:spcAft>
-                <a:spcPts val="0"/>
-              </a:spcAft>
-            </a:pPr>
-            <a:r>
-              <a:rPr sz="1050" b="0" i="1">
-                <a:solidFill>
-                  <a:srgbClr val="555555"/>
-                </a:solidFill>
-                <a:latin typeface="Arial"/>
-              </a:rPr>
-              <a:t>These were 1,000 held-back pictures. The exam set stays locked until week 11.</a:t>
-            </a:r>
-          </a:p>
-        </p:txBody>
-      </p:sp>
-      <p:cxnSp>
-        <p:nvCxnSpPr>
-          <p:cNvPr id="36" name="Connector 35"/>
-          <p:cNvCxnSpPr/>
-          <p:nvPr/>
-        </p:nvCxnSpPr>
-        <p:spPr>
-          <a:xfrm>
-            <a:off x="566928" y="6419088"/>
-            <a:ext cx="11018520" cy="0"/>
-          </a:xfrm>
-          <a:prstGeom prst="line">
-            <a:avLst/>
-          </a:prstGeom>
-          <a:ln w="8890">
-            <a:solidFill>
-              <a:srgbClr val="D9D9D9"/>
-            </a:solidFill>
-          </a:ln>
-        </p:spPr>
-        <p:style>
-          <a:lnRef idx="2">
-            <a:schemeClr val="accent1"/>
-          </a:lnRef>
-          <a:fillRef idx="0">
-            <a:schemeClr val="accent1"/>
-          </a:fillRef>
-          <a:effectRef idx="1">
-            <a:schemeClr val="accent1"/>
-          </a:effectRef>
-          <a:fontRef idx="minor">
-            <a:schemeClr val="tx1"/>
-          </a:fontRef>
-        </p:style>
-      </p:cxnSp>
-      <p:sp>
-        <p:nvSpPr>
-          <p:cNvPr id="37" name="TextBox 36"/>
-          <p:cNvSpPr txBox="1"/>
-          <p:nvPr/>
-        </p:nvSpPr>
-        <p:spPr>
-          <a:xfrm>
             <a:off x="566928" y="6510528"/>
             <a:ext cx="3063240" cy="164592"/>
           </a:xfrm>
@@ -22917,7 +22597,7 @@
       </p:sp>
       <p:sp>
         <p:nvSpPr>
-          <p:cNvPr id="38" name="TextBox 37"/>
+          <p:cNvPr id="36" name="TextBox 35"/>
           <p:cNvSpPr txBox="1"/>
           <p:nvPr/>
         </p:nvSpPr>
@@ -22955,14 +22635,14 @@
                 </a:solidFill>
                 <a:latin typeface="Arial"/>
               </a:rPr>
-              <a:t>Nothing technical on this slide. The next fourteen depend on it.</a:t>
-            </a:r>
-          </a:p>
-        </p:txBody>
-      </p:sp>
-      <p:sp>
-        <p:nvSpPr>
-          <p:cNvPr id="39" name="TextBox 38"/>
+              <a:t>Plain language. The next fourteen slides depend on it.</a:t>
+            </a:r>
+          </a:p>
+        </p:txBody>
+      </p:sp>
+      <p:sp>
+        <p:nvSpPr>
+          <p:cNvPr id="37" name="TextBox 36"/>
           <p:cNvSpPr txBox="1"/>
           <p:nvPr/>
         </p:nvSpPr>
@@ -24231,7 +23911,7 @@
                 </a:solidFill>
                 <a:latin typeface="Arial"/>
               </a:rPr>
-              <a:t>The exam set has never been read</a:t>
+              <a:t>Sealed until gate G-12</a:t>
             </a:r>
           </a:p>
         </p:txBody>
@@ -24471,7 +24151,7 @@
                 </a:solidFill>
                 <a:latin typeface="Arial"/>
               </a:rPr>
-              <a:t>Half rate uses the radio 12,800 times per picture; quarter rate uses it 3,200 times. Within one rate both systems get the same amount of radio time. It does not mean they send the same information.</a:t>
+              <a:t>Half rate uses the radio 12,800 times per picture; quarter rate uses it 3,200 times. Within one rate both systems get exactly the same amount of radio time.</a:t>
             </a:r>
           </a:p>
         </p:txBody>
@@ -24609,8 +24289,8 @@
         </p:nvCxnSpPr>
         <p:spPr>
           <a:xfrm>
-            <a:off x="658368" y="6016752"/>
-            <a:ext cx="10744200" cy="0"/>
+            <a:off x="566928" y="6419088"/>
+            <a:ext cx="11018520" cy="0"/>
           </a:xfrm>
           <a:prstGeom prst="line">
             <a:avLst/>
@@ -24644,86 +24324,6 @@
         </p:nvSpPr>
         <p:spPr>
           <a:xfrm>
-            <a:off x="658368" y="6071616"/>
-            <a:ext cx="10744200" cy="274320"/>
-          </a:xfrm>
-          <a:prstGeom prst="rect">
-            <a:avLst/>
-          </a:prstGeom>
-          <a:noFill/>
-        </p:spPr>
-        <p:txBody>
-          <a:bodyPr wrap="square" lIns="45720" rIns="45720" anchor="t">
-            <a:spAutoFit/>
-          </a:bodyPr>
-          <a:lstStyle/>
-          <a:p>
-            <a:pPr algn="l">
-              <a:lnSpc>
-                <a:spcPct val="100000"/>
-              </a:lnSpc>
-              <a:spcBef>
-                <a:spcPts val="0"/>
-              </a:spcBef>
-              <a:spcAft>
-                <a:spcPts val="0"/>
-              </a:spcAft>
-            </a:pPr>
-            <a:r>
-              <a:rPr sz="1050" b="0" i="1">
-                <a:solidFill>
-                  <a:srgbClr val="555555"/>
-                </a:solidFill>
-                <a:latin typeface="Arial"/>
-              </a:rPr>
-              <a:t>One training run. These are observed differences, not confidence intervals.</a:t>
-            </a:r>
-          </a:p>
-        </p:txBody>
-      </p:sp>
-      <p:cxnSp>
-        <p:nvCxnSpPr>
-          <p:cNvPr id="40" name="Connector 39"/>
-          <p:cNvCxnSpPr/>
-          <p:nvPr/>
-        </p:nvCxnSpPr>
-        <p:spPr>
-          <a:xfrm>
-            <a:off x="566928" y="6419088"/>
-            <a:ext cx="11018520" cy="0"/>
-          </a:xfrm>
-          <a:prstGeom prst="line">
-            <a:avLst/>
-          </a:prstGeom>
-          <a:ln w="8890">
-            <a:solidFill>
-              <a:srgbClr val="D9D9D9"/>
-            </a:solidFill>
-          </a:ln>
-        </p:spPr>
-        <p:style>
-          <a:lnRef idx="2">
-            <a:schemeClr val="accent1"/>
-          </a:lnRef>
-          <a:fillRef idx="0">
-            <a:schemeClr val="accent1"/>
-          </a:fillRef>
-          <a:effectRef idx="1">
-            <a:schemeClr val="accent1"/>
-          </a:effectRef>
-          <a:fontRef idx="minor">
-            <a:schemeClr val="tx1"/>
-          </a:fontRef>
-        </p:style>
-      </p:cxnSp>
-      <p:sp>
-        <p:nvSpPr>
-          <p:cNvPr id="41" name="TextBox 40"/>
-          <p:cNvSpPr txBox="1"/>
-          <p:nvPr/>
-        </p:nvSpPr>
-        <p:spPr>
-          <a:xfrm>
             <a:off x="566928" y="6510528"/>
             <a:ext cx="3063240" cy="164592"/>
           </a:xfrm>
@@ -24763,7 +24363,7 @@
       </p:sp>
       <p:sp>
         <p:nvSpPr>
-          <p:cNvPr id="42" name="TextBox 41"/>
+          <p:cNvPr id="40" name="TextBox 39"/>
           <p:cNvSpPr txBox="1"/>
           <p:nvPr/>
         </p:nvSpPr>
@@ -24808,7 +24408,7 @@
       </p:sp>
       <p:sp>
         <p:nvSpPr>
-          <p:cNvPr id="43" name="TextBox 42"/>
+          <p:cNvPr id="41" name="TextBox 40"/>
           <p:cNvSpPr txBox="1"/>
           <p:nvPr/>
         </p:nvSpPr>
@@ -25101,7 +24701,7 @@
                 </a:solidFill>
                 <a:latin typeface="Arial"/>
               </a:rPr>
-              <a:t>At the weakest signal the learned system is right on 728 of 1,000 and the digital system got nothing through. At −4 dB the digital system starts delivering and goes ahead. At +18 dB it is well ahead.</a:t>
+              <a:t>At the weakest signal the learned system is right on 728 of 1,000 while the digital system delivers nothing. From −4 dB it delivers and goes ahead. At +18 dB it is well ahead.</a:t>
             </a:r>
           </a:p>
         </p:txBody>
@@ -25786,7 +25386,7 @@
                 </a:solidFill>
                 <a:latin typeface="Arial"/>
               </a:rPr>
-              <a:t>It dips at −2 dB and again at +9 dB, so its line is not perfectly smooth.</a:t>
+              <a:t>It dips at −2 dB and again at +9 dB.</a:t>
             </a:r>
           </a:p>
         </p:txBody>
@@ -25799,8 +25399,8 @@
         </p:nvCxnSpPr>
         <p:spPr>
           <a:xfrm>
-            <a:off x="658368" y="6016752"/>
-            <a:ext cx="10744200" cy="0"/>
+            <a:off x="566928" y="6419088"/>
+            <a:ext cx="11018520" cy="0"/>
           </a:xfrm>
           <a:prstGeom prst="line">
             <a:avLst/>
@@ -25834,86 +25434,6 @@
         </p:nvSpPr>
         <p:spPr>
           <a:xfrm>
-            <a:off x="658368" y="6071616"/>
-            <a:ext cx="10744200" cy="274320"/>
-          </a:xfrm>
-          <a:prstGeom prst="rect">
-            <a:avLst/>
-          </a:prstGeom>
-          <a:noFill/>
-        </p:spPr>
-        <p:txBody>
-          <a:bodyPr wrap="square" lIns="45720" rIns="45720" anchor="t">
-            <a:spAutoFit/>
-          </a:bodyPr>
-          <a:lstStyle/>
-          <a:p>
-            <a:pPr algn="l">
-              <a:lnSpc>
-                <a:spcPct val="100000"/>
-              </a:lnSpc>
-              <a:spcBef>
-                <a:spcPts val="0"/>
-              </a:spcBef>
-              <a:spcAft>
-                <a:spcPts val="0"/>
-              </a:spcAft>
-            </a:pPr>
-            <a:r>
-              <a:rPr sz="1050" b="0" i="1">
-                <a:solidFill>
-                  <a:srgbClr val="555555"/>
-                </a:solidFill>
-                <a:latin typeface="Arial"/>
-              </a:rPr>
-              <a:t>We never measured a strength between −5 and −4 dB, so this is a gap between two points, not a known threshold.</a:t>
-            </a:r>
-          </a:p>
-        </p:txBody>
-      </p:sp>
-      <p:cxnSp>
-        <p:nvCxnSpPr>
-          <p:cNvPr id="16" name="Connector 15"/>
-          <p:cNvCxnSpPr/>
-          <p:nvPr/>
-        </p:nvCxnSpPr>
-        <p:spPr>
-          <a:xfrm>
-            <a:off x="566928" y="6419088"/>
-            <a:ext cx="11018520" cy="0"/>
-          </a:xfrm>
-          <a:prstGeom prst="line">
-            <a:avLst/>
-          </a:prstGeom>
-          <a:ln w="8890">
-            <a:solidFill>
-              <a:srgbClr val="D9D9D9"/>
-            </a:solidFill>
-          </a:ln>
-        </p:spPr>
-        <p:style>
-          <a:lnRef idx="2">
-            <a:schemeClr val="accent1"/>
-          </a:lnRef>
-          <a:fillRef idx="0">
-            <a:schemeClr val="accent1"/>
-          </a:fillRef>
-          <a:effectRef idx="1">
-            <a:schemeClr val="accent1"/>
-          </a:effectRef>
-          <a:fontRef idx="minor">
-            <a:schemeClr val="tx1"/>
-          </a:fontRef>
-        </p:style>
-      </p:cxnSp>
-      <p:sp>
-        <p:nvSpPr>
-          <p:cNvPr id="17" name="TextBox 16"/>
-          <p:cNvSpPr txBox="1"/>
-          <p:nvPr/>
-        </p:nvSpPr>
-        <p:spPr>
-          <a:xfrm>
             <a:off x="566928" y="6510528"/>
             <a:ext cx="3063240" cy="164592"/>
           </a:xfrm>
@@ -25953,7 +25473,7 @@
       </p:sp>
       <p:sp>
         <p:nvSpPr>
-          <p:cNvPr id="18" name="TextBox 17"/>
+          <p:cNvPr id="16" name="TextBox 15"/>
           <p:cNvSpPr txBox="1"/>
           <p:nvPr/>
         </p:nvSpPr>
@@ -25991,14 +25511,14 @@
                 </a:solidFill>
                 <a:latin typeface="Arial"/>
               </a:rPr>
-              <a:t>−8 to +2 dB · measured points only, nothing in between</a:t>
-            </a:r>
-          </a:p>
-        </p:txBody>
-      </p:sp>
-      <p:sp>
-        <p:nvSpPr>
-          <p:cNvPr id="19" name="TextBox 18"/>
+              <a:t>−8 to +2 dB</a:t>
+            </a:r>
+          </a:p>
+        </p:txBody>
+      </p:sp>
+      <p:sp>
+        <p:nvSpPr>
+          <p:cNvPr id="17" name="TextBox 16"/>
           <p:cNvSpPr txBox="1"/>
           <p:nvPr/>
         </p:nvSpPr>
@@ -26564,8 +26084,8 @@
         </p:nvCxnSpPr>
         <p:spPr>
           <a:xfrm>
-            <a:off x="658368" y="6016752"/>
-            <a:ext cx="10744200" cy="0"/>
+            <a:off x="566928" y="6419088"/>
+            <a:ext cx="11018520" cy="0"/>
           </a:xfrm>
           <a:prstGeom prst="line">
             <a:avLst/>
@@ -26599,86 +26119,6 @@
         </p:nvSpPr>
         <p:spPr>
           <a:xfrm>
-            <a:off x="658368" y="6071616"/>
-            <a:ext cx="10744200" cy="274320"/>
-          </a:xfrm>
-          <a:prstGeom prst="rect">
-            <a:avLst/>
-          </a:prstGeom>
-          <a:noFill/>
-        </p:spPr>
-        <p:txBody>
-          <a:bodyPr wrap="square" lIns="45720" rIns="45720" anchor="t">
-            <a:spAutoFit/>
-          </a:bodyPr>
-          <a:lstStyle/>
-          <a:p>
-            <a:pPr algn="l">
-              <a:lnSpc>
-                <a:spcPct val="100000"/>
-              </a:lnSpc>
-              <a:spcBef>
-                <a:spcPts val="0"/>
-              </a:spcBef>
-              <a:spcAft>
-                <a:spcPts val="0"/>
-              </a:spcAft>
-            </a:pPr>
-            <a:r>
-              <a:rPr sz="1050" b="0" i="1">
-                <a:solidFill>
-                  <a:srgbClr val="555555"/>
-                </a:solidFill>
-                <a:latin typeface="Arial"/>
-              </a:rPr>
-              <a:t>Because it crosses and then uncrosses, we should not claim one clean crossover at this rate.</a:t>
-            </a:r>
-          </a:p>
-        </p:txBody>
-      </p:sp>
-      <p:cxnSp>
-        <p:nvCxnSpPr>
-          <p:cNvPr id="16" name="Connector 15"/>
-          <p:cNvCxnSpPr/>
-          <p:nvPr/>
-        </p:nvCxnSpPr>
-        <p:spPr>
-          <a:xfrm>
-            <a:off x="566928" y="6419088"/>
-            <a:ext cx="11018520" cy="0"/>
-          </a:xfrm>
-          <a:prstGeom prst="line">
-            <a:avLst/>
-          </a:prstGeom>
-          <a:ln w="8890">
-            <a:solidFill>
-              <a:srgbClr val="D9D9D9"/>
-            </a:solidFill>
-          </a:ln>
-        </p:spPr>
-        <p:style>
-          <a:lnRef idx="2">
-            <a:schemeClr val="accent1"/>
-          </a:lnRef>
-          <a:fillRef idx="0">
-            <a:schemeClr val="accent1"/>
-          </a:fillRef>
-          <a:effectRef idx="1">
-            <a:schemeClr val="accent1"/>
-          </a:effectRef>
-          <a:fontRef idx="minor">
-            <a:schemeClr val="tx1"/>
-          </a:fontRef>
-        </p:style>
-      </p:cxnSp>
-      <p:sp>
-        <p:nvSpPr>
-          <p:cNvPr id="17" name="TextBox 16"/>
-          <p:cNvSpPr txBox="1"/>
-          <p:nvPr/>
-        </p:nvSpPr>
-        <p:spPr>
-          <a:xfrm>
             <a:off x="566928" y="6510528"/>
             <a:ext cx="3063240" cy="164592"/>
           </a:xfrm>
@@ -26718,7 +26158,7 @@
       </p:sp>
       <p:sp>
         <p:nvSpPr>
-          <p:cNvPr id="18" name="TextBox 17"/>
+          <p:cNvPr id="16" name="TextBox 15"/>
           <p:cNvSpPr txBox="1"/>
           <p:nvPr/>
         </p:nvSpPr>
@@ -26763,7 +26203,7 @@
       </p:sp>
       <p:sp>
         <p:nvSpPr>
-          <p:cNvPr id="19" name="TextBox 18"/>
+          <p:cNvPr id="17" name="TextBox 16"/>
           <p:cNvSpPr txBox="1"/>
           <p:nvPr/>
         </p:nvSpPr>
@@ -28109,8 +27549,8 @@
         </p:nvCxnSpPr>
         <p:spPr>
           <a:xfrm>
-            <a:off x="658368" y="5998464"/>
-            <a:ext cx="10744200" cy="0"/>
+            <a:off x="566928" y="6419088"/>
+            <a:ext cx="11018520" cy="0"/>
           </a:xfrm>
           <a:prstGeom prst="line">
             <a:avLst/>
@@ -28144,86 +27584,6 @@
         </p:nvSpPr>
         <p:spPr>
           <a:xfrm>
-            <a:off x="658368" y="6053328"/>
-            <a:ext cx="10744200" cy="274320"/>
-          </a:xfrm>
-          <a:prstGeom prst="rect">
-            <a:avLst/>
-          </a:prstGeom>
-          <a:noFill/>
-        </p:spPr>
-        <p:txBody>
-          <a:bodyPr wrap="square" lIns="45720" rIns="45720" anchor="t">
-            <a:spAutoFit/>
-          </a:bodyPr>
-          <a:lstStyle/>
-          <a:p>
-            <a:pPr algn="l">
-              <a:lnSpc>
-                <a:spcPct val="100000"/>
-              </a:lnSpc>
-              <a:spcBef>
-                <a:spcPts val="0"/>
-              </a:spcBef>
-              <a:spcAft>
-                <a:spcPts val="0"/>
-              </a:spcAft>
-            </a:pPr>
-            <a:r>
-              <a:rPr sz="1050" b="0" i="1">
-                <a:solidFill>
-                  <a:srgbClr val="555555"/>
-                </a:solidFill>
-                <a:latin typeface="Arial"/>
-              </a:rPr>
-              <a:t>Two separately trained models from one run. This is not a measure of how much results vary between runs.</a:t>
-            </a:r>
-          </a:p>
-        </p:txBody>
-      </p:sp>
-      <p:cxnSp>
-        <p:nvCxnSpPr>
-          <p:cNvPr id="34" name="Connector 33"/>
-          <p:cNvCxnSpPr/>
-          <p:nvPr/>
-        </p:nvCxnSpPr>
-        <p:spPr>
-          <a:xfrm>
-            <a:off x="566928" y="6419088"/>
-            <a:ext cx="11018520" cy="0"/>
-          </a:xfrm>
-          <a:prstGeom prst="line">
-            <a:avLst/>
-          </a:prstGeom>
-          <a:ln w="8890">
-            <a:solidFill>
-              <a:srgbClr val="D9D9D9"/>
-            </a:solidFill>
-          </a:ln>
-        </p:spPr>
-        <p:style>
-          <a:lnRef idx="2">
-            <a:schemeClr val="accent1"/>
-          </a:lnRef>
-          <a:fillRef idx="0">
-            <a:schemeClr val="accent1"/>
-          </a:fillRef>
-          <a:effectRef idx="1">
-            <a:schemeClr val="accent1"/>
-          </a:effectRef>
-          <a:fontRef idx="minor">
-            <a:schemeClr val="tx1"/>
-          </a:fontRef>
-        </p:style>
-      </p:cxnSp>
-      <p:sp>
-        <p:nvSpPr>
-          <p:cNvPr id="35" name="TextBox 34"/>
-          <p:cNvSpPr txBox="1"/>
-          <p:nvPr/>
-        </p:nvSpPr>
-        <p:spPr>
-          <a:xfrm>
             <a:off x="566928" y="6510528"/>
             <a:ext cx="3063240" cy="164592"/>
           </a:xfrm>
@@ -28263,7 +27623,7 @@
       </p:sp>
       <p:sp>
         <p:nvSpPr>
-          <p:cNvPr id="36" name="TextBox 35"/>
+          <p:cNvPr id="34" name="TextBox 33"/>
           <p:cNvSpPr txBox="1"/>
           <p:nvPr/>
         </p:nvSpPr>
@@ -28308,7 +27668,7 @@
       </p:sp>
       <p:sp>
         <p:nvSpPr>
-          <p:cNvPr id="37" name="TextBox 36"/>
+          <p:cNvPr id="35" name="TextBox 34"/>
           <p:cNvSpPr txBox="1"/>
           <p:nvPr/>
         </p:nvSpPr>

--- a/deliverables/review-2/semantic-communication-second-review.pptx
+++ b/deliverables/review-2/semantic-communication-second-review.pptx
@@ -4331,7 +4331,7 @@
                 </a:solidFill>
                 <a:latin typeface="Arial"/>
               </a:rPr>
-              <a:t>If we had only compared against a normal compressed image, the weak-signal story would be too easy to believe.</a:t>
+              <a:t>A JPEG image is an easy thing to beat. This arm is harder, and it is the one worth reporting.</a:t>
             </a:r>
           </a:p>
         </p:txBody>
@@ -5981,7 +5981,7 @@
                 </a:solidFill>
                 <a:latin typeface="Arial"/>
               </a:rPr>
-              <a:t>Four controls, including one that went against us</a:t>
+              <a:t>Four controls on the digital system</a:t>
             </a:r>
           </a:p>
         </p:txBody>
@@ -6061,7 +6061,7 @@
                 </a:solidFill>
                 <a:latin typeface="Arial"/>
               </a:rPr>
-              <a:t>Each panel takes one design choice away from the digital system and shows what it was worth.</a:t>
+              <a:t>Each panel takes one design choice away and shows what it was worth.</a:t>
             </a:r>
           </a:p>
         </p:txBody>
@@ -6550,7 +6550,7 @@
                 </a:solidFill>
                 <a:latin typeface="Arial"/>
               </a:rPr>
-              <a:t>82.0% once it arrives — the sender’s own predicted label.</a:t>
+              <a:t>82.0% once it arrives, using the sender’s own predicted label.</a:t>
             </a:r>
           </a:p>
         </p:txBody>
@@ -11887,7 +11887,7 @@
                 </a:solidFill>
                 <a:latin typeface="Arial"/>
               </a:rPr>
-              <a:t>Every figure is a single observed measurement from one run over 1,000 held-back pictures.</a:t>
+              <a:t>A single observed measurement per figure, from one run over 1,000 held-back pictures.</a:t>
             </a:r>
           </a:p>
         </p:txBody>
@@ -12012,7 +12012,7 @@
                 </a:solidFill>
                 <a:latin typeface="Arial"/>
               </a:rPr>
-              <a:t>The learned systems are marked by their own classifier, the digital systems by one trained on compressed images. These numbers describe whole systems.</a:t>
+              <a:t>Marked by their own classifier on one side, by one trained on compressed images on the other. These numbers describe whole systems.</a:t>
             </a:r>
           </a:p>
         </p:txBody>
@@ -12137,7 +12137,7 @@
                 </a:solidFill>
                 <a:latin typeface="Arial"/>
               </a:rPr>
-              <a:t>The digital settings and grader were frozen from earlier validation work. The learned versions are separate training runs.</a:t>
+              <a:t>Digital settings and grader were frozen from earlier validation work; the learned versions are separate training runs.</a:t>
             </a:r>
           </a:p>
         </p:txBody>
@@ -12262,7 +12262,7 @@
                 </a:solidFill>
                 <a:latin typeface="Arial"/>
               </a:rPr>
-              <a:t>Peak-to-average ratio is measured on the numbers we send. Real-radio replay is scheduled for W14.</a:t>
+              <a:t>Spike heights are measured on the numbers we send. Real-radio replay is scheduled for W14.</a:t>
             </a:r>
           </a:p>
         </p:txBody>
@@ -12387,7 +12387,7 @@
                 </a:solidFill>
                 <a:latin typeface="Arial"/>
               </a:rPr>
-              <a:t>The fallback rule and fixed settings produce visible jumps. Curves pass through measured points only.</a:t>
+              <a:t>The fallback rule and fixed settings produce visible jumps. Every curve passes through measured points.</a:t>
             </a:r>
           </a:p>
         </p:txBody>
@@ -12788,7 +12788,7 @@
                 </a:solidFill>
                 <a:latin typeface="Arial"/>
               </a:rPr>
-              <a:t>The rubric asks what we decided based on the results obtained. These are the four that count.</a:t>
+              <a:t>What we changed once we could see the measurements.</a:t>
             </a:r>
           </a:p>
         </p:txBody>
@@ -14011,52 +14011,7 @@
       </p:cxnSp>
       <p:sp>
         <p:nvSpPr>
-          <p:cNvPr id="4" name="TextBox 3"/>
-          <p:cNvSpPr txBox="1"/>
-          <p:nvPr/>
-        </p:nvSpPr>
-        <p:spPr>
-          <a:xfrm>
-            <a:off x="566928" y="1225296"/>
-            <a:ext cx="11018520" cy="310896"/>
-          </a:xfrm>
-          <a:prstGeom prst="rect">
-            <a:avLst/>
-          </a:prstGeom>
-          <a:noFill/>
-        </p:spPr>
-        <p:txBody>
-          <a:bodyPr wrap="square" lIns="45720" rIns="45720" anchor="t">
-            <a:spAutoFit/>
-          </a:bodyPr>
-          <a:lstStyle/>
-          <a:p>
-            <a:pPr algn="ctr">
-              <a:lnSpc>
-                <a:spcPct val="100000"/>
-              </a:lnSpc>
-              <a:spcBef>
-                <a:spcPts val="0"/>
-              </a:spcBef>
-              <a:spcAft>
-                <a:spcPts val="0"/>
-              </a:spcAft>
-            </a:pPr>
-            <a:r>
-              <a:rPr sz="1250" b="0" i="0">
-                <a:solidFill>
-                  <a:srgbClr val="555555"/>
-                </a:solidFill>
-                <a:latin typeface="Arial"/>
-              </a:rPr>
-              <a:t>Both claims are about how the experiment is built.</a:t>
-            </a:r>
-          </a:p>
-        </p:txBody>
-      </p:sp>
-      <p:sp>
-        <p:nvSpPr>
-          <p:cNvPr id="5" name="Rectangle 4"/>
+          <p:cNvPr id="4" name="Rectangle 3"/>
           <p:cNvSpPr/>
           <p:nvPr/>
         </p:nvSpPr>
@@ -14101,7 +14056,7 @@
       </p:sp>
       <p:sp>
         <p:nvSpPr>
-          <p:cNvPr id="6" name="TextBox 5"/>
+          <p:cNvPr id="5" name="TextBox 4"/>
           <p:cNvSpPr txBox="1"/>
           <p:nvPr/>
         </p:nvSpPr>
@@ -14146,7 +14101,7 @@
       </p:sp>
       <p:sp>
         <p:nvSpPr>
-          <p:cNvPr id="7" name="TextBox 6"/>
+          <p:cNvPr id="6" name="TextBox 5"/>
           <p:cNvSpPr txBox="1"/>
           <p:nvPr/>
         </p:nvSpPr>
@@ -14191,7 +14146,7 @@
       </p:sp>
       <p:cxnSp>
         <p:nvCxnSpPr>
-          <p:cNvPr id="8" name="Connector 7"/>
+          <p:cNvPr id="7" name="Connector 6"/>
           <p:cNvCxnSpPr/>
           <p:nvPr/>
         </p:nvCxnSpPr>
@@ -14226,7 +14181,7 @@
       </p:cxnSp>
       <p:sp>
         <p:nvSpPr>
-          <p:cNvPr id="9" name="TextBox 8"/>
+          <p:cNvPr id="8" name="TextBox 7"/>
           <p:cNvSpPr txBox="1"/>
           <p:nvPr/>
         </p:nvSpPr>
@@ -14271,7 +14226,7 @@
       </p:sp>
       <p:sp>
         <p:nvSpPr>
-          <p:cNvPr id="10" name="Rectangle 9"/>
+          <p:cNvPr id="9" name="Rectangle 8"/>
           <p:cNvSpPr/>
           <p:nvPr/>
         </p:nvSpPr>
@@ -14316,7 +14271,7 @@
       </p:sp>
       <p:sp>
         <p:nvSpPr>
-          <p:cNvPr id="11" name="TextBox 10"/>
+          <p:cNvPr id="10" name="TextBox 9"/>
           <p:cNvSpPr txBox="1"/>
           <p:nvPr/>
         </p:nvSpPr>
@@ -14361,7 +14316,7 @@
       </p:sp>
       <p:sp>
         <p:nvSpPr>
-          <p:cNvPr id="12" name="TextBox 11"/>
+          <p:cNvPr id="11" name="TextBox 10"/>
           <p:cNvSpPr txBox="1"/>
           <p:nvPr/>
         </p:nvSpPr>
@@ -14406,7 +14361,7 @@
       </p:sp>
       <p:cxnSp>
         <p:nvCxnSpPr>
-          <p:cNvPr id="13" name="Connector 12"/>
+          <p:cNvPr id="12" name="Connector 11"/>
           <p:cNvCxnSpPr/>
           <p:nvPr/>
         </p:nvCxnSpPr>
@@ -14441,7 +14396,7 @@
       </p:cxnSp>
       <p:sp>
         <p:nvSpPr>
-          <p:cNvPr id="14" name="TextBox 13"/>
+          <p:cNvPr id="13" name="TextBox 12"/>
           <p:cNvSpPr txBox="1"/>
           <p:nvPr/>
         </p:nvSpPr>
@@ -14486,7 +14441,7 @@
       </p:sp>
       <p:sp>
         <p:nvSpPr>
-          <p:cNvPr id="15" name="TextBox 14"/>
+          <p:cNvPr id="14" name="TextBox 13"/>
           <p:cNvSpPr txBox="1"/>
           <p:nvPr/>
         </p:nvSpPr>
@@ -14531,7 +14486,7 @@
       </p:sp>
       <p:sp>
         <p:nvSpPr>
-          <p:cNvPr id="16" name="TextBox 15"/>
+          <p:cNvPr id="15" name="TextBox 14"/>
           <p:cNvSpPr txBox="1"/>
           <p:nvPr/>
         </p:nvSpPr>
@@ -14576,7 +14531,7 @@
       </p:sp>
       <p:sp>
         <p:nvSpPr>
-          <p:cNvPr id="17" name="TextBox 16"/>
+          <p:cNvPr id="16" name="TextBox 15"/>
           <p:cNvSpPr txBox="1"/>
           <p:nvPr/>
         </p:nvSpPr>
@@ -14621,7 +14576,7 @@
       </p:sp>
       <p:sp>
         <p:nvSpPr>
-          <p:cNvPr id="18" name="TextBox 17"/>
+          <p:cNvPr id="17" name="TextBox 16"/>
           <p:cNvSpPr txBox="1"/>
           <p:nvPr/>
         </p:nvSpPr>
@@ -14666,7 +14621,7 @@
       </p:sp>
       <p:sp>
         <p:nvSpPr>
-          <p:cNvPr id="19" name="TextBox 18"/>
+          <p:cNvPr id="18" name="TextBox 17"/>
           <p:cNvSpPr txBox="1"/>
           <p:nvPr/>
         </p:nvSpPr>
@@ -14711,7 +14666,7 @@
       </p:sp>
       <p:sp>
         <p:nvSpPr>
-          <p:cNvPr id="20" name="TextBox 19"/>
+          <p:cNvPr id="19" name="TextBox 18"/>
           <p:cNvSpPr txBox="1"/>
           <p:nvPr/>
         </p:nvSpPr>
@@ -14756,7 +14711,7 @@
       </p:sp>
       <p:sp>
         <p:nvSpPr>
-          <p:cNvPr id="21" name="TextBox 20"/>
+          <p:cNvPr id="20" name="TextBox 19"/>
           <p:cNvSpPr txBox="1"/>
           <p:nvPr/>
         </p:nvSpPr>
@@ -14801,7 +14756,7 @@
       </p:sp>
       <p:sp>
         <p:nvSpPr>
-          <p:cNvPr id="22" name="TextBox 21"/>
+          <p:cNvPr id="21" name="TextBox 20"/>
           <p:cNvSpPr txBox="1"/>
           <p:nvPr/>
         </p:nvSpPr>
@@ -14846,7 +14801,7 @@
       </p:sp>
       <p:sp>
         <p:nvSpPr>
-          <p:cNvPr id="23" name="TextBox 22"/>
+          <p:cNvPr id="22" name="TextBox 21"/>
           <p:cNvSpPr txBox="1"/>
           <p:nvPr/>
         </p:nvSpPr>
@@ -14891,7 +14846,7 @@
       </p:sp>
       <p:sp>
         <p:nvSpPr>
-          <p:cNvPr id="24" name="TextBox 23"/>
+          <p:cNvPr id="23" name="TextBox 22"/>
           <p:cNvSpPr txBox="1"/>
           <p:nvPr/>
         </p:nvSpPr>
@@ -14936,7 +14891,7 @@
       </p:sp>
       <p:cxnSp>
         <p:nvCxnSpPr>
-          <p:cNvPr id="25" name="Connector 24"/>
+          <p:cNvPr id="24" name="Connector 23"/>
           <p:cNvCxnSpPr/>
           <p:nvPr/>
         </p:nvCxnSpPr>
@@ -14971,7 +14926,7 @@
       </p:cxnSp>
       <p:sp>
         <p:nvSpPr>
-          <p:cNvPr id="26" name="TextBox 25"/>
+          <p:cNvPr id="25" name="TextBox 24"/>
           <p:cNvSpPr txBox="1"/>
           <p:nvPr/>
         </p:nvSpPr>
@@ -15016,7 +14971,7 @@
       </p:sp>
       <p:sp>
         <p:nvSpPr>
-          <p:cNvPr id="27" name="TextBox 26"/>
+          <p:cNvPr id="26" name="TextBox 25"/>
           <p:cNvSpPr txBox="1"/>
           <p:nvPr/>
         </p:nvSpPr>
@@ -15061,7 +15016,7 @@
       </p:sp>
       <p:cxnSp>
         <p:nvCxnSpPr>
-          <p:cNvPr id="28" name="Connector 27"/>
+          <p:cNvPr id="27" name="Connector 26"/>
           <p:cNvCxnSpPr/>
           <p:nvPr/>
         </p:nvCxnSpPr>
@@ -15096,7 +15051,7 @@
       </p:cxnSp>
       <p:sp>
         <p:nvSpPr>
-          <p:cNvPr id="29" name="TextBox 28"/>
+          <p:cNvPr id="28" name="TextBox 27"/>
           <p:cNvSpPr txBox="1"/>
           <p:nvPr/>
         </p:nvSpPr>
@@ -15141,7 +15096,7 @@
       </p:sp>
       <p:sp>
         <p:nvSpPr>
-          <p:cNvPr id="30" name="TextBox 29"/>
+          <p:cNvPr id="29" name="TextBox 28"/>
           <p:cNvSpPr txBox="1"/>
           <p:nvPr/>
         </p:nvSpPr>
@@ -15186,7 +15141,7 @@
       </p:sp>
       <p:sp>
         <p:nvSpPr>
-          <p:cNvPr id="31" name="TextBox 30"/>
+          <p:cNvPr id="30" name="TextBox 29"/>
           <p:cNvSpPr txBox="1"/>
           <p:nvPr/>
         </p:nvSpPr>
@@ -17946,7 +17901,7 @@
                 </a:solidFill>
                 <a:latin typeface="Arial"/>
               </a:rPr>
-              <a:t>One guarded run on the exam set once the locking manifest is signed. So far, zero exam pictures opened.</a:t>
+              <a:t>One guarded run on the exam set once the locking manifest is signed.</a:t>
             </a:r>
           </a:p>
         </p:txBody>
@@ -18812,7 +18767,7 @@
                 </a:solidFill>
                 <a:latin typeface="Arial"/>
               </a:rPr>
-              <a:t>Measured how badly it loses pictures at every setting, tested it on all 288,000 held-back combinations, and froze the settings it should use at each signal strength.</a:t>
+              <a:t>Measured how badly it loses pictures at every setting. All 288,000 held-back combinations tested, and the settings it should use at each signal strength frozen.</a:t>
             </a:r>
           </a:p>
         </p:txBody>
@@ -18937,7 +18892,7 @@
                 </a:solidFill>
                 <a:latin typeface="Arial"/>
               </a:rPr>
-              <a:t>Built the training loop, trained models at several seeds, and froze three of them at half rate.</a:t>
+              <a:t>Training loop built, models trained at several seeds. Three of them are frozen at half rate.</a:t>
             </a:r>
           </a:p>
         </p:txBody>
@@ -19187,7 +19142,7 @@
                 </a:solidFill>
                 <a:latin typeface="Arial"/>
               </a:rPr>
-              <a:t>Trained a second version with the signal strength picked at random, and compared it against the first.</a:t>
+              <a:t>A second version, with the training signal strength picked at random each time, for comparison against the first.</a:t>
             </a:r>
           </a:p>
         </p:txBody>
@@ -19687,7 +19642,7 @@
                 </a:solidFill>
                 <a:latin typeface="Arial"/>
               </a:rPr>
-              <a:t>Still locked. It opens in week 11 once the locking document is signed.</a:t>
+              <a:t>Opens in week 11, once the locking document is signed.</a:t>
             </a:r>
           </a:p>
         </p:txBody>
@@ -19700,8 +19655,8 @@
         </p:nvCxnSpPr>
         <p:spPr>
           <a:xfrm>
-            <a:off x="658368" y="6016752"/>
-            <a:ext cx="10744200" cy="0"/>
+            <a:off x="566928" y="6419088"/>
+            <a:ext cx="11018520" cy="0"/>
           </a:xfrm>
           <a:prstGeom prst="line">
             <a:avLst/>
@@ -19735,86 +19690,6 @@
         </p:nvSpPr>
         <p:spPr>
           <a:xfrm>
-            <a:off x="658368" y="6071616"/>
-            <a:ext cx="10744200" cy="274320"/>
-          </a:xfrm>
-          <a:prstGeom prst="rect">
-            <a:avLst/>
-          </a:prstGeom>
-          <a:noFill/>
-        </p:spPr>
-        <p:txBody>
-          <a:bodyPr wrap="square" lIns="45720" rIns="45720" anchor="t">
-            <a:spAutoFit/>
-          </a:bodyPr>
-          <a:lstStyle/>
-          <a:p>
-            <a:pPr algn="l">
-              <a:lnSpc>
-                <a:spcPct val="100000"/>
-              </a:lnSpc>
-              <a:spcBef>
-                <a:spcPts val="0"/>
-              </a:spcBef>
-              <a:spcAft>
-                <a:spcPts val="0"/>
-              </a:spcAft>
-            </a:pPr>
-            <a:r>
-              <a:rPr sz="1050" b="0" i="1">
-                <a:solidFill>
-                  <a:srgbClr val="555555"/>
-                </a:solidFill>
-                <a:latin typeface="Arial"/>
-              </a:rPr>
-              <a:t>Everything above ran on held-back pictures. The exam set stays locked until gate G-12.</a:t>
-            </a:r>
-          </a:p>
-        </p:txBody>
-      </p:sp>
-      <p:cxnSp>
-        <p:nvCxnSpPr>
-          <p:cNvPr id="30" name="Connector 29"/>
-          <p:cNvCxnSpPr/>
-          <p:nvPr/>
-        </p:nvCxnSpPr>
-        <p:spPr>
-          <a:xfrm>
-            <a:off x="566928" y="6419088"/>
-            <a:ext cx="11018520" cy="0"/>
-          </a:xfrm>
-          <a:prstGeom prst="line">
-            <a:avLst/>
-          </a:prstGeom>
-          <a:ln w="8890">
-            <a:solidFill>
-              <a:srgbClr val="D9D9D9"/>
-            </a:solidFill>
-          </a:ln>
-        </p:spPr>
-        <p:style>
-          <a:lnRef idx="2">
-            <a:schemeClr val="accent1"/>
-          </a:lnRef>
-          <a:fillRef idx="0">
-            <a:schemeClr val="accent1"/>
-          </a:fillRef>
-          <a:effectRef idx="1">
-            <a:schemeClr val="accent1"/>
-          </a:effectRef>
-          <a:fontRef idx="minor">
-            <a:schemeClr val="tx1"/>
-          </a:fontRef>
-        </p:style>
-      </p:cxnSp>
-      <p:sp>
-        <p:nvSpPr>
-          <p:cNvPr id="31" name="TextBox 30"/>
-          <p:cNvSpPr txBox="1"/>
-          <p:nvPr/>
-        </p:nvSpPr>
-        <p:spPr>
-          <a:xfrm>
             <a:off x="566928" y="6510528"/>
             <a:ext cx="3063240" cy="164592"/>
           </a:xfrm>
@@ -19854,7 +19729,7 @@
       </p:sp>
       <p:sp>
         <p:nvSpPr>
-          <p:cNvPr id="32" name="TextBox 31"/>
+          <p:cNvPr id="30" name="TextBox 29"/>
           <p:cNvSpPr txBox="1"/>
           <p:nvPr/>
         </p:nvSpPr>
@@ -19899,7 +19774,7 @@
       </p:sp>
       <p:sp>
         <p:nvSpPr>
-          <p:cNvPr id="33" name="TextBox 32"/>
+          <p:cNvPr id="31" name="TextBox 30"/>
           <p:cNvSpPr txBox="1"/>
           <p:nvPr/>
         </p:nvSpPr>
@@ -21224,7 +21099,7 @@
                 </a:solidFill>
                 <a:latin typeface="Arial"/>
               </a:rPr>
-              <a:t>Every chart that follows runs from a very weak radio signal on the left to a clean one on the right.</a:t>
+              <a:t>Every chart in this deck runs from a very weak radio signal on the left to a clean one on the right.</a:t>
             </a:r>
           </a:p>
         </p:txBody>
@@ -22430,7 +22305,7 @@
                 </a:solidFill>
                 <a:latin typeface="Arial"/>
               </a:rPr>
-              <a:t>The digital system got almost nothing through, so every picture fell back to one fixed answer — and that answer happens to be right 100 times out of 1,000. So 10%.</a:t>
+              <a:t>The digital system got almost nothing through, so every picture fell back to one fixed answer. That answer happens to be right 100 times out of 1,000. So 10%.</a:t>
             </a:r>
           </a:p>
         </p:txBody>
@@ -23371,7 +23246,7 @@
                 </a:solidFill>
                 <a:latin typeface="Arial"/>
               </a:rPr>
-              <a:t>Five of them are controls rather than headline systems</a:t>
+              <a:t>Five are controls, not headline systems</a:t>
             </a:r>
           </a:p>
         </p:txBody>
@@ -24061,7 +23936,7 @@
                 </a:solidFill>
                 <a:latin typeface="Arial"/>
               </a:rPr>
-              <a:t>Two things that govern how every later chart should be read</a:t>
+              <a:t>Two things to keep in mind</a:t>
             </a:r>
           </a:p>
         </p:txBody>
@@ -24276,7 +24151,7 @@
                 </a:solidFill>
                 <a:latin typeface="Arial"/>
               </a:rPr>
-              <a:t>The learned systems are marked by the classifier built into them. The digital systems are marked by one we trained on compressed-looking images. So we compare whole systems: the link, the representation, and the marker.</a:t>
+              <a:t>The learned systems are marked by the classifier built into them. The digital systems are marked by one we trained on compressed-looking images. So every comparison in this deck is between whole systems, link and marker included.</a:t>
             </a:r>
           </a:p>
         </p:txBody>
@@ -24597,7 +24472,7 @@
                 </a:solidFill>
                 <a:latin typeface="Arial"/>
               </a:rPr>
-              <a:t>The learned system keeps answering the whole way across. The digital system stays silent, then overtakes it.</a:t>
+              <a:t>One line runs the whole width of the chart. The other has a step in it near the left.</a:t>
             </a:r>
           </a:p>
         </p:txBody>
@@ -25821,7 +25696,7 @@
                 </a:solidFill>
                 <a:latin typeface="Arial"/>
               </a:rPr>
-              <a:t>Going from half to quarter rate drops the learned system from 72.8% to 49.4%. That is a 23 point loss.</a:t>
+              <a:t>Going from half to quarter rate drops the learned system from 72.8% to 49.4%.</a:t>
             </a:r>
           </a:p>
         </p:txBody>

--- a/deliverables/review-2/semantic-communication-second-review.pptx
+++ b/deliverables/review-2/semantic-communication-second-review.pptx
@@ -12262,7 +12262,7 @@
                 </a:solidFill>
                 <a:latin typeface="Arial"/>
               </a:rPr>
-              <a:t>Spike heights are measured on the numbers we send. Real-radio replay is scheduled for W14.</a:t>
+              <a:t>Spike heights are measured on the numbers we send. Real-radio replay is scheduled for late October.</a:t>
             </a:r>
           </a:p>
         </p:txBody>
@@ -12467,7 +12467,7 @@
                 </a:solidFill>
                 <a:latin typeface="Arial"/>
               </a:rPr>
-              <a:t>Both outcomes count as success under the specification: a crossing, and the learned system winning everywhere.</a:t>
+              <a:t>Both outcomes count as a successful project: a crossing, and the learned system winning everywhere.</a:t>
             </a:r>
           </a:p>
         </p:txBody>
@@ -12788,7 +12788,7 @@
                 </a:solidFill>
                 <a:latin typeface="Arial"/>
               </a:rPr>
-              <a:t>What we changed once we could see the measurements.</a:t>
+              <a:t>Four changes we made after the measurements started coming in.</a:t>
             </a:r>
           </a:p>
         </p:txBody>
@@ -12878,7 +12878,7 @@
                 </a:solidFill>
                 <a:latin typeface="Arial"/>
               </a:rPr>
-              <a:t>AM-34</a:t>
+              <a:t>Baseline too weak</a:t>
             </a:r>
           </a:p>
         </p:txBody>
@@ -13093,7 +13093,7 @@
                 </a:solidFill>
                 <a:latin typeface="Arial"/>
               </a:rPr>
-              <a:t>AM-52</a:t>
+              <a:t>Signal grid too coarse</a:t>
             </a:r>
           </a:p>
         </p:txBody>
@@ -13308,7 +13308,7 @@
                 </a:solidFill>
                 <a:latin typeface="Arial"/>
               </a:rPr>
-              <a:t>AM-58</a:t>
+              <a:t>A faulty check</a:t>
             </a:r>
           </a:p>
         </p:txBody>
@@ -13523,7 +13523,7 @@
                 </a:solidFill>
                 <a:latin typeface="Arial"/>
               </a:rPr>
-              <a:t>AM-60</a:t>
+              <a:t>Exam set unlocked too early</a:t>
             </a:r>
           </a:p>
         </p:txBody>
@@ -13568,7 +13568,7 @@
                 </a:solidFill>
                 <a:latin typeface="Arial"/>
               </a:rPr>
-              <a:t>The exam set was set to unlock in week 9, about three weeks before the manifest that locks it existed. We moved that to week 11.</a:t>
+              <a:t>The exam set was set to unlock in week 9, about three weeks before the document that locks it existed. We moved that to week 11.</a:t>
             </a:r>
           </a:p>
         </p:txBody>
@@ -13728,7 +13728,7 @@
                 </a:solidFill>
                 <a:latin typeface="Arial"/>
               </a:rPr>
-              <a:t>Twenty-two further changes are written down in SPEC §17, including three checks that turned out to be wrong and had to be repaired.</a:t>
+              <a:t>Twenty-two further changes were made during the project, including three checks that turned out to be wrong and were repaired.</a:t>
             </a:r>
           </a:p>
         </p:txBody>
@@ -13853,7 +13853,7 @@
                 </a:solidFill>
                 <a:latin typeface="Arial"/>
               </a:rPr>
-              <a:t>Required by PR-8(c): a one-slide distillation of SPEC §17</a:t>
+              <a:t>What we changed once we could see the measurements</a:t>
             </a:r>
           </a:p>
         </p:txBody>
@@ -15009,7 +15009,7 @@
                 </a:solidFill>
                 <a:latin typeface="Arial"/>
               </a:rPr>
-              <a:t>Each claim resolves to a specific reference in the 30-source review at docs/literature-review.md. The full written novelty statement ships with the final review package.</a:t>
+              <a:t>Each claim resolves to a specific entry in the 30-source literature review. The full written novelty statement ships with the final review package.</a:t>
             </a:r>
           </a:p>
         </p:txBody>
@@ -15298,8 +15298,8 @@
         </p:nvSpPr>
         <p:spPr>
           <a:xfrm>
-            <a:off x="566928" y="1426464"/>
-            <a:ext cx="566928" cy="219456"/>
+            <a:off x="566928" y="1408176"/>
+            <a:ext cx="1828800" cy="237744"/>
           </a:xfrm>
           <a:prstGeom prst="rect">
             <a:avLst/>
@@ -15324,27 +15324,72 @@
               </a:spcAft>
             </a:pPr>
             <a:r>
-              <a:rPr sz="1100" b="1" i="0">
+              <a:rPr sz="1100" b="0" i="0">
+                <a:solidFill>
+                  <a:srgbClr val="555555"/>
+                </a:solidFill>
+                <a:latin typeface="Arial"/>
+              </a:rPr>
+              <a:t>29 Sep – 3 Oct</a:t>
+            </a:r>
+          </a:p>
+        </p:txBody>
+      </p:sp>
+      <p:sp>
+        <p:nvSpPr>
+          <p:cNvPr id="5" name="TextBox 4"/>
+          <p:cNvSpPr txBox="1"/>
+          <p:nvPr/>
+        </p:nvSpPr>
+        <p:spPr>
+          <a:xfrm>
+            <a:off x="2542032" y="1371600"/>
+            <a:ext cx="2468880" cy="256032"/>
+          </a:xfrm>
+          <a:prstGeom prst="rect">
+            <a:avLst/>
+          </a:prstGeom>
+          <a:noFill/>
+        </p:spPr>
+        <p:txBody>
+          <a:bodyPr wrap="square" lIns="45720" rIns="45720" anchor="t">
+            <a:spAutoFit/>
+          </a:bodyPr>
+          <a:lstStyle/>
+          <a:p>
+            <a:pPr algn="l">
+              <a:lnSpc>
+                <a:spcPct val="100000"/>
+              </a:lnSpc>
+              <a:spcBef>
+                <a:spcPts val="0"/>
+              </a:spcBef>
+              <a:spcAft>
+                <a:spcPts val="0"/>
+              </a:spcAft>
+            </a:pPr>
+            <a:r>
+              <a:rPr sz="1200" b="1" i="0">
                 <a:solidFill>
                   <a:srgbClr val="111111"/>
                 </a:solidFill>
                 <a:latin typeface="Arial"/>
               </a:rPr>
-              <a:t>W10</a:t>
-            </a:r>
-          </a:p>
-        </p:txBody>
-      </p:sp>
-      <p:sp>
-        <p:nvSpPr>
-          <p:cNvPr id="5" name="TextBox 4"/>
-          <p:cNvSpPr txBox="1"/>
-          <p:nvPr/>
-        </p:nvSpPr>
-        <p:spPr>
-          <a:xfrm>
-            <a:off x="1298448" y="1426464"/>
-            <a:ext cx="1572768" cy="219456"/>
+              <a:t>Second Review</a:t>
+            </a:r>
+          </a:p>
+        </p:txBody>
+      </p:sp>
+      <p:sp>
+        <p:nvSpPr>
+          <p:cNvPr id="6" name="TextBox 5"/>
+          <p:cNvSpPr txBox="1"/>
+          <p:nvPr/>
+        </p:nvSpPr>
+        <p:spPr>
+          <a:xfrm>
+            <a:off x="5120640" y="1389888"/>
+            <a:ext cx="5175504" cy="256032"/>
           </a:xfrm>
           <a:prstGeom prst="rect">
             <a:avLst/>
@@ -15375,52 +15420,7 @@
                 </a:solidFill>
                 <a:latin typeface="Arial"/>
               </a:rPr>
-              <a:t>29 Sep – 3 Oct</a:t>
-            </a:r>
-          </a:p>
-        </p:txBody>
-      </p:sp>
-      <p:sp>
-        <p:nvSpPr>
-          <p:cNvPr id="6" name="TextBox 5"/>
-          <p:cNvSpPr txBox="1"/>
-          <p:nvPr/>
-        </p:nvSpPr>
-        <p:spPr>
-          <a:xfrm>
-            <a:off x="3017520" y="1371600"/>
-            <a:ext cx="2377440" cy="256032"/>
-          </a:xfrm>
-          <a:prstGeom prst="rect">
-            <a:avLst/>
-          </a:prstGeom>
-          <a:noFill/>
-        </p:spPr>
-        <p:txBody>
-          <a:bodyPr wrap="square" lIns="45720" rIns="45720" anchor="t">
-            <a:spAutoFit/>
-          </a:bodyPr>
-          <a:lstStyle/>
-          <a:p>
-            <a:pPr algn="l">
-              <a:lnSpc>
-                <a:spcPct val="100000"/>
-              </a:lnSpc>
-              <a:spcBef>
-                <a:spcPts val="0"/>
-              </a:spcBef>
-              <a:spcAft>
-                <a:spcPts val="0"/>
-              </a:spcAft>
-            </a:pPr>
-            <a:r>
-              <a:rPr sz="1200" b="1" i="0">
-                <a:solidFill>
-                  <a:srgbClr val="111111"/>
-                </a:solidFill>
-                <a:latin typeface="Arial"/>
-              </a:rPr>
-              <a:t>Second Review</a:t>
+              <a:t>Held-back measurements complete; package and figures frozen</a:t>
             </a:r>
           </a:p>
         </p:txBody>
@@ -15428,51 +15428,6 @@
       <p:sp>
         <p:nvSpPr>
           <p:cNvPr id="7" name="TextBox 6"/>
-          <p:cNvSpPr txBox="1"/>
-          <p:nvPr/>
-        </p:nvSpPr>
-        <p:spPr>
-          <a:xfrm>
-            <a:off x="5541264" y="1389888"/>
-            <a:ext cx="4754880" cy="256032"/>
-          </a:xfrm>
-          <a:prstGeom prst="rect">
-            <a:avLst/>
-          </a:prstGeom>
-          <a:noFill/>
-        </p:spPr>
-        <p:txBody>
-          <a:bodyPr wrap="square" lIns="45720" rIns="45720" anchor="t">
-            <a:spAutoFit/>
-          </a:bodyPr>
-          <a:lstStyle/>
-          <a:p>
-            <a:pPr algn="l">
-              <a:lnSpc>
-                <a:spcPct val="100000"/>
-              </a:lnSpc>
-              <a:spcBef>
-                <a:spcPts val="0"/>
-              </a:spcBef>
-              <a:spcAft>
-                <a:spcPts val="0"/>
-              </a:spcAft>
-            </a:pPr>
-            <a:r>
-              <a:rPr sz="1100" b="0" i="0">
-                <a:solidFill>
-                  <a:srgbClr val="555555"/>
-                </a:solidFill>
-                <a:latin typeface="Arial"/>
-              </a:rPr>
-              <a:t>Held-back measurements complete; package and figures frozen</a:t>
-            </a:r>
-          </a:p>
-        </p:txBody>
-      </p:sp>
-      <p:sp>
-        <p:nvSpPr>
-          <p:cNvPr id="8" name="TextBox 7"/>
           <p:cNvSpPr txBox="1"/>
           <p:nvPr/>
         </p:nvSpPr>
@@ -15517,7 +15472,7 @@
       </p:sp>
       <p:cxnSp>
         <p:nvCxnSpPr>
-          <p:cNvPr id="9" name="Connector 8"/>
+          <p:cNvPr id="8" name="Connector 7"/>
           <p:cNvCxnSpPr/>
           <p:nvPr/>
         </p:nvCxnSpPr>
@@ -15552,14 +15507,59 @@
       </p:cxnSp>
       <p:sp>
         <p:nvSpPr>
+          <p:cNvPr id="9" name="TextBox 8"/>
+          <p:cNvSpPr txBox="1"/>
+          <p:nvPr/>
+        </p:nvSpPr>
+        <p:spPr>
+          <a:xfrm>
+            <a:off x="566928" y="1956816"/>
+            <a:ext cx="1828800" cy="237744"/>
+          </a:xfrm>
+          <a:prstGeom prst="rect">
+            <a:avLst/>
+          </a:prstGeom>
+          <a:noFill/>
+        </p:spPr>
+        <p:txBody>
+          <a:bodyPr wrap="square" lIns="45720" rIns="45720" anchor="t">
+            <a:spAutoFit/>
+          </a:bodyPr>
+          <a:lstStyle/>
+          <a:p>
+            <a:pPr algn="l">
+              <a:lnSpc>
+                <a:spcPct val="100000"/>
+              </a:lnSpc>
+              <a:spcBef>
+                <a:spcPts val="0"/>
+              </a:spcBef>
+              <a:spcAft>
+                <a:spcPts val="0"/>
+              </a:spcAft>
+            </a:pPr>
+            <a:r>
+              <a:rPr sz="1100" b="0" i="0">
+                <a:solidFill>
+                  <a:srgbClr val="555555"/>
+                </a:solidFill>
+                <a:latin typeface="Arial"/>
+              </a:rPr>
+              <a:t>5 – 11 Oct</a:t>
+            </a:r>
+          </a:p>
+        </p:txBody>
+      </p:sp>
+      <p:sp>
+        <p:nvSpPr>
           <p:cNvPr id="10" name="TextBox 9"/>
           <p:cNvSpPr txBox="1"/>
           <p:nvPr/>
         </p:nvSpPr>
         <p:spPr>
           <a:xfrm>
-            <a:off x="566928" y="1975104"/>
-            <a:ext cx="566928" cy="219456"/>
+            <a:off x="2542032" y="1920240"/>
+            <a:ext cx="2468880" cy="256032"/>
           </a:xfrm>
           <a:prstGeom prst="rect">
             <a:avLst/>
@@ -15584,13 +15584,13 @@
               </a:spcAft>
             </a:pPr>
             <a:r>
-              <a:rPr sz="1100" b="1" i="0">
+              <a:rPr sz="1200" b="1" i="0">
                 <a:solidFill>
                   <a:srgbClr val="111111"/>
                 </a:solidFill>
                 <a:latin typeface="Arial"/>
               </a:rPr>
-              <a:t>W11</a:t>
+              <a:t>Open the exam set</a:t>
             </a:r>
           </a:p>
         </p:txBody>
@@ -15603,8 +15603,8 @@
         </p:nvSpPr>
         <p:spPr>
           <a:xfrm>
-            <a:off x="1298448" y="1975104"/>
-            <a:ext cx="1572768" cy="219456"/>
+            <a:off x="5120640" y="1938528"/>
+            <a:ext cx="5175504" cy="256032"/>
           </a:xfrm>
           <a:prstGeom prst="rect">
             <a:avLst/>
@@ -15635,7 +15635,7 @@
                 </a:solidFill>
                 <a:latin typeface="Arial"/>
               </a:rPr>
-              <a:t>5 – 11 Oct</a:t>
+              <a:t>One guarded opening once the freeze is signed</a:t>
             </a:r>
           </a:p>
         </p:txBody>
@@ -15643,96 +15643,6 @@
       <p:sp>
         <p:nvSpPr>
           <p:cNvPr id="12" name="TextBox 11"/>
-          <p:cNvSpPr txBox="1"/>
-          <p:nvPr/>
-        </p:nvSpPr>
-        <p:spPr>
-          <a:xfrm>
-            <a:off x="3017520" y="1920240"/>
-            <a:ext cx="2377440" cy="256032"/>
-          </a:xfrm>
-          <a:prstGeom prst="rect">
-            <a:avLst/>
-          </a:prstGeom>
-          <a:noFill/>
-        </p:spPr>
-        <p:txBody>
-          <a:bodyPr wrap="square" lIns="45720" rIns="45720" anchor="t">
-            <a:spAutoFit/>
-          </a:bodyPr>
-          <a:lstStyle/>
-          <a:p>
-            <a:pPr algn="l">
-              <a:lnSpc>
-                <a:spcPct val="100000"/>
-              </a:lnSpc>
-              <a:spcBef>
-                <a:spcPts val="0"/>
-              </a:spcBef>
-              <a:spcAft>
-                <a:spcPts val="0"/>
-              </a:spcAft>
-            </a:pPr>
-            <a:r>
-              <a:rPr sz="1200" b="1" i="0">
-                <a:solidFill>
-                  <a:srgbClr val="111111"/>
-                </a:solidFill>
-                <a:latin typeface="Arial"/>
-              </a:rPr>
-              <a:t>Open the exam set</a:t>
-            </a:r>
-          </a:p>
-        </p:txBody>
-      </p:sp>
-      <p:sp>
-        <p:nvSpPr>
-          <p:cNvPr id="13" name="TextBox 12"/>
-          <p:cNvSpPr txBox="1"/>
-          <p:nvPr/>
-        </p:nvSpPr>
-        <p:spPr>
-          <a:xfrm>
-            <a:off x="5541264" y="1938528"/>
-            <a:ext cx="4754880" cy="256032"/>
-          </a:xfrm>
-          <a:prstGeom prst="rect">
-            <a:avLst/>
-          </a:prstGeom>
-          <a:noFill/>
-        </p:spPr>
-        <p:txBody>
-          <a:bodyPr wrap="square" lIns="45720" rIns="45720" anchor="t">
-            <a:spAutoFit/>
-          </a:bodyPr>
-          <a:lstStyle/>
-          <a:p>
-            <a:pPr algn="l">
-              <a:lnSpc>
-                <a:spcPct val="100000"/>
-              </a:lnSpc>
-              <a:spcBef>
-                <a:spcPts val="0"/>
-              </a:spcBef>
-              <a:spcAft>
-                <a:spcPts val="0"/>
-              </a:spcAft>
-            </a:pPr>
-            <a:r>
-              <a:rPr sz="1100" b="0" i="0">
-                <a:solidFill>
-                  <a:srgbClr val="555555"/>
-                </a:solidFill>
-                <a:latin typeface="Arial"/>
-              </a:rPr>
-              <a:t>One guarded opening once the locking manifest is signed</a:t>
-            </a:r>
-          </a:p>
-        </p:txBody>
-      </p:sp>
-      <p:sp>
-        <p:nvSpPr>
-          <p:cNvPr id="14" name="TextBox 13"/>
           <p:cNvSpPr txBox="1"/>
           <p:nvPr/>
         </p:nvSpPr>
@@ -15777,7 +15687,7 @@
       </p:sp>
       <p:cxnSp>
         <p:nvCxnSpPr>
-          <p:cNvPr id="15" name="Connector 14"/>
+          <p:cNvPr id="13" name="Connector 12"/>
           <p:cNvCxnSpPr/>
           <p:nvPr/>
         </p:nvCxnSpPr>
@@ -15812,14 +15722,104 @@
       </p:cxnSp>
       <p:sp>
         <p:nvSpPr>
+          <p:cNvPr id="14" name="TextBox 13"/>
+          <p:cNvSpPr txBox="1"/>
+          <p:nvPr/>
+        </p:nvSpPr>
+        <p:spPr>
+          <a:xfrm>
+            <a:off x="566928" y="2505456"/>
+            <a:ext cx="1828800" cy="237744"/>
+          </a:xfrm>
+          <a:prstGeom prst="rect">
+            <a:avLst/>
+          </a:prstGeom>
+          <a:noFill/>
+        </p:spPr>
+        <p:txBody>
+          <a:bodyPr wrap="square" lIns="45720" rIns="45720" anchor="t">
+            <a:spAutoFit/>
+          </a:bodyPr>
+          <a:lstStyle/>
+          <a:p>
+            <a:pPr algn="l">
+              <a:lnSpc>
+                <a:spcPct val="100000"/>
+              </a:lnSpc>
+              <a:spcBef>
+                <a:spcPts val="0"/>
+              </a:spcBef>
+              <a:spcAft>
+                <a:spcPts val="0"/>
+              </a:spcAft>
+            </a:pPr>
+            <a:r>
+              <a:rPr sz="1100" b="0" i="0">
+                <a:solidFill>
+                  <a:srgbClr val="555555"/>
+                </a:solidFill>
+                <a:latin typeface="Arial"/>
+              </a:rPr>
+              <a:t>12 – 18 Oct</a:t>
+            </a:r>
+          </a:p>
+        </p:txBody>
+      </p:sp>
+      <p:sp>
+        <p:nvSpPr>
+          <p:cNvPr id="15" name="TextBox 14"/>
+          <p:cNvSpPr txBox="1"/>
+          <p:nvPr/>
+        </p:nvSpPr>
+        <p:spPr>
+          <a:xfrm>
+            <a:off x="2542032" y="2468880"/>
+            <a:ext cx="2468880" cy="256032"/>
+          </a:xfrm>
+          <a:prstGeom prst="rect">
+            <a:avLst/>
+          </a:prstGeom>
+          <a:noFill/>
+        </p:spPr>
+        <p:txBody>
+          <a:bodyPr wrap="square" lIns="45720" rIns="45720" anchor="t">
+            <a:spAutoFit/>
+          </a:bodyPr>
+          <a:lstStyle/>
+          <a:p>
+            <a:pPr algn="l">
+              <a:lnSpc>
+                <a:spcPct val="100000"/>
+              </a:lnSpc>
+              <a:spcBef>
+                <a:spcPts val="0"/>
+              </a:spcBef>
+              <a:spcAft>
+                <a:spcPts val="0"/>
+              </a:spcAft>
+            </a:pPr>
+            <a:r>
+              <a:rPr sz="1200" b="1" i="0">
+                <a:solidFill>
+                  <a:srgbClr val="111111"/>
+                </a:solidFill>
+                <a:latin typeface="Arial"/>
+              </a:rPr>
+              <a:t>Decide everything</a:t>
+            </a:r>
+          </a:p>
+        </p:txBody>
+      </p:sp>
+      <p:sp>
+        <p:nvSpPr>
           <p:cNvPr id="16" name="TextBox 15"/>
           <p:cNvSpPr txBox="1"/>
           <p:nvPr/>
         </p:nvSpPr>
         <p:spPr>
           <a:xfrm>
-            <a:off x="566928" y="2523744"/>
-            <a:ext cx="566928" cy="219456"/>
+            <a:off x="5120640" y="2487168"/>
+            <a:ext cx="5175504" cy="256032"/>
           </a:xfrm>
           <a:prstGeom prst="rect">
             <a:avLst/>
@@ -15844,13 +15844,13 @@
               </a:spcAft>
             </a:pPr>
             <a:r>
-              <a:rPr sz="1100" b="1" i="0">
-                <a:solidFill>
-                  <a:srgbClr val="111111"/>
-                </a:solidFill>
-                <a:latin typeface="Arial"/>
-              </a:rPr>
-              <a:t>W12</a:t>
+              <a:rPr sz="1100" b="0" i="0">
+                <a:solidFill>
+                  <a:srgbClr val="555555"/>
+                </a:solidFill>
+                <a:latin typeface="Arial"/>
+              </a:rPr>
+              <a:t>Every hypothesis settled on the exam set; first tier frozen</a:t>
             </a:r>
           </a:p>
         </p:txBody>
@@ -15858,141 +15858,6 @@
       <p:sp>
         <p:nvSpPr>
           <p:cNvPr id="17" name="TextBox 16"/>
-          <p:cNvSpPr txBox="1"/>
-          <p:nvPr/>
-        </p:nvSpPr>
-        <p:spPr>
-          <a:xfrm>
-            <a:off x="1298448" y="2523744"/>
-            <a:ext cx="1572768" cy="219456"/>
-          </a:xfrm>
-          <a:prstGeom prst="rect">
-            <a:avLst/>
-          </a:prstGeom>
-          <a:noFill/>
-        </p:spPr>
-        <p:txBody>
-          <a:bodyPr wrap="square" lIns="45720" rIns="45720" anchor="t">
-            <a:spAutoFit/>
-          </a:bodyPr>
-          <a:lstStyle/>
-          <a:p>
-            <a:pPr algn="l">
-              <a:lnSpc>
-                <a:spcPct val="100000"/>
-              </a:lnSpc>
-              <a:spcBef>
-                <a:spcPts val="0"/>
-              </a:spcBef>
-              <a:spcAft>
-                <a:spcPts val="0"/>
-              </a:spcAft>
-            </a:pPr>
-            <a:r>
-              <a:rPr sz="1100" b="0" i="0">
-                <a:solidFill>
-                  <a:srgbClr val="555555"/>
-                </a:solidFill>
-                <a:latin typeface="Arial"/>
-              </a:rPr>
-              <a:t>12 – 18 Oct</a:t>
-            </a:r>
-          </a:p>
-        </p:txBody>
-      </p:sp>
-      <p:sp>
-        <p:nvSpPr>
-          <p:cNvPr id="18" name="TextBox 17"/>
-          <p:cNvSpPr txBox="1"/>
-          <p:nvPr/>
-        </p:nvSpPr>
-        <p:spPr>
-          <a:xfrm>
-            <a:off x="3017520" y="2468880"/>
-            <a:ext cx="2377440" cy="256032"/>
-          </a:xfrm>
-          <a:prstGeom prst="rect">
-            <a:avLst/>
-          </a:prstGeom>
-          <a:noFill/>
-        </p:spPr>
-        <p:txBody>
-          <a:bodyPr wrap="square" lIns="45720" rIns="45720" anchor="t">
-            <a:spAutoFit/>
-          </a:bodyPr>
-          <a:lstStyle/>
-          <a:p>
-            <a:pPr algn="l">
-              <a:lnSpc>
-                <a:spcPct val="100000"/>
-              </a:lnSpc>
-              <a:spcBef>
-                <a:spcPts val="0"/>
-              </a:spcBef>
-              <a:spcAft>
-                <a:spcPts val="0"/>
-              </a:spcAft>
-            </a:pPr>
-            <a:r>
-              <a:rPr sz="1200" b="1" i="0">
-                <a:solidFill>
-                  <a:srgbClr val="111111"/>
-                </a:solidFill>
-                <a:latin typeface="Arial"/>
-              </a:rPr>
-              <a:t>Decide everything</a:t>
-            </a:r>
-          </a:p>
-        </p:txBody>
-      </p:sp>
-      <p:sp>
-        <p:nvSpPr>
-          <p:cNvPr id="19" name="TextBox 18"/>
-          <p:cNvSpPr txBox="1"/>
-          <p:nvPr/>
-        </p:nvSpPr>
-        <p:spPr>
-          <a:xfrm>
-            <a:off x="5541264" y="2487168"/>
-            <a:ext cx="4754880" cy="256032"/>
-          </a:xfrm>
-          <a:prstGeom prst="rect">
-            <a:avLst/>
-          </a:prstGeom>
-          <a:noFill/>
-        </p:spPr>
-        <p:txBody>
-          <a:bodyPr wrap="square" lIns="45720" rIns="45720" anchor="t">
-            <a:spAutoFit/>
-          </a:bodyPr>
-          <a:lstStyle/>
-          <a:p>
-            <a:pPr algn="l">
-              <a:lnSpc>
-                <a:spcPct val="100000"/>
-              </a:lnSpc>
-              <a:spcBef>
-                <a:spcPts val="0"/>
-              </a:spcBef>
-              <a:spcAft>
-                <a:spcPts val="0"/>
-              </a:spcAft>
-            </a:pPr>
-            <a:r>
-              <a:rPr sz="1100" b="0" i="0">
-                <a:solidFill>
-                  <a:srgbClr val="555555"/>
-                </a:solidFill>
-                <a:latin typeface="Arial"/>
-              </a:rPr>
-              <a:t>Every hypothesis settled on the exam set; first tier frozen</a:t>
-            </a:r>
-          </a:p>
-        </p:txBody>
-      </p:sp>
-      <p:sp>
-        <p:nvSpPr>
-          <p:cNvPr id="20" name="TextBox 19"/>
           <p:cNvSpPr txBox="1"/>
           <p:nvPr/>
         </p:nvSpPr>
@@ -16037,7 +15902,7 @@
       </p:sp>
       <p:cxnSp>
         <p:nvCxnSpPr>
-          <p:cNvPr id="21" name="Connector 20"/>
+          <p:cNvPr id="18" name="Connector 17"/>
           <p:cNvCxnSpPr/>
           <p:nvPr/>
         </p:nvCxnSpPr>
@@ -16072,187 +15937,142 @@
       </p:cxnSp>
       <p:sp>
         <p:nvSpPr>
+          <p:cNvPr id="19" name="TextBox 18"/>
+          <p:cNvSpPr txBox="1"/>
+          <p:nvPr/>
+        </p:nvSpPr>
+        <p:spPr>
+          <a:xfrm>
+            <a:off x="566928" y="3054096"/>
+            <a:ext cx="1828800" cy="237744"/>
+          </a:xfrm>
+          <a:prstGeom prst="rect">
+            <a:avLst/>
+          </a:prstGeom>
+          <a:noFill/>
+        </p:spPr>
+        <p:txBody>
+          <a:bodyPr wrap="square" lIns="45720" rIns="45720" anchor="t">
+            <a:spAutoFit/>
+          </a:bodyPr>
+          <a:lstStyle/>
+          <a:p>
+            <a:pPr algn="l">
+              <a:lnSpc>
+                <a:spcPct val="100000"/>
+              </a:lnSpc>
+              <a:spcBef>
+                <a:spcPts val="0"/>
+              </a:spcBef>
+              <a:spcAft>
+                <a:spcPts val="0"/>
+              </a:spcAft>
+            </a:pPr>
+            <a:r>
+              <a:rPr sz="1100" b="0" i="0">
+                <a:solidFill>
+                  <a:srgbClr val="555555"/>
+                </a:solidFill>
+                <a:latin typeface="Arial"/>
+              </a:rPr>
+              <a:t>19 – 25 Oct</a:t>
+            </a:r>
+          </a:p>
+        </p:txBody>
+      </p:sp>
+      <p:sp>
+        <p:nvSpPr>
+          <p:cNvPr id="20" name="TextBox 19"/>
+          <p:cNvSpPr txBox="1"/>
+          <p:nvPr/>
+        </p:nvSpPr>
+        <p:spPr>
+          <a:xfrm>
+            <a:off x="2542032" y="3017520"/>
+            <a:ext cx="2468880" cy="256032"/>
+          </a:xfrm>
+          <a:prstGeom prst="rect">
+            <a:avLst/>
+          </a:prstGeom>
+          <a:noFill/>
+        </p:spPr>
+        <p:txBody>
+          <a:bodyPr wrap="square" lIns="45720" rIns="45720" anchor="t">
+            <a:spAutoFit/>
+          </a:bodyPr>
+          <a:lstStyle/>
+          <a:p>
+            <a:pPr algn="l">
+              <a:lnSpc>
+                <a:spcPct val="100000"/>
+              </a:lnSpc>
+              <a:spcBef>
+                <a:spcPts val="0"/>
+              </a:spcBef>
+              <a:spcAft>
+                <a:spcPts val="0"/>
+              </a:spcAft>
+            </a:pPr>
+            <a:r>
+              <a:rPr sz="1200" b="1" i="0">
+                <a:solidFill>
+                  <a:srgbClr val="111111"/>
+                </a:solidFill>
+                <a:latin typeface="Arial"/>
+              </a:rPr>
+              <a:t>Demo</a:t>
+            </a:r>
+          </a:p>
+        </p:txBody>
+      </p:sp>
+      <p:sp>
+        <p:nvSpPr>
+          <p:cNvPr id="21" name="TextBox 20"/>
+          <p:cNvSpPr txBox="1"/>
+          <p:nvPr/>
+        </p:nvSpPr>
+        <p:spPr>
+          <a:xfrm>
+            <a:off x="5120640" y="3035808"/>
+            <a:ext cx="5175504" cy="256032"/>
+          </a:xfrm>
+          <a:prstGeom prst="rect">
+            <a:avLst/>
+          </a:prstGeom>
+          <a:noFill/>
+        </p:spPr>
+        <p:txBody>
+          <a:bodyPr wrap="square" lIns="45720" rIns="45720" anchor="t">
+            <a:spAutoFit/>
+          </a:bodyPr>
+          <a:lstStyle/>
+          <a:p>
+            <a:pPr algn="l">
+              <a:lnSpc>
+                <a:spcPct val="100000"/>
+              </a:lnSpc>
+              <a:spcBef>
+                <a:spcPts val="0"/>
+              </a:spcBef>
+              <a:spcAft>
+                <a:spcPts val="0"/>
+              </a:spcAft>
+            </a:pPr>
+            <a:r>
+              <a:rPr sz="1100" b="0" i="0">
+                <a:solidFill>
+                  <a:srgbClr val="555555"/>
+                </a:solidFill>
+                <a:latin typeface="Arial"/>
+              </a:rPr>
+              <a:t>Signal-strength slider, both systems side by side, frozen plot</a:t>
+            </a:r>
+          </a:p>
+        </p:txBody>
+      </p:sp>
+      <p:sp>
+        <p:nvSpPr>
           <p:cNvPr id="22" name="TextBox 21"/>
-          <p:cNvSpPr txBox="1"/>
-          <p:nvPr/>
-        </p:nvSpPr>
-        <p:spPr>
-          <a:xfrm>
-            <a:off x="566928" y="3072384"/>
-            <a:ext cx="566928" cy="219456"/>
-          </a:xfrm>
-          <a:prstGeom prst="rect">
-            <a:avLst/>
-          </a:prstGeom>
-          <a:noFill/>
-        </p:spPr>
-        <p:txBody>
-          <a:bodyPr wrap="square" lIns="45720" rIns="45720" anchor="t">
-            <a:spAutoFit/>
-          </a:bodyPr>
-          <a:lstStyle/>
-          <a:p>
-            <a:pPr algn="l">
-              <a:lnSpc>
-                <a:spcPct val="100000"/>
-              </a:lnSpc>
-              <a:spcBef>
-                <a:spcPts val="0"/>
-              </a:spcBef>
-              <a:spcAft>
-                <a:spcPts val="0"/>
-              </a:spcAft>
-            </a:pPr>
-            <a:r>
-              <a:rPr sz="1100" b="1" i="0">
-                <a:solidFill>
-                  <a:srgbClr val="111111"/>
-                </a:solidFill>
-                <a:latin typeface="Arial"/>
-              </a:rPr>
-              <a:t>W13</a:t>
-            </a:r>
-          </a:p>
-        </p:txBody>
-      </p:sp>
-      <p:sp>
-        <p:nvSpPr>
-          <p:cNvPr id="23" name="TextBox 22"/>
-          <p:cNvSpPr txBox="1"/>
-          <p:nvPr/>
-        </p:nvSpPr>
-        <p:spPr>
-          <a:xfrm>
-            <a:off x="1298448" y="3072384"/>
-            <a:ext cx="1572768" cy="219456"/>
-          </a:xfrm>
-          <a:prstGeom prst="rect">
-            <a:avLst/>
-          </a:prstGeom>
-          <a:noFill/>
-        </p:spPr>
-        <p:txBody>
-          <a:bodyPr wrap="square" lIns="45720" rIns="45720" anchor="t">
-            <a:spAutoFit/>
-          </a:bodyPr>
-          <a:lstStyle/>
-          <a:p>
-            <a:pPr algn="l">
-              <a:lnSpc>
-                <a:spcPct val="100000"/>
-              </a:lnSpc>
-              <a:spcBef>
-                <a:spcPts val="0"/>
-              </a:spcBef>
-              <a:spcAft>
-                <a:spcPts val="0"/>
-              </a:spcAft>
-            </a:pPr>
-            <a:r>
-              <a:rPr sz="1100" b="0" i="0">
-                <a:solidFill>
-                  <a:srgbClr val="555555"/>
-                </a:solidFill>
-                <a:latin typeface="Arial"/>
-              </a:rPr>
-              <a:t>19 – 25 Oct</a:t>
-            </a:r>
-          </a:p>
-        </p:txBody>
-      </p:sp>
-      <p:sp>
-        <p:nvSpPr>
-          <p:cNvPr id="24" name="TextBox 23"/>
-          <p:cNvSpPr txBox="1"/>
-          <p:nvPr/>
-        </p:nvSpPr>
-        <p:spPr>
-          <a:xfrm>
-            <a:off x="3017520" y="3017520"/>
-            <a:ext cx="2377440" cy="256032"/>
-          </a:xfrm>
-          <a:prstGeom prst="rect">
-            <a:avLst/>
-          </a:prstGeom>
-          <a:noFill/>
-        </p:spPr>
-        <p:txBody>
-          <a:bodyPr wrap="square" lIns="45720" rIns="45720" anchor="t">
-            <a:spAutoFit/>
-          </a:bodyPr>
-          <a:lstStyle/>
-          <a:p>
-            <a:pPr algn="l">
-              <a:lnSpc>
-                <a:spcPct val="100000"/>
-              </a:lnSpc>
-              <a:spcBef>
-                <a:spcPts val="0"/>
-              </a:spcBef>
-              <a:spcAft>
-                <a:spcPts val="0"/>
-              </a:spcAft>
-            </a:pPr>
-            <a:r>
-              <a:rPr sz="1200" b="1" i="0">
-                <a:solidFill>
-                  <a:srgbClr val="111111"/>
-                </a:solidFill>
-                <a:latin typeface="Arial"/>
-              </a:rPr>
-              <a:t>Demo</a:t>
-            </a:r>
-          </a:p>
-        </p:txBody>
-      </p:sp>
-      <p:sp>
-        <p:nvSpPr>
-          <p:cNvPr id="25" name="TextBox 24"/>
-          <p:cNvSpPr txBox="1"/>
-          <p:nvPr/>
-        </p:nvSpPr>
-        <p:spPr>
-          <a:xfrm>
-            <a:off x="5541264" y="3035808"/>
-            <a:ext cx="4754880" cy="256032"/>
-          </a:xfrm>
-          <a:prstGeom prst="rect">
-            <a:avLst/>
-          </a:prstGeom>
-          <a:noFill/>
-        </p:spPr>
-        <p:txBody>
-          <a:bodyPr wrap="square" lIns="45720" rIns="45720" anchor="t">
-            <a:spAutoFit/>
-          </a:bodyPr>
-          <a:lstStyle/>
-          <a:p>
-            <a:pPr algn="l">
-              <a:lnSpc>
-                <a:spcPct val="100000"/>
-              </a:lnSpc>
-              <a:spcBef>
-                <a:spcPts val="0"/>
-              </a:spcBef>
-              <a:spcAft>
-                <a:spcPts val="0"/>
-              </a:spcAft>
-            </a:pPr>
-            <a:r>
-              <a:rPr sz="1100" b="0" i="0">
-                <a:solidFill>
-                  <a:srgbClr val="555555"/>
-                </a:solidFill>
-                <a:latin typeface="Arial"/>
-              </a:rPr>
-              <a:t>Signal-strength slider, both systems side by side, frozen plot</a:t>
-            </a:r>
-          </a:p>
-        </p:txBody>
-      </p:sp>
-      <p:sp>
-        <p:nvSpPr>
-          <p:cNvPr id="26" name="TextBox 25"/>
           <p:cNvSpPr txBox="1"/>
           <p:nvPr/>
         </p:nvSpPr>
@@ -16297,7 +16117,7 @@
       </p:sp>
       <p:cxnSp>
         <p:nvCxnSpPr>
-          <p:cNvPr id="27" name="Connector 26"/>
+          <p:cNvPr id="23" name="Connector 22"/>
           <p:cNvCxnSpPr/>
           <p:nvPr/>
         </p:nvCxnSpPr>
@@ -16332,14 +16152,14 @@
       </p:cxnSp>
       <p:sp>
         <p:nvSpPr>
-          <p:cNvPr id="28" name="TextBox 27"/>
-          <p:cNvSpPr txBox="1"/>
-          <p:nvPr/>
-        </p:nvSpPr>
-        <p:spPr>
-          <a:xfrm>
-            <a:off x="566928" y="3621024"/>
-            <a:ext cx="566928" cy="219456"/>
+          <p:cNvPr id="24" name="TextBox 23"/>
+          <p:cNvSpPr txBox="1"/>
+          <p:nvPr/>
+        </p:nvSpPr>
+        <p:spPr>
+          <a:xfrm>
+            <a:off x="566928" y="3602736"/>
+            <a:ext cx="1828800" cy="237744"/>
           </a:xfrm>
           <a:prstGeom prst="rect">
             <a:avLst/>
@@ -16364,27 +16184,72 @@
               </a:spcAft>
             </a:pPr>
             <a:r>
-              <a:rPr sz="1100" b="1" i="0">
+              <a:rPr sz="1100" b="0" i="0">
+                <a:solidFill>
+                  <a:srgbClr val="555555"/>
+                </a:solidFill>
+                <a:latin typeface="Arial"/>
+              </a:rPr>
+              <a:t>26 Oct – 1 Nov</a:t>
+            </a:r>
+          </a:p>
+        </p:txBody>
+      </p:sp>
+      <p:sp>
+        <p:nvSpPr>
+          <p:cNvPr id="25" name="TextBox 24"/>
+          <p:cNvSpPr txBox="1"/>
+          <p:nvPr/>
+        </p:nvSpPr>
+        <p:spPr>
+          <a:xfrm>
+            <a:off x="2542032" y="3566160"/>
+            <a:ext cx="2468880" cy="256032"/>
+          </a:xfrm>
+          <a:prstGeom prst="rect">
+            <a:avLst/>
+          </a:prstGeom>
+          <a:noFill/>
+        </p:spPr>
+        <p:txBody>
+          <a:bodyPr wrap="square" lIns="45720" rIns="45720" anchor="t">
+            <a:spAutoFit/>
+          </a:bodyPr>
+          <a:lstStyle/>
+          <a:p>
+            <a:pPr algn="l">
+              <a:lnSpc>
+                <a:spcPct val="100000"/>
+              </a:lnSpc>
+              <a:spcBef>
+                <a:spcPts val="0"/>
+              </a:spcBef>
+              <a:spcAft>
+                <a:spcPts val="0"/>
+              </a:spcAft>
+            </a:pPr>
+            <a:r>
+              <a:rPr sz="1200" b="1" i="0">
                 <a:solidFill>
                   <a:srgbClr val="111111"/>
                 </a:solidFill>
                 <a:latin typeface="Arial"/>
               </a:rPr>
-              <a:t>W14</a:t>
-            </a:r>
-          </a:p>
-        </p:txBody>
-      </p:sp>
-      <p:sp>
-        <p:nvSpPr>
-          <p:cNvPr id="29" name="TextBox 28"/>
-          <p:cNvSpPr txBox="1"/>
-          <p:nvPr/>
-        </p:nvSpPr>
-        <p:spPr>
-          <a:xfrm>
-            <a:off x="1298448" y="3621024"/>
-            <a:ext cx="1572768" cy="219456"/>
+              <a:t>Poster and hardware</a:t>
+            </a:r>
+          </a:p>
+        </p:txBody>
+      </p:sp>
+      <p:sp>
+        <p:nvSpPr>
+          <p:cNvPr id="26" name="TextBox 25"/>
+          <p:cNvSpPr txBox="1"/>
+          <p:nvPr/>
+        </p:nvSpPr>
+        <p:spPr>
+          <a:xfrm>
+            <a:off x="5120640" y="3584448"/>
+            <a:ext cx="5175504" cy="256032"/>
           </a:xfrm>
           <a:prstGeom prst="rect">
             <a:avLst/>
@@ -16415,96 +16280,6 @@
                 </a:solidFill>
                 <a:latin typeface="Arial"/>
               </a:rPr>
-              <a:t>26 Oct – 1 Nov</a:t>
-            </a:r>
-          </a:p>
-        </p:txBody>
-      </p:sp>
-      <p:sp>
-        <p:nvSpPr>
-          <p:cNvPr id="30" name="TextBox 29"/>
-          <p:cNvSpPr txBox="1"/>
-          <p:nvPr/>
-        </p:nvSpPr>
-        <p:spPr>
-          <a:xfrm>
-            <a:off x="3017520" y="3566160"/>
-            <a:ext cx="2377440" cy="256032"/>
-          </a:xfrm>
-          <a:prstGeom prst="rect">
-            <a:avLst/>
-          </a:prstGeom>
-          <a:noFill/>
-        </p:spPr>
-        <p:txBody>
-          <a:bodyPr wrap="square" lIns="45720" rIns="45720" anchor="t">
-            <a:spAutoFit/>
-          </a:bodyPr>
-          <a:lstStyle/>
-          <a:p>
-            <a:pPr algn="l">
-              <a:lnSpc>
-                <a:spcPct val="100000"/>
-              </a:lnSpc>
-              <a:spcBef>
-                <a:spcPts val="0"/>
-              </a:spcBef>
-              <a:spcAft>
-                <a:spcPts val="0"/>
-              </a:spcAft>
-            </a:pPr>
-            <a:r>
-              <a:rPr sz="1200" b="1" i="0">
-                <a:solidFill>
-                  <a:srgbClr val="111111"/>
-                </a:solidFill>
-                <a:latin typeface="Arial"/>
-              </a:rPr>
-              <a:t>Poster and hardware</a:t>
-            </a:r>
-          </a:p>
-        </p:txBody>
-      </p:sp>
-      <p:sp>
-        <p:nvSpPr>
-          <p:cNvPr id="31" name="TextBox 30"/>
-          <p:cNvSpPr txBox="1"/>
-          <p:nvPr/>
-        </p:nvSpPr>
-        <p:spPr>
-          <a:xfrm>
-            <a:off x="5541264" y="3584448"/>
-            <a:ext cx="4754880" cy="256032"/>
-          </a:xfrm>
-          <a:prstGeom prst="rect">
-            <a:avLst/>
-          </a:prstGeom>
-          <a:noFill/>
-        </p:spPr>
-        <p:txBody>
-          <a:bodyPr wrap="square" lIns="45720" rIns="45720" anchor="t">
-            <a:spAutoFit/>
-          </a:bodyPr>
-          <a:lstStyle/>
-          <a:p>
-            <a:pPr algn="l">
-              <a:lnSpc>
-                <a:spcPct val="100000"/>
-              </a:lnSpc>
-              <a:spcBef>
-                <a:spcPts val="0"/>
-              </a:spcBef>
-              <a:spcAft>
-                <a:spcPts val="0"/>
-              </a:spcAft>
-            </a:pPr>
-            <a:r>
-              <a:rPr sz="1100" b="0" i="0">
-                <a:solidFill>
-                  <a:srgbClr val="555555"/>
-                </a:solidFill>
-                <a:latin typeface="Arial"/>
-              </a:rPr>
               <a:t>Poster draft; real radio only if the first tier leaves room</a:t>
             </a:r>
           </a:p>
@@ -16512,7 +16287,7 @@
       </p:sp>
       <p:sp>
         <p:nvSpPr>
-          <p:cNvPr id="32" name="TextBox 31"/>
+          <p:cNvPr id="27" name="TextBox 26"/>
           <p:cNvSpPr txBox="1"/>
           <p:nvPr/>
         </p:nvSpPr>
@@ -16557,7 +16332,7 @@
       </p:sp>
       <p:cxnSp>
         <p:nvCxnSpPr>
-          <p:cNvPr id="33" name="Connector 32"/>
+          <p:cNvPr id="28" name="Connector 27"/>
           <p:cNvCxnSpPr/>
           <p:nvPr/>
         </p:nvCxnSpPr>
@@ -16592,14 +16367,14 @@
       </p:cxnSp>
       <p:sp>
         <p:nvSpPr>
-          <p:cNvPr id="34" name="TextBox 33"/>
-          <p:cNvSpPr txBox="1"/>
-          <p:nvPr/>
-        </p:nvSpPr>
-        <p:spPr>
-          <a:xfrm>
-            <a:off x="566928" y="4169663"/>
-            <a:ext cx="566928" cy="219456"/>
+          <p:cNvPr id="29" name="TextBox 28"/>
+          <p:cNvSpPr txBox="1"/>
+          <p:nvPr/>
+        </p:nvSpPr>
+        <p:spPr>
+          <a:xfrm>
+            <a:off x="566928" y="4151376"/>
+            <a:ext cx="1828800" cy="237744"/>
           </a:xfrm>
           <a:prstGeom prst="rect">
             <a:avLst/>
@@ -16624,27 +16399,72 @@
               </a:spcAft>
             </a:pPr>
             <a:r>
-              <a:rPr sz="1100" b="1" i="0">
+              <a:rPr sz="1100" b="0" i="0">
+                <a:solidFill>
+                  <a:srgbClr val="555555"/>
+                </a:solidFill>
+                <a:latin typeface="Arial"/>
+              </a:rPr>
+              <a:t>2 – 8 Nov</a:t>
+            </a:r>
+          </a:p>
+        </p:txBody>
+      </p:sp>
+      <p:sp>
+        <p:nvSpPr>
+          <p:cNvPr id="30" name="TextBox 29"/>
+          <p:cNvSpPr txBox="1"/>
+          <p:nvPr/>
+        </p:nvSpPr>
+        <p:spPr>
+          <a:xfrm>
+            <a:off x="2542032" y="4114800"/>
+            <a:ext cx="2468880" cy="256032"/>
+          </a:xfrm>
+          <a:prstGeom prst="rect">
+            <a:avLst/>
+          </a:prstGeom>
+          <a:noFill/>
+        </p:spPr>
+        <p:txBody>
+          <a:bodyPr wrap="square" lIns="45720" rIns="45720" anchor="t">
+            <a:spAutoFit/>
+          </a:bodyPr>
+          <a:lstStyle/>
+          <a:p>
+            <a:pPr algn="l">
+              <a:lnSpc>
+                <a:spcPct val="100000"/>
+              </a:lnSpc>
+              <a:spcBef>
+                <a:spcPts val="0"/>
+              </a:spcBef>
+              <a:spcAft>
+                <a:spcPts val="0"/>
+              </a:spcAft>
+            </a:pPr>
+            <a:r>
+              <a:rPr sz="1200" b="1" i="0">
                 <a:solidFill>
                   <a:srgbClr val="111111"/>
                 </a:solidFill>
                 <a:latin typeface="Arial"/>
               </a:rPr>
-              <a:t>W15</a:t>
-            </a:r>
-          </a:p>
-        </p:txBody>
-      </p:sp>
-      <p:sp>
-        <p:nvSpPr>
-          <p:cNvPr id="35" name="TextBox 34"/>
-          <p:cNvSpPr txBox="1"/>
-          <p:nvPr/>
-        </p:nvSpPr>
-        <p:spPr>
-          <a:xfrm>
-            <a:off x="1298448" y="4169663"/>
-            <a:ext cx="1572768" cy="219456"/>
+              <a:t>Report freeze</a:t>
+            </a:r>
+          </a:p>
+        </p:txBody>
+      </p:sp>
+      <p:sp>
+        <p:nvSpPr>
+          <p:cNvPr id="31" name="TextBox 30"/>
+          <p:cNvSpPr txBox="1"/>
+          <p:nvPr/>
+        </p:nvSpPr>
+        <p:spPr>
+          <a:xfrm>
+            <a:off x="5120640" y="4133087"/>
+            <a:ext cx="5175504" cy="256032"/>
           </a:xfrm>
           <a:prstGeom prst="rect">
             <a:avLst/>
@@ -16675,96 +16495,6 @@
                 </a:solidFill>
                 <a:latin typeface="Arial"/>
               </a:rPr>
-              <a:t>2 – 8 Nov</a:t>
-            </a:r>
-          </a:p>
-        </p:txBody>
-      </p:sp>
-      <p:sp>
-        <p:nvSpPr>
-          <p:cNvPr id="36" name="TextBox 35"/>
-          <p:cNvSpPr txBox="1"/>
-          <p:nvPr/>
-        </p:nvSpPr>
-        <p:spPr>
-          <a:xfrm>
-            <a:off x="3017520" y="4114800"/>
-            <a:ext cx="2377440" cy="256032"/>
-          </a:xfrm>
-          <a:prstGeom prst="rect">
-            <a:avLst/>
-          </a:prstGeom>
-          <a:noFill/>
-        </p:spPr>
-        <p:txBody>
-          <a:bodyPr wrap="square" lIns="45720" rIns="45720" anchor="t">
-            <a:spAutoFit/>
-          </a:bodyPr>
-          <a:lstStyle/>
-          <a:p>
-            <a:pPr algn="l">
-              <a:lnSpc>
-                <a:spcPct val="100000"/>
-              </a:lnSpc>
-              <a:spcBef>
-                <a:spcPts val="0"/>
-              </a:spcBef>
-              <a:spcAft>
-                <a:spcPts val="0"/>
-              </a:spcAft>
-            </a:pPr>
-            <a:r>
-              <a:rPr sz="1200" b="1" i="0">
-                <a:solidFill>
-                  <a:srgbClr val="111111"/>
-                </a:solidFill>
-                <a:latin typeface="Arial"/>
-              </a:rPr>
-              <a:t>Internal freeze</a:t>
-            </a:r>
-          </a:p>
-        </p:txBody>
-      </p:sp>
-      <p:sp>
-        <p:nvSpPr>
-          <p:cNvPr id="37" name="TextBox 36"/>
-          <p:cNvSpPr txBox="1"/>
-          <p:nvPr/>
-        </p:nvSpPr>
-        <p:spPr>
-          <a:xfrm>
-            <a:off x="5541264" y="4133087"/>
-            <a:ext cx="4754880" cy="256032"/>
-          </a:xfrm>
-          <a:prstGeom prst="rect">
-            <a:avLst/>
-          </a:prstGeom>
-          <a:noFill/>
-        </p:spPr>
-        <p:txBody>
-          <a:bodyPr wrap="square" lIns="45720" rIns="45720" anchor="t">
-            <a:spAutoFit/>
-          </a:bodyPr>
-          <a:lstStyle/>
-          <a:p>
-            <a:pPr algn="l">
-              <a:lnSpc>
-                <a:spcPct val="100000"/>
-              </a:lnSpc>
-              <a:spcBef>
-                <a:spcPts val="0"/>
-              </a:spcBef>
-              <a:spcAft>
-                <a:spcPts val="0"/>
-              </a:spcAft>
-            </a:pPr>
-            <a:r>
-              <a:rPr sz="1100" b="0" i="0">
-                <a:solidFill>
-                  <a:srgbClr val="555555"/>
-                </a:solidFill>
-                <a:latin typeface="Arial"/>
-              </a:rPr>
               <a:t>Report finished in the required format</a:t>
             </a:r>
           </a:p>
@@ -16772,7 +16502,7 @@
       </p:sp>
       <p:sp>
         <p:nvSpPr>
-          <p:cNvPr id="38" name="TextBox 37"/>
+          <p:cNvPr id="32" name="TextBox 31"/>
           <p:cNvSpPr txBox="1"/>
           <p:nvPr/>
         </p:nvSpPr>
@@ -16817,7 +16547,7 @@
       </p:sp>
       <p:cxnSp>
         <p:nvCxnSpPr>
-          <p:cNvPr id="39" name="Connector 38"/>
+          <p:cNvPr id="33" name="Connector 32"/>
           <p:cNvCxnSpPr/>
           <p:nvPr/>
         </p:nvCxnSpPr>
@@ -16852,14 +16582,14 @@
       </p:cxnSp>
       <p:sp>
         <p:nvSpPr>
-          <p:cNvPr id="40" name="TextBox 39"/>
-          <p:cNvSpPr txBox="1"/>
-          <p:nvPr/>
-        </p:nvSpPr>
-        <p:spPr>
-          <a:xfrm>
-            <a:off x="566928" y="4718303"/>
-            <a:ext cx="566928" cy="219456"/>
+          <p:cNvPr id="34" name="TextBox 33"/>
+          <p:cNvSpPr txBox="1"/>
+          <p:nvPr/>
+        </p:nvSpPr>
+        <p:spPr>
+          <a:xfrm>
+            <a:off x="566928" y="4700016"/>
+            <a:ext cx="1828800" cy="237744"/>
           </a:xfrm>
           <a:prstGeom prst="rect">
             <a:avLst/>
@@ -16884,27 +16614,72 @@
               </a:spcAft>
             </a:pPr>
             <a:r>
-              <a:rPr sz="1100" b="1" i="0">
+              <a:rPr sz="1100" b="0" i="0">
+                <a:solidFill>
+                  <a:srgbClr val="555555"/>
+                </a:solidFill>
+                <a:latin typeface="Arial"/>
+              </a:rPr>
+              <a:t>9 – 15 Nov</a:t>
+            </a:r>
+          </a:p>
+        </p:txBody>
+      </p:sp>
+      <p:sp>
+        <p:nvSpPr>
+          <p:cNvPr id="35" name="TextBox 34"/>
+          <p:cNvSpPr txBox="1"/>
+          <p:nvPr/>
+        </p:nvSpPr>
+        <p:spPr>
+          <a:xfrm>
+            <a:off x="2542032" y="4663440"/>
+            <a:ext cx="2468880" cy="256032"/>
+          </a:xfrm>
+          <a:prstGeom prst="rect">
+            <a:avLst/>
+          </a:prstGeom>
+          <a:noFill/>
+        </p:spPr>
+        <p:txBody>
+          <a:bodyPr wrap="square" lIns="45720" rIns="45720" anchor="t">
+            <a:spAutoFit/>
+          </a:bodyPr>
+          <a:lstStyle/>
+          <a:p>
+            <a:pPr algn="l">
+              <a:lnSpc>
+                <a:spcPct val="100000"/>
+              </a:lnSpc>
+              <a:spcBef>
+                <a:spcPts val="0"/>
+              </a:spcBef>
+              <a:spcAft>
+                <a:spcPts val="0"/>
+              </a:spcAft>
+            </a:pPr>
+            <a:r>
+              <a:rPr sz="1200" b="1" i="0">
                 <a:solidFill>
                   <a:srgbClr val="111111"/>
                 </a:solidFill>
                 <a:latin typeface="Arial"/>
               </a:rPr>
-              <a:t>W16</a:t>
-            </a:r>
-          </a:p>
-        </p:txBody>
-      </p:sp>
-      <p:sp>
-        <p:nvSpPr>
-          <p:cNvPr id="41" name="TextBox 40"/>
-          <p:cNvSpPr txBox="1"/>
-          <p:nvPr/>
-        </p:nvSpPr>
-        <p:spPr>
-          <a:xfrm>
-            <a:off x="1298448" y="4718303"/>
-            <a:ext cx="1572768" cy="219456"/>
+              <a:t>Spare week</a:t>
+            </a:r>
+          </a:p>
+        </p:txBody>
+      </p:sp>
+      <p:sp>
+        <p:nvSpPr>
+          <p:cNvPr id="36" name="TextBox 35"/>
+          <p:cNvSpPr txBox="1"/>
+          <p:nvPr/>
+        </p:nvSpPr>
+        <p:spPr>
+          <a:xfrm>
+            <a:off x="5120640" y="4681727"/>
+            <a:ext cx="5175504" cy="256032"/>
           </a:xfrm>
           <a:prstGeom prst="rect">
             <a:avLst/>
@@ -16935,96 +16710,6 @@
                 </a:solidFill>
                 <a:latin typeface="Arial"/>
               </a:rPr>
-              <a:t>9 – 15 Nov</a:t>
-            </a:r>
-          </a:p>
-        </p:txBody>
-      </p:sp>
-      <p:sp>
-        <p:nvSpPr>
-          <p:cNvPr id="42" name="TextBox 41"/>
-          <p:cNvSpPr txBox="1"/>
-          <p:nvPr/>
-        </p:nvSpPr>
-        <p:spPr>
-          <a:xfrm>
-            <a:off x="3017520" y="4663440"/>
-            <a:ext cx="2377440" cy="256032"/>
-          </a:xfrm>
-          <a:prstGeom prst="rect">
-            <a:avLst/>
-          </a:prstGeom>
-          <a:noFill/>
-        </p:spPr>
-        <p:txBody>
-          <a:bodyPr wrap="square" lIns="45720" rIns="45720" anchor="t">
-            <a:spAutoFit/>
-          </a:bodyPr>
-          <a:lstStyle/>
-          <a:p>
-            <a:pPr algn="l">
-              <a:lnSpc>
-                <a:spcPct val="100000"/>
-              </a:lnSpc>
-              <a:spcBef>
-                <a:spcPts val="0"/>
-              </a:spcBef>
-              <a:spcAft>
-                <a:spcPts val="0"/>
-              </a:spcAft>
-            </a:pPr>
-            <a:r>
-              <a:rPr sz="1200" b="1" i="0">
-                <a:solidFill>
-                  <a:srgbClr val="111111"/>
-                </a:solidFill>
-                <a:latin typeface="Arial"/>
-              </a:rPr>
-              <a:t>Spare week</a:t>
-            </a:r>
-          </a:p>
-        </p:txBody>
-      </p:sp>
-      <p:sp>
-        <p:nvSpPr>
-          <p:cNvPr id="43" name="TextBox 42"/>
-          <p:cNvSpPr txBox="1"/>
-          <p:nvPr/>
-        </p:nvSpPr>
-        <p:spPr>
-          <a:xfrm>
-            <a:off x="5541264" y="4681727"/>
-            <a:ext cx="4754880" cy="256032"/>
-          </a:xfrm>
-          <a:prstGeom prst="rect">
-            <a:avLst/>
-          </a:prstGeom>
-          <a:noFill/>
-        </p:spPr>
-        <p:txBody>
-          <a:bodyPr wrap="square" lIns="45720" rIns="45720" anchor="t">
-            <a:spAutoFit/>
-          </a:bodyPr>
-          <a:lstStyle/>
-          <a:p>
-            <a:pPr algn="l">
-              <a:lnSpc>
-                <a:spcPct val="100000"/>
-              </a:lnSpc>
-              <a:spcBef>
-                <a:spcPts val="0"/>
-              </a:spcBef>
-              <a:spcAft>
-                <a:spcPts val="0"/>
-              </a:spcAft>
-            </a:pPr>
-            <a:r>
-              <a:rPr sz="1100" b="0" i="0">
-                <a:solidFill>
-                  <a:srgbClr val="555555"/>
-                </a:solidFill>
-                <a:latin typeface="Arial"/>
-              </a:rPr>
               <a:t>Report completion and checking</a:t>
             </a:r>
           </a:p>
@@ -17032,7 +16717,7 @@
       </p:sp>
       <p:sp>
         <p:nvSpPr>
-          <p:cNvPr id="44" name="TextBox 43"/>
+          <p:cNvPr id="37" name="TextBox 36"/>
           <p:cNvSpPr txBox="1"/>
           <p:nvPr/>
         </p:nvSpPr>
@@ -17077,7 +16762,7 @@
       </p:sp>
       <p:cxnSp>
         <p:nvCxnSpPr>
-          <p:cNvPr id="45" name="Connector 44"/>
+          <p:cNvPr id="38" name="Connector 37"/>
           <p:cNvCxnSpPr/>
           <p:nvPr/>
         </p:nvCxnSpPr>
@@ -17112,14 +16797,14 @@
       </p:cxnSp>
       <p:sp>
         <p:nvSpPr>
-          <p:cNvPr id="46" name="TextBox 45"/>
-          <p:cNvSpPr txBox="1"/>
-          <p:nvPr/>
-        </p:nvSpPr>
-        <p:spPr>
-          <a:xfrm>
-            <a:off x="566928" y="5266944"/>
-            <a:ext cx="566928" cy="219456"/>
+          <p:cNvPr id="39" name="TextBox 38"/>
+          <p:cNvSpPr txBox="1"/>
+          <p:nvPr/>
+        </p:nvSpPr>
+        <p:spPr>
+          <a:xfrm>
+            <a:off x="566928" y="5248656"/>
+            <a:ext cx="1828800" cy="237744"/>
           </a:xfrm>
           <a:prstGeom prst="rect">
             <a:avLst/>
@@ -17144,27 +16829,72 @@
               </a:spcAft>
             </a:pPr>
             <a:r>
-              <a:rPr sz="1100" b="1" i="0">
+              <a:rPr sz="1100" b="0" i="0">
+                <a:solidFill>
+                  <a:srgbClr val="555555"/>
+                </a:solidFill>
+                <a:latin typeface="Arial"/>
+              </a:rPr>
+              <a:t>16 – 22 Nov</a:t>
+            </a:r>
+          </a:p>
+        </p:txBody>
+      </p:sp>
+      <p:sp>
+        <p:nvSpPr>
+          <p:cNvPr id="40" name="TextBox 39"/>
+          <p:cNvSpPr txBox="1"/>
+          <p:nvPr/>
+        </p:nvSpPr>
+        <p:spPr>
+          <a:xfrm>
+            <a:off x="2542032" y="5212080"/>
+            <a:ext cx="2468880" cy="256032"/>
+          </a:xfrm>
+          <a:prstGeom prst="rect">
+            <a:avLst/>
+          </a:prstGeom>
+          <a:noFill/>
+        </p:spPr>
+        <p:txBody>
+          <a:bodyPr wrap="square" lIns="45720" rIns="45720" anchor="t">
+            <a:spAutoFit/>
+          </a:bodyPr>
+          <a:lstStyle/>
+          <a:p>
+            <a:pPr algn="l">
+              <a:lnSpc>
+                <a:spcPct val="100000"/>
+              </a:lnSpc>
+              <a:spcBef>
+                <a:spcPts val="0"/>
+              </a:spcBef>
+              <a:spcAft>
+                <a:spcPts val="0"/>
+              </a:spcAft>
+            </a:pPr>
+            <a:r>
+              <a:rPr sz="1200" b="1" i="0">
                 <a:solidFill>
                   <a:srgbClr val="111111"/>
                 </a:solidFill>
                 <a:latin typeface="Arial"/>
               </a:rPr>
-              <a:t>W17</a:t>
-            </a:r>
-          </a:p>
-        </p:txBody>
-      </p:sp>
-      <p:sp>
-        <p:nvSpPr>
-          <p:cNvPr id="47" name="TextBox 46"/>
-          <p:cNvSpPr txBox="1"/>
-          <p:nvPr/>
-        </p:nvSpPr>
-        <p:spPr>
-          <a:xfrm>
-            <a:off x="1298448" y="5266944"/>
-            <a:ext cx="1572768" cy="219456"/>
+              <a:t>Final Review</a:t>
+            </a:r>
+          </a:p>
+        </p:txBody>
+      </p:sp>
+      <p:sp>
+        <p:nvSpPr>
+          <p:cNvPr id="41" name="TextBox 40"/>
+          <p:cNvSpPr txBox="1"/>
+          <p:nvPr/>
+        </p:nvSpPr>
+        <p:spPr>
+          <a:xfrm>
+            <a:off x="5120640" y="5230368"/>
+            <a:ext cx="5175504" cy="256032"/>
           </a:xfrm>
           <a:prstGeom prst="rect">
             <a:avLst/>
@@ -17195,96 +16925,6 @@
                 </a:solidFill>
                 <a:latin typeface="Arial"/>
               </a:rPr>
-              <a:t>16 – 22 Nov</a:t>
-            </a:r>
-          </a:p>
-        </p:txBody>
-      </p:sp>
-      <p:sp>
-        <p:nvSpPr>
-          <p:cNvPr id="48" name="TextBox 47"/>
-          <p:cNvSpPr txBox="1"/>
-          <p:nvPr/>
-        </p:nvSpPr>
-        <p:spPr>
-          <a:xfrm>
-            <a:off x="3017520" y="5212080"/>
-            <a:ext cx="2377440" cy="256032"/>
-          </a:xfrm>
-          <a:prstGeom prst="rect">
-            <a:avLst/>
-          </a:prstGeom>
-          <a:noFill/>
-        </p:spPr>
-        <p:txBody>
-          <a:bodyPr wrap="square" lIns="45720" rIns="45720" anchor="t">
-            <a:spAutoFit/>
-          </a:bodyPr>
-          <a:lstStyle/>
-          <a:p>
-            <a:pPr algn="l">
-              <a:lnSpc>
-                <a:spcPct val="100000"/>
-              </a:lnSpc>
-              <a:spcBef>
-                <a:spcPts val="0"/>
-              </a:spcBef>
-              <a:spcAft>
-                <a:spcPts val="0"/>
-              </a:spcAft>
-            </a:pPr>
-            <a:r>
-              <a:rPr sz="1200" b="1" i="0">
-                <a:solidFill>
-                  <a:srgbClr val="111111"/>
-                </a:solidFill>
-                <a:latin typeface="Arial"/>
-              </a:rPr>
-              <a:t>Final Review</a:t>
-            </a:r>
-          </a:p>
-        </p:txBody>
-      </p:sp>
-      <p:sp>
-        <p:nvSpPr>
-          <p:cNvPr id="49" name="TextBox 48"/>
-          <p:cNvSpPr txBox="1"/>
-          <p:nvPr/>
-        </p:nvSpPr>
-        <p:spPr>
-          <a:xfrm>
-            <a:off x="5541264" y="5230368"/>
-            <a:ext cx="4754880" cy="256032"/>
-          </a:xfrm>
-          <a:prstGeom prst="rect">
-            <a:avLst/>
-          </a:prstGeom>
-          <a:noFill/>
-        </p:spPr>
-        <p:txBody>
-          <a:bodyPr wrap="square" lIns="45720" rIns="45720" anchor="t">
-            <a:spAutoFit/>
-          </a:bodyPr>
-          <a:lstStyle/>
-          <a:p>
-            <a:pPr algn="l">
-              <a:lnSpc>
-                <a:spcPct val="100000"/>
-              </a:lnSpc>
-              <a:spcBef>
-                <a:spcPts val="0"/>
-              </a:spcBef>
-              <a:spcAft>
-                <a:spcPts val="0"/>
-              </a:spcAft>
-            </a:pPr>
-            <a:r>
-              <a:rPr sz="1100" b="0" i="0">
-                <a:solidFill>
-                  <a:srgbClr val="555555"/>
-                </a:solidFill>
-                <a:latin typeface="Arial"/>
-              </a:rPr>
               <a:t>Final review 17–21 Nov; report and material due 20 Nov</a:t>
             </a:r>
           </a:p>
@@ -17292,7 +16932,7 @@
       </p:sp>
       <p:sp>
         <p:nvSpPr>
-          <p:cNvPr id="50" name="TextBox 49"/>
+          <p:cNvPr id="42" name="TextBox 41"/>
           <p:cNvSpPr txBox="1"/>
           <p:nvPr/>
         </p:nvSpPr>
@@ -17337,7 +16977,7 @@
       </p:sp>
       <p:cxnSp>
         <p:nvCxnSpPr>
-          <p:cNvPr id="51" name="Connector 50"/>
+          <p:cNvPr id="43" name="Connector 42"/>
           <p:cNvCxnSpPr/>
           <p:nvPr/>
         </p:nvCxnSpPr>
@@ -17372,7 +17012,7 @@
       </p:cxnSp>
       <p:cxnSp>
         <p:nvCxnSpPr>
-          <p:cNvPr id="52" name="Connector 51"/>
+          <p:cNvPr id="44" name="Connector 43"/>
           <p:cNvCxnSpPr/>
           <p:nvPr/>
         </p:nvCxnSpPr>
@@ -17407,7 +17047,7 @@
       </p:cxnSp>
       <p:sp>
         <p:nvSpPr>
-          <p:cNvPr id="53" name="TextBox 52"/>
+          <p:cNvPr id="45" name="TextBox 44"/>
           <p:cNvSpPr txBox="1"/>
           <p:nvPr/>
         </p:nvSpPr>
@@ -17445,14 +17085,14 @@
                 </a:solidFill>
                 <a:latin typeface="Arial"/>
               </a:rPr>
-              <a:t>The report is due inside Final Review week, so W15 is an internal freeze and W16 is reserved for report completion.</a:t>
+              <a:t>The report is due on 20 November, inside Final Review week, so the week before it is a freeze.</a:t>
             </a:r>
           </a:p>
         </p:txBody>
       </p:sp>
       <p:cxnSp>
         <p:nvCxnSpPr>
-          <p:cNvPr id="54" name="Connector 53"/>
+          <p:cNvPr id="46" name="Connector 45"/>
           <p:cNvCxnSpPr/>
           <p:nvPr/>
         </p:nvCxnSpPr>
@@ -17487,7 +17127,7 @@
       </p:cxnSp>
       <p:sp>
         <p:nvSpPr>
-          <p:cNvPr id="55" name="TextBox 54"/>
+          <p:cNvPr id="47" name="TextBox 46"/>
           <p:cNvSpPr txBox="1"/>
           <p:nvPr/>
         </p:nvSpPr>
@@ -17532,7 +17172,7 @@
       </p:sp>
       <p:sp>
         <p:nvSpPr>
-          <p:cNvPr id="56" name="TextBox 55"/>
+          <p:cNvPr id="48" name="TextBox 47"/>
           <p:cNvSpPr txBox="1"/>
           <p:nvPr/>
         </p:nvSpPr>
@@ -17577,7 +17217,7 @@
       </p:sp>
       <p:sp>
         <p:nvSpPr>
-          <p:cNvPr id="57" name="TextBox 56"/>
+          <p:cNvPr id="49" name="TextBox 48"/>
           <p:cNvSpPr txBox="1"/>
           <p:nvPr/>
         </p:nvSpPr>
@@ -18199,7 +17839,7 @@
         </p:nvSpPr>
         <p:spPr>
           <a:xfrm>
-            <a:off x="566928" y="4754880"/>
+            <a:off x="566928" y="4791456"/>
             <a:ext cx="11018520" cy="256032"/>
           </a:xfrm>
           <a:prstGeom prst="rect">
@@ -18231,7 +17871,7 @@
                 </a:solidFill>
                 <a:latin typeface="Arial"/>
               </a:rPr>
-              <a:t>Evidence trail</a:t>
+              <a:t>What we are asking for</a:t>
             </a:r>
           </a:p>
         </p:txBody>
@@ -18244,8 +17884,8 @@
         </p:nvSpPr>
         <p:spPr>
           <a:xfrm>
-            <a:off x="566928" y="5065776"/>
-            <a:ext cx="11018520" cy="310896"/>
+            <a:off x="566928" y="5138928"/>
+            <a:ext cx="11018520" cy="566928"/>
           </a:xfrm>
           <a:prstGeom prst="rect">
             <a:avLst/>
@@ -18276,7 +17916,7 @@
                 </a:solidFill>
                 <a:latin typeface="Arial"/>
               </a:rPr>
-              <a:t>results/learned/w10/ holds the 252-measurement record and the per-picture manifest. Figures and data are in presentation-results/. Requirements and changes are in spec/SPEC.md §17.</a:t>
+              <a:t>Questions on the method or the numbers. The per-picture records behind every point are available on request, and the exam set stays sealed until week 11.</a:t>
             </a:r>
           </a:p>
         </p:txBody>
@@ -18289,7 +17929,7 @@
         </p:nvCxnSpPr>
         <p:spPr>
           <a:xfrm>
-            <a:off x="566928" y="5541264"/>
+            <a:off x="566928" y="6419088"/>
             <a:ext cx="11018520" cy="0"/>
           </a:xfrm>
           <a:prstGeom prst="line">
@@ -18324,86 +17964,6 @@
         </p:nvSpPr>
         <p:spPr>
           <a:xfrm>
-            <a:off x="566928" y="5669280"/>
-            <a:ext cx="11018520" cy="310896"/>
-          </a:xfrm>
-          <a:prstGeom prst="rect">
-            <a:avLst/>
-          </a:prstGeom>
-          <a:noFill/>
-        </p:spPr>
-        <p:txBody>
-          <a:bodyPr wrap="square" lIns="45720" rIns="45720" anchor="t">
-            <a:spAutoFit/>
-          </a:bodyPr>
-          <a:lstStyle/>
-          <a:p>
-            <a:pPr algn="l">
-              <a:lnSpc>
-                <a:spcPct val="100000"/>
-              </a:lnSpc>
-              <a:spcBef>
-                <a:spcPts val="0"/>
-              </a:spcBef>
-              <a:spcAft>
-                <a:spcPts val="0"/>
-              </a:spcAft>
-            </a:pPr>
-            <a:r>
-              <a:rPr sz="1200" b="1" i="0">
-                <a:solidFill>
-                  <a:srgbClr val="111111"/>
-                </a:solidFill>
-                <a:latin typeface="Arial"/>
-              </a:rPr>
-              <a:t>The exam set stays sealed until gate G-12.</a:t>
-            </a:r>
-          </a:p>
-        </p:txBody>
-      </p:sp>
-      <p:cxnSp>
-        <p:nvCxnSpPr>
-          <p:cNvPr id="19" name="Connector 18"/>
-          <p:cNvCxnSpPr/>
-          <p:nvPr/>
-        </p:nvCxnSpPr>
-        <p:spPr>
-          <a:xfrm>
-            <a:off x="566928" y="6419088"/>
-            <a:ext cx="11018520" cy="0"/>
-          </a:xfrm>
-          <a:prstGeom prst="line">
-            <a:avLst/>
-          </a:prstGeom>
-          <a:ln w="8890">
-            <a:solidFill>
-              <a:srgbClr val="D9D9D9"/>
-            </a:solidFill>
-          </a:ln>
-        </p:spPr>
-        <p:style>
-          <a:lnRef idx="2">
-            <a:schemeClr val="accent1"/>
-          </a:lnRef>
-          <a:fillRef idx="0">
-            <a:schemeClr val="accent1"/>
-          </a:fillRef>
-          <a:effectRef idx="1">
-            <a:schemeClr val="accent1"/>
-          </a:effectRef>
-          <a:fontRef idx="minor">
-            <a:schemeClr val="tx1"/>
-          </a:fontRef>
-        </p:style>
-      </p:cxnSp>
-      <p:sp>
-        <p:nvSpPr>
-          <p:cNvPr id="20" name="TextBox 19"/>
-          <p:cNvSpPr txBox="1"/>
-          <p:nvPr/>
-        </p:nvSpPr>
-        <p:spPr>
-          <a:xfrm>
             <a:off x="566928" y="6510528"/>
             <a:ext cx="3063240" cy="164592"/>
           </a:xfrm>
@@ -18443,7 +18003,7 @@
       </p:sp>
       <p:sp>
         <p:nvSpPr>
-          <p:cNvPr id="21" name="TextBox 20"/>
+          <p:cNvPr id="19" name="TextBox 18"/>
           <p:cNvSpPr txBox="1"/>
           <p:nvPr/>
         </p:nvSpPr>
@@ -18488,7 +18048,7 @@
       </p:sp>
       <p:sp>
         <p:nvSpPr>
-          <p:cNvPr id="22" name="TextBox 21"/>
+          <p:cNvPr id="20" name="TextBox 19"/>
           <p:cNvSpPr txBox="1"/>
           <p:nvPr/>
         </p:nvSpPr>
@@ -23786,7 +23346,7 @@
                 </a:solidFill>
                 <a:latin typeface="Arial"/>
               </a:rPr>
-              <a:t>Sealed until gate G-12</a:t>
+              <a:t>Sealed until week 11</a:t>
             </a:r>
           </a:p>
         </p:txBody>

--- a/deliverables/review-2/semantic-communication-second-review.pptx
+++ b/deliverables/review-2/semantic-communication-second-review.pptx
@@ -4251,7 +4251,7 @@
                 </a:solidFill>
                 <a:latin typeface="Arial"/>
               </a:rPr>
-              <a:t>The control that keeps the comparison honest</a:t>
+              <a:t>Training across signal strengths instead of one</a:t>
             </a:r>
           </a:p>
         </p:txBody>
@@ -4331,14 +4331,14 @@
                 </a:solidFill>
                 <a:latin typeface="Arial"/>
               </a:rPr>
-              <a:t>A JPEG image is an easy thing to beat. This arm is harder, and it is the one worth reporting.</a:t>
+              <a:t>Picking the training signal strength at random each time lifts the whole weak end of the line.</a:t>
             </a:r>
           </a:p>
         </p:txBody>
       </p:sp>
       <p:pic>
         <p:nvPicPr>
-          <p:cNvPr id="5" name="Picture 4" descr="05_task_aware_digital.png"/>
+          <p:cNvPr id="5" name="Picture 4" descr="04_training_robustness.png"/>
           <p:cNvPicPr>
             <a:picLocks noChangeAspect="1"/>
           </p:cNvPicPr>
@@ -4352,8 +4352,8 @@
         </p:blipFill>
         <p:spPr>
           <a:xfrm>
-            <a:off x="3074323" y="1645920"/>
-            <a:ext cx="6043048" cy="3054095"/>
+            <a:off x="3237160" y="1645920"/>
+            <a:ext cx="5717374" cy="2889504"/>
           </a:xfrm>
           <a:prstGeom prst="rect">
             <a:avLst/>
@@ -4362,22 +4362,67 @@
       </p:pic>
       <p:sp>
         <p:nvSpPr>
-          <p:cNvPr id="6" name="TextBox 5"/>
-          <p:cNvSpPr txBox="1"/>
-          <p:nvPr/>
-        </p:nvSpPr>
-        <p:spPr>
-          <a:xfrm>
-            <a:off x="658368" y="4864608"/>
-            <a:ext cx="1828800" cy="274320"/>
-          </a:xfrm>
-          <a:prstGeom prst="rect">
-            <a:avLst/>
-          </a:prstGeom>
-          <a:noFill/>
-        </p:spPr>
-        <p:txBody>
-          <a:bodyPr wrap="square" lIns="45720" rIns="45720" anchor="t">
+          <p:cNvPr id="6" name="Rectangle 5"/>
+          <p:cNvSpPr/>
+          <p:nvPr/>
+        </p:nvSpPr>
+        <p:spPr>
+          <a:xfrm>
+            <a:off x="2011680" y="4700016"/>
+            <a:ext cx="7680960" cy="384048"/>
+          </a:xfrm>
+          <a:prstGeom prst="rect">
+            <a:avLst/>
+          </a:prstGeom>
+          <a:solidFill>
+            <a:srgbClr val="F3F3F3"/>
+          </a:solidFill>
+          <a:ln w="11430">
+            <a:solidFill>
+              <a:srgbClr val="D9D9D9"/>
+            </a:solidFill>
+          </a:ln>
+        </p:spPr>
+        <p:style>
+          <a:lnRef idx="1">
+            <a:schemeClr val="accent1"/>
+          </a:lnRef>
+          <a:fillRef idx="3">
+            <a:schemeClr val="accent1"/>
+          </a:fillRef>
+          <a:effectRef idx="2">
+            <a:schemeClr val="accent1"/>
+          </a:effectRef>
+          <a:fontRef idx="minor">
+            <a:schemeClr val="lt1"/>
+          </a:fontRef>
+        </p:style>
+        <p:txBody>
+          <a:bodyPr rtlCol="0" anchor="ctr"/>
+          <a:lstStyle/>
+          <a:p>
+            <a:pPr algn="ctr"/>
+          </a:p>
+        </p:txBody>
+      </p:sp>
+      <p:sp>
+        <p:nvSpPr>
+          <p:cNvPr id="7" name="TextBox 6"/>
+          <p:cNvSpPr txBox="1"/>
+          <p:nvPr/>
+        </p:nvSpPr>
+        <p:spPr>
+          <a:xfrm>
+            <a:off x="2139696" y="4800600"/>
+            <a:ext cx="2432304" cy="219456"/>
+          </a:xfrm>
+          <a:prstGeom prst="rect">
+            <a:avLst/>
+          </a:prstGeom>
+          <a:noFill/>
+        </p:spPr>
+        <p:txBody>
+          <a:bodyPr wrap="square" lIns="45720" rIns="45720" anchor="ctr">
             <a:spAutoFit/>
           </a:bodyPr>
           <a:lstStyle/>
@@ -4394,35 +4439,305 @@
               </a:spcAft>
             </a:pPr>
             <a:r>
-              <a:rPr sz="1200" b="1" i="0">
+              <a:rPr sz="1050" b="1" i="0">
                 <a:solidFill>
                   <a:srgbClr val="111111"/>
                 </a:solidFill>
                 <a:latin typeface="Arial"/>
               </a:rPr>
-              <a:t>What this arm does</a:t>
-            </a:r>
-          </a:p>
-        </p:txBody>
-      </p:sp>
-      <p:sp>
-        <p:nvSpPr>
-          <p:cNvPr id="7" name="TextBox 6"/>
-          <p:cNvSpPr txBox="1"/>
-          <p:nvPr/>
-        </p:nvSpPr>
-        <p:spPr>
-          <a:xfrm>
-            <a:off x="2578608" y="4846320"/>
-            <a:ext cx="8823960" cy="621792"/>
-          </a:xfrm>
-          <a:prstGeom prst="rect">
-            <a:avLst/>
-          </a:prstGeom>
-          <a:noFill/>
-        </p:spPr>
-        <p:txBody>
-          <a:bodyPr wrap="square" lIns="45720" rIns="45720" anchor="t">
+              <a:t>Training</a:t>
+            </a:r>
+          </a:p>
+        </p:txBody>
+      </p:sp>
+      <p:sp>
+        <p:nvSpPr>
+          <p:cNvPr id="8" name="TextBox 7"/>
+          <p:cNvSpPr txBox="1"/>
+          <p:nvPr/>
+        </p:nvSpPr>
+        <p:spPr>
+          <a:xfrm>
+            <a:off x="4791455" y="4800600"/>
+            <a:ext cx="786384" cy="219456"/>
+          </a:xfrm>
+          <a:prstGeom prst="rect">
+            <a:avLst/>
+          </a:prstGeom>
+          <a:noFill/>
+        </p:spPr>
+        <p:txBody>
+          <a:bodyPr wrap="square" lIns="45720" rIns="45720" anchor="ctr">
+            <a:spAutoFit/>
+          </a:bodyPr>
+          <a:lstStyle/>
+          <a:p>
+            <a:pPr algn="ctr">
+              <a:lnSpc>
+                <a:spcPct val="100000"/>
+              </a:lnSpc>
+              <a:spcBef>
+                <a:spcPts val="0"/>
+              </a:spcBef>
+              <a:spcAft>
+                <a:spcPts val="0"/>
+              </a:spcAft>
+            </a:pPr>
+            <a:r>
+              <a:rPr sz="1050" b="1" i="0">
+                <a:solidFill>
+                  <a:srgbClr val="111111"/>
+                </a:solidFill>
+                <a:latin typeface="Arial"/>
+              </a:rPr>
+              <a:t>−8 dB</a:t>
+            </a:r>
+          </a:p>
+        </p:txBody>
+      </p:sp>
+      <p:sp>
+        <p:nvSpPr>
+          <p:cNvPr id="9" name="TextBox 8"/>
+          <p:cNvSpPr txBox="1"/>
+          <p:nvPr/>
+        </p:nvSpPr>
+        <p:spPr>
+          <a:xfrm>
+            <a:off x="5797296" y="4800600"/>
+            <a:ext cx="786384" cy="219456"/>
+          </a:xfrm>
+          <a:prstGeom prst="rect">
+            <a:avLst/>
+          </a:prstGeom>
+          <a:noFill/>
+        </p:spPr>
+        <p:txBody>
+          <a:bodyPr wrap="square" lIns="45720" rIns="45720" anchor="ctr">
+            <a:spAutoFit/>
+          </a:bodyPr>
+          <a:lstStyle/>
+          <a:p>
+            <a:pPr algn="ctr">
+              <a:lnSpc>
+                <a:spcPct val="100000"/>
+              </a:lnSpc>
+              <a:spcBef>
+                <a:spcPts val="0"/>
+              </a:spcBef>
+              <a:spcAft>
+                <a:spcPts val="0"/>
+              </a:spcAft>
+            </a:pPr>
+            <a:r>
+              <a:rPr sz="1050" b="1" i="0">
+                <a:solidFill>
+                  <a:srgbClr val="111111"/>
+                </a:solidFill>
+                <a:latin typeface="Arial"/>
+              </a:rPr>
+              <a:t>−4 dB</a:t>
+            </a:r>
+          </a:p>
+        </p:txBody>
+      </p:sp>
+      <p:sp>
+        <p:nvSpPr>
+          <p:cNvPr id="10" name="TextBox 9"/>
+          <p:cNvSpPr txBox="1"/>
+          <p:nvPr/>
+        </p:nvSpPr>
+        <p:spPr>
+          <a:xfrm>
+            <a:off x="6803136" y="4800600"/>
+            <a:ext cx="786384" cy="219456"/>
+          </a:xfrm>
+          <a:prstGeom prst="rect">
+            <a:avLst/>
+          </a:prstGeom>
+          <a:noFill/>
+        </p:spPr>
+        <p:txBody>
+          <a:bodyPr wrap="square" lIns="45720" rIns="45720" anchor="ctr">
+            <a:spAutoFit/>
+          </a:bodyPr>
+          <a:lstStyle/>
+          <a:p>
+            <a:pPr algn="ctr">
+              <a:lnSpc>
+                <a:spcPct val="100000"/>
+              </a:lnSpc>
+              <a:spcBef>
+                <a:spcPts val="0"/>
+              </a:spcBef>
+              <a:spcAft>
+                <a:spcPts val="0"/>
+              </a:spcAft>
+            </a:pPr>
+            <a:r>
+              <a:rPr sz="1050" b="1" i="0">
+                <a:solidFill>
+                  <a:srgbClr val="111111"/>
+                </a:solidFill>
+                <a:latin typeface="Arial"/>
+              </a:rPr>
+              <a:t>0 dB</a:t>
+            </a:r>
+          </a:p>
+        </p:txBody>
+      </p:sp>
+      <p:sp>
+        <p:nvSpPr>
+          <p:cNvPr id="11" name="TextBox 10"/>
+          <p:cNvSpPr txBox="1"/>
+          <p:nvPr/>
+        </p:nvSpPr>
+        <p:spPr>
+          <a:xfrm>
+            <a:off x="7808976" y="4800600"/>
+            <a:ext cx="786384" cy="219456"/>
+          </a:xfrm>
+          <a:prstGeom prst="rect">
+            <a:avLst/>
+          </a:prstGeom>
+          <a:noFill/>
+        </p:spPr>
+        <p:txBody>
+          <a:bodyPr wrap="square" lIns="45720" rIns="45720" anchor="ctr">
+            <a:spAutoFit/>
+          </a:bodyPr>
+          <a:lstStyle/>
+          <a:p>
+            <a:pPr algn="ctr">
+              <a:lnSpc>
+                <a:spcPct val="100000"/>
+              </a:lnSpc>
+              <a:spcBef>
+                <a:spcPts val="0"/>
+              </a:spcBef>
+              <a:spcAft>
+                <a:spcPts val="0"/>
+              </a:spcAft>
+            </a:pPr>
+            <a:r>
+              <a:rPr sz="1050" b="1" i="0">
+                <a:solidFill>
+                  <a:srgbClr val="111111"/>
+                </a:solidFill>
+                <a:latin typeface="Arial"/>
+              </a:rPr>
+              <a:t>+9 dB</a:t>
+            </a:r>
+          </a:p>
+        </p:txBody>
+      </p:sp>
+      <p:sp>
+        <p:nvSpPr>
+          <p:cNvPr id="12" name="TextBox 11"/>
+          <p:cNvSpPr txBox="1"/>
+          <p:nvPr/>
+        </p:nvSpPr>
+        <p:spPr>
+          <a:xfrm>
+            <a:off x="8814816" y="4800600"/>
+            <a:ext cx="786384" cy="219456"/>
+          </a:xfrm>
+          <a:prstGeom prst="rect">
+            <a:avLst/>
+          </a:prstGeom>
+          <a:noFill/>
+        </p:spPr>
+        <p:txBody>
+          <a:bodyPr wrap="square" lIns="45720" rIns="45720" anchor="ctr">
+            <a:spAutoFit/>
+          </a:bodyPr>
+          <a:lstStyle/>
+          <a:p>
+            <a:pPr algn="ctr">
+              <a:lnSpc>
+                <a:spcPct val="100000"/>
+              </a:lnSpc>
+              <a:spcBef>
+                <a:spcPts val="0"/>
+              </a:spcBef>
+              <a:spcAft>
+                <a:spcPts val="0"/>
+              </a:spcAft>
+            </a:pPr>
+            <a:r>
+              <a:rPr sz="1050" b="1" i="0">
+                <a:solidFill>
+                  <a:srgbClr val="111111"/>
+                </a:solidFill>
+                <a:latin typeface="Arial"/>
+              </a:rPr>
+              <a:t>+18 dB</a:t>
+            </a:r>
+          </a:p>
+        </p:txBody>
+      </p:sp>
+      <p:sp>
+        <p:nvSpPr>
+          <p:cNvPr id="13" name="Rectangle 12"/>
+          <p:cNvSpPr/>
+          <p:nvPr/>
+        </p:nvSpPr>
+        <p:spPr>
+          <a:xfrm>
+            <a:off x="2011680" y="5084064"/>
+            <a:ext cx="7680960" cy="420624"/>
+          </a:xfrm>
+          <a:prstGeom prst="rect">
+            <a:avLst/>
+          </a:prstGeom>
+          <a:solidFill>
+            <a:srgbClr val="F3F3F3"/>
+          </a:solidFill>
+          <a:ln w="11430">
+            <a:solidFill>
+              <a:srgbClr val="D9D9D9"/>
+            </a:solidFill>
+          </a:ln>
+        </p:spPr>
+        <p:style>
+          <a:lnRef idx="1">
+            <a:schemeClr val="accent1"/>
+          </a:lnRef>
+          <a:fillRef idx="3">
+            <a:schemeClr val="accent1"/>
+          </a:fillRef>
+          <a:effectRef idx="2">
+            <a:schemeClr val="accent1"/>
+          </a:effectRef>
+          <a:fontRef idx="minor">
+            <a:schemeClr val="lt1"/>
+          </a:fontRef>
+        </p:style>
+        <p:txBody>
+          <a:bodyPr rtlCol="0" anchor="ctr"/>
+          <a:lstStyle/>
+          <a:p>
+            <a:pPr algn="ctr"/>
+          </a:p>
+        </p:txBody>
+      </p:sp>
+      <p:sp>
+        <p:nvSpPr>
+          <p:cNvPr id="14" name="TextBox 13"/>
+          <p:cNvSpPr txBox="1"/>
+          <p:nvPr/>
+        </p:nvSpPr>
+        <p:spPr>
+          <a:xfrm>
+            <a:off x="2139696" y="5184648"/>
+            <a:ext cx="2432304" cy="256032"/>
+          </a:xfrm>
+          <a:prstGeom prst="rect">
+            <a:avLst/>
+          </a:prstGeom>
+          <a:noFill/>
+        </p:spPr>
+        <p:txBody>
+          <a:bodyPr wrap="square" lIns="45720" rIns="45720" anchor="ctr">
             <a:spAutoFit/>
           </a:bodyPr>
           <a:lstStyle/>
@@ -4439,32 +4754,572 @@
               </a:spcAft>
             </a:pPr>
             <a:r>
+              <a:rPr sz="1150" b="1" i="0">
+                <a:solidFill>
+                  <a:srgbClr val="111111"/>
+                </a:solidFill>
+                <a:latin typeface="Arial"/>
+              </a:rPr>
+              <a:t>Random each time</a:t>
+            </a:r>
+          </a:p>
+        </p:txBody>
+      </p:sp>
+      <p:sp>
+        <p:nvSpPr>
+          <p:cNvPr id="15" name="TextBox 14"/>
+          <p:cNvSpPr txBox="1"/>
+          <p:nvPr/>
+        </p:nvSpPr>
+        <p:spPr>
+          <a:xfrm>
+            <a:off x="4791455" y="5184648"/>
+            <a:ext cx="786384" cy="256032"/>
+          </a:xfrm>
+          <a:prstGeom prst="rect">
+            <a:avLst/>
+          </a:prstGeom>
+          <a:noFill/>
+        </p:spPr>
+        <p:txBody>
+          <a:bodyPr wrap="square" lIns="45720" rIns="45720" anchor="ctr">
+            <a:spAutoFit/>
+          </a:bodyPr>
+          <a:lstStyle/>
+          <a:p>
+            <a:pPr algn="ctr">
+              <a:lnSpc>
+                <a:spcPct val="100000"/>
+              </a:lnSpc>
+              <a:spcBef>
+                <a:spcPts val="0"/>
+              </a:spcBef>
+              <a:spcAft>
+                <a:spcPts val="0"/>
+              </a:spcAft>
+            </a:pPr>
+            <a:r>
+              <a:rPr sz="1150" b="1" i="0">
+                <a:solidFill>
+                  <a:srgbClr val="111111"/>
+                </a:solidFill>
+                <a:latin typeface="Arial"/>
+              </a:rPr>
+              <a:t>77.0</a:t>
+            </a:r>
+          </a:p>
+        </p:txBody>
+      </p:sp>
+      <p:sp>
+        <p:nvSpPr>
+          <p:cNvPr id="16" name="TextBox 15"/>
+          <p:cNvSpPr txBox="1"/>
+          <p:nvPr/>
+        </p:nvSpPr>
+        <p:spPr>
+          <a:xfrm>
+            <a:off x="5797296" y="5184648"/>
+            <a:ext cx="786384" cy="256032"/>
+          </a:xfrm>
+          <a:prstGeom prst="rect">
+            <a:avLst/>
+          </a:prstGeom>
+          <a:noFill/>
+        </p:spPr>
+        <p:txBody>
+          <a:bodyPr wrap="square" lIns="45720" rIns="45720" anchor="ctr">
+            <a:spAutoFit/>
+          </a:bodyPr>
+          <a:lstStyle/>
+          <a:p>
+            <a:pPr algn="ctr">
+              <a:lnSpc>
+                <a:spcPct val="100000"/>
+              </a:lnSpc>
+              <a:spcBef>
+                <a:spcPts val="0"/>
+              </a:spcBef>
+              <a:spcAft>
+                <a:spcPts val="0"/>
+              </a:spcAft>
+            </a:pPr>
+            <a:r>
+              <a:rPr sz="1150" b="1" i="0">
+                <a:solidFill>
+                  <a:srgbClr val="111111"/>
+                </a:solidFill>
+                <a:latin typeface="Arial"/>
+              </a:rPr>
+              <a:t>82.4</a:t>
+            </a:r>
+          </a:p>
+        </p:txBody>
+      </p:sp>
+      <p:sp>
+        <p:nvSpPr>
+          <p:cNvPr id="17" name="TextBox 16"/>
+          <p:cNvSpPr txBox="1"/>
+          <p:nvPr/>
+        </p:nvSpPr>
+        <p:spPr>
+          <a:xfrm>
+            <a:off x="6803136" y="5184648"/>
+            <a:ext cx="786384" cy="256032"/>
+          </a:xfrm>
+          <a:prstGeom prst="rect">
+            <a:avLst/>
+          </a:prstGeom>
+          <a:noFill/>
+        </p:spPr>
+        <p:txBody>
+          <a:bodyPr wrap="square" lIns="45720" rIns="45720" anchor="ctr">
+            <a:spAutoFit/>
+          </a:bodyPr>
+          <a:lstStyle/>
+          <a:p>
+            <a:pPr algn="ctr">
+              <a:lnSpc>
+                <a:spcPct val="100000"/>
+              </a:lnSpc>
+              <a:spcBef>
+                <a:spcPts val="0"/>
+              </a:spcBef>
+              <a:spcAft>
+                <a:spcPts val="0"/>
+              </a:spcAft>
+            </a:pPr>
+            <a:r>
+              <a:rPr sz="1150" b="1" i="0">
+                <a:solidFill>
+                  <a:srgbClr val="111111"/>
+                </a:solidFill>
+                <a:latin typeface="Arial"/>
+              </a:rPr>
+              <a:t>83.0</a:t>
+            </a:r>
+          </a:p>
+        </p:txBody>
+      </p:sp>
+      <p:sp>
+        <p:nvSpPr>
+          <p:cNvPr id="18" name="TextBox 17"/>
+          <p:cNvSpPr txBox="1"/>
+          <p:nvPr/>
+        </p:nvSpPr>
+        <p:spPr>
+          <a:xfrm>
+            <a:off x="7808976" y="5184648"/>
+            <a:ext cx="786384" cy="256032"/>
+          </a:xfrm>
+          <a:prstGeom prst="rect">
+            <a:avLst/>
+          </a:prstGeom>
+          <a:noFill/>
+        </p:spPr>
+        <p:txBody>
+          <a:bodyPr wrap="square" lIns="45720" rIns="45720" anchor="ctr">
+            <a:spAutoFit/>
+          </a:bodyPr>
+          <a:lstStyle/>
+          <a:p>
+            <a:pPr algn="ctr">
+              <a:lnSpc>
+                <a:spcPct val="100000"/>
+              </a:lnSpc>
+              <a:spcBef>
+                <a:spcPts val="0"/>
+              </a:spcBef>
+              <a:spcAft>
+                <a:spcPts val="0"/>
+              </a:spcAft>
+            </a:pPr>
+            <a:r>
+              <a:rPr sz="1150" b="1" i="0">
+                <a:solidFill>
+                  <a:srgbClr val="111111"/>
+                </a:solidFill>
+                <a:latin typeface="Arial"/>
+              </a:rPr>
+              <a:t>84.1</a:t>
+            </a:r>
+          </a:p>
+        </p:txBody>
+      </p:sp>
+      <p:sp>
+        <p:nvSpPr>
+          <p:cNvPr id="19" name="TextBox 18"/>
+          <p:cNvSpPr txBox="1"/>
+          <p:nvPr/>
+        </p:nvSpPr>
+        <p:spPr>
+          <a:xfrm>
+            <a:off x="8814816" y="5184648"/>
+            <a:ext cx="786384" cy="256032"/>
+          </a:xfrm>
+          <a:prstGeom prst="rect">
+            <a:avLst/>
+          </a:prstGeom>
+          <a:noFill/>
+        </p:spPr>
+        <p:txBody>
+          <a:bodyPr wrap="square" lIns="45720" rIns="45720" anchor="ctr">
+            <a:spAutoFit/>
+          </a:bodyPr>
+          <a:lstStyle/>
+          <a:p>
+            <a:pPr algn="ctr">
+              <a:lnSpc>
+                <a:spcPct val="100000"/>
+              </a:lnSpc>
+              <a:spcBef>
+                <a:spcPts val="0"/>
+              </a:spcBef>
+              <a:spcAft>
+                <a:spcPts val="0"/>
+              </a:spcAft>
+            </a:pPr>
+            <a:r>
+              <a:rPr sz="1150" b="1" i="0">
+                <a:solidFill>
+                  <a:srgbClr val="111111"/>
+                </a:solidFill>
+                <a:latin typeface="Arial"/>
+              </a:rPr>
+              <a:t>83.9</a:t>
+            </a:r>
+          </a:p>
+        </p:txBody>
+      </p:sp>
+      <p:sp>
+        <p:nvSpPr>
+          <p:cNvPr id="20" name="Rectangle 19"/>
+          <p:cNvSpPr/>
+          <p:nvPr/>
+        </p:nvSpPr>
+        <p:spPr>
+          <a:xfrm>
+            <a:off x="2011680" y="5504688"/>
+            <a:ext cx="7680960" cy="420624"/>
+          </a:xfrm>
+          <a:prstGeom prst="rect">
+            <a:avLst/>
+          </a:prstGeom>
+          <a:solidFill>
+            <a:srgbClr val="FFFFFF"/>
+          </a:solidFill>
+          <a:ln w="11430">
+            <a:solidFill>
+              <a:srgbClr val="D9D9D9"/>
+            </a:solidFill>
+          </a:ln>
+        </p:spPr>
+        <p:style>
+          <a:lnRef idx="1">
+            <a:schemeClr val="accent1"/>
+          </a:lnRef>
+          <a:fillRef idx="3">
+            <a:schemeClr val="accent1"/>
+          </a:fillRef>
+          <a:effectRef idx="2">
+            <a:schemeClr val="accent1"/>
+          </a:effectRef>
+          <a:fontRef idx="minor">
+            <a:schemeClr val="lt1"/>
+          </a:fontRef>
+        </p:style>
+        <p:txBody>
+          <a:bodyPr rtlCol="0" anchor="ctr"/>
+          <a:lstStyle/>
+          <a:p>
+            <a:pPr algn="ctr"/>
+          </a:p>
+        </p:txBody>
+      </p:sp>
+      <p:sp>
+        <p:nvSpPr>
+          <p:cNvPr id="21" name="TextBox 20"/>
+          <p:cNvSpPr txBox="1"/>
+          <p:nvPr/>
+        </p:nvSpPr>
+        <p:spPr>
+          <a:xfrm>
+            <a:off x="2139696" y="5605272"/>
+            <a:ext cx="2432304" cy="256032"/>
+          </a:xfrm>
+          <a:prstGeom prst="rect">
+            <a:avLst/>
+          </a:prstGeom>
+          <a:noFill/>
+        </p:spPr>
+        <p:txBody>
+          <a:bodyPr wrap="square" lIns="45720" rIns="45720" anchor="ctr">
+            <a:spAutoFit/>
+          </a:bodyPr>
+          <a:lstStyle/>
+          <a:p>
+            <a:pPr algn="l">
+              <a:lnSpc>
+                <a:spcPct val="100000"/>
+              </a:lnSpc>
+              <a:spcBef>
+                <a:spcPts val="0"/>
+              </a:spcBef>
+              <a:spcAft>
+                <a:spcPts val="0"/>
+              </a:spcAft>
+            </a:pPr>
+            <a:r>
               <a:rPr sz="1150" b="0" i="0">
                 <a:solidFill>
                   <a:srgbClr val="555555"/>
                 </a:solidFill>
                 <a:latin typeface="Arial"/>
               </a:rPr>
-              <a:t>Instead of a JPEG image it sends the learned features themselves, through the same error-correction code and radio settings, using the same 12,800 uses of the radio. It separates “knows the task” from “codes both at once”.</a:t>
+              <a:t>One fixed strength</a:t>
+            </a:r>
+          </a:p>
+        </p:txBody>
+      </p:sp>
+      <p:sp>
+        <p:nvSpPr>
+          <p:cNvPr id="22" name="TextBox 21"/>
+          <p:cNvSpPr txBox="1"/>
+          <p:nvPr/>
+        </p:nvSpPr>
+        <p:spPr>
+          <a:xfrm>
+            <a:off x="4791455" y="5605272"/>
+            <a:ext cx="786384" cy="256032"/>
+          </a:xfrm>
+          <a:prstGeom prst="rect">
+            <a:avLst/>
+          </a:prstGeom>
+          <a:noFill/>
+        </p:spPr>
+        <p:txBody>
+          <a:bodyPr wrap="square" lIns="45720" rIns="45720" anchor="ctr">
+            <a:spAutoFit/>
+          </a:bodyPr>
+          <a:lstStyle/>
+          <a:p>
+            <a:pPr algn="ctr">
+              <a:lnSpc>
+                <a:spcPct val="100000"/>
+              </a:lnSpc>
+              <a:spcBef>
+                <a:spcPts val="0"/>
+              </a:spcBef>
+              <a:spcAft>
+                <a:spcPts val="0"/>
+              </a:spcAft>
+            </a:pPr>
+            <a:r>
+              <a:rPr sz="1150" b="0" i="0">
+                <a:solidFill>
+                  <a:srgbClr val="555555"/>
+                </a:solidFill>
+                <a:latin typeface="Arial"/>
+              </a:rPr>
+              <a:t>72.8</a:t>
+            </a:r>
+          </a:p>
+        </p:txBody>
+      </p:sp>
+      <p:sp>
+        <p:nvSpPr>
+          <p:cNvPr id="23" name="TextBox 22"/>
+          <p:cNvSpPr txBox="1"/>
+          <p:nvPr/>
+        </p:nvSpPr>
+        <p:spPr>
+          <a:xfrm>
+            <a:off x="5797296" y="5605272"/>
+            <a:ext cx="786384" cy="256032"/>
+          </a:xfrm>
+          <a:prstGeom prst="rect">
+            <a:avLst/>
+          </a:prstGeom>
+          <a:noFill/>
+        </p:spPr>
+        <p:txBody>
+          <a:bodyPr wrap="square" lIns="45720" rIns="45720" anchor="ctr">
+            <a:spAutoFit/>
+          </a:bodyPr>
+          <a:lstStyle/>
+          <a:p>
+            <a:pPr algn="ctr">
+              <a:lnSpc>
+                <a:spcPct val="100000"/>
+              </a:lnSpc>
+              <a:spcBef>
+                <a:spcPts val="0"/>
+              </a:spcBef>
+              <a:spcAft>
+                <a:spcPts val="0"/>
+              </a:spcAft>
+            </a:pPr>
+            <a:r>
+              <a:rPr sz="1150" b="0" i="0">
+                <a:solidFill>
+                  <a:srgbClr val="555555"/>
+                </a:solidFill>
+                <a:latin typeface="Arial"/>
+              </a:rPr>
+              <a:t>79.4</a:t>
+            </a:r>
+          </a:p>
+        </p:txBody>
+      </p:sp>
+      <p:sp>
+        <p:nvSpPr>
+          <p:cNvPr id="24" name="TextBox 23"/>
+          <p:cNvSpPr txBox="1"/>
+          <p:nvPr/>
+        </p:nvSpPr>
+        <p:spPr>
+          <a:xfrm>
+            <a:off x="6803136" y="5605272"/>
+            <a:ext cx="786384" cy="256032"/>
+          </a:xfrm>
+          <a:prstGeom prst="rect">
+            <a:avLst/>
+          </a:prstGeom>
+          <a:noFill/>
+        </p:spPr>
+        <p:txBody>
+          <a:bodyPr wrap="square" lIns="45720" rIns="45720" anchor="ctr">
+            <a:spAutoFit/>
+          </a:bodyPr>
+          <a:lstStyle/>
+          <a:p>
+            <a:pPr algn="ctr">
+              <a:lnSpc>
+                <a:spcPct val="100000"/>
+              </a:lnSpc>
+              <a:spcBef>
+                <a:spcPts val="0"/>
+              </a:spcBef>
+              <a:spcAft>
+                <a:spcPts val="0"/>
+              </a:spcAft>
+            </a:pPr>
+            <a:r>
+              <a:rPr sz="1150" b="0" i="0">
+                <a:solidFill>
+                  <a:srgbClr val="555555"/>
+                </a:solidFill>
+                <a:latin typeface="Arial"/>
+              </a:rPr>
+              <a:t>81.2</a:t>
+            </a:r>
+          </a:p>
+        </p:txBody>
+      </p:sp>
+      <p:sp>
+        <p:nvSpPr>
+          <p:cNvPr id="25" name="TextBox 24"/>
+          <p:cNvSpPr txBox="1"/>
+          <p:nvPr/>
+        </p:nvSpPr>
+        <p:spPr>
+          <a:xfrm>
+            <a:off x="7808976" y="5605272"/>
+            <a:ext cx="786384" cy="256032"/>
+          </a:xfrm>
+          <a:prstGeom prst="rect">
+            <a:avLst/>
+          </a:prstGeom>
+          <a:noFill/>
+        </p:spPr>
+        <p:txBody>
+          <a:bodyPr wrap="square" lIns="45720" rIns="45720" anchor="ctr">
+            <a:spAutoFit/>
+          </a:bodyPr>
+          <a:lstStyle/>
+          <a:p>
+            <a:pPr algn="ctr">
+              <a:lnSpc>
+                <a:spcPct val="100000"/>
+              </a:lnSpc>
+              <a:spcBef>
+                <a:spcPts val="0"/>
+              </a:spcBef>
+              <a:spcAft>
+                <a:spcPts val="0"/>
+              </a:spcAft>
+            </a:pPr>
+            <a:r>
+              <a:rPr sz="1150" b="0" i="0">
+                <a:solidFill>
+                  <a:srgbClr val="555555"/>
+                </a:solidFill>
+                <a:latin typeface="Arial"/>
+              </a:rPr>
+              <a:t>83.8</a:t>
+            </a:r>
+          </a:p>
+        </p:txBody>
+      </p:sp>
+      <p:sp>
+        <p:nvSpPr>
+          <p:cNvPr id="26" name="TextBox 25"/>
+          <p:cNvSpPr txBox="1"/>
+          <p:nvPr/>
+        </p:nvSpPr>
+        <p:spPr>
+          <a:xfrm>
+            <a:off x="8814816" y="5605272"/>
+            <a:ext cx="786384" cy="256032"/>
+          </a:xfrm>
+          <a:prstGeom prst="rect">
+            <a:avLst/>
+          </a:prstGeom>
+          <a:noFill/>
+        </p:spPr>
+        <p:txBody>
+          <a:bodyPr wrap="square" lIns="45720" rIns="45720" anchor="ctr">
+            <a:spAutoFit/>
+          </a:bodyPr>
+          <a:lstStyle/>
+          <a:p>
+            <a:pPr algn="ctr">
+              <a:lnSpc>
+                <a:spcPct val="100000"/>
+              </a:lnSpc>
+              <a:spcBef>
+                <a:spcPts val="0"/>
+              </a:spcBef>
+              <a:spcAft>
+                <a:spcPts val="0"/>
+              </a:spcAft>
+            </a:pPr>
+            <a:r>
+              <a:rPr sz="1150" b="0" i="0">
+                <a:solidFill>
+                  <a:srgbClr val="555555"/>
+                </a:solidFill>
+                <a:latin typeface="Arial"/>
+              </a:rPr>
+              <a:t>83.4</a:t>
             </a:r>
           </a:p>
         </p:txBody>
       </p:sp>
       <p:cxnSp>
         <p:nvCxnSpPr>
-          <p:cNvPr id="8" name="Connector 7"/>
+          <p:cNvPr id="27" name="Connector 26"/>
           <p:cNvCxnSpPr/>
           <p:nvPr/>
         </p:nvCxnSpPr>
         <p:spPr>
           <a:xfrm>
-            <a:off x="658368" y="5413248"/>
-            <a:ext cx="10744200" cy="0"/>
+            <a:off x="4663440" y="4700016"/>
+            <a:ext cx="0" cy="1225296"/>
           </a:xfrm>
           <a:prstGeom prst="line">
             <a:avLst/>
           </a:prstGeom>
-          <a:ln w="6350">
+          <a:ln w="8890">
             <a:solidFill>
               <a:srgbClr val="D9D9D9"/>
             </a:solidFill>
@@ -4485,106 +5340,16 @@
           </a:fontRef>
         </p:style>
       </p:cxnSp>
-      <p:sp>
-        <p:nvSpPr>
-          <p:cNvPr id="9" name="TextBox 8"/>
-          <p:cNvSpPr txBox="1"/>
-          <p:nvPr/>
-        </p:nvSpPr>
-        <p:spPr>
-          <a:xfrm>
-            <a:off x="658368" y="5541264"/>
-            <a:ext cx="1828800" cy="274320"/>
-          </a:xfrm>
-          <a:prstGeom prst="rect">
-            <a:avLst/>
-          </a:prstGeom>
-          <a:noFill/>
-        </p:spPr>
-        <p:txBody>
-          <a:bodyPr wrap="square" lIns="45720" rIns="45720" anchor="t">
-            <a:spAutoFit/>
-          </a:bodyPr>
-          <a:lstStyle/>
-          <a:p>
-            <a:pPr algn="l">
-              <a:lnSpc>
-                <a:spcPct val="100000"/>
-              </a:lnSpc>
-              <a:spcBef>
-                <a:spcPts val="0"/>
-              </a:spcBef>
-              <a:spcAft>
-                <a:spcPts val="0"/>
-              </a:spcAft>
-            </a:pPr>
-            <a:r>
-              <a:rPr sz="1200" b="1" i="0">
-                <a:solidFill>
-                  <a:srgbClr val="111111"/>
-                </a:solidFill>
-                <a:latin typeface="Arial"/>
-              </a:rPr>
-              <a:t>What it settles</a:t>
-            </a:r>
-          </a:p>
-        </p:txBody>
-      </p:sp>
-      <p:sp>
-        <p:nvSpPr>
-          <p:cNvPr id="10" name="TextBox 9"/>
-          <p:cNvSpPr txBox="1"/>
-          <p:nvPr/>
-        </p:nvSpPr>
-        <p:spPr>
-          <a:xfrm>
-            <a:off x="2578608" y="5522976"/>
-            <a:ext cx="8823960" cy="621792"/>
-          </a:xfrm>
-          <a:prstGeom prst="rect">
-            <a:avLst/>
-          </a:prstGeom>
-          <a:noFill/>
-        </p:spPr>
-        <p:txBody>
-          <a:bodyPr wrap="square" lIns="45720" rIns="45720" anchor="t">
-            <a:spAutoFit/>
-          </a:bodyPr>
-          <a:lstStyle/>
-          <a:p>
-            <a:pPr algn="l">
-              <a:lnSpc>
-                <a:spcPct val="100000"/>
-              </a:lnSpc>
-              <a:spcBef>
-                <a:spcPts val="0"/>
-              </a:spcBef>
-              <a:spcAft>
-                <a:spcPts val="0"/>
-              </a:spcAft>
-            </a:pPr>
-            <a:r>
-              <a:rPr sz="1150" b="0" i="0">
-                <a:solidFill>
-                  <a:srgbClr val="555555"/>
-                </a:solidFill>
-                <a:latin typeface="Arial"/>
-              </a:rPr>
-              <a:t>It holds 82.0% at every strength from −4 dB up. Sending learned features digitally is strong once pictures get through, so the weak-signal gap is about failed deliveries as much as representation.</a:t>
-            </a:r>
-          </a:p>
-        </p:txBody>
-      </p:sp>
       <p:cxnSp>
         <p:nvCxnSpPr>
-          <p:cNvPr id="11" name="Connector 10"/>
+          <p:cNvPr id="28" name="Connector 27"/>
           <p:cNvCxnSpPr/>
           <p:nvPr/>
         </p:nvCxnSpPr>
         <p:spPr>
           <a:xfrm>
-            <a:off x="566928" y="6419088"/>
-            <a:ext cx="11018520" cy="0"/>
+            <a:off x="5669280" y="4700016"/>
+            <a:ext cx="0" cy="1225296"/>
           </a:xfrm>
           <a:prstGeom prst="line">
             <a:avLst/>
@@ -4610,9 +5375,149 @@
           </a:fontRef>
         </p:style>
       </p:cxnSp>
-      <p:sp>
-        <p:nvSpPr>
-          <p:cNvPr id="12" name="TextBox 11"/>
+      <p:cxnSp>
+        <p:nvCxnSpPr>
+          <p:cNvPr id="29" name="Connector 28"/>
+          <p:cNvCxnSpPr/>
+          <p:nvPr/>
+        </p:nvCxnSpPr>
+        <p:spPr>
+          <a:xfrm>
+            <a:off x="6675120" y="4700016"/>
+            <a:ext cx="0" cy="1225296"/>
+          </a:xfrm>
+          <a:prstGeom prst="line">
+            <a:avLst/>
+          </a:prstGeom>
+          <a:ln w="8890">
+            <a:solidFill>
+              <a:srgbClr val="D9D9D9"/>
+            </a:solidFill>
+          </a:ln>
+        </p:spPr>
+        <p:style>
+          <a:lnRef idx="2">
+            <a:schemeClr val="accent1"/>
+          </a:lnRef>
+          <a:fillRef idx="0">
+            <a:schemeClr val="accent1"/>
+          </a:fillRef>
+          <a:effectRef idx="1">
+            <a:schemeClr val="accent1"/>
+          </a:effectRef>
+          <a:fontRef idx="minor">
+            <a:schemeClr val="tx1"/>
+          </a:fontRef>
+        </p:style>
+      </p:cxnSp>
+      <p:cxnSp>
+        <p:nvCxnSpPr>
+          <p:cNvPr id="30" name="Connector 29"/>
+          <p:cNvCxnSpPr/>
+          <p:nvPr/>
+        </p:nvCxnSpPr>
+        <p:spPr>
+          <a:xfrm>
+            <a:off x="7680960" y="4700016"/>
+            <a:ext cx="0" cy="1225296"/>
+          </a:xfrm>
+          <a:prstGeom prst="line">
+            <a:avLst/>
+          </a:prstGeom>
+          <a:ln w="8890">
+            <a:solidFill>
+              <a:srgbClr val="D9D9D9"/>
+            </a:solidFill>
+          </a:ln>
+        </p:spPr>
+        <p:style>
+          <a:lnRef idx="2">
+            <a:schemeClr val="accent1"/>
+          </a:lnRef>
+          <a:fillRef idx="0">
+            <a:schemeClr val="accent1"/>
+          </a:fillRef>
+          <a:effectRef idx="1">
+            <a:schemeClr val="accent1"/>
+          </a:effectRef>
+          <a:fontRef idx="minor">
+            <a:schemeClr val="tx1"/>
+          </a:fontRef>
+        </p:style>
+      </p:cxnSp>
+      <p:cxnSp>
+        <p:nvCxnSpPr>
+          <p:cNvPr id="31" name="Connector 30"/>
+          <p:cNvCxnSpPr/>
+          <p:nvPr/>
+        </p:nvCxnSpPr>
+        <p:spPr>
+          <a:xfrm>
+            <a:off x="8686800" y="4700016"/>
+            <a:ext cx="0" cy="1225296"/>
+          </a:xfrm>
+          <a:prstGeom prst="line">
+            <a:avLst/>
+          </a:prstGeom>
+          <a:ln w="8890">
+            <a:solidFill>
+              <a:srgbClr val="D9D9D9"/>
+            </a:solidFill>
+          </a:ln>
+        </p:spPr>
+        <p:style>
+          <a:lnRef idx="2">
+            <a:schemeClr val="accent1"/>
+          </a:lnRef>
+          <a:fillRef idx="0">
+            <a:schemeClr val="accent1"/>
+          </a:fillRef>
+          <a:effectRef idx="1">
+            <a:schemeClr val="accent1"/>
+          </a:effectRef>
+          <a:fontRef idx="minor">
+            <a:schemeClr val="tx1"/>
+          </a:fontRef>
+        </p:style>
+      </p:cxnSp>
+      <p:cxnSp>
+        <p:nvCxnSpPr>
+          <p:cNvPr id="32" name="Connector 31"/>
+          <p:cNvCxnSpPr/>
+          <p:nvPr/>
+        </p:nvCxnSpPr>
+        <p:spPr>
+          <a:xfrm>
+            <a:off x="566928" y="6419088"/>
+            <a:ext cx="11018520" cy="0"/>
+          </a:xfrm>
+          <a:prstGeom prst="line">
+            <a:avLst/>
+          </a:prstGeom>
+          <a:ln w="8890">
+            <a:solidFill>
+              <a:srgbClr val="D9D9D9"/>
+            </a:solidFill>
+          </a:ln>
+        </p:spPr>
+        <p:style>
+          <a:lnRef idx="2">
+            <a:schemeClr val="accent1"/>
+          </a:lnRef>
+          <a:fillRef idx="0">
+            <a:schemeClr val="accent1"/>
+          </a:fillRef>
+          <a:effectRef idx="1">
+            <a:schemeClr val="accent1"/>
+          </a:effectRef>
+          <a:fontRef idx="minor">
+            <a:schemeClr val="tx1"/>
+          </a:fontRef>
+        </p:style>
+      </p:cxnSp>
+      <p:sp>
+        <p:nvSpPr>
+          <p:cNvPr id="33" name="TextBox 32"/>
           <p:cNvSpPr txBox="1"/>
           <p:nvPr/>
         </p:nvSpPr>
@@ -4657,7 +5562,7 @@
       </p:sp>
       <p:sp>
         <p:nvSpPr>
-          <p:cNvPr id="13" name="TextBox 12"/>
+          <p:cNvPr id="34" name="TextBox 33"/>
           <p:cNvSpPr txBox="1"/>
           <p:nvPr/>
         </p:nvSpPr>
@@ -4695,14 +5600,14 @@
                 </a:solidFill>
                 <a:latin typeface="Arial"/>
               </a:rPr>
-              <a:t>Same radio time, same error-correction code, same modulation</a:t>
-            </a:r>
-          </a:p>
-        </p:txBody>
-      </p:sp>
-      <p:sp>
-        <p:nvSpPr>
-          <p:cNvPr id="14" name="TextBox 13"/>
+              <a:t>Two separately trained versions of the learned system</a:t>
+            </a:r>
+          </a:p>
+        </p:txBody>
+      </p:sp>
+      <p:sp>
+        <p:nvSpPr>
+          <p:cNvPr id="35" name="TextBox 34"/>
           <p:cNvSpPr txBox="1"/>
           <p:nvPr/>
         </p:nvSpPr>
@@ -4811,7 +5716,7 @@
                 </a:solidFill>
                 <a:latin typeface="Arial"/>
               </a:rPr>
-              <a:t>Keeping the signal peaks from getting too tall</a:t>
+              <a:t>The control that keeps the comparison honest</a:t>
             </a:r>
           </a:p>
         </p:txBody>
@@ -4891,14 +5796,14 @@
                 </a:solidFill>
                 <a:latin typeface="Arial"/>
               </a:rPr>
-              <a:t>A real transmitter needs a limit on signal peaks, so we trained a second model under one.</a:t>
+              <a:t>A JPEG image is an easy thing to beat. This system is harder, and it is the one worth reporting.</a:t>
             </a:r>
           </a:p>
         </p:txBody>
       </p:sp>
       <p:pic>
         <p:nvPicPr>
-          <p:cNvPr id="5" name="Picture 4" descr="06_papr_tradeoff.png"/>
+          <p:cNvPr id="5" name="Picture 4" descr="05_task_aware_digital.png"/>
           <p:cNvPicPr>
             <a:picLocks noChangeAspect="1"/>
           </p:cNvPicPr>
@@ -4912,8 +5817,8 @@
         </p:blipFill>
         <p:spPr>
           <a:xfrm>
-            <a:off x="3050788" y="1645920"/>
-            <a:ext cx="6090118" cy="2468880"/>
+            <a:off x="3074323" y="1645920"/>
+            <a:ext cx="6043048" cy="3054095"/>
           </a:xfrm>
           <a:prstGeom prst="rect">
             <a:avLst/>
@@ -4928,8 +5833,8 @@
         </p:nvSpPr>
         <p:spPr>
           <a:xfrm>
-            <a:off x="658368" y="4224528"/>
-            <a:ext cx="10744200" cy="274320"/>
+            <a:off x="658368" y="4864608"/>
+            <a:ext cx="1828800" cy="274320"/>
           </a:xfrm>
           <a:prstGeom prst="rect">
             <a:avLst/>
@@ -4954,707 +5859,77 @@
               </a:spcAft>
             </a:pPr>
             <a:r>
-              <a:rPr sz="1100" b="0" i="1">
+              <a:rPr sz="1200" b="1" i="0">
+                <a:solidFill>
+                  <a:srgbClr val="111111"/>
+                </a:solidFill>
+                <a:latin typeface="Arial"/>
+              </a:rPr>
+              <a:t>What this system does</a:t>
+            </a:r>
+          </a:p>
+        </p:txBody>
+      </p:sp>
+      <p:sp>
+        <p:nvSpPr>
+          <p:cNvPr id="7" name="TextBox 6"/>
+          <p:cNvSpPr txBox="1"/>
+          <p:nvPr/>
+        </p:nvSpPr>
+        <p:spPr>
+          <a:xfrm>
+            <a:off x="2578608" y="4846320"/>
+            <a:ext cx="8823960" cy="621792"/>
+          </a:xfrm>
+          <a:prstGeom prst="rect">
+            <a:avLst/>
+          </a:prstGeom>
+          <a:noFill/>
+        </p:spPr>
+        <p:txBody>
+          <a:bodyPr wrap="square" lIns="45720" rIns="45720" anchor="t">
+            <a:spAutoFit/>
+          </a:bodyPr>
+          <a:lstStyle/>
+          <a:p>
+            <a:pPr algn="l">
+              <a:lnSpc>
+                <a:spcPct val="100000"/>
+              </a:lnSpc>
+              <a:spcBef>
+                <a:spcPts val="0"/>
+              </a:spcBef>
+              <a:spcAft>
+                <a:spcPts val="0"/>
+              </a:spcAft>
+            </a:pPr>
+            <a:r>
+              <a:rPr sz="1150" b="0" i="0">
                 <a:solidFill>
                   <a:srgbClr val="555555"/>
                 </a:solidFill>
                 <a:latin typeface="Arial"/>
               </a:rPr>
-              <a:t>“Peak-to-average power ratio” = how much taller the tallest spike is than the average.</a:t>
-            </a:r>
-          </a:p>
-        </p:txBody>
-      </p:sp>
-      <p:sp>
-        <p:nvSpPr>
-          <p:cNvPr id="7" name="Rectangle 6"/>
-          <p:cNvSpPr/>
-          <p:nvPr/>
-        </p:nvSpPr>
-        <p:spPr>
-          <a:xfrm>
-            <a:off x="1463040" y="4590288"/>
-            <a:ext cx="8321040" cy="384048"/>
-          </a:xfrm>
-          <a:prstGeom prst="rect">
-            <a:avLst/>
-          </a:prstGeom>
-          <a:solidFill>
-            <a:srgbClr val="F3F3F3"/>
-          </a:solidFill>
-          <a:ln w="11430">
-            <a:solidFill>
-              <a:srgbClr val="D9D9D9"/>
-            </a:solidFill>
-          </a:ln>
-        </p:spPr>
-        <p:style>
-          <a:lnRef idx="1">
-            <a:schemeClr val="accent1"/>
-          </a:lnRef>
-          <a:fillRef idx="3">
-            <a:schemeClr val="accent1"/>
-          </a:fillRef>
-          <a:effectRef idx="2">
-            <a:schemeClr val="accent1"/>
-          </a:effectRef>
-          <a:fontRef idx="minor">
-            <a:schemeClr val="lt1"/>
-          </a:fontRef>
-        </p:style>
-        <p:txBody>
-          <a:bodyPr rtlCol="0" anchor="ctr"/>
-          <a:lstStyle/>
-          <a:p>
-            <a:pPr algn="ctr"/>
-          </a:p>
-        </p:txBody>
-      </p:sp>
-      <p:sp>
-        <p:nvSpPr>
-          <p:cNvPr id="8" name="TextBox 7"/>
-          <p:cNvSpPr txBox="1"/>
-          <p:nvPr/>
-        </p:nvSpPr>
-        <p:spPr>
-          <a:xfrm>
-            <a:off x="1591056" y="4690872"/>
-            <a:ext cx="2889504" cy="219456"/>
-          </a:xfrm>
-          <a:prstGeom prst="rect">
-            <a:avLst/>
-          </a:prstGeom>
-          <a:noFill/>
-        </p:spPr>
-        <p:txBody>
-          <a:bodyPr wrap="square" lIns="45720" rIns="45720" anchor="ctr">
-            <a:spAutoFit/>
-          </a:bodyPr>
-          <a:lstStyle/>
-          <a:p>
-            <a:pPr algn="l">
-              <a:lnSpc>
-                <a:spcPct val="100000"/>
-              </a:lnSpc>
-              <a:spcBef>
-                <a:spcPts val="0"/>
-              </a:spcBef>
-              <a:spcAft>
-                <a:spcPts val="0"/>
-              </a:spcAft>
-            </a:pPr>
-            <a:r>
-              <a:rPr sz="1050" b="1" i="0">
-                <a:solidFill>
-                  <a:srgbClr val="111111"/>
-                </a:solidFill>
-                <a:latin typeface="Arial"/>
-              </a:rPr>
-              <a:t>Model</a:t>
-            </a:r>
-          </a:p>
-        </p:txBody>
-      </p:sp>
-      <p:sp>
-        <p:nvSpPr>
-          <p:cNvPr id="9" name="TextBox 8"/>
-          <p:cNvSpPr txBox="1"/>
-          <p:nvPr/>
-        </p:nvSpPr>
-        <p:spPr>
-          <a:xfrm>
-            <a:off x="4700016" y="4690872"/>
-            <a:ext cx="1517904" cy="219456"/>
-          </a:xfrm>
-          <a:prstGeom prst="rect">
-            <a:avLst/>
-          </a:prstGeom>
-          <a:noFill/>
-        </p:spPr>
-        <p:txBody>
-          <a:bodyPr wrap="square" lIns="45720" rIns="45720" anchor="ctr">
-            <a:spAutoFit/>
-          </a:bodyPr>
-          <a:lstStyle/>
-          <a:p>
-            <a:pPr algn="ctr">
-              <a:lnSpc>
-                <a:spcPct val="100000"/>
-              </a:lnSpc>
-              <a:spcBef>
-                <a:spcPts val="0"/>
-              </a:spcBef>
-              <a:spcAft>
-                <a:spcPts val="0"/>
-              </a:spcAft>
-            </a:pPr>
-            <a:r>
-              <a:rPr sz="1050" b="1" i="0">
-                <a:solidFill>
-                  <a:srgbClr val="111111"/>
-                </a:solidFill>
-                <a:latin typeface="Arial"/>
-              </a:rPr>
-              <a:t>Tallest spike</a:t>
-            </a:r>
-          </a:p>
-        </p:txBody>
-      </p:sp>
-      <p:sp>
-        <p:nvSpPr>
-          <p:cNvPr id="10" name="TextBox 9"/>
-          <p:cNvSpPr txBox="1"/>
-          <p:nvPr/>
-        </p:nvSpPr>
-        <p:spPr>
-          <a:xfrm>
-            <a:off x="6437376" y="4690872"/>
-            <a:ext cx="1517904" cy="219456"/>
-          </a:xfrm>
-          <a:prstGeom prst="rect">
-            <a:avLst/>
-          </a:prstGeom>
-          <a:noFill/>
-        </p:spPr>
-        <p:txBody>
-          <a:bodyPr wrap="square" lIns="45720" rIns="45720" anchor="ctr">
-            <a:spAutoFit/>
-          </a:bodyPr>
-          <a:lstStyle/>
-          <a:p>
-            <a:pPr algn="ctr">
-              <a:lnSpc>
-                <a:spcPct val="100000"/>
-              </a:lnSpc>
-              <a:spcBef>
-                <a:spcPts val="0"/>
-              </a:spcBef>
-              <a:spcAft>
-                <a:spcPts val="0"/>
-              </a:spcAft>
-            </a:pPr>
-            <a:r>
-              <a:rPr sz="1050" b="1" i="0">
-                <a:solidFill>
-                  <a:srgbClr val="111111"/>
-                </a:solidFill>
-                <a:latin typeface="Arial"/>
-              </a:rPr>
-              <a:t>At −8 dB</a:t>
-            </a:r>
-          </a:p>
-        </p:txBody>
-      </p:sp>
-      <p:sp>
-        <p:nvSpPr>
-          <p:cNvPr id="11" name="TextBox 10"/>
-          <p:cNvSpPr txBox="1"/>
-          <p:nvPr/>
-        </p:nvSpPr>
-        <p:spPr>
-          <a:xfrm>
-            <a:off x="8174736" y="4690872"/>
-            <a:ext cx="1517904" cy="219456"/>
-          </a:xfrm>
-          <a:prstGeom prst="rect">
-            <a:avLst/>
-          </a:prstGeom>
-          <a:noFill/>
-        </p:spPr>
-        <p:txBody>
-          <a:bodyPr wrap="square" lIns="45720" rIns="45720" anchor="ctr">
-            <a:spAutoFit/>
-          </a:bodyPr>
-          <a:lstStyle/>
-          <a:p>
-            <a:pPr algn="ctr">
-              <a:lnSpc>
-                <a:spcPct val="100000"/>
-              </a:lnSpc>
-              <a:spcBef>
-                <a:spcPts val="0"/>
-              </a:spcBef>
-              <a:spcAft>
-                <a:spcPts val="0"/>
-              </a:spcAft>
-            </a:pPr>
-            <a:r>
-              <a:rPr sz="1050" b="1" i="0">
-                <a:solidFill>
-                  <a:srgbClr val="111111"/>
-                </a:solidFill>
-                <a:latin typeface="Arial"/>
-              </a:rPr>
-              <a:t>At +18 dB</a:t>
-            </a:r>
-          </a:p>
-        </p:txBody>
-      </p:sp>
-      <p:sp>
-        <p:nvSpPr>
-          <p:cNvPr id="12" name="Rectangle 11"/>
-          <p:cNvSpPr/>
-          <p:nvPr/>
-        </p:nvSpPr>
-        <p:spPr>
-          <a:xfrm>
-            <a:off x="1463040" y="4974336"/>
-            <a:ext cx="8321040" cy="420624"/>
-          </a:xfrm>
-          <a:prstGeom prst="rect">
-            <a:avLst/>
-          </a:prstGeom>
-          <a:solidFill>
-            <a:srgbClr val="F3F3F3"/>
-          </a:solidFill>
-          <a:ln w="11430">
-            <a:solidFill>
-              <a:srgbClr val="D9D9D9"/>
-            </a:solidFill>
-          </a:ln>
-        </p:spPr>
-        <p:style>
-          <a:lnRef idx="1">
-            <a:schemeClr val="accent1"/>
-          </a:lnRef>
-          <a:fillRef idx="3">
-            <a:schemeClr val="accent1"/>
-          </a:fillRef>
-          <a:effectRef idx="2">
-            <a:schemeClr val="accent1"/>
-          </a:effectRef>
-          <a:fontRef idx="minor">
-            <a:schemeClr val="lt1"/>
-          </a:fontRef>
-        </p:style>
-        <p:txBody>
-          <a:bodyPr rtlCol="0" anchor="ctr"/>
-          <a:lstStyle/>
-          <a:p>
-            <a:pPr algn="ctr"/>
-          </a:p>
-        </p:txBody>
-      </p:sp>
-      <p:sp>
-        <p:nvSpPr>
-          <p:cNvPr id="13" name="TextBox 12"/>
-          <p:cNvSpPr txBox="1"/>
-          <p:nvPr/>
-        </p:nvSpPr>
-        <p:spPr>
-          <a:xfrm>
-            <a:off x="1591056" y="5074920"/>
-            <a:ext cx="2889504" cy="256032"/>
-          </a:xfrm>
-          <a:prstGeom prst="rect">
-            <a:avLst/>
-          </a:prstGeom>
-          <a:noFill/>
-        </p:spPr>
-        <p:txBody>
-          <a:bodyPr wrap="square" lIns="45720" rIns="45720" anchor="ctr">
-            <a:spAutoFit/>
-          </a:bodyPr>
-          <a:lstStyle/>
-          <a:p>
-            <a:pPr algn="l">
-              <a:lnSpc>
-                <a:spcPct val="100000"/>
-              </a:lnSpc>
-              <a:spcBef>
-                <a:spcPts val="0"/>
-              </a:spcBef>
-              <a:spcAft>
-                <a:spcPts val="0"/>
-              </a:spcAft>
-            </a:pPr>
-            <a:r>
-              <a:rPr sz="1150" b="1" i="0">
-                <a:solidFill>
-                  <a:srgbClr val="111111"/>
-                </a:solidFill>
-                <a:latin typeface="Arial"/>
-              </a:rPr>
-              <a:t>Power-limited</a:t>
-            </a:r>
-          </a:p>
-        </p:txBody>
-      </p:sp>
-      <p:sp>
-        <p:nvSpPr>
-          <p:cNvPr id="14" name="TextBox 13"/>
-          <p:cNvSpPr txBox="1"/>
-          <p:nvPr/>
-        </p:nvSpPr>
-        <p:spPr>
-          <a:xfrm>
-            <a:off x="4700016" y="5074920"/>
-            <a:ext cx="1517904" cy="256032"/>
-          </a:xfrm>
-          <a:prstGeom prst="rect">
-            <a:avLst/>
-          </a:prstGeom>
-          <a:noFill/>
-        </p:spPr>
-        <p:txBody>
-          <a:bodyPr wrap="square" lIns="45720" rIns="45720" anchor="ctr">
-            <a:spAutoFit/>
-          </a:bodyPr>
-          <a:lstStyle/>
-          <a:p>
-            <a:pPr algn="ctr">
-              <a:lnSpc>
-                <a:spcPct val="100000"/>
-              </a:lnSpc>
-              <a:spcBef>
-                <a:spcPts val="0"/>
-              </a:spcBef>
-              <a:spcAft>
-                <a:spcPts val="0"/>
-              </a:spcAft>
-            </a:pPr>
-            <a:r>
-              <a:rPr sz="1150" b="1" i="0">
-                <a:solidFill>
-                  <a:srgbClr val="111111"/>
-                </a:solidFill>
-                <a:latin typeface="Arial"/>
-              </a:rPr>
-              <a:t>3.000002 dB</a:t>
-            </a:r>
-          </a:p>
-        </p:txBody>
-      </p:sp>
-      <p:sp>
-        <p:nvSpPr>
-          <p:cNvPr id="15" name="TextBox 14"/>
-          <p:cNvSpPr txBox="1"/>
-          <p:nvPr/>
-        </p:nvSpPr>
-        <p:spPr>
-          <a:xfrm>
-            <a:off x="6437376" y="5074920"/>
-            <a:ext cx="1517904" cy="256032"/>
-          </a:xfrm>
-          <a:prstGeom prst="rect">
-            <a:avLst/>
-          </a:prstGeom>
-          <a:noFill/>
-        </p:spPr>
-        <p:txBody>
-          <a:bodyPr wrap="square" lIns="45720" rIns="45720" anchor="ctr">
-            <a:spAutoFit/>
-          </a:bodyPr>
-          <a:lstStyle/>
-          <a:p>
-            <a:pPr algn="ctr">
-              <a:lnSpc>
-                <a:spcPct val="100000"/>
-              </a:lnSpc>
-              <a:spcBef>
-                <a:spcPts val="0"/>
-              </a:spcBef>
-              <a:spcAft>
-                <a:spcPts val="0"/>
-              </a:spcAft>
-            </a:pPr>
-            <a:r>
-              <a:rPr sz="1150" b="1" i="0">
-                <a:solidFill>
-                  <a:srgbClr val="111111"/>
-                </a:solidFill>
-                <a:latin typeface="Arial"/>
-              </a:rPr>
-              <a:t>75.9%</a:t>
-            </a:r>
-          </a:p>
-        </p:txBody>
-      </p:sp>
-      <p:sp>
-        <p:nvSpPr>
-          <p:cNvPr id="16" name="TextBox 15"/>
-          <p:cNvSpPr txBox="1"/>
-          <p:nvPr/>
-        </p:nvSpPr>
-        <p:spPr>
-          <a:xfrm>
-            <a:off x="8174736" y="5074920"/>
-            <a:ext cx="1517904" cy="256032"/>
-          </a:xfrm>
-          <a:prstGeom prst="rect">
-            <a:avLst/>
-          </a:prstGeom>
-          <a:noFill/>
-        </p:spPr>
-        <p:txBody>
-          <a:bodyPr wrap="square" lIns="45720" rIns="45720" anchor="ctr">
-            <a:spAutoFit/>
-          </a:bodyPr>
-          <a:lstStyle/>
-          <a:p>
-            <a:pPr algn="ctr">
-              <a:lnSpc>
-                <a:spcPct val="100000"/>
-              </a:lnSpc>
-              <a:spcBef>
-                <a:spcPts val="0"/>
-              </a:spcBef>
-              <a:spcAft>
-                <a:spcPts val="0"/>
-              </a:spcAft>
-            </a:pPr>
-            <a:r>
-              <a:rPr sz="1150" b="1" i="0">
-                <a:solidFill>
-                  <a:srgbClr val="111111"/>
-                </a:solidFill>
-                <a:latin typeface="Arial"/>
-              </a:rPr>
-              <a:t>83.2%</a:t>
-            </a:r>
-          </a:p>
-        </p:txBody>
-      </p:sp>
-      <p:sp>
-        <p:nvSpPr>
-          <p:cNvPr id="17" name="Rectangle 16"/>
-          <p:cNvSpPr/>
-          <p:nvPr/>
-        </p:nvSpPr>
-        <p:spPr>
-          <a:xfrm>
-            <a:off x="1463040" y="5394959"/>
-            <a:ext cx="8321040" cy="420624"/>
-          </a:xfrm>
-          <a:prstGeom prst="rect">
-            <a:avLst/>
-          </a:prstGeom>
-          <a:solidFill>
-            <a:srgbClr val="FFFFFF"/>
-          </a:solidFill>
-          <a:ln w="11430">
-            <a:solidFill>
-              <a:srgbClr val="D9D9D9"/>
-            </a:solidFill>
-          </a:ln>
-        </p:spPr>
-        <p:style>
-          <a:lnRef idx="1">
-            <a:schemeClr val="accent1"/>
-          </a:lnRef>
-          <a:fillRef idx="3">
-            <a:schemeClr val="accent1"/>
-          </a:fillRef>
-          <a:effectRef idx="2">
-            <a:schemeClr val="accent1"/>
-          </a:effectRef>
-          <a:fontRef idx="minor">
-            <a:schemeClr val="lt1"/>
-          </a:fontRef>
-        </p:style>
-        <p:txBody>
-          <a:bodyPr rtlCol="0" anchor="ctr"/>
-          <a:lstStyle/>
-          <a:p>
-            <a:pPr algn="ctr"/>
-          </a:p>
-        </p:txBody>
-      </p:sp>
-      <p:sp>
-        <p:nvSpPr>
-          <p:cNvPr id="18" name="TextBox 17"/>
-          <p:cNvSpPr txBox="1"/>
-          <p:nvPr/>
-        </p:nvSpPr>
-        <p:spPr>
-          <a:xfrm>
-            <a:off x="1591056" y="5495544"/>
-            <a:ext cx="2889504" cy="256032"/>
-          </a:xfrm>
-          <a:prstGeom prst="rect">
-            <a:avLst/>
-          </a:prstGeom>
-          <a:noFill/>
-        </p:spPr>
-        <p:txBody>
-          <a:bodyPr wrap="square" lIns="45720" rIns="45720" anchor="ctr">
-            <a:spAutoFit/>
-          </a:bodyPr>
-          <a:lstStyle/>
-          <a:p>
-            <a:pPr algn="l">
-              <a:lnSpc>
-                <a:spcPct val="100000"/>
-              </a:lnSpc>
-              <a:spcBef>
-                <a:spcPts val="0"/>
-              </a:spcBef>
-              <a:spcAft>
-                <a:spcPts val="0"/>
-              </a:spcAft>
-            </a:pPr>
-            <a:r>
-              <a:rPr sz="1150" b="0" i="0">
-                <a:solidFill>
-                  <a:srgbClr val="555555"/>
-                </a:solidFill>
-                <a:latin typeface="Arial"/>
-              </a:rPr>
-              <a:t>Ordinary learned</a:t>
-            </a:r>
-          </a:p>
-        </p:txBody>
-      </p:sp>
-      <p:sp>
-        <p:nvSpPr>
-          <p:cNvPr id="19" name="TextBox 18"/>
-          <p:cNvSpPr txBox="1"/>
-          <p:nvPr/>
-        </p:nvSpPr>
-        <p:spPr>
-          <a:xfrm>
-            <a:off x="4700016" y="5495544"/>
-            <a:ext cx="1517904" cy="256032"/>
-          </a:xfrm>
-          <a:prstGeom prst="rect">
-            <a:avLst/>
-          </a:prstGeom>
-          <a:noFill/>
-        </p:spPr>
-        <p:txBody>
-          <a:bodyPr wrap="square" lIns="45720" rIns="45720" anchor="ctr">
-            <a:spAutoFit/>
-          </a:bodyPr>
-          <a:lstStyle/>
-          <a:p>
-            <a:pPr algn="ctr">
-              <a:lnSpc>
-                <a:spcPct val="100000"/>
-              </a:lnSpc>
-              <a:spcBef>
-                <a:spcPts val="0"/>
-              </a:spcBef>
-              <a:spcAft>
-                <a:spcPts val="0"/>
-              </a:spcAft>
-            </a:pPr>
-            <a:r>
-              <a:rPr sz="1150" b="0" i="0">
-                <a:solidFill>
-                  <a:srgbClr val="555555"/>
-                </a:solidFill>
-                <a:latin typeface="Arial"/>
-              </a:rPr>
-              <a:t>20.059284 dB</a:t>
-            </a:r>
-          </a:p>
-        </p:txBody>
-      </p:sp>
-      <p:sp>
-        <p:nvSpPr>
-          <p:cNvPr id="20" name="TextBox 19"/>
-          <p:cNvSpPr txBox="1"/>
-          <p:nvPr/>
-        </p:nvSpPr>
-        <p:spPr>
-          <a:xfrm>
-            <a:off x="6437376" y="5495544"/>
-            <a:ext cx="1517904" cy="256032"/>
-          </a:xfrm>
-          <a:prstGeom prst="rect">
-            <a:avLst/>
-          </a:prstGeom>
-          <a:noFill/>
-        </p:spPr>
-        <p:txBody>
-          <a:bodyPr wrap="square" lIns="45720" rIns="45720" anchor="ctr">
-            <a:spAutoFit/>
-          </a:bodyPr>
-          <a:lstStyle/>
-          <a:p>
-            <a:pPr algn="ctr">
-              <a:lnSpc>
-                <a:spcPct val="100000"/>
-              </a:lnSpc>
-              <a:spcBef>
-                <a:spcPts val="0"/>
-              </a:spcBef>
-              <a:spcAft>
-                <a:spcPts val="0"/>
-              </a:spcAft>
-            </a:pPr>
-            <a:r>
-              <a:rPr sz="1150" b="0" i="0">
-                <a:solidFill>
-                  <a:srgbClr val="555555"/>
-                </a:solidFill>
-                <a:latin typeface="Arial"/>
-              </a:rPr>
-              <a:t>72.8%</a:t>
-            </a:r>
-          </a:p>
-        </p:txBody>
-      </p:sp>
-      <p:sp>
-        <p:nvSpPr>
-          <p:cNvPr id="21" name="TextBox 20"/>
-          <p:cNvSpPr txBox="1"/>
-          <p:nvPr/>
-        </p:nvSpPr>
-        <p:spPr>
-          <a:xfrm>
-            <a:off x="8174736" y="5495544"/>
-            <a:ext cx="1517904" cy="256032"/>
-          </a:xfrm>
-          <a:prstGeom prst="rect">
-            <a:avLst/>
-          </a:prstGeom>
-          <a:noFill/>
-        </p:spPr>
-        <p:txBody>
-          <a:bodyPr wrap="square" lIns="45720" rIns="45720" anchor="ctr">
-            <a:spAutoFit/>
-          </a:bodyPr>
-          <a:lstStyle/>
-          <a:p>
-            <a:pPr algn="ctr">
-              <a:lnSpc>
-                <a:spcPct val="100000"/>
-              </a:lnSpc>
-              <a:spcBef>
-                <a:spcPts val="0"/>
-              </a:spcBef>
-              <a:spcAft>
-                <a:spcPts val="0"/>
-              </a:spcAft>
-            </a:pPr>
-            <a:r>
-              <a:rPr sz="1150" b="0" i="0">
-                <a:solidFill>
-                  <a:srgbClr val="555555"/>
-                </a:solidFill>
-                <a:latin typeface="Arial"/>
-              </a:rPr>
-              <a:t>83.4%</a:t>
+              <a:t>Instead of a JPEG image it sends the learned features themselves, through the same error-correction code and radio settings, using the same 12,800 uses of the radio. It separates “knows the task” from “codes both at once”.</a:t>
             </a:r>
           </a:p>
         </p:txBody>
       </p:sp>
       <p:cxnSp>
         <p:nvCxnSpPr>
-          <p:cNvPr id="22" name="Connector 21"/>
+          <p:cNvPr id="8" name="Connector 7"/>
           <p:cNvCxnSpPr/>
           <p:nvPr/>
         </p:nvCxnSpPr>
         <p:spPr>
           <a:xfrm>
-            <a:off x="4572000" y="4590288"/>
-            <a:ext cx="0" cy="1225295"/>
+            <a:off x="658368" y="5413248"/>
+            <a:ext cx="10744200" cy="0"/>
           </a:xfrm>
           <a:prstGeom prst="line">
             <a:avLst/>
           </a:prstGeom>
-          <a:ln w="8890">
+          <a:ln w="6350">
             <a:solidFill>
               <a:srgbClr val="D9D9D9"/>
             </a:solidFill>
@@ -5675,16 +5950,106 @@
           </a:fontRef>
         </p:style>
       </p:cxnSp>
+      <p:sp>
+        <p:nvSpPr>
+          <p:cNvPr id="9" name="TextBox 8"/>
+          <p:cNvSpPr txBox="1"/>
+          <p:nvPr/>
+        </p:nvSpPr>
+        <p:spPr>
+          <a:xfrm>
+            <a:off x="658368" y="5541264"/>
+            <a:ext cx="1828800" cy="274320"/>
+          </a:xfrm>
+          <a:prstGeom prst="rect">
+            <a:avLst/>
+          </a:prstGeom>
+          <a:noFill/>
+        </p:spPr>
+        <p:txBody>
+          <a:bodyPr wrap="square" lIns="45720" rIns="45720" anchor="t">
+            <a:spAutoFit/>
+          </a:bodyPr>
+          <a:lstStyle/>
+          <a:p>
+            <a:pPr algn="l">
+              <a:lnSpc>
+                <a:spcPct val="100000"/>
+              </a:lnSpc>
+              <a:spcBef>
+                <a:spcPts val="0"/>
+              </a:spcBef>
+              <a:spcAft>
+                <a:spcPts val="0"/>
+              </a:spcAft>
+            </a:pPr>
+            <a:r>
+              <a:rPr sz="1200" b="1" i="0">
+                <a:solidFill>
+                  <a:srgbClr val="111111"/>
+                </a:solidFill>
+                <a:latin typeface="Arial"/>
+              </a:rPr>
+              <a:t>What it settles</a:t>
+            </a:r>
+          </a:p>
+        </p:txBody>
+      </p:sp>
+      <p:sp>
+        <p:nvSpPr>
+          <p:cNvPr id="10" name="TextBox 9"/>
+          <p:cNvSpPr txBox="1"/>
+          <p:nvPr/>
+        </p:nvSpPr>
+        <p:spPr>
+          <a:xfrm>
+            <a:off x="2578608" y="5522976"/>
+            <a:ext cx="8823960" cy="621792"/>
+          </a:xfrm>
+          <a:prstGeom prst="rect">
+            <a:avLst/>
+          </a:prstGeom>
+          <a:noFill/>
+        </p:spPr>
+        <p:txBody>
+          <a:bodyPr wrap="square" lIns="45720" rIns="45720" anchor="t">
+            <a:spAutoFit/>
+          </a:bodyPr>
+          <a:lstStyle/>
+          <a:p>
+            <a:pPr algn="l">
+              <a:lnSpc>
+                <a:spcPct val="100000"/>
+              </a:lnSpc>
+              <a:spcBef>
+                <a:spcPts val="0"/>
+              </a:spcBef>
+              <a:spcAft>
+                <a:spcPts val="0"/>
+              </a:spcAft>
+            </a:pPr>
+            <a:r>
+              <a:rPr sz="1150" b="0" i="0">
+                <a:solidFill>
+                  <a:srgbClr val="555555"/>
+                </a:solidFill>
+                <a:latin typeface="Arial"/>
+              </a:rPr>
+              <a:t>It holds 82.0% at every strength from −4 dB up. Sending learned features digitally is strong once pictures get through, so the weak-signal gap is about failed deliveries as much as representation.</a:t>
+            </a:r>
+          </a:p>
+        </p:txBody>
+      </p:sp>
       <p:cxnSp>
         <p:nvCxnSpPr>
-          <p:cNvPr id="23" name="Connector 22"/>
+          <p:cNvPr id="11" name="Connector 10"/>
           <p:cNvCxnSpPr/>
           <p:nvPr/>
         </p:nvCxnSpPr>
         <p:spPr>
           <a:xfrm>
-            <a:off x="6309360" y="4590288"/>
-            <a:ext cx="0" cy="1225295"/>
+            <a:off x="566928" y="6419088"/>
+            <a:ext cx="11018520" cy="0"/>
           </a:xfrm>
           <a:prstGeom prst="line">
             <a:avLst/>
@@ -5710,79 +6075,9 @@
           </a:fontRef>
         </p:style>
       </p:cxnSp>
-      <p:cxnSp>
-        <p:nvCxnSpPr>
-          <p:cNvPr id="24" name="Connector 23"/>
-          <p:cNvCxnSpPr/>
-          <p:nvPr/>
-        </p:nvCxnSpPr>
-        <p:spPr>
-          <a:xfrm>
-            <a:off x="8046719" y="4590288"/>
-            <a:ext cx="0" cy="1225295"/>
-          </a:xfrm>
-          <a:prstGeom prst="line">
-            <a:avLst/>
-          </a:prstGeom>
-          <a:ln w="8890">
-            <a:solidFill>
-              <a:srgbClr val="D9D9D9"/>
-            </a:solidFill>
-          </a:ln>
-        </p:spPr>
-        <p:style>
-          <a:lnRef idx="2">
-            <a:schemeClr val="accent1"/>
-          </a:lnRef>
-          <a:fillRef idx="0">
-            <a:schemeClr val="accent1"/>
-          </a:fillRef>
-          <a:effectRef idx="1">
-            <a:schemeClr val="accent1"/>
-          </a:effectRef>
-          <a:fontRef idx="minor">
-            <a:schemeClr val="tx1"/>
-          </a:fontRef>
-        </p:style>
-      </p:cxnSp>
-      <p:cxnSp>
-        <p:nvCxnSpPr>
-          <p:cNvPr id="25" name="Connector 24"/>
-          <p:cNvCxnSpPr/>
-          <p:nvPr/>
-        </p:nvCxnSpPr>
-        <p:spPr>
-          <a:xfrm>
-            <a:off x="566928" y="6419088"/>
-            <a:ext cx="11018520" cy="0"/>
-          </a:xfrm>
-          <a:prstGeom prst="line">
-            <a:avLst/>
-          </a:prstGeom>
-          <a:ln w="8890">
-            <a:solidFill>
-              <a:srgbClr val="D9D9D9"/>
-            </a:solidFill>
-          </a:ln>
-        </p:spPr>
-        <p:style>
-          <a:lnRef idx="2">
-            <a:schemeClr val="accent1"/>
-          </a:lnRef>
-          <a:fillRef idx="0">
-            <a:schemeClr val="accent1"/>
-          </a:fillRef>
-          <a:effectRef idx="1">
-            <a:schemeClr val="accent1"/>
-          </a:effectRef>
-          <a:fontRef idx="minor">
-            <a:schemeClr val="tx1"/>
-          </a:fontRef>
-        </p:style>
-      </p:cxnSp>
-      <p:sp>
-        <p:nvSpPr>
-          <p:cNvPr id="26" name="TextBox 25"/>
+      <p:sp>
+        <p:nvSpPr>
+          <p:cNvPr id="12" name="TextBox 11"/>
           <p:cNvSpPr txBox="1"/>
           <p:nvPr/>
         </p:nvSpPr>
@@ -5827,7 +6122,7 @@
       </p:sp>
       <p:sp>
         <p:nvSpPr>
-          <p:cNvPr id="27" name="TextBox 26"/>
+          <p:cNvPr id="13" name="TextBox 12"/>
           <p:cNvSpPr txBox="1"/>
           <p:nvPr/>
         </p:nvSpPr>
@@ -5865,14 +6160,14 @@
                 </a:solidFill>
                 <a:latin typeface="Arial"/>
               </a:rPr>
-              <a:t>Peak-to-average power ratio, measured on the numbers we send</a:t>
-            </a:r>
-          </a:p>
-        </p:txBody>
-      </p:sp>
-      <p:sp>
-        <p:nvSpPr>
-          <p:cNvPr id="28" name="TextBox 27"/>
+              <a:t>Same radio time, same error-correction code, same modulation</a:t>
+            </a:r>
+          </a:p>
+        </p:txBody>
+      </p:sp>
+      <p:sp>
+        <p:nvSpPr>
+          <p:cNvPr id="14" name="TextBox 13"/>
           <p:cNvSpPr txBox="1"/>
           <p:nvPr/>
         </p:nvSpPr>
@@ -5981,7 +6276,7 @@
                 </a:solidFill>
                 <a:latin typeface="Arial"/>
               </a:rPr>
-              <a:t>Four controls on the digital system</a:t>
+              <a:t>Keeping the signal peaks from getting too tall</a:t>
             </a:r>
           </a:p>
         </p:txBody>
@@ -6055,20 +6350,20 @@
               </a:spcAft>
             </a:pPr>
             <a:r>
-              <a:rPr sz="1300" b="1" i="0">
+              <a:rPr sz="1400" b="1" i="0">
                 <a:solidFill>
                   <a:srgbClr val="111111"/>
                 </a:solidFill>
                 <a:latin typeface="Arial"/>
               </a:rPr>
-              <a:t>Each panel takes one design choice away and shows what it was worth.</a:t>
+              <a:t>A real transmitter needs a limit on signal peaks, so we trained a second model under one.</a:t>
             </a:r>
           </a:p>
         </p:txBody>
       </p:sp>
       <p:pic>
         <p:nvPicPr>
-          <p:cNvPr id="5" name="Picture 4" descr="07_secondary_controls.png"/>
+          <p:cNvPr id="5" name="Picture 4" descr="06_papr_tradeoff.png"/>
           <p:cNvPicPr>
             <a:picLocks noChangeAspect="1"/>
           </p:cNvPicPr>
@@ -6082,8 +6377,8 @@
         </p:blipFill>
         <p:spPr>
           <a:xfrm>
-            <a:off x="4388307" y="1609344"/>
-            <a:ext cx="3415079" cy="2487168"/>
+            <a:off x="3050788" y="1645920"/>
+            <a:ext cx="6090118" cy="2468880"/>
           </a:xfrm>
           <a:prstGeom prst="rect">
             <a:avLst/>
@@ -6098,8 +6393,8 @@
         </p:nvSpPr>
         <p:spPr>
           <a:xfrm>
-            <a:off x="658368" y="4315968"/>
-            <a:ext cx="1828800" cy="274320"/>
+            <a:off x="658368" y="4224528"/>
+            <a:ext cx="10744200" cy="274320"/>
           </a:xfrm>
           <a:prstGeom prst="rect">
             <a:avLst/>
@@ -6124,35 +6419,305 @@
               </a:spcAft>
             </a:pPr>
             <a:r>
-              <a:rPr sz="1200" b="1" i="0">
+              <a:rPr sz="1100" b="0" i="1">
+                <a:solidFill>
+                  <a:srgbClr val="555555"/>
+                </a:solidFill>
+                <a:latin typeface="Arial"/>
+              </a:rPr>
+              <a:t>“Peak-to-average power ratio” = how much taller the tallest spike is than the average.</a:t>
+            </a:r>
+          </a:p>
+        </p:txBody>
+      </p:sp>
+      <p:sp>
+        <p:nvSpPr>
+          <p:cNvPr id="7" name="Rectangle 6"/>
+          <p:cNvSpPr/>
+          <p:nvPr/>
+        </p:nvSpPr>
+        <p:spPr>
+          <a:xfrm>
+            <a:off x="1463040" y="4590288"/>
+            <a:ext cx="8321040" cy="384048"/>
+          </a:xfrm>
+          <a:prstGeom prst="rect">
+            <a:avLst/>
+          </a:prstGeom>
+          <a:solidFill>
+            <a:srgbClr val="F3F3F3"/>
+          </a:solidFill>
+          <a:ln w="11430">
+            <a:solidFill>
+              <a:srgbClr val="D9D9D9"/>
+            </a:solidFill>
+          </a:ln>
+        </p:spPr>
+        <p:style>
+          <a:lnRef idx="1">
+            <a:schemeClr val="accent1"/>
+          </a:lnRef>
+          <a:fillRef idx="3">
+            <a:schemeClr val="accent1"/>
+          </a:fillRef>
+          <a:effectRef idx="2">
+            <a:schemeClr val="accent1"/>
+          </a:effectRef>
+          <a:fontRef idx="minor">
+            <a:schemeClr val="lt1"/>
+          </a:fontRef>
+        </p:style>
+        <p:txBody>
+          <a:bodyPr rtlCol="0" anchor="ctr"/>
+          <a:lstStyle/>
+          <a:p>
+            <a:pPr algn="ctr"/>
+          </a:p>
+        </p:txBody>
+      </p:sp>
+      <p:sp>
+        <p:nvSpPr>
+          <p:cNvPr id="8" name="TextBox 7"/>
+          <p:cNvSpPr txBox="1"/>
+          <p:nvPr/>
+        </p:nvSpPr>
+        <p:spPr>
+          <a:xfrm>
+            <a:off x="1591056" y="4690872"/>
+            <a:ext cx="2889504" cy="219456"/>
+          </a:xfrm>
+          <a:prstGeom prst="rect">
+            <a:avLst/>
+          </a:prstGeom>
+          <a:noFill/>
+        </p:spPr>
+        <p:txBody>
+          <a:bodyPr wrap="square" lIns="45720" rIns="45720" anchor="ctr">
+            <a:spAutoFit/>
+          </a:bodyPr>
+          <a:lstStyle/>
+          <a:p>
+            <a:pPr algn="l">
+              <a:lnSpc>
+                <a:spcPct val="100000"/>
+              </a:lnSpc>
+              <a:spcBef>
+                <a:spcPts val="0"/>
+              </a:spcBef>
+              <a:spcAft>
+                <a:spcPts val="0"/>
+              </a:spcAft>
+            </a:pPr>
+            <a:r>
+              <a:rPr sz="1050" b="1" i="0">
                 <a:solidFill>
                   <a:srgbClr val="111111"/>
                 </a:solidFill>
                 <a:latin typeface="Arial"/>
               </a:rPr>
-              <a:t>Fixed settings</a:t>
-            </a:r>
-          </a:p>
-        </p:txBody>
-      </p:sp>
-      <p:sp>
-        <p:nvSpPr>
-          <p:cNvPr id="7" name="TextBox 6"/>
-          <p:cNvSpPr txBox="1"/>
-          <p:nvPr/>
-        </p:nvSpPr>
-        <p:spPr>
-          <a:xfrm>
-            <a:off x="2578608" y="4297680"/>
-            <a:ext cx="8823960" cy="402336"/>
-          </a:xfrm>
-          <a:prstGeom prst="rect">
-            <a:avLst/>
-          </a:prstGeom>
-          <a:noFill/>
-        </p:spPr>
-        <p:txBody>
-          <a:bodyPr wrap="square" lIns="45720" rIns="45720" anchor="t">
+              <a:t>Model</a:t>
+            </a:r>
+          </a:p>
+        </p:txBody>
+      </p:sp>
+      <p:sp>
+        <p:nvSpPr>
+          <p:cNvPr id="9" name="TextBox 8"/>
+          <p:cNvSpPr txBox="1"/>
+          <p:nvPr/>
+        </p:nvSpPr>
+        <p:spPr>
+          <a:xfrm>
+            <a:off x="4700016" y="4690872"/>
+            <a:ext cx="1517904" cy="219456"/>
+          </a:xfrm>
+          <a:prstGeom prst="rect">
+            <a:avLst/>
+          </a:prstGeom>
+          <a:noFill/>
+        </p:spPr>
+        <p:txBody>
+          <a:bodyPr wrap="square" lIns="45720" rIns="45720" anchor="ctr">
+            <a:spAutoFit/>
+          </a:bodyPr>
+          <a:lstStyle/>
+          <a:p>
+            <a:pPr algn="ctr">
+              <a:lnSpc>
+                <a:spcPct val="100000"/>
+              </a:lnSpc>
+              <a:spcBef>
+                <a:spcPts val="0"/>
+              </a:spcBef>
+              <a:spcAft>
+                <a:spcPts val="0"/>
+              </a:spcAft>
+            </a:pPr>
+            <a:r>
+              <a:rPr sz="1050" b="1" i="0">
+                <a:solidFill>
+                  <a:srgbClr val="111111"/>
+                </a:solidFill>
+                <a:latin typeface="Arial"/>
+              </a:rPr>
+              <a:t>Tallest spike</a:t>
+            </a:r>
+          </a:p>
+        </p:txBody>
+      </p:sp>
+      <p:sp>
+        <p:nvSpPr>
+          <p:cNvPr id="10" name="TextBox 9"/>
+          <p:cNvSpPr txBox="1"/>
+          <p:nvPr/>
+        </p:nvSpPr>
+        <p:spPr>
+          <a:xfrm>
+            <a:off x="6437376" y="4690872"/>
+            <a:ext cx="1517904" cy="219456"/>
+          </a:xfrm>
+          <a:prstGeom prst="rect">
+            <a:avLst/>
+          </a:prstGeom>
+          <a:noFill/>
+        </p:spPr>
+        <p:txBody>
+          <a:bodyPr wrap="square" lIns="45720" rIns="45720" anchor="ctr">
+            <a:spAutoFit/>
+          </a:bodyPr>
+          <a:lstStyle/>
+          <a:p>
+            <a:pPr algn="ctr">
+              <a:lnSpc>
+                <a:spcPct val="100000"/>
+              </a:lnSpc>
+              <a:spcBef>
+                <a:spcPts val="0"/>
+              </a:spcBef>
+              <a:spcAft>
+                <a:spcPts val="0"/>
+              </a:spcAft>
+            </a:pPr>
+            <a:r>
+              <a:rPr sz="1050" b="1" i="0">
+                <a:solidFill>
+                  <a:srgbClr val="111111"/>
+                </a:solidFill>
+                <a:latin typeface="Arial"/>
+              </a:rPr>
+              <a:t>At −8 dB</a:t>
+            </a:r>
+          </a:p>
+        </p:txBody>
+      </p:sp>
+      <p:sp>
+        <p:nvSpPr>
+          <p:cNvPr id="11" name="TextBox 10"/>
+          <p:cNvSpPr txBox="1"/>
+          <p:nvPr/>
+        </p:nvSpPr>
+        <p:spPr>
+          <a:xfrm>
+            <a:off x="8174736" y="4690872"/>
+            <a:ext cx="1517904" cy="219456"/>
+          </a:xfrm>
+          <a:prstGeom prst="rect">
+            <a:avLst/>
+          </a:prstGeom>
+          <a:noFill/>
+        </p:spPr>
+        <p:txBody>
+          <a:bodyPr wrap="square" lIns="45720" rIns="45720" anchor="ctr">
+            <a:spAutoFit/>
+          </a:bodyPr>
+          <a:lstStyle/>
+          <a:p>
+            <a:pPr algn="ctr">
+              <a:lnSpc>
+                <a:spcPct val="100000"/>
+              </a:lnSpc>
+              <a:spcBef>
+                <a:spcPts val="0"/>
+              </a:spcBef>
+              <a:spcAft>
+                <a:spcPts val="0"/>
+              </a:spcAft>
+            </a:pPr>
+            <a:r>
+              <a:rPr sz="1050" b="1" i="0">
+                <a:solidFill>
+                  <a:srgbClr val="111111"/>
+                </a:solidFill>
+                <a:latin typeface="Arial"/>
+              </a:rPr>
+              <a:t>At +18 dB</a:t>
+            </a:r>
+          </a:p>
+        </p:txBody>
+      </p:sp>
+      <p:sp>
+        <p:nvSpPr>
+          <p:cNvPr id="12" name="Rectangle 11"/>
+          <p:cNvSpPr/>
+          <p:nvPr/>
+        </p:nvSpPr>
+        <p:spPr>
+          <a:xfrm>
+            <a:off x="1463040" y="4974336"/>
+            <a:ext cx="8321040" cy="420624"/>
+          </a:xfrm>
+          <a:prstGeom prst="rect">
+            <a:avLst/>
+          </a:prstGeom>
+          <a:solidFill>
+            <a:srgbClr val="F3F3F3"/>
+          </a:solidFill>
+          <a:ln w="11430">
+            <a:solidFill>
+              <a:srgbClr val="D9D9D9"/>
+            </a:solidFill>
+          </a:ln>
+        </p:spPr>
+        <p:style>
+          <a:lnRef idx="1">
+            <a:schemeClr val="accent1"/>
+          </a:lnRef>
+          <a:fillRef idx="3">
+            <a:schemeClr val="accent1"/>
+          </a:fillRef>
+          <a:effectRef idx="2">
+            <a:schemeClr val="accent1"/>
+          </a:effectRef>
+          <a:fontRef idx="minor">
+            <a:schemeClr val="lt1"/>
+          </a:fontRef>
+        </p:style>
+        <p:txBody>
+          <a:bodyPr rtlCol="0" anchor="ctr"/>
+          <a:lstStyle/>
+          <a:p>
+            <a:pPr algn="ctr"/>
+          </a:p>
+        </p:txBody>
+      </p:sp>
+      <p:sp>
+        <p:nvSpPr>
+          <p:cNvPr id="13" name="TextBox 12"/>
+          <p:cNvSpPr txBox="1"/>
+          <p:nvPr/>
+        </p:nvSpPr>
+        <p:spPr>
+          <a:xfrm>
+            <a:off x="1591056" y="5074920"/>
+            <a:ext cx="2889504" cy="256032"/>
+          </a:xfrm>
+          <a:prstGeom prst="rect">
+            <a:avLst/>
+          </a:prstGeom>
+          <a:noFill/>
+        </p:spPr>
+        <p:txBody>
+          <a:bodyPr wrap="square" lIns="45720" rIns="45720" anchor="ctr">
             <a:spAutoFit/>
           </a:bodyPr>
           <a:lstStyle/>
@@ -6169,32 +6734,392 @@
               </a:spcAft>
             </a:pPr>
             <a:r>
+              <a:rPr sz="1150" b="1" i="0">
+                <a:solidFill>
+                  <a:srgbClr val="111111"/>
+                </a:solidFill>
+                <a:latin typeface="Arial"/>
+              </a:rPr>
+              <a:t>Power-limited</a:t>
+            </a:r>
+          </a:p>
+        </p:txBody>
+      </p:sp>
+      <p:sp>
+        <p:nvSpPr>
+          <p:cNvPr id="14" name="TextBox 13"/>
+          <p:cNvSpPr txBox="1"/>
+          <p:nvPr/>
+        </p:nvSpPr>
+        <p:spPr>
+          <a:xfrm>
+            <a:off x="4700016" y="5074920"/>
+            <a:ext cx="1517904" cy="256032"/>
+          </a:xfrm>
+          <a:prstGeom prst="rect">
+            <a:avLst/>
+          </a:prstGeom>
+          <a:noFill/>
+        </p:spPr>
+        <p:txBody>
+          <a:bodyPr wrap="square" lIns="45720" rIns="45720" anchor="ctr">
+            <a:spAutoFit/>
+          </a:bodyPr>
+          <a:lstStyle/>
+          <a:p>
+            <a:pPr algn="ctr">
+              <a:lnSpc>
+                <a:spcPct val="100000"/>
+              </a:lnSpc>
+              <a:spcBef>
+                <a:spcPts val="0"/>
+              </a:spcBef>
+              <a:spcAft>
+                <a:spcPts val="0"/>
+              </a:spcAft>
+            </a:pPr>
+            <a:r>
+              <a:rPr sz="1150" b="1" i="0">
+                <a:solidFill>
+                  <a:srgbClr val="111111"/>
+                </a:solidFill>
+                <a:latin typeface="Arial"/>
+              </a:rPr>
+              <a:t>3.000002 dB</a:t>
+            </a:r>
+          </a:p>
+        </p:txBody>
+      </p:sp>
+      <p:sp>
+        <p:nvSpPr>
+          <p:cNvPr id="15" name="TextBox 14"/>
+          <p:cNvSpPr txBox="1"/>
+          <p:nvPr/>
+        </p:nvSpPr>
+        <p:spPr>
+          <a:xfrm>
+            <a:off x="6437376" y="5074920"/>
+            <a:ext cx="1517904" cy="256032"/>
+          </a:xfrm>
+          <a:prstGeom prst="rect">
+            <a:avLst/>
+          </a:prstGeom>
+          <a:noFill/>
+        </p:spPr>
+        <p:txBody>
+          <a:bodyPr wrap="square" lIns="45720" rIns="45720" anchor="ctr">
+            <a:spAutoFit/>
+          </a:bodyPr>
+          <a:lstStyle/>
+          <a:p>
+            <a:pPr algn="ctr">
+              <a:lnSpc>
+                <a:spcPct val="100000"/>
+              </a:lnSpc>
+              <a:spcBef>
+                <a:spcPts val="0"/>
+              </a:spcBef>
+              <a:spcAft>
+                <a:spcPts val="0"/>
+              </a:spcAft>
+            </a:pPr>
+            <a:r>
+              <a:rPr sz="1150" b="1" i="0">
+                <a:solidFill>
+                  <a:srgbClr val="111111"/>
+                </a:solidFill>
+                <a:latin typeface="Arial"/>
+              </a:rPr>
+              <a:t>75.9%</a:t>
+            </a:r>
+          </a:p>
+        </p:txBody>
+      </p:sp>
+      <p:sp>
+        <p:nvSpPr>
+          <p:cNvPr id="16" name="TextBox 15"/>
+          <p:cNvSpPr txBox="1"/>
+          <p:nvPr/>
+        </p:nvSpPr>
+        <p:spPr>
+          <a:xfrm>
+            <a:off x="8174736" y="5074920"/>
+            <a:ext cx="1517904" cy="256032"/>
+          </a:xfrm>
+          <a:prstGeom prst="rect">
+            <a:avLst/>
+          </a:prstGeom>
+          <a:noFill/>
+        </p:spPr>
+        <p:txBody>
+          <a:bodyPr wrap="square" lIns="45720" rIns="45720" anchor="ctr">
+            <a:spAutoFit/>
+          </a:bodyPr>
+          <a:lstStyle/>
+          <a:p>
+            <a:pPr algn="ctr">
+              <a:lnSpc>
+                <a:spcPct val="100000"/>
+              </a:lnSpc>
+              <a:spcBef>
+                <a:spcPts val="0"/>
+              </a:spcBef>
+              <a:spcAft>
+                <a:spcPts val="0"/>
+              </a:spcAft>
+            </a:pPr>
+            <a:r>
+              <a:rPr sz="1150" b="1" i="0">
+                <a:solidFill>
+                  <a:srgbClr val="111111"/>
+                </a:solidFill>
+                <a:latin typeface="Arial"/>
+              </a:rPr>
+              <a:t>83.2%</a:t>
+            </a:r>
+          </a:p>
+        </p:txBody>
+      </p:sp>
+      <p:sp>
+        <p:nvSpPr>
+          <p:cNvPr id="17" name="Rectangle 16"/>
+          <p:cNvSpPr/>
+          <p:nvPr/>
+        </p:nvSpPr>
+        <p:spPr>
+          <a:xfrm>
+            <a:off x="1463040" y="5394959"/>
+            <a:ext cx="8321040" cy="420624"/>
+          </a:xfrm>
+          <a:prstGeom prst="rect">
+            <a:avLst/>
+          </a:prstGeom>
+          <a:solidFill>
+            <a:srgbClr val="FFFFFF"/>
+          </a:solidFill>
+          <a:ln w="11430">
+            <a:solidFill>
+              <a:srgbClr val="D9D9D9"/>
+            </a:solidFill>
+          </a:ln>
+        </p:spPr>
+        <p:style>
+          <a:lnRef idx="1">
+            <a:schemeClr val="accent1"/>
+          </a:lnRef>
+          <a:fillRef idx="3">
+            <a:schemeClr val="accent1"/>
+          </a:fillRef>
+          <a:effectRef idx="2">
+            <a:schemeClr val="accent1"/>
+          </a:effectRef>
+          <a:fontRef idx="minor">
+            <a:schemeClr val="lt1"/>
+          </a:fontRef>
+        </p:style>
+        <p:txBody>
+          <a:bodyPr rtlCol="0" anchor="ctr"/>
+          <a:lstStyle/>
+          <a:p>
+            <a:pPr algn="ctr"/>
+          </a:p>
+        </p:txBody>
+      </p:sp>
+      <p:sp>
+        <p:nvSpPr>
+          <p:cNvPr id="18" name="TextBox 17"/>
+          <p:cNvSpPr txBox="1"/>
+          <p:nvPr/>
+        </p:nvSpPr>
+        <p:spPr>
+          <a:xfrm>
+            <a:off x="1591056" y="5495544"/>
+            <a:ext cx="2889504" cy="256032"/>
+          </a:xfrm>
+          <a:prstGeom prst="rect">
+            <a:avLst/>
+          </a:prstGeom>
+          <a:noFill/>
+        </p:spPr>
+        <p:txBody>
+          <a:bodyPr wrap="square" lIns="45720" rIns="45720" anchor="ctr">
+            <a:spAutoFit/>
+          </a:bodyPr>
+          <a:lstStyle/>
+          <a:p>
+            <a:pPr algn="l">
+              <a:lnSpc>
+                <a:spcPct val="100000"/>
+              </a:lnSpc>
+              <a:spcBef>
+                <a:spcPts val="0"/>
+              </a:spcBef>
+              <a:spcAft>
+                <a:spcPts val="0"/>
+              </a:spcAft>
+            </a:pPr>
+            <a:r>
               <a:rPr sz="1150" b="0" i="0">
                 <a:solidFill>
                   <a:srgbClr val="555555"/>
                 </a:solidFill>
                 <a:latin typeface="Arial"/>
               </a:rPr>
-              <a:t>Sits at the fallback floor until +6 dB, then reaches 89.0%. Choosing settings per strength buys real reach.</a:t>
+              <a:t>Ordinary learned</a:t>
+            </a:r>
+          </a:p>
+        </p:txBody>
+      </p:sp>
+      <p:sp>
+        <p:nvSpPr>
+          <p:cNvPr id="19" name="TextBox 18"/>
+          <p:cNvSpPr txBox="1"/>
+          <p:nvPr/>
+        </p:nvSpPr>
+        <p:spPr>
+          <a:xfrm>
+            <a:off x="4700016" y="5495544"/>
+            <a:ext cx="1517904" cy="256032"/>
+          </a:xfrm>
+          <a:prstGeom prst="rect">
+            <a:avLst/>
+          </a:prstGeom>
+          <a:noFill/>
+        </p:spPr>
+        <p:txBody>
+          <a:bodyPr wrap="square" lIns="45720" rIns="45720" anchor="ctr">
+            <a:spAutoFit/>
+          </a:bodyPr>
+          <a:lstStyle/>
+          <a:p>
+            <a:pPr algn="ctr">
+              <a:lnSpc>
+                <a:spcPct val="100000"/>
+              </a:lnSpc>
+              <a:spcBef>
+                <a:spcPts val="0"/>
+              </a:spcBef>
+              <a:spcAft>
+                <a:spcPts val="0"/>
+              </a:spcAft>
+            </a:pPr>
+            <a:r>
+              <a:rPr sz="1150" b="0" i="0">
+                <a:solidFill>
+                  <a:srgbClr val="555555"/>
+                </a:solidFill>
+                <a:latin typeface="Arial"/>
+              </a:rPr>
+              <a:t>20.059284 dB</a:t>
+            </a:r>
+          </a:p>
+        </p:txBody>
+      </p:sp>
+      <p:sp>
+        <p:nvSpPr>
+          <p:cNvPr id="20" name="TextBox 19"/>
+          <p:cNvSpPr txBox="1"/>
+          <p:nvPr/>
+        </p:nvSpPr>
+        <p:spPr>
+          <a:xfrm>
+            <a:off x="6437376" y="5495544"/>
+            <a:ext cx="1517904" cy="256032"/>
+          </a:xfrm>
+          <a:prstGeom prst="rect">
+            <a:avLst/>
+          </a:prstGeom>
+          <a:noFill/>
+        </p:spPr>
+        <p:txBody>
+          <a:bodyPr wrap="square" lIns="45720" rIns="45720" anchor="ctr">
+            <a:spAutoFit/>
+          </a:bodyPr>
+          <a:lstStyle/>
+          <a:p>
+            <a:pPr algn="ctr">
+              <a:lnSpc>
+                <a:spcPct val="100000"/>
+              </a:lnSpc>
+              <a:spcBef>
+                <a:spcPts val="0"/>
+              </a:spcBef>
+              <a:spcAft>
+                <a:spcPts val="0"/>
+              </a:spcAft>
+            </a:pPr>
+            <a:r>
+              <a:rPr sz="1150" b="0" i="0">
+                <a:solidFill>
+                  <a:srgbClr val="555555"/>
+                </a:solidFill>
+                <a:latin typeface="Arial"/>
+              </a:rPr>
+              <a:t>72.8%</a:t>
+            </a:r>
+          </a:p>
+        </p:txBody>
+      </p:sp>
+      <p:sp>
+        <p:nvSpPr>
+          <p:cNvPr id="21" name="TextBox 20"/>
+          <p:cNvSpPr txBox="1"/>
+          <p:nvPr/>
+        </p:nvSpPr>
+        <p:spPr>
+          <a:xfrm>
+            <a:off x="8174736" y="5495544"/>
+            <a:ext cx="1517904" cy="256032"/>
+          </a:xfrm>
+          <a:prstGeom prst="rect">
+            <a:avLst/>
+          </a:prstGeom>
+          <a:noFill/>
+        </p:spPr>
+        <p:txBody>
+          <a:bodyPr wrap="square" lIns="45720" rIns="45720" anchor="ctr">
+            <a:spAutoFit/>
+          </a:bodyPr>
+          <a:lstStyle/>
+          <a:p>
+            <a:pPr algn="ctr">
+              <a:lnSpc>
+                <a:spcPct val="100000"/>
+              </a:lnSpc>
+              <a:spcBef>
+                <a:spcPts val="0"/>
+              </a:spcBef>
+              <a:spcAft>
+                <a:spcPts val="0"/>
+              </a:spcAft>
+            </a:pPr>
+            <a:r>
+              <a:rPr sz="1150" b="0" i="0">
+                <a:solidFill>
+                  <a:srgbClr val="555555"/>
+                </a:solidFill>
+                <a:latin typeface="Arial"/>
+              </a:rPr>
+              <a:t>83.4%</a:t>
             </a:r>
           </a:p>
         </p:txBody>
       </p:sp>
       <p:cxnSp>
         <p:nvCxnSpPr>
-          <p:cNvPr id="8" name="Connector 7"/>
+          <p:cNvPr id="22" name="Connector 21"/>
           <p:cNvCxnSpPr/>
           <p:nvPr/>
         </p:nvCxnSpPr>
         <p:spPr>
           <a:xfrm>
-            <a:off x="658368" y="4645152"/>
-            <a:ext cx="10744200" cy="0"/>
+            <a:off x="4572000" y="4590288"/>
+            <a:ext cx="0" cy="1225295"/>
           </a:xfrm>
           <a:prstGeom prst="line">
             <a:avLst/>
           </a:prstGeom>
-          <a:ln w="6350">
+          <a:ln w="8890">
             <a:solidFill>
               <a:srgbClr val="D9D9D9"/>
             </a:solidFill>
@@ -6215,111 +7140,21 @@
           </a:fontRef>
         </p:style>
       </p:cxnSp>
-      <p:sp>
-        <p:nvSpPr>
-          <p:cNvPr id="9" name="TextBox 8"/>
-          <p:cNvSpPr txBox="1"/>
-          <p:nvPr/>
-        </p:nvSpPr>
-        <p:spPr>
-          <a:xfrm>
-            <a:off x="658368" y="4773168"/>
-            <a:ext cx="1828800" cy="274320"/>
-          </a:xfrm>
-          <a:prstGeom prst="rect">
-            <a:avLst/>
-          </a:prstGeom>
-          <a:noFill/>
-        </p:spPr>
-        <p:txBody>
-          <a:bodyPr wrap="square" lIns="45720" rIns="45720" anchor="t">
-            <a:spAutoFit/>
-          </a:bodyPr>
-          <a:lstStyle/>
-          <a:p>
-            <a:pPr algn="l">
-              <a:lnSpc>
-                <a:spcPct val="100000"/>
-              </a:lnSpc>
-              <a:spcBef>
-                <a:spcPts val="0"/>
-              </a:spcBef>
-              <a:spcAft>
-                <a:spcPts val="0"/>
-              </a:spcAft>
-            </a:pPr>
-            <a:r>
-              <a:rPr sz="1200" b="1" i="0">
-                <a:solidFill>
-                  <a:srgbClr val="111111"/>
-                </a:solidFill>
-                <a:latin typeface="Arial"/>
-              </a:rPr>
-              <a:t>Fixed modulation</a:t>
-            </a:r>
-          </a:p>
-        </p:txBody>
-      </p:sp>
-      <p:sp>
-        <p:nvSpPr>
-          <p:cNvPr id="10" name="TextBox 9"/>
-          <p:cNvSpPr txBox="1"/>
-          <p:nvPr/>
-        </p:nvSpPr>
-        <p:spPr>
-          <a:xfrm>
-            <a:off x="2578608" y="4754880"/>
-            <a:ext cx="8823960" cy="402336"/>
-          </a:xfrm>
-          <a:prstGeom prst="rect">
-            <a:avLst/>
-          </a:prstGeom>
-          <a:noFill/>
-        </p:spPr>
-        <p:txBody>
-          <a:bodyPr wrap="square" lIns="45720" rIns="45720" anchor="t">
-            <a:spAutoFit/>
-          </a:bodyPr>
-          <a:lstStyle/>
-          <a:p>
-            <a:pPr algn="l">
-              <a:lnSpc>
-                <a:spcPct val="100000"/>
-              </a:lnSpc>
-              <a:spcBef>
-                <a:spcPts val="0"/>
-              </a:spcBef>
-              <a:spcAft>
-                <a:spcPts val="0"/>
-              </a:spcAft>
-            </a:pPr>
-            <a:r>
-              <a:rPr sz="1150" b="0" i="0">
-                <a:solidFill>
-                  <a:srgbClr val="555555"/>
-                </a:solidFill>
-                <a:latin typeface="Arial"/>
-              </a:rPr>
-              <a:t>Starts working later than adaptive selection, and settles near 88.7%.</a:t>
-            </a:r>
-          </a:p>
-        </p:txBody>
-      </p:sp>
       <p:cxnSp>
         <p:nvCxnSpPr>
-          <p:cNvPr id="11" name="Connector 10"/>
+          <p:cNvPr id="23" name="Connector 22"/>
           <p:cNvCxnSpPr/>
           <p:nvPr/>
         </p:nvCxnSpPr>
         <p:spPr>
           <a:xfrm>
-            <a:off x="658368" y="5102352"/>
-            <a:ext cx="10744200" cy="0"/>
+            <a:off x="6309360" y="4590288"/>
+            <a:ext cx="0" cy="1225295"/>
           </a:xfrm>
           <a:prstGeom prst="line">
             <a:avLst/>
           </a:prstGeom>
-          <a:ln w="6350">
+          <a:ln w="8890">
             <a:solidFill>
               <a:srgbClr val="D9D9D9"/>
             </a:solidFill>
@@ -6340,111 +7175,21 @@
           </a:fontRef>
         </p:style>
       </p:cxnSp>
-      <p:sp>
-        <p:nvSpPr>
-          <p:cNvPr id="12" name="TextBox 11"/>
-          <p:cNvSpPr txBox="1"/>
-          <p:nvPr/>
-        </p:nvSpPr>
-        <p:spPr>
-          <a:xfrm>
-            <a:off x="658368" y="5230368"/>
-            <a:ext cx="1828800" cy="274320"/>
-          </a:xfrm>
-          <a:prstGeom prst="rect">
-            <a:avLst/>
-          </a:prstGeom>
-          <a:noFill/>
-        </p:spPr>
-        <p:txBody>
-          <a:bodyPr wrap="square" lIns="45720" rIns="45720" anchor="t">
-            <a:spAutoFit/>
-          </a:bodyPr>
-          <a:lstStyle/>
-          <a:p>
-            <a:pPr algn="l">
-              <a:lnSpc>
-                <a:spcPct val="100000"/>
-              </a:lnSpc>
-              <a:spcBef>
-                <a:spcPts val="0"/>
-              </a:spcBef>
-              <a:spcAft>
-                <a:spcPts val="0"/>
-              </a:spcAft>
-            </a:pPr>
-            <a:r>
-              <a:rPr sz="1200" b="1" i="0">
-                <a:solidFill>
-                  <a:srgbClr val="111111"/>
-                </a:solidFill>
-                <a:latin typeface="Arial"/>
-              </a:rPr>
-              <a:t>JPEG secondary curve</a:t>
-            </a:r>
-          </a:p>
-        </p:txBody>
-      </p:sp>
-      <p:sp>
-        <p:nvSpPr>
-          <p:cNvPr id="13" name="TextBox 12"/>
-          <p:cNvSpPr txBox="1"/>
-          <p:nvPr/>
-        </p:nvSpPr>
-        <p:spPr>
-          <a:xfrm>
-            <a:off x="2578608" y="5212080"/>
-            <a:ext cx="8823960" cy="402336"/>
-          </a:xfrm>
-          <a:prstGeom prst="rect">
-            <a:avLst/>
-          </a:prstGeom>
-          <a:noFill/>
-        </p:spPr>
-        <p:txBody>
-          <a:bodyPr wrap="square" lIns="45720" rIns="45720" anchor="t">
-            <a:spAutoFit/>
-          </a:bodyPr>
-          <a:lstStyle/>
-          <a:p>
-            <a:pPr algn="l">
-              <a:lnSpc>
-                <a:spcPct val="100000"/>
-              </a:lnSpc>
-              <a:spcBef>
-                <a:spcPts val="0"/>
-              </a:spcBef>
-              <a:spcAft>
-                <a:spcPts val="0"/>
-              </a:spcAft>
-            </a:pPr>
-            <a:r>
-              <a:rPr sz="1150" b="0" i="0">
-                <a:solidFill>
-                  <a:srgbClr val="555555"/>
-                </a:solidFill>
-                <a:latin typeface="Arial"/>
-              </a:rPr>
-              <a:t>88.6% at +18 dB, with a full outage at +9 dB.</a:t>
-            </a:r>
-          </a:p>
-        </p:txBody>
-      </p:sp>
       <p:cxnSp>
         <p:nvCxnSpPr>
-          <p:cNvPr id="14" name="Connector 13"/>
+          <p:cNvPr id="24" name="Connector 23"/>
           <p:cNvCxnSpPr/>
           <p:nvPr/>
         </p:nvCxnSpPr>
         <p:spPr>
           <a:xfrm>
-            <a:off x="658368" y="5559552"/>
-            <a:ext cx="10744200" cy="0"/>
+            <a:off x="8046719" y="4590288"/>
+            <a:ext cx="0" cy="1225295"/>
           </a:xfrm>
           <a:prstGeom prst="line">
             <a:avLst/>
           </a:prstGeom>
-          <a:ln w="6350">
+          <a:ln w="8890">
             <a:solidFill>
               <a:srgbClr val="D9D9D9"/>
             </a:solidFill>
@@ -6465,99 +7210,9 @@
           </a:fontRef>
         </p:style>
       </p:cxnSp>
-      <p:sp>
-        <p:nvSpPr>
-          <p:cNvPr id="15" name="TextBox 14"/>
-          <p:cNvSpPr txBox="1"/>
-          <p:nvPr/>
-        </p:nvSpPr>
-        <p:spPr>
-          <a:xfrm>
-            <a:off x="658368" y="5687568"/>
-            <a:ext cx="1828800" cy="274320"/>
-          </a:xfrm>
-          <a:prstGeom prst="rect">
-            <a:avLst/>
-          </a:prstGeom>
-          <a:noFill/>
-        </p:spPr>
-        <p:txBody>
-          <a:bodyPr wrap="square" lIns="45720" rIns="45720" anchor="t">
-            <a:spAutoFit/>
-          </a:bodyPr>
-          <a:lstStyle/>
-          <a:p>
-            <a:pPr algn="l">
-              <a:lnSpc>
-                <a:spcPct val="100000"/>
-              </a:lnSpc>
-              <a:spcBef>
-                <a:spcPts val="0"/>
-              </a:spcBef>
-              <a:spcAft>
-                <a:spcPts val="0"/>
-              </a:spcAft>
-            </a:pPr>
-            <a:r>
-              <a:rPr sz="1200" b="1" i="0">
-                <a:solidFill>
-                  <a:srgbClr val="111111"/>
-                </a:solidFill>
-                <a:latin typeface="Arial"/>
-              </a:rPr>
-              <a:t>Sending the answer</a:t>
-            </a:r>
-          </a:p>
-        </p:txBody>
-      </p:sp>
-      <p:sp>
-        <p:nvSpPr>
-          <p:cNvPr id="16" name="TextBox 15"/>
-          <p:cNvSpPr txBox="1"/>
-          <p:nvPr/>
-        </p:nvSpPr>
-        <p:spPr>
-          <a:xfrm>
-            <a:off x="2578608" y="5669280"/>
-            <a:ext cx="8823960" cy="402336"/>
-          </a:xfrm>
-          <a:prstGeom prst="rect">
-            <a:avLst/>
-          </a:prstGeom>
-          <a:noFill/>
-        </p:spPr>
-        <p:txBody>
-          <a:bodyPr wrap="square" lIns="45720" rIns="45720" anchor="t">
-            <a:spAutoFit/>
-          </a:bodyPr>
-          <a:lstStyle/>
-          <a:p>
-            <a:pPr algn="l">
-              <a:lnSpc>
-                <a:spcPct val="100000"/>
-              </a:lnSpc>
-              <a:spcBef>
-                <a:spcPts val="0"/>
-              </a:spcBef>
-              <a:spcAft>
-                <a:spcPts val="0"/>
-              </a:spcAft>
-            </a:pPr>
-            <a:r>
-              <a:rPr sz="1150" b="0" i="0">
-                <a:solidFill>
-                  <a:srgbClr val="555555"/>
-                </a:solidFill>
-                <a:latin typeface="Arial"/>
-              </a:rPr>
-              <a:t>82.0% once it arrives, using the sender’s own predicted label.</a:t>
-            </a:r>
-          </a:p>
-        </p:txBody>
-      </p:sp>
       <p:cxnSp>
         <p:nvCxnSpPr>
-          <p:cNvPr id="17" name="Connector 16"/>
+          <p:cNvPr id="25" name="Connector 24"/>
           <p:cNvCxnSpPr/>
           <p:nvPr/>
         </p:nvCxnSpPr>
@@ -6592,7 +7247,7 @@
       </p:cxnSp>
       <p:sp>
         <p:nvSpPr>
-          <p:cNvPr id="18" name="TextBox 17"/>
+          <p:cNvPr id="26" name="TextBox 25"/>
           <p:cNvSpPr txBox="1"/>
           <p:nvPr/>
         </p:nvSpPr>
@@ -6637,7 +7292,7 @@
       </p:sp>
       <p:sp>
         <p:nvSpPr>
-          <p:cNvPr id="19" name="TextBox 18"/>
+          <p:cNvPr id="27" name="TextBox 26"/>
           <p:cNvSpPr txBox="1"/>
           <p:nvPr/>
         </p:nvSpPr>
@@ -6675,14 +7330,14 @@
                 </a:solidFill>
                 <a:latin typeface="Arial"/>
               </a:rPr>
-              <a:t>Settings, image format, sending the answer, rebuilding the picture</a:t>
-            </a:r>
-          </a:p>
-        </p:txBody>
-      </p:sp>
-      <p:sp>
-        <p:nvSpPr>
-          <p:cNvPr id="20" name="TextBox 19"/>
+              <a:t>Peak-to-average power ratio, measured on the numbers we send</a:t>
+            </a:r>
+          </a:p>
+        </p:txBody>
+      </p:sp>
+      <p:sp>
+        <p:nvSpPr>
+          <p:cNvPr id="28" name="TextBox 27"/>
           <p:cNvSpPr txBox="1"/>
           <p:nvPr/>
         </p:nvSpPr>
@@ -6791,7 +7446,7 @@
                 </a:solidFill>
                 <a:latin typeface="Arial"/>
               </a:rPr>
-              <a:t>Why the digital line breaks where it does</a:t>
+              <a:t>Four controls on the digital system</a:t>
             </a:r>
           </a:p>
         </p:txBody>
@@ -6839,8 +7494,8 @@
         </p:nvSpPr>
         <p:spPr>
           <a:xfrm>
-            <a:off x="658368" y="1280160"/>
-            <a:ext cx="5669280" cy="292608"/>
+            <a:off x="566928" y="1225296"/>
+            <a:ext cx="11018520" cy="310896"/>
           </a:xfrm>
           <a:prstGeom prst="rect">
             <a:avLst/>
@@ -6853,7 +7508,7 @@
           </a:bodyPr>
           <a:lstStyle/>
           <a:p>
-            <a:pPr algn="l">
+            <a:pPr algn="ctr">
               <a:lnSpc>
                 <a:spcPct val="100000"/>
               </a:lnSpc>
@@ -6871,14 +7526,14 @@
                 </a:solidFill>
                 <a:latin typeface="Arial"/>
               </a:rPr>
-              <a:t>The score only moves when the pictures start or stop arriving.</a:t>
+              <a:t>Each panel takes one design choice away and shows what it was worth.</a:t>
             </a:r>
           </a:p>
         </p:txBody>
       </p:sp>
       <p:pic>
         <p:nvPicPr>
-          <p:cNvPr id="5" name="Picture 4" descr="08_delivery_coverage.png"/>
+          <p:cNvPr id="5" name="Picture 4" descr="07_secondary_controls.png"/>
           <p:cNvPicPr>
             <a:picLocks noChangeAspect="1"/>
           </p:cNvPicPr>
@@ -6892,8 +7547,8 @@
         </p:blipFill>
         <p:spPr>
           <a:xfrm>
-            <a:off x="786384" y="1682496"/>
-            <a:ext cx="4858041" cy="3749039"/>
+            <a:off x="4388307" y="1609344"/>
+            <a:ext cx="3415079" cy="2487168"/>
           </a:xfrm>
           <a:prstGeom prst="rect">
             <a:avLst/>
@@ -6908,8 +7563,8 @@
         </p:nvSpPr>
         <p:spPr>
           <a:xfrm>
-            <a:off x="6729984" y="1737360"/>
-            <a:ext cx="1463039" cy="274320"/>
+            <a:off x="658368" y="4315968"/>
+            <a:ext cx="1828800" cy="274320"/>
           </a:xfrm>
           <a:prstGeom prst="rect">
             <a:avLst/>
@@ -6934,13 +7589,13 @@
               </a:spcAft>
             </a:pPr>
             <a:r>
-              <a:rPr sz="1150" b="1" i="0">
+              <a:rPr sz="1200" b="1" i="0">
                 <a:solidFill>
                   <a:srgbClr val="111111"/>
                 </a:solidFill>
                 <a:latin typeface="Arial"/>
               </a:rPr>
-              <a:t>The 10% is a rule</a:t>
+              <a:t>Fixed settings</a:t>
             </a:r>
           </a:p>
         </p:txBody>
@@ -6953,8 +7608,8 @@
         </p:nvSpPr>
         <p:spPr>
           <a:xfrm>
-            <a:off x="8284464" y="1719072"/>
-            <a:ext cx="3255263" cy="1097280"/>
+            <a:off x="2578608" y="4297680"/>
+            <a:ext cx="8823960" cy="402336"/>
           </a:xfrm>
           <a:prstGeom prst="rect">
             <a:avLst/>
@@ -6979,13 +7634,13 @@
               </a:spcAft>
             </a:pPr>
             <a:r>
-              <a:rPr sz="1100" b="0" i="0">
+              <a:rPr sz="1150" b="0" i="0">
                 <a:solidFill>
                   <a:srgbClr val="555555"/>
                 </a:solidFill>
                 <a:latin typeface="Arial"/>
               </a:rPr>
-              <a:t>Every picture takes the same fallback answer when delivery fails. On an evenly split set that is right 100 times in 1,000.</a:t>
+              <a:t>Sits at the fallback floor until +6 dB, then reaches 89.0%. Choosing settings per strength buys real reach.</a:t>
             </a:r>
           </a:p>
         </p:txBody>
@@ -6998,8 +7653,8 @@
         </p:nvCxnSpPr>
         <p:spPr>
           <a:xfrm>
-            <a:off x="6729984" y="2761488"/>
-            <a:ext cx="4809744" cy="0"/>
+            <a:off x="658368" y="4645152"/>
+            <a:ext cx="10744200" cy="0"/>
           </a:xfrm>
           <a:prstGeom prst="line">
             <a:avLst/>
@@ -7033,8 +7688,8 @@
         </p:nvSpPr>
         <p:spPr>
           <a:xfrm>
-            <a:off x="6729984" y="2889504"/>
-            <a:ext cx="1463039" cy="274320"/>
+            <a:off x="658368" y="4773168"/>
+            <a:ext cx="1828800" cy="274320"/>
           </a:xfrm>
           <a:prstGeom prst="rect">
             <a:avLst/>
@@ -7059,13 +7714,13 @@
               </a:spcAft>
             </a:pPr>
             <a:r>
-              <a:rPr sz="1150" b="1" i="0">
+              <a:rPr sz="1200" b="1" i="0">
                 <a:solidFill>
                   <a:srgbClr val="111111"/>
                 </a:solidFill>
                 <a:latin typeface="Arial"/>
               </a:rPr>
-              <a:t>Outages are part of it</a:t>
+              <a:t>Fixed modulation</a:t>
             </a:r>
           </a:p>
         </p:txBody>
@@ -7078,8 +7733,8 @@
         </p:nvSpPr>
         <p:spPr>
           <a:xfrm>
-            <a:off x="8284464" y="2871216"/>
-            <a:ext cx="3255263" cy="1097280"/>
+            <a:off x="2578608" y="4754880"/>
+            <a:ext cx="8823960" cy="402336"/>
           </a:xfrm>
           <a:prstGeom prst="rect">
             <a:avLst/>
@@ -7104,13 +7759,13 @@
               </a:spcAft>
             </a:pPr>
             <a:r>
-              <a:rPr sz="1100" b="0" i="0">
+              <a:rPr sz="1150" b="0" i="0">
                 <a:solidFill>
                   <a:srgbClr val="555555"/>
                 </a:solidFill>
                 <a:latin typeface="Arial"/>
               </a:rPr>
-              <a:t>We report how many pictures arrived next to how many we got right, so a broken link is distinguishable from a wrong guess.</a:t>
+              <a:t>Starts working later than adaptive selection, and settles near 88.7%.</a:t>
             </a:r>
           </a:p>
         </p:txBody>
@@ -7123,8 +7778,8 @@
         </p:nvCxnSpPr>
         <p:spPr>
           <a:xfrm>
-            <a:off x="6729984" y="3913632"/>
-            <a:ext cx="4809744" cy="0"/>
+            <a:off x="658368" y="5102352"/>
+            <a:ext cx="10744200" cy="0"/>
           </a:xfrm>
           <a:prstGeom prst="line">
             <a:avLst/>
@@ -7158,8 +7813,8 @@
         </p:nvSpPr>
         <p:spPr>
           <a:xfrm>
-            <a:off x="6729984" y="4041648"/>
-            <a:ext cx="1463039" cy="274320"/>
+            <a:off x="658368" y="5230368"/>
+            <a:ext cx="1828800" cy="274320"/>
           </a:xfrm>
           <a:prstGeom prst="rect">
             <a:avLst/>
@@ -7184,13 +7839,13 @@
               </a:spcAft>
             </a:pPr>
             <a:r>
-              <a:rPr sz="1150" b="1" i="0">
+              <a:rPr sz="1200" b="1" i="0">
                 <a:solidFill>
                   <a:srgbClr val="111111"/>
                 </a:solidFill>
                 <a:latin typeface="Arial"/>
               </a:rPr>
-              <a:t>Learned always answers</a:t>
+              <a:t>JPEG secondary curve</a:t>
             </a:r>
           </a:p>
         </p:txBody>
@@ -7203,8 +7858,8 @@
         </p:nvSpPr>
         <p:spPr>
           <a:xfrm>
-            <a:off x="8284464" y="4023360"/>
-            <a:ext cx="3255263" cy="1097280"/>
+            <a:off x="2578608" y="5212080"/>
+            <a:ext cx="8823960" cy="402336"/>
           </a:xfrm>
           <a:prstGeom prst="rect">
             <a:avLst/>
@@ -7229,13 +7884,13 @@
               </a:spcAft>
             </a:pPr>
             <a:r>
-              <a:rPr sz="1100" b="0" i="0">
+              <a:rPr sz="1150" b="0" i="0">
                 <a:solidFill>
                   <a:srgbClr val="555555"/>
                 </a:solidFill>
                 <a:latin typeface="Arial"/>
               </a:rPr>
-              <a:t>Its rules promise a label at every strength, so its curve never flattens against a floor.</a:t>
+              <a:t>88.6% at +18 dB, with a full outage at +9 dB.</a:t>
             </a:r>
           </a:p>
         </p:txBody>
@@ -7248,13 +7903,13 @@
         </p:nvCxnSpPr>
         <p:spPr>
           <a:xfrm>
-            <a:off x="566928" y="6419088"/>
-            <a:ext cx="11018520" cy="0"/>
+            <a:off x="658368" y="5559552"/>
+            <a:ext cx="10744200" cy="0"/>
           </a:xfrm>
           <a:prstGeom prst="line">
             <a:avLst/>
           </a:prstGeom>
-          <a:ln w="8890">
+          <a:ln w="6350">
             <a:solidFill>
               <a:srgbClr val="D9D9D9"/>
             </a:solidFill>
@@ -7283,6 +7938,131 @@
         </p:nvSpPr>
         <p:spPr>
           <a:xfrm>
+            <a:off x="658368" y="5687568"/>
+            <a:ext cx="1828800" cy="274320"/>
+          </a:xfrm>
+          <a:prstGeom prst="rect">
+            <a:avLst/>
+          </a:prstGeom>
+          <a:noFill/>
+        </p:spPr>
+        <p:txBody>
+          <a:bodyPr wrap="square" lIns="45720" rIns="45720" anchor="t">
+            <a:spAutoFit/>
+          </a:bodyPr>
+          <a:lstStyle/>
+          <a:p>
+            <a:pPr algn="l">
+              <a:lnSpc>
+                <a:spcPct val="100000"/>
+              </a:lnSpc>
+              <a:spcBef>
+                <a:spcPts val="0"/>
+              </a:spcBef>
+              <a:spcAft>
+                <a:spcPts val="0"/>
+              </a:spcAft>
+            </a:pPr>
+            <a:r>
+              <a:rPr sz="1200" b="1" i="0">
+                <a:solidFill>
+                  <a:srgbClr val="111111"/>
+                </a:solidFill>
+                <a:latin typeface="Arial"/>
+              </a:rPr>
+              <a:t>Sending the answer</a:t>
+            </a:r>
+          </a:p>
+        </p:txBody>
+      </p:sp>
+      <p:sp>
+        <p:nvSpPr>
+          <p:cNvPr id="16" name="TextBox 15"/>
+          <p:cNvSpPr txBox="1"/>
+          <p:nvPr/>
+        </p:nvSpPr>
+        <p:spPr>
+          <a:xfrm>
+            <a:off x="2578608" y="5669280"/>
+            <a:ext cx="8823960" cy="402336"/>
+          </a:xfrm>
+          <a:prstGeom prst="rect">
+            <a:avLst/>
+          </a:prstGeom>
+          <a:noFill/>
+        </p:spPr>
+        <p:txBody>
+          <a:bodyPr wrap="square" lIns="45720" rIns="45720" anchor="t">
+            <a:spAutoFit/>
+          </a:bodyPr>
+          <a:lstStyle/>
+          <a:p>
+            <a:pPr algn="l">
+              <a:lnSpc>
+                <a:spcPct val="100000"/>
+              </a:lnSpc>
+              <a:spcBef>
+                <a:spcPts val="0"/>
+              </a:spcBef>
+              <a:spcAft>
+                <a:spcPts val="0"/>
+              </a:spcAft>
+            </a:pPr>
+            <a:r>
+              <a:rPr sz="1150" b="0" i="0">
+                <a:solidFill>
+                  <a:srgbClr val="555555"/>
+                </a:solidFill>
+                <a:latin typeface="Arial"/>
+              </a:rPr>
+              <a:t>82.0% once it arrives, using the sender’s own predicted label.</a:t>
+            </a:r>
+          </a:p>
+        </p:txBody>
+      </p:sp>
+      <p:cxnSp>
+        <p:nvCxnSpPr>
+          <p:cNvPr id="17" name="Connector 16"/>
+          <p:cNvCxnSpPr/>
+          <p:nvPr/>
+        </p:nvCxnSpPr>
+        <p:spPr>
+          <a:xfrm>
+            <a:off x="566928" y="6419088"/>
+            <a:ext cx="11018520" cy="0"/>
+          </a:xfrm>
+          <a:prstGeom prst="line">
+            <a:avLst/>
+          </a:prstGeom>
+          <a:ln w="8890">
+            <a:solidFill>
+              <a:srgbClr val="D9D9D9"/>
+            </a:solidFill>
+          </a:ln>
+        </p:spPr>
+        <p:style>
+          <a:lnRef idx="2">
+            <a:schemeClr val="accent1"/>
+          </a:lnRef>
+          <a:fillRef idx="0">
+            <a:schemeClr val="accent1"/>
+          </a:fillRef>
+          <a:effectRef idx="1">
+            <a:schemeClr val="accent1"/>
+          </a:effectRef>
+          <a:fontRef idx="minor">
+            <a:schemeClr val="tx1"/>
+          </a:fontRef>
+        </p:style>
+      </p:cxnSp>
+      <p:sp>
+        <p:nvSpPr>
+          <p:cNvPr id="18" name="TextBox 17"/>
+          <p:cNvSpPr txBox="1"/>
+          <p:nvPr/>
+        </p:nvSpPr>
+        <p:spPr>
+          <a:xfrm>
             <a:off x="566928" y="6510528"/>
             <a:ext cx="3063240" cy="164592"/>
           </a:xfrm>
@@ -7315,14 +8095,14 @@
                 </a:solidFill>
                 <a:latin typeface="Arial"/>
               </a:rPr>
-              <a:t>Rubric: Analytical Skills, Results</a:t>
-            </a:r>
-          </a:p>
-        </p:txBody>
-      </p:sp>
-      <p:sp>
-        <p:nvSpPr>
-          <p:cNvPr id="16" name="TextBox 15"/>
+              <a:t>Rubric: Results, Analytical Skills</a:t>
+            </a:r>
+          </a:p>
+        </p:txBody>
+      </p:sp>
+      <p:sp>
+        <p:nvSpPr>
+          <p:cNvPr id="19" name="TextBox 18"/>
           <p:cNvSpPr txBox="1"/>
           <p:nvPr/>
         </p:nvSpPr>
@@ -7360,14 +8140,14 @@
                 </a:solidFill>
                 <a:latin typeface="Arial"/>
               </a:rPr>
-              <a:t>When pictures stop arriving, the score drops to match</a:t>
-            </a:r>
-          </a:p>
-        </p:txBody>
-      </p:sp>
-      <p:sp>
-        <p:nvSpPr>
-          <p:cNvPr id="17" name="TextBox 16"/>
+              <a:t>Settings, image format, sending the answer, rebuilding the picture</a:t>
+            </a:r>
+          </a:p>
+        </p:txBody>
+      </p:sp>
+      <p:sp>
+        <p:nvSpPr>
+          <p:cNvPr id="20" name="TextBox 19"/>
           <p:cNvSpPr txBox="1"/>
           <p:nvPr/>
         </p:nvSpPr>
@@ -14139,7 +14919,7 @@
                 </a:solidFill>
                 <a:latin typeface="Arial"/>
               </a:rPr>
-              <a:t>A digital arm sends learned features through the same error-correction code and radio settings, using the same amount of radio time. It tells “knows the task” apart from “codes both at once” inside one experiment.</a:t>
+              <a:t>A second system sends learned features through the same error-correction code and radio settings, using the same amount of radio time. It tells “knows the task” apart from “codes both at once” inside one experiment.</a:t>
             </a:r>
           </a:p>
         </p:txBody>
@@ -25062,7 +25842,7 @@
                 </a:solidFill>
                 <a:latin typeface="Arial"/>
               </a:rPr>
-              <a:t>What happens when we quarter the radio time</a:t>
+              <a:t>Why the digital line breaks where it does</a:t>
             </a:r>
           </a:p>
         </p:txBody>
@@ -25110,8 +25890,8 @@
         </p:nvSpPr>
         <p:spPr>
           <a:xfrm>
-            <a:off x="566928" y="1225296"/>
-            <a:ext cx="11018520" cy="310896"/>
+            <a:off x="658368" y="1280160"/>
+            <a:ext cx="5669280" cy="292608"/>
           </a:xfrm>
           <a:prstGeom prst="rect">
             <a:avLst/>
@@ -25124,32 +25904,32 @@
           </a:bodyPr>
           <a:lstStyle/>
           <a:p>
-            <a:pPr algn="ctr">
-              <a:lnSpc>
-                <a:spcPct val="100000"/>
-              </a:lnSpc>
-              <a:spcBef>
-                <a:spcPts val="0"/>
-              </a:spcBef>
-              <a:spcAft>
-                <a:spcPts val="0"/>
-              </a:spcAft>
-            </a:pPr>
-            <a:r>
-              <a:rPr sz="1400" b="1" i="0">
+            <a:pPr algn="l">
+              <a:lnSpc>
+                <a:spcPct val="100000"/>
+              </a:lnSpc>
+              <a:spcBef>
+                <a:spcPts val="0"/>
+              </a:spcBef>
+              <a:spcAft>
+                <a:spcPts val="0"/>
+              </a:spcAft>
+            </a:pPr>
+            <a:r>
+              <a:rPr sz="1300" b="1" i="0">
                 <a:solidFill>
                   <a:srgbClr val="111111"/>
                 </a:solidFill>
                 <a:latin typeface="Arial"/>
               </a:rPr>
-              <a:t>On a quarter of the radio time, the digital system loses far more at the weak end than the learned one does.</a:t>
+              <a:t>The score only moves when the pictures start or stop arriving.</a:t>
             </a:r>
           </a:p>
         </p:txBody>
       </p:sp>
       <p:pic>
         <p:nvPicPr>
-          <p:cNvPr id="5" name="Picture 4" descr="03_bandwidth_efficiency.png"/>
+          <p:cNvPr id="5" name="Picture 4" descr="08_delivery_coverage.png"/>
           <p:cNvPicPr>
             <a:picLocks noChangeAspect="1"/>
           </p:cNvPicPr>
@@ -25163,8 +25943,8 @@
         </p:blipFill>
         <p:spPr>
           <a:xfrm>
-            <a:off x="2802672" y="1645920"/>
-            <a:ext cx="6586350" cy="2670047"/>
+            <a:off x="786384" y="1682496"/>
+            <a:ext cx="4858041" cy="3749039"/>
           </a:xfrm>
           <a:prstGeom prst="rect">
             <a:avLst/>
@@ -25179,8 +25959,8 @@
         </p:nvSpPr>
         <p:spPr>
           <a:xfrm>
-            <a:off x="658368" y="4572000"/>
-            <a:ext cx="1828800" cy="274320"/>
+            <a:off x="6729984" y="1737360"/>
+            <a:ext cx="1463039" cy="274320"/>
           </a:xfrm>
           <a:prstGeom prst="rect">
             <a:avLst/>
@@ -25205,13 +25985,13 @@
               </a:spcAft>
             </a:pPr>
             <a:r>
-              <a:rPr sz="1200" b="1" i="0">
+              <a:rPr sz="1150" b="1" i="0">
                 <a:solidFill>
                   <a:srgbClr val="111111"/>
                 </a:solidFill>
                 <a:latin typeface="Arial"/>
               </a:rPr>
-              <a:t>Weak signal</a:t>
+              <a:t>The 10% is a rule</a:t>
             </a:r>
           </a:p>
         </p:txBody>
@@ -25224,8 +26004,8 @@
         </p:nvSpPr>
         <p:spPr>
           <a:xfrm>
-            <a:off x="2578608" y="4553712"/>
-            <a:ext cx="8823960" cy="402336"/>
+            <a:off x="8284464" y="1719072"/>
+            <a:ext cx="3255263" cy="1097280"/>
           </a:xfrm>
           <a:prstGeom prst="rect">
             <a:avLst/>
@@ -25250,13 +26030,13 @@
               </a:spcAft>
             </a:pPr>
             <a:r>
-              <a:rPr sz="1150" b="0" i="0">
+              <a:rPr sz="1100" b="0" i="0">
                 <a:solidFill>
                   <a:srgbClr val="555555"/>
                 </a:solidFill>
                 <a:latin typeface="Arial"/>
               </a:rPr>
-              <a:t>Going from half to quarter rate drops the learned system from 72.8% to 49.4%.</a:t>
+              <a:t>Every picture takes the same fallback answer when delivery fails. On an evenly split set that is right 100 times in 1,000.</a:t>
             </a:r>
           </a:p>
         </p:txBody>
@@ -25269,8 +26049,8 @@
         </p:nvCxnSpPr>
         <p:spPr>
           <a:xfrm>
-            <a:off x="658368" y="4901184"/>
-            <a:ext cx="10744200" cy="0"/>
+            <a:off x="6729984" y="2761488"/>
+            <a:ext cx="4809744" cy="0"/>
           </a:xfrm>
           <a:prstGeom prst="line">
             <a:avLst/>
@@ -25304,8 +26084,8 @@
         </p:nvSpPr>
         <p:spPr>
           <a:xfrm>
-            <a:off x="658368" y="5029200"/>
-            <a:ext cx="1828800" cy="274320"/>
+            <a:off x="6729984" y="2889504"/>
+            <a:ext cx="1463039" cy="274320"/>
           </a:xfrm>
           <a:prstGeom prst="rect">
             <a:avLst/>
@@ -25330,13 +26110,13 @@
               </a:spcAft>
             </a:pPr>
             <a:r>
-              <a:rPr sz="1200" b="1" i="0">
+              <a:rPr sz="1150" b="1" i="0">
                 <a:solidFill>
                   <a:srgbClr val="111111"/>
                 </a:solidFill>
                 <a:latin typeface="Arial"/>
               </a:rPr>
-              <a:t>At 0 dB, quarter rate</a:t>
+              <a:t>Outages are part of it</a:t>
             </a:r>
           </a:p>
         </p:txBody>
@@ -25349,8 +26129,8 @@
         </p:nvSpPr>
         <p:spPr>
           <a:xfrm>
-            <a:off x="2578608" y="5010912"/>
-            <a:ext cx="8823960" cy="402336"/>
+            <a:off x="8284464" y="2871216"/>
+            <a:ext cx="3255263" cy="1097280"/>
           </a:xfrm>
           <a:prstGeom prst="rect">
             <a:avLst/>
@@ -25375,13 +26155,13 @@
               </a:spcAft>
             </a:pPr>
             <a:r>
-              <a:rPr sz="1150" b="0" i="0">
+              <a:rPr sz="1100" b="0" i="0">
                 <a:solidFill>
                   <a:srgbClr val="555555"/>
                 </a:solidFill>
                 <a:latin typeface="Arial"/>
               </a:rPr>
-              <a:t>Learned 78.7% against digital 69.4%. The learned system is still ahead.</a:t>
+              <a:t>We report how many pictures arrived next to how many we got right, so a broken link is distinguishable from a wrong guess.</a:t>
             </a:r>
           </a:p>
         </p:txBody>
@@ -25394,8 +26174,8 @@
         </p:nvCxnSpPr>
         <p:spPr>
           <a:xfrm>
-            <a:off x="658368" y="5358384"/>
-            <a:ext cx="10744200" cy="0"/>
+            <a:off x="6729984" y="3913632"/>
+            <a:ext cx="4809744" cy="0"/>
           </a:xfrm>
           <a:prstGeom prst="line">
             <a:avLst/>
@@ -25429,8 +26209,8 @@
         </p:nvSpPr>
         <p:spPr>
           <a:xfrm>
-            <a:off x="658368" y="5486400"/>
-            <a:ext cx="1828800" cy="274320"/>
+            <a:off x="6729984" y="4041648"/>
+            <a:ext cx="1463039" cy="274320"/>
           </a:xfrm>
           <a:prstGeom prst="rect">
             <a:avLst/>
@@ -25455,13 +26235,13 @@
               </a:spcAft>
             </a:pPr>
             <a:r>
-              <a:rPr sz="1200" b="1" i="0">
+              <a:rPr sz="1150" b="1" i="0">
                 <a:solidFill>
                   <a:srgbClr val="111111"/>
                 </a:solidFill>
                 <a:latin typeface="Arial"/>
               </a:rPr>
-              <a:t>Catches up, then slips</a:t>
+              <a:t>Learned always answers</a:t>
             </a:r>
           </a:p>
         </p:txBody>
@@ -25474,8 +26254,8 @@
         </p:nvSpPr>
         <p:spPr>
           <a:xfrm>
-            <a:off x="2578608" y="5468112"/>
-            <a:ext cx="8823960" cy="402336"/>
+            <a:off x="8284464" y="4023360"/>
+            <a:ext cx="3255263" cy="1097280"/>
           </a:xfrm>
           <a:prstGeom prst="rect">
             <a:avLst/>
@@ -25500,13 +26280,13 @@
               </a:spcAft>
             </a:pPr>
             <a:r>
-              <a:rPr sz="1150" b="0" i="0">
+              <a:rPr sz="1100" b="0" i="0">
                 <a:solidFill>
                   <a:srgbClr val="555555"/>
                 </a:solidFill>
                 <a:latin typeface="Arial"/>
               </a:rPr>
-              <a:t>Digital passes learned at the +4 dB point, loses the lead at +9 dB, then goes ahead again.</a:t>
+              <a:t>Its rules promise a label at every strength, so its curve never flattens against a floor.</a:t>
             </a:r>
           </a:p>
         </p:txBody>
@@ -25586,7 +26366,7 @@
                 </a:solidFill>
                 <a:latin typeface="Arial"/>
               </a:rPr>
-              <a:t>Rubric: Results, Analytical Skills</a:t>
+              <a:t>Rubric: Analytical Skills, Results</a:t>
             </a:r>
           </a:p>
         </p:txBody>
@@ -25631,7 +26411,7 @@
                 </a:solidFill>
                 <a:latin typeface="Arial"/>
               </a:rPr>
-              <a:t>Quarter rate against half rate · compare within each panel</a:t>
+              <a:t>When pictures stop arriving, the score drops to match</a:t>
             </a:r>
           </a:p>
         </p:txBody>
@@ -25747,7 +26527,7 @@
                 </a:solidFill>
                 <a:latin typeface="Arial"/>
               </a:rPr>
-              <a:t>Training across signal strengths instead of one</a:t>
+              <a:t>What happens when we quarter the radio time</a:t>
             </a:r>
           </a:p>
         </p:txBody>
@@ -25827,14 +26607,14 @@
                 </a:solidFill>
                 <a:latin typeface="Arial"/>
               </a:rPr>
-              <a:t>Picking the training signal strength at random each time lifts the whole weak end of the line.</a:t>
+              <a:t>On a quarter of the radio time, the digital system loses far more at the weak end than the learned one does.</a:t>
             </a:r>
           </a:p>
         </p:txBody>
       </p:sp>
       <p:pic>
         <p:nvPicPr>
-          <p:cNvPr id="5" name="Picture 4" descr="04_training_robustness.png"/>
+          <p:cNvPr id="5" name="Picture 4" descr="03_bandwidth_efficiency.png"/>
           <p:cNvPicPr>
             <a:picLocks noChangeAspect="1"/>
           </p:cNvPicPr>
@@ -25848,8 +26628,8 @@
         </p:blipFill>
         <p:spPr>
           <a:xfrm>
-            <a:off x="3237160" y="1645920"/>
-            <a:ext cx="5717374" cy="2889504"/>
+            <a:off x="2802672" y="1645920"/>
+            <a:ext cx="6586350" cy="2670047"/>
           </a:xfrm>
           <a:prstGeom prst="rect">
             <a:avLst/>
@@ -25858,46 +26638,46 @@
       </p:pic>
       <p:sp>
         <p:nvSpPr>
-          <p:cNvPr id="6" name="Rectangle 5"/>
-          <p:cNvSpPr/>
-          <p:nvPr/>
-        </p:nvSpPr>
-        <p:spPr>
-          <a:xfrm>
-            <a:off x="2011680" y="4700016"/>
-            <a:ext cx="7680960" cy="384048"/>
-          </a:xfrm>
-          <a:prstGeom prst="rect">
-            <a:avLst/>
-          </a:prstGeom>
-          <a:solidFill>
-            <a:srgbClr val="F3F3F3"/>
-          </a:solidFill>
-          <a:ln w="11430">
-            <a:solidFill>
-              <a:srgbClr val="D9D9D9"/>
-            </a:solidFill>
-          </a:ln>
-        </p:spPr>
-        <p:style>
-          <a:lnRef idx="1">
-            <a:schemeClr val="accent1"/>
-          </a:lnRef>
-          <a:fillRef idx="3">
-            <a:schemeClr val="accent1"/>
-          </a:fillRef>
-          <a:effectRef idx="2">
-            <a:schemeClr val="accent1"/>
-          </a:effectRef>
-          <a:fontRef idx="minor">
-            <a:schemeClr val="lt1"/>
-          </a:fontRef>
-        </p:style>
-        <p:txBody>
-          <a:bodyPr rtlCol="0" anchor="ctr"/>
-          <a:lstStyle/>
-          <a:p>
-            <a:pPr algn="ctr"/>
+          <p:cNvPr id="6" name="TextBox 5"/>
+          <p:cNvSpPr txBox="1"/>
+          <p:nvPr/>
+        </p:nvSpPr>
+        <p:spPr>
+          <a:xfrm>
+            <a:off x="658368" y="4572000"/>
+            <a:ext cx="1828800" cy="274320"/>
+          </a:xfrm>
+          <a:prstGeom prst="rect">
+            <a:avLst/>
+          </a:prstGeom>
+          <a:noFill/>
+        </p:spPr>
+        <p:txBody>
+          <a:bodyPr wrap="square" lIns="45720" rIns="45720" anchor="t">
+            <a:spAutoFit/>
+          </a:bodyPr>
+          <a:lstStyle/>
+          <a:p>
+            <a:pPr algn="l">
+              <a:lnSpc>
+                <a:spcPct val="100000"/>
+              </a:lnSpc>
+              <a:spcBef>
+                <a:spcPts val="0"/>
+              </a:spcBef>
+              <a:spcAft>
+                <a:spcPts val="0"/>
+              </a:spcAft>
+            </a:pPr>
+            <a:r>
+              <a:rPr sz="1200" b="1" i="0">
+                <a:solidFill>
+                  <a:srgbClr val="111111"/>
+                </a:solidFill>
+                <a:latin typeface="Arial"/>
+              </a:rPr>
+              <a:t>Weak signal</a:t>
+            </a:r>
           </a:p>
         </p:txBody>
       </p:sp>
@@ -25909,16 +26689,16 @@
         </p:nvSpPr>
         <p:spPr>
           <a:xfrm>
-            <a:off x="2139696" y="4800600"/>
-            <a:ext cx="2432304" cy="219456"/>
-          </a:xfrm>
-          <a:prstGeom prst="rect">
-            <a:avLst/>
-          </a:prstGeom>
-          <a:noFill/>
-        </p:spPr>
-        <p:txBody>
-          <a:bodyPr wrap="square" lIns="45720" rIns="45720" anchor="ctr">
+            <a:off x="2578608" y="4553712"/>
+            <a:ext cx="8823960" cy="402336"/>
+          </a:xfrm>
+          <a:prstGeom prst="rect">
+            <a:avLst/>
+          </a:prstGeom>
+          <a:noFill/>
+        </p:spPr>
+        <p:txBody>
+          <a:bodyPr wrap="square" lIns="45720" rIns="45720" anchor="t">
             <a:spAutoFit/>
           </a:bodyPr>
           <a:lstStyle/>
@@ -25935,887 +26715,32 @@
               </a:spcAft>
             </a:pPr>
             <a:r>
-              <a:rPr sz="1050" b="1" i="0">
-                <a:solidFill>
-                  <a:srgbClr val="111111"/>
-                </a:solidFill>
-                <a:latin typeface="Arial"/>
-              </a:rPr>
-              <a:t>Training</a:t>
-            </a:r>
-          </a:p>
-        </p:txBody>
-      </p:sp>
-      <p:sp>
-        <p:nvSpPr>
-          <p:cNvPr id="8" name="TextBox 7"/>
-          <p:cNvSpPr txBox="1"/>
-          <p:nvPr/>
-        </p:nvSpPr>
-        <p:spPr>
-          <a:xfrm>
-            <a:off x="4791455" y="4800600"/>
-            <a:ext cx="786384" cy="219456"/>
-          </a:xfrm>
-          <a:prstGeom prst="rect">
-            <a:avLst/>
-          </a:prstGeom>
-          <a:noFill/>
-        </p:spPr>
-        <p:txBody>
-          <a:bodyPr wrap="square" lIns="45720" rIns="45720" anchor="ctr">
-            <a:spAutoFit/>
-          </a:bodyPr>
-          <a:lstStyle/>
-          <a:p>
-            <a:pPr algn="ctr">
-              <a:lnSpc>
-                <a:spcPct val="100000"/>
-              </a:lnSpc>
-              <a:spcBef>
-                <a:spcPts val="0"/>
-              </a:spcBef>
-              <a:spcAft>
-                <a:spcPts val="0"/>
-              </a:spcAft>
-            </a:pPr>
-            <a:r>
-              <a:rPr sz="1050" b="1" i="0">
-                <a:solidFill>
-                  <a:srgbClr val="111111"/>
-                </a:solidFill>
-                <a:latin typeface="Arial"/>
-              </a:rPr>
-              <a:t>−8 dB</a:t>
-            </a:r>
-          </a:p>
-        </p:txBody>
-      </p:sp>
-      <p:sp>
-        <p:nvSpPr>
-          <p:cNvPr id="9" name="TextBox 8"/>
-          <p:cNvSpPr txBox="1"/>
-          <p:nvPr/>
-        </p:nvSpPr>
-        <p:spPr>
-          <a:xfrm>
-            <a:off x="5797296" y="4800600"/>
-            <a:ext cx="786384" cy="219456"/>
-          </a:xfrm>
-          <a:prstGeom prst="rect">
-            <a:avLst/>
-          </a:prstGeom>
-          <a:noFill/>
-        </p:spPr>
-        <p:txBody>
-          <a:bodyPr wrap="square" lIns="45720" rIns="45720" anchor="ctr">
-            <a:spAutoFit/>
-          </a:bodyPr>
-          <a:lstStyle/>
-          <a:p>
-            <a:pPr algn="ctr">
-              <a:lnSpc>
-                <a:spcPct val="100000"/>
-              </a:lnSpc>
-              <a:spcBef>
-                <a:spcPts val="0"/>
-              </a:spcBef>
-              <a:spcAft>
-                <a:spcPts val="0"/>
-              </a:spcAft>
-            </a:pPr>
-            <a:r>
-              <a:rPr sz="1050" b="1" i="0">
-                <a:solidFill>
-                  <a:srgbClr val="111111"/>
-                </a:solidFill>
-                <a:latin typeface="Arial"/>
-              </a:rPr>
-              <a:t>−4 dB</a:t>
-            </a:r>
-          </a:p>
-        </p:txBody>
-      </p:sp>
-      <p:sp>
-        <p:nvSpPr>
-          <p:cNvPr id="10" name="TextBox 9"/>
-          <p:cNvSpPr txBox="1"/>
-          <p:nvPr/>
-        </p:nvSpPr>
-        <p:spPr>
-          <a:xfrm>
-            <a:off x="6803136" y="4800600"/>
-            <a:ext cx="786384" cy="219456"/>
-          </a:xfrm>
-          <a:prstGeom prst="rect">
-            <a:avLst/>
-          </a:prstGeom>
-          <a:noFill/>
-        </p:spPr>
-        <p:txBody>
-          <a:bodyPr wrap="square" lIns="45720" rIns="45720" anchor="ctr">
-            <a:spAutoFit/>
-          </a:bodyPr>
-          <a:lstStyle/>
-          <a:p>
-            <a:pPr algn="ctr">
-              <a:lnSpc>
-                <a:spcPct val="100000"/>
-              </a:lnSpc>
-              <a:spcBef>
-                <a:spcPts val="0"/>
-              </a:spcBef>
-              <a:spcAft>
-                <a:spcPts val="0"/>
-              </a:spcAft>
-            </a:pPr>
-            <a:r>
-              <a:rPr sz="1050" b="1" i="0">
-                <a:solidFill>
-                  <a:srgbClr val="111111"/>
-                </a:solidFill>
-                <a:latin typeface="Arial"/>
-              </a:rPr>
-              <a:t>0 dB</a:t>
-            </a:r>
-          </a:p>
-        </p:txBody>
-      </p:sp>
-      <p:sp>
-        <p:nvSpPr>
-          <p:cNvPr id="11" name="TextBox 10"/>
-          <p:cNvSpPr txBox="1"/>
-          <p:nvPr/>
-        </p:nvSpPr>
-        <p:spPr>
-          <a:xfrm>
-            <a:off x="7808976" y="4800600"/>
-            <a:ext cx="786384" cy="219456"/>
-          </a:xfrm>
-          <a:prstGeom prst="rect">
-            <a:avLst/>
-          </a:prstGeom>
-          <a:noFill/>
-        </p:spPr>
-        <p:txBody>
-          <a:bodyPr wrap="square" lIns="45720" rIns="45720" anchor="ctr">
-            <a:spAutoFit/>
-          </a:bodyPr>
-          <a:lstStyle/>
-          <a:p>
-            <a:pPr algn="ctr">
-              <a:lnSpc>
-                <a:spcPct val="100000"/>
-              </a:lnSpc>
-              <a:spcBef>
-                <a:spcPts val="0"/>
-              </a:spcBef>
-              <a:spcAft>
-                <a:spcPts val="0"/>
-              </a:spcAft>
-            </a:pPr>
-            <a:r>
-              <a:rPr sz="1050" b="1" i="0">
-                <a:solidFill>
-                  <a:srgbClr val="111111"/>
-                </a:solidFill>
-                <a:latin typeface="Arial"/>
-              </a:rPr>
-              <a:t>+9 dB</a:t>
-            </a:r>
-          </a:p>
-        </p:txBody>
-      </p:sp>
-      <p:sp>
-        <p:nvSpPr>
-          <p:cNvPr id="12" name="TextBox 11"/>
-          <p:cNvSpPr txBox="1"/>
-          <p:nvPr/>
-        </p:nvSpPr>
-        <p:spPr>
-          <a:xfrm>
-            <a:off x="8814816" y="4800600"/>
-            <a:ext cx="786384" cy="219456"/>
-          </a:xfrm>
-          <a:prstGeom prst="rect">
-            <a:avLst/>
-          </a:prstGeom>
-          <a:noFill/>
-        </p:spPr>
-        <p:txBody>
-          <a:bodyPr wrap="square" lIns="45720" rIns="45720" anchor="ctr">
-            <a:spAutoFit/>
-          </a:bodyPr>
-          <a:lstStyle/>
-          <a:p>
-            <a:pPr algn="ctr">
-              <a:lnSpc>
-                <a:spcPct val="100000"/>
-              </a:lnSpc>
-              <a:spcBef>
-                <a:spcPts val="0"/>
-              </a:spcBef>
-              <a:spcAft>
-                <a:spcPts val="0"/>
-              </a:spcAft>
-            </a:pPr>
-            <a:r>
-              <a:rPr sz="1050" b="1" i="0">
-                <a:solidFill>
-                  <a:srgbClr val="111111"/>
-                </a:solidFill>
-                <a:latin typeface="Arial"/>
-              </a:rPr>
-              <a:t>+18 dB</a:t>
-            </a:r>
-          </a:p>
-        </p:txBody>
-      </p:sp>
-      <p:sp>
-        <p:nvSpPr>
-          <p:cNvPr id="13" name="Rectangle 12"/>
-          <p:cNvSpPr/>
-          <p:nvPr/>
-        </p:nvSpPr>
-        <p:spPr>
-          <a:xfrm>
-            <a:off x="2011680" y="5084064"/>
-            <a:ext cx="7680960" cy="420624"/>
-          </a:xfrm>
-          <a:prstGeom prst="rect">
-            <a:avLst/>
-          </a:prstGeom>
-          <a:solidFill>
-            <a:srgbClr val="F3F3F3"/>
-          </a:solidFill>
-          <a:ln w="11430">
-            <a:solidFill>
-              <a:srgbClr val="D9D9D9"/>
-            </a:solidFill>
-          </a:ln>
-        </p:spPr>
-        <p:style>
-          <a:lnRef idx="1">
-            <a:schemeClr val="accent1"/>
-          </a:lnRef>
-          <a:fillRef idx="3">
-            <a:schemeClr val="accent1"/>
-          </a:fillRef>
-          <a:effectRef idx="2">
-            <a:schemeClr val="accent1"/>
-          </a:effectRef>
-          <a:fontRef idx="minor">
-            <a:schemeClr val="lt1"/>
-          </a:fontRef>
-        </p:style>
-        <p:txBody>
-          <a:bodyPr rtlCol="0" anchor="ctr"/>
-          <a:lstStyle/>
-          <a:p>
-            <a:pPr algn="ctr"/>
-          </a:p>
-        </p:txBody>
-      </p:sp>
-      <p:sp>
-        <p:nvSpPr>
-          <p:cNvPr id="14" name="TextBox 13"/>
-          <p:cNvSpPr txBox="1"/>
-          <p:nvPr/>
-        </p:nvSpPr>
-        <p:spPr>
-          <a:xfrm>
-            <a:off x="2139696" y="5184648"/>
-            <a:ext cx="2432304" cy="256032"/>
-          </a:xfrm>
-          <a:prstGeom prst="rect">
-            <a:avLst/>
-          </a:prstGeom>
-          <a:noFill/>
-        </p:spPr>
-        <p:txBody>
-          <a:bodyPr wrap="square" lIns="45720" rIns="45720" anchor="ctr">
-            <a:spAutoFit/>
-          </a:bodyPr>
-          <a:lstStyle/>
-          <a:p>
-            <a:pPr algn="l">
-              <a:lnSpc>
-                <a:spcPct val="100000"/>
-              </a:lnSpc>
-              <a:spcBef>
-                <a:spcPts val="0"/>
-              </a:spcBef>
-              <a:spcAft>
-                <a:spcPts val="0"/>
-              </a:spcAft>
-            </a:pPr>
-            <a:r>
-              <a:rPr sz="1150" b="1" i="0">
-                <a:solidFill>
-                  <a:srgbClr val="111111"/>
-                </a:solidFill>
-                <a:latin typeface="Arial"/>
-              </a:rPr>
-              <a:t>Random each time</a:t>
-            </a:r>
-          </a:p>
-        </p:txBody>
-      </p:sp>
-      <p:sp>
-        <p:nvSpPr>
-          <p:cNvPr id="15" name="TextBox 14"/>
-          <p:cNvSpPr txBox="1"/>
-          <p:nvPr/>
-        </p:nvSpPr>
-        <p:spPr>
-          <a:xfrm>
-            <a:off x="4791455" y="5184648"/>
-            <a:ext cx="786384" cy="256032"/>
-          </a:xfrm>
-          <a:prstGeom prst="rect">
-            <a:avLst/>
-          </a:prstGeom>
-          <a:noFill/>
-        </p:spPr>
-        <p:txBody>
-          <a:bodyPr wrap="square" lIns="45720" rIns="45720" anchor="ctr">
-            <a:spAutoFit/>
-          </a:bodyPr>
-          <a:lstStyle/>
-          <a:p>
-            <a:pPr algn="ctr">
-              <a:lnSpc>
-                <a:spcPct val="100000"/>
-              </a:lnSpc>
-              <a:spcBef>
-                <a:spcPts val="0"/>
-              </a:spcBef>
-              <a:spcAft>
-                <a:spcPts val="0"/>
-              </a:spcAft>
-            </a:pPr>
-            <a:r>
-              <a:rPr sz="1150" b="1" i="0">
-                <a:solidFill>
-                  <a:srgbClr val="111111"/>
-                </a:solidFill>
-                <a:latin typeface="Arial"/>
-              </a:rPr>
-              <a:t>77.0</a:t>
-            </a:r>
-          </a:p>
-        </p:txBody>
-      </p:sp>
-      <p:sp>
-        <p:nvSpPr>
-          <p:cNvPr id="16" name="TextBox 15"/>
-          <p:cNvSpPr txBox="1"/>
-          <p:nvPr/>
-        </p:nvSpPr>
-        <p:spPr>
-          <a:xfrm>
-            <a:off x="5797296" y="5184648"/>
-            <a:ext cx="786384" cy="256032"/>
-          </a:xfrm>
-          <a:prstGeom prst="rect">
-            <a:avLst/>
-          </a:prstGeom>
-          <a:noFill/>
-        </p:spPr>
-        <p:txBody>
-          <a:bodyPr wrap="square" lIns="45720" rIns="45720" anchor="ctr">
-            <a:spAutoFit/>
-          </a:bodyPr>
-          <a:lstStyle/>
-          <a:p>
-            <a:pPr algn="ctr">
-              <a:lnSpc>
-                <a:spcPct val="100000"/>
-              </a:lnSpc>
-              <a:spcBef>
-                <a:spcPts val="0"/>
-              </a:spcBef>
-              <a:spcAft>
-                <a:spcPts val="0"/>
-              </a:spcAft>
-            </a:pPr>
-            <a:r>
-              <a:rPr sz="1150" b="1" i="0">
-                <a:solidFill>
-                  <a:srgbClr val="111111"/>
-                </a:solidFill>
-                <a:latin typeface="Arial"/>
-              </a:rPr>
-              <a:t>82.4</a:t>
-            </a:r>
-          </a:p>
-        </p:txBody>
-      </p:sp>
-      <p:sp>
-        <p:nvSpPr>
-          <p:cNvPr id="17" name="TextBox 16"/>
-          <p:cNvSpPr txBox="1"/>
-          <p:nvPr/>
-        </p:nvSpPr>
-        <p:spPr>
-          <a:xfrm>
-            <a:off x="6803136" y="5184648"/>
-            <a:ext cx="786384" cy="256032"/>
-          </a:xfrm>
-          <a:prstGeom prst="rect">
-            <a:avLst/>
-          </a:prstGeom>
-          <a:noFill/>
-        </p:spPr>
-        <p:txBody>
-          <a:bodyPr wrap="square" lIns="45720" rIns="45720" anchor="ctr">
-            <a:spAutoFit/>
-          </a:bodyPr>
-          <a:lstStyle/>
-          <a:p>
-            <a:pPr algn="ctr">
-              <a:lnSpc>
-                <a:spcPct val="100000"/>
-              </a:lnSpc>
-              <a:spcBef>
-                <a:spcPts val="0"/>
-              </a:spcBef>
-              <a:spcAft>
-                <a:spcPts val="0"/>
-              </a:spcAft>
-            </a:pPr>
-            <a:r>
-              <a:rPr sz="1150" b="1" i="0">
-                <a:solidFill>
-                  <a:srgbClr val="111111"/>
-                </a:solidFill>
-                <a:latin typeface="Arial"/>
-              </a:rPr>
-              <a:t>83.0</a:t>
-            </a:r>
-          </a:p>
-        </p:txBody>
-      </p:sp>
-      <p:sp>
-        <p:nvSpPr>
-          <p:cNvPr id="18" name="TextBox 17"/>
-          <p:cNvSpPr txBox="1"/>
-          <p:nvPr/>
-        </p:nvSpPr>
-        <p:spPr>
-          <a:xfrm>
-            <a:off x="7808976" y="5184648"/>
-            <a:ext cx="786384" cy="256032"/>
-          </a:xfrm>
-          <a:prstGeom prst="rect">
-            <a:avLst/>
-          </a:prstGeom>
-          <a:noFill/>
-        </p:spPr>
-        <p:txBody>
-          <a:bodyPr wrap="square" lIns="45720" rIns="45720" anchor="ctr">
-            <a:spAutoFit/>
-          </a:bodyPr>
-          <a:lstStyle/>
-          <a:p>
-            <a:pPr algn="ctr">
-              <a:lnSpc>
-                <a:spcPct val="100000"/>
-              </a:lnSpc>
-              <a:spcBef>
-                <a:spcPts val="0"/>
-              </a:spcBef>
-              <a:spcAft>
-                <a:spcPts val="0"/>
-              </a:spcAft>
-            </a:pPr>
-            <a:r>
-              <a:rPr sz="1150" b="1" i="0">
-                <a:solidFill>
-                  <a:srgbClr val="111111"/>
-                </a:solidFill>
-                <a:latin typeface="Arial"/>
-              </a:rPr>
-              <a:t>84.1</a:t>
-            </a:r>
-          </a:p>
-        </p:txBody>
-      </p:sp>
-      <p:sp>
-        <p:nvSpPr>
-          <p:cNvPr id="19" name="TextBox 18"/>
-          <p:cNvSpPr txBox="1"/>
-          <p:nvPr/>
-        </p:nvSpPr>
-        <p:spPr>
-          <a:xfrm>
-            <a:off x="8814816" y="5184648"/>
-            <a:ext cx="786384" cy="256032"/>
-          </a:xfrm>
-          <a:prstGeom prst="rect">
-            <a:avLst/>
-          </a:prstGeom>
-          <a:noFill/>
-        </p:spPr>
-        <p:txBody>
-          <a:bodyPr wrap="square" lIns="45720" rIns="45720" anchor="ctr">
-            <a:spAutoFit/>
-          </a:bodyPr>
-          <a:lstStyle/>
-          <a:p>
-            <a:pPr algn="ctr">
-              <a:lnSpc>
-                <a:spcPct val="100000"/>
-              </a:lnSpc>
-              <a:spcBef>
-                <a:spcPts val="0"/>
-              </a:spcBef>
-              <a:spcAft>
-                <a:spcPts val="0"/>
-              </a:spcAft>
-            </a:pPr>
-            <a:r>
-              <a:rPr sz="1150" b="1" i="0">
-                <a:solidFill>
-                  <a:srgbClr val="111111"/>
-                </a:solidFill>
-                <a:latin typeface="Arial"/>
-              </a:rPr>
-              <a:t>83.9</a:t>
-            </a:r>
-          </a:p>
-        </p:txBody>
-      </p:sp>
-      <p:sp>
-        <p:nvSpPr>
-          <p:cNvPr id="20" name="Rectangle 19"/>
-          <p:cNvSpPr/>
-          <p:nvPr/>
-        </p:nvSpPr>
-        <p:spPr>
-          <a:xfrm>
-            <a:off x="2011680" y="5504688"/>
-            <a:ext cx="7680960" cy="420624"/>
-          </a:xfrm>
-          <a:prstGeom prst="rect">
-            <a:avLst/>
-          </a:prstGeom>
-          <a:solidFill>
-            <a:srgbClr val="FFFFFF"/>
-          </a:solidFill>
-          <a:ln w="11430">
-            <a:solidFill>
-              <a:srgbClr val="D9D9D9"/>
-            </a:solidFill>
-          </a:ln>
-        </p:spPr>
-        <p:style>
-          <a:lnRef idx="1">
-            <a:schemeClr val="accent1"/>
-          </a:lnRef>
-          <a:fillRef idx="3">
-            <a:schemeClr val="accent1"/>
-          </a:fillRef>
-          <a:effectRef idx="2">
-            <a:schemeClr val="accent1"/>
-          </a:effectRef>
-          <a:fontRef idx="minor">
-            <a:schemeClr val="lt1"/>
-          </a:fontRef>
-        </p:style>
-        <p:txBody>
-          <a:bodyPr rtlCol="0" anchor="ctr"/>
-          <a:lstStyle/>
-          <a:p>
-            <a:pPr algn="ctr"/>
-          </a:p>
-        </p:txBody>
-      </p:sp>
-      <p:sp>
-        <p:nvSpPr>
-          <p:cNvPr id="21" name="TextBox 20"/>
-          <p:cNvSpPr txBox="1"/>
-          <p:nvPr/>
-        </p:nvSpPr>
-        <p:spPr>
-          <a:xfrm>
-            <a:off x="2139696" y="5605272"/>
-            <a:ext cx="2432304" cy="256032"/>
-          </a:xfrm>
-          <a:prstGeom prst="rect">
-            <a:avLst/>
-          </a:prstGeom>
-          <a:noFill/>
-        </p:spPr>
-        <p:txBody>
-          <a:bodyPr wrap="square" lIns="45720" rIns="45720" anchor="ctr">
-            <a:spAutoFit/>
-          </a:bodyPr>
-          <a:lstStyle/>
-          <a:p>
-            <a:pPr algn="l">
-              <a:lnSpc>
-                <a:spcPct val="100000"/>
-              </a:lnSpc>
-              <a:spcBef>
-                <a:spcPts val="0"/>
-              </a:spcBef>
-              <a:spcAft>
-                <a:spcPts val="0"/>
-              </a:spcAft>
-            </a:pPr>
-            <a:r>
               <a:rPr sz="1150" b="0" i="0">
                 <a:solidFill>
                   <a:srgbClr val="555555"/>
                 </a:solidFill>
                 <a:latin typeface="Arial"/>
               </a:rPr>
-              <a:t>One fixed strength</a:t>
-            </a:r>
-          </a:p>
-        </p:txBody>
-      </p:sp>
-      <p:sp>
-        <p:nvSpPr>
-          <p:cNvPr id="22" name="TextBox 21"/>
-          <p:cNvSpPr txBox="1"/>
-          <p:nvPr/>
-        </p:nvSpPr>
-        <p:spPr>
-          <a:xfrm>
-            <a:off x="4791455" y="5605272"/>
-            <a:ext cx="786384" cy="256032"/>
-          </a:xfrm>
-          <a:prstGeom prst="rect">
-            <a:avLst/>
-          </a:prstGeom>
-          <a:noFill/>
-        </p:spPr>
-        <p:txBody>
-          <a:bodyPr wrap="square" lIns="45720" rIns="45720" anchor="ctr">
-            <a:spAutoFit/>
-          </a:bodyPr>
-          <a:lstStyle/>
-          <a:p>
-            <a:pPr algn="ctr">
-              <a:lnSpc>
-                <a:spcPct val="100000"/>
-              </a:lnSpc>
-              <a:spcBef>
-                <a:spcPts val="0"/>
-              </a:spcBef>
-              <a:spcAft>
-                <a:spcPts val="0"/>
-              </a:spcAft>
-            </a:pPr>
-            <a:r>
-              <a:rPr sz="1150" b="0" i="0">
-                <a:solidFill>
-                  <a:srgbClr val="555555"/>
-                </a:solidFill>
-                <a:latin typeface="Arial"/>
-              </a:rPr>
-              <a:t>72.8</a:t>
-            </a:r>
-          </a:p>
-        </p:txBody>
-      </p:sp>
-      <p:sp>
-        <p:nvSpPr>
-          <p:cNvPr id="23" name="TextBox 22"/>
-          <p:cNvSpPr txBox="1"/>
-          <p:nvPr/>
-        </p:nvSpPr>
-        <p:spPr>
-          <a:xfrm>
-            <a:off x="5797296" y="5605272"/>
-            <a:ext cx="786384" cy="256032"/>
-          </a:xfrm>
-          <a:prstGeom prst="rect">
-            <a:avLst/>
-          </a:prstGeom>
-          <a:noFill/>
-        </p:spPr>
-        <p:txBody>
-          <a:bodyPr wrap="square" lIns="45720" rIns="45720" anchor="ctr">
-            <a:spAutoFit/>
-          </a:bodyPr>
-          <a:lstStyle/>
-          <a:p>
-            <a:pPr algn="ctr">
-              <a:lnSpc>
-                <a:spcPct val="100000"/>
-              </a:lnSpc>
-              <a:spcBef>
-                <a:spcPts val="0"/>
-              </a:spcBef>
-              <a:spcAft>
-                <a:spcPts val="0"/>
-              </a:spcAft>
-            </a:pPr>
-            <a:r>
-              <a:rPr sz="1150" b="0" i="0">
-                <a:solidFill>
-                  <a:srgbClr val="555555"/>
-                </a:solidFill>
-                <a:latin typeface="Arial"/>
-              </a:rPr>
-              <a:t>79.4</a:t>
-            </a:r>
-          </a:p>
-        </p:txBody>
-      </p:sp>
-      <p:sp>
-        <p:nvSpPr>
-          <p:cNvPr id="24" name="TextBox 23"/>
-          <p:cNvSpPr txBox="1"/>
-          <p:nvPr/>
-        </p:nvSpPr>
-        <p:spPr>
-          <a:xfrm>
-            <a:off x="6803136" y="5605272"/>
-            <a:ext cx="786384" cy="256032"/>
-          </a:xfrm>
-          <a:prstGeom prst="rect">
-            <a:avLst/>
-          </a:prstGeom>
-          <a:noFill/>
-        </p:spPr>
-        <p:txBody>
-          <a:bodyPr wrap="square" lIns="45720" rIns="45720" anchor="ctr">
-            <a:spAutoFit/>
-          </a:bodyPr>
-          <a:lstStyle/>
-          <a:p>
-            <a:pPr algn="ctr">
-              <a:lnSpc>
-                <a:spcPct val="100000"/>
-              </a:lnSpc>
-              <a:spcBef>
-                <a:spcPts val="0"/>
-              </a:spcBef>
-              <a:spcAft>
-                <a:spcPts val="0"/>
-              </a:spcAft>
-            </a:pPr>
-            <a:r>
-              <a:rPr sz="1150" b="0" i="0">
-                <a:solidFill>
-                  <a:srgbClr val="555555"/>
-                </a:solidFill>
-                <a:latin typeface="Arial"/>
-              </a:rPr>
-              <a:t>81.2</a:t>
-            </a:r>
-          </a:p>
-        </p:txBody>
-      </p:sp>
-      <p:sp>
-        <p:nvSpPr>
-          <p:cNvPr id="25" name="TextBox 24"/>
-          <p:cNvSpPr txBox="1"/>
-          <p:nvPr/>
-        </p:nvSpPr>
-        <p:spPr>
-          <a:xfrm>
-            <a:off x="7808976" y="5605272"/>
-            <a:ext cx="786384" cy="256032"/>
-          </a:xfrm>
-          <a:prstGeom prst="rect">
-            <a:avLst/>
-          </a:prstGeom>
-          <a:noFill/>
-        </p:spPr>
-        <p:txBody>
-          <a:bodyPr wrap="square" lIns="45720" rIns="45720" anchor="ctr">
-            <a:spAutoFit/>
-          </a:bodyPr>
-          <a:lstStyle/>
-          <a:p>
-            <a:pPr algn="ctr">
-              <a:lnSpc>
-                <a:spcPct val="100000"/>
-              </a:lnSpc>
-              <a:spcBef>
-                <a:spcPts val="0"/>
-              </a:spcBef>
-              <a:spcAft>
-                <a:spcPts val="0"/>
-              </a:spcAft>
-            </a:pPr>
-            <a:r>
-              <a:rPr sz="1150" b="0" i="0">
-                <a:solidFill>
-                  <a:srgbClr val="555555"/>
-                </a:solidFill>
-                <a:latin typeface="Arial"/>
-              </a:rPr>
-              <a:t>83.8</a:t>
-            </a:r>
-          </a:p>
-        </p:txBody>
-      </p:sp>
-      <p:sp>
-        <p:nvSpPr>
-          <p:cNvPr id="26" name="TextBox 25"/>
-          <p:cNvSpPr txBox="1"/>
-          <p:nvPr/>
-        </p:nvSpPr>
-        <p:spPr>
-          <a:xfrm>
-            <a:off x="8814816" y="5605272"/>
-            <a:ext cx="786384" cy="256032"/>
-          </a:xfrm>
-          <a:prstGeom prst="rect">
-            <a:avLst/>
-          </a:prstGeom>
-          <a:noFill/>
-        </p:spPr>
-        <p:txBody>
-          <a:bodyPr wrap="square" lIns="45720" rIns="45720" anchor="ctr">
-            <a:spAutoFit/>
-          </a:bodyPr>
-          <a:lstStyle/>
-          <a:p>
-            <a:pPr algn="ctr">
-              <a:lnSpc>
-                <a:spcPct val="100000"/>
-              </a:lnSpc>
-              <a:spcBef>
-                <a:spcPts val="0"/>
-              </a:spcBef>
-              <a:spcAft>
-                <a:spcPts val="0"/>
-              </a:spcAft>
-            </a:pPr>
-            <a:r>
-              <a:rPr sz="1150" b="0" i="0">
-                <a:solidFill>
-                  <a:srgbClr val="555555"/>
-                </a:solidFill>
-                <a:latin typeface="Arial"/>
-              </a:rPr>
-              <a:t>83.4</a:t>
+              <a:t>Going from half to quarter rate drops the learned system from 72.8% to 49.4%.</a:t>
             </a:r>
           </a:p>
         </p:txBody>
       </p:sp>
       <p:cxnSp>
         <p:nvCxnSpPr>
-          <p:cNvPr id="27" name="Connector 26"/>
+          <p:cNvPr id="8" name="Connector 7"/>
           <p:cNvCxnSpPr/>
           <p:nvPr/>
         </p:nvCxnSpPr>
         <p:spPr>
           <a:xfrm>
-            <a:off x="4663440" y="4700016"/>
-            <a:ext cx="0" cy="1225296"/>
+            <a:off x="658368" y="4901184"/>
+            <a:ext cx="10744200" cy="0"/>
           </a:xfrm>
           <a:prstGeom prst="line">
             <a:avLst/>
           </a:prstGeom>
-          <a:ln w="8890">
+          <a:ln w="6350">
             <a:solidFill>
               <a:srgbClr val="D9D9D9"/>
             </a:solidFill>
@@ -26836,21 +26761,111 @@
           </a:fontRef>
         </p:style>
       </p:cxnSp>
+      <p:sp>
+        <p:nvSpPr>
+          <p:cNvPr id="9" name="TextBox 8"/>
+          <p:cNvSpPr txBox="1"/>
+          <p:nvPr/>
+        </p:nvSpPr>
+        <p:spPr>
+          <a:xfrm>
+            <a:off x="658368" y="5029200"/>
+            <a:ext cx="1828800" cy="274320"/>
+          </a:xfrm>
+          <a:prstGeom prst="rect">
+            <a:avLst/>
+          </a:prstGeom>
+          <a:noFill/>
+        </p:spPr>
+        <p:txBody>
+          <a:bodyPr wrap="square" lIns="45720" rIns="45720" anchor="t">
+            <a:spAutoFit/>
+          </a:bodyPr>
+          <a:lstStyle/>
+          <a:p>
+            <a:pPr algn="l">
+              <a:lnSpc>
+                <a:spcPct val="100000"/>
+              </a:lnSpc>
+              <a:spcBef>
+                <a:spcPts val="0"/>
+              </a:spcBef>
+              <a:spcAft>
+                <a:spcPts val="0"/>
+              </a:spcAft>
+            </a:pPr>
+            <a:r>
+              <a:rPr sz="1200" b="1" i="0">
+                <a:solidFill>
+                  <a:srgbClr val="111111"/>
+                </a:solidFill>
+                <a:latin typeface="Arial"/>
+              </a:rPr>
+              <a:t>At 0 dB, quarter rate</a:t>
+            </a:r>
+          </a:p>
+        </p:txBody>
+      </p:sp>
+      <p:sp>
+        <p:nvSpPr>
+          <p:cNvPr id="10" name="TextBox 9"/>
+          <p:cNvSpPr txBox="1"/>
+          <p:nvPr/>
+        </p:nvSpPr>
+        <p:spPr>
+          <a:xfrm>
+            <a:off x="2578608" y="5010912"/>
+            <a:ext cx="8823960" cy="402336"/>
+          </a:xfrm>
+          <a:prstGeom prst="rect">
+            <a:avLst/>
+          </a:prstGeom>
+          <a:noFill/>
+        </p:spPr>
+        <p:txBody>
+          <a:bodyPr wrap="square" lIns="45720" rIns="45720" anchor="t">
+            <a:spAutoFit/>
+          </a:bodyPr>
+          <a:lstStyle/>
+          <a:p>
+            <a:pPr algn="l">
+              <a:lnSpc>
+                <a:spcPct val="100000"/>
+              </a:lnSpc>
+              <a:spcBef>
+                <a:spcPts val="0"/>
+              </a:spcBef>
+              <a:spcAft>
+                <a:spcPts val="0"/>
+              </a:spcAft>
+            </a:pPr>
+            <a:r>
+              <a:rPr sz="1150" b="0" i="0">
+                <a:solidFill>
+                  <a:srgbClr val="555555"/>
+                </a:solidFill>
+                <a:latin typeface="Arial"/>
+              </a:rPr>
+              <a:t>Learned 78.7% against digital 69.4%. The learned system is still ahead.</a:t>
+            </a:r>
+          </a:p>
+        </p:txBody>
+      </p:sp>
       <p:cxnSp>
         <p:nvCxnSpPr>
-          <p:cNvPr id="28" name="Connector 27"/>
+          <p:cNvPr id="11" name="Connector 10"/>
           <p:cNvCxnSpPr/>
           <p:nvPr/>
         </p:nvCxnSpPr>
         <p:spPr>
           <a:xfrm>
-            <a:off x="5669280" y="4700016"/>
-            <a:ext cx="0" cy="1225296"/>
+            <a:off x="658368" y="5358384"/>
+            <a:ext cx="10744200" cy="0"/>
           </a:xfrm>
           <a:prstGeom prst="line">
             <a:avLst/>
           </a:prstGeom>
-          <a:ln w="8890">
+          <a:ln w="6350">
             <a:solidFill>
               <a:srgbClr val="D9D9D9"/>
             </a:solidFill>
@@ -26871,16 +26886,106 @@
           </a:fontRef>
         </p:style>
       </p:cxnSp>
+      <p:sp>
+        <p:nvSpPr>
+          <p:cNvPr id="12" name="TextBox 11"/>
+          <p:cNvSpPr txBox="1"/>
+          <p:nvPr/>
+        </p:nvSpPr>
+        <p:spPr>
+          <a:xfrm>
+            <a:off x="658368" y="5486400"/>
+            <a:ext cx="1828800" cy="274320"/>
+          </a:xfrm>
+          <a:prstGeom prst="rect">
+            <a:avLst/>
+          </a:prstGeom>
+          <a:noFill/>
+        </p:spPr>
+        <p:txBody>
+          <a:bodyPr wrap="square" lIns="45720" rIns="45720" anchor="t">
+            <a:spAutoFit/>
+          </a:bodyPr>
+          <a:lstStyle/>
+          <a:p>
+            <a:pPr algn="l">
+              <a:lnSpc>
+                <a:spcPct val="100000"/>
+              </a:lnSpc>
+              <a:spcBef>
+                <a:spcPts val="0"/>
+              </a:spcBef>
+              <a:spcAft>
+                <a:spcPts val="0"/>
+              </a:spcAft>
+            </a:pPr>
+            <a:r>
+              <a:rPr sz="1200" b="1" i="0">
+                <a:solidFill>
+                  <a:srgbClr val="111111"/>
+                </a:solidFill>
+                <a:latin typeface="Arial"/>
+              </a:rPr>
+              <a:t>Catches up, then slips</a:t>
+            </a:r>
+          </a:p>
+        </p:txBody>
+      </p:sp>
+      <p:sp>
+        <p:nvSpPr>
+          <p:cNvPr id="13" name="TextBox 12"/>
+          <p:cNvSpPr txBox="1"/>
+          <p:nvPr/>
+        </p:nvSpPr>
+        <p:spPr>
+          <a:xfrm>
+            <a:off x="2578608" y="5468112"/>
+            <a:ext cx="8823960" cy="402336"/>
+          </a:xfrm>
+          <a:prstGeom prst="rect">
+            <a:avLst/>
+          </a:prstGeom>
+          <a:noFill/>
+        </p:spPr>
+        <p:txBody>
+          <a:bodyPr wrap="square" lIns="45720" rIns="45720" anchor="t">
+            <a:spAutoFit/>
+          </a:bodyPr>
+          <a:lstStyle/>
+          <a:p>
+            <a:pPr algn="l">
+              <a:lnSpc>
+                <a:spcPct val="100000"/>
+              </a:lnSpc>
+              <a:spcBef>
+                <a:spcPts val="0"/>
+              </a:spcBef>
+              <a:spcAft>
+                <a:spcPts val="0"/>
+              </a:spcAft>
+            </a:pPr>
+            <a:r>
+              <a:rPr sz="1150" b="0" i="0">
+                <a:solidFill>
+                  <a:srgbClr val="555555"/>
+                </a:solidFill>
+                <a:latin typeface="Arial"/>
+              </a:rPr>
+              <a:t>Digital passes learned at the +4 dB point, loses the lead at +9 dB, then goes ahead again.</a:t>
+            </a:r>
+          </a:p>
+        </p:txBody>
+      </p:sp>
       <p:cxnSp>
         <p:nvCxnSpPr>
-          <p:cNvPr id="29" name="Connector 28"/>
+          <p:cNvPr id="14" name="Connector 13"/>
           <p:cNvCxnSpPr/>
           <p:nvPr/>
         </p:nvCxnSpPr>
         <p:spPr>
           <a:xfrm>
-            <a:off x="6675120" y="4700016"/>
-            <a:ext cx="0" cy="1225296"/>
+            <a:off x="566928" y="6419088"/>
+            <a:ext cx="11018520" cy="0"/>
           </a:xfrm>
           <a:prstGeom prst="line">
             <a:avLst/>
@@ -26906,114 +27011,9 @@
           </a:fontRef>
         </p:style>
       </p:cxnSp>
-      <p:cxnSp>
-        <p:nvCxnSpPr>
-          <p:cNvPr id="30" name="Connector 29"/>
-          <p:cNvCxnSpPr/>
-          <p:nvPr/>
-        </p:nvCxnSpPr>
-        <p:spPr>
-          <a:xfrm>
-            <a:off x="7680960" y="4700016"/>
-            <a:ext cx="0" cy="1225296"/>
-          </a:xfrm>
-          <a:prstGeom prst="line">
-            <a:avLst/>
-          </a:prstGeom>
-          <a:ln w="8890">
-            <a:solidFill>
-              <a:srgbClr val="D9D9D9"/>
-            </a:solidFill>
-          </a:ln>
-        </p:spPr>
-        <p:style>
-          <a:lnRef idx="2">
-            <a:schemeClr val="accent1"/>
-          </a:lnRef>
-          <a:fillRef idx="0">
-            <a:schemeClr val="accent1"/>
-          </a:fillRef>
-          <a:effectRef idx="1">
-            <a:schemeClr val="accent1"/>
-          </a:effectRef>
-          <a:fontRef idx="minor">
-            <a:schemeClr val="tx1"/>
-          </a:fontRef>
-        </p:style>
-      </p:cxnSp>
-      <p:cxnSp>
-        <p:nvCxnSpPr>
-          <p:cNvPr id="31" name="Connector 30"/>
-          <p:cNvCxnSpPr/>
-          <p:nvPr/>
-        </p:nvCxnSpPr>
-        <p:spPr>
-          <a:xfrm>
-            <a:off x="8686800" y="4700016"/>
-            <a:ext cx="0" cy="1225296"/>
-          </a:xfrm>
-          <a:prstGeom prst="line">
-            <a:avLst/>
-          </a:prstGeom>
-          <a:ln w="8890">
-            <a:solidFill>
-              <a:srgbClr val="D9D9D9"/>
-            </a:solidFill>
-          </a:ln>
-        </p:spPr>
-        <p:style>
-          <a:lnRef idx="2">
-            <a:schemeClr val="accent1"/>
-          </a:lnRef>
-          <a:fillRef idx="0">
-            <a:schemeClr val="accent1"/>
-          </a:fillRef>
-          <a:effectRef idx="1">
-            <a:schemeClr val="accent1"/>
-          </a:effectRef>
-          <a:fontRef idx="minor">
-            <a:schemeClr val="tx1"/>
-          </a:fontRef>
-        </p:style>
-      </p:cxnSp>
-      <p:cxnSp>
-        <p:nvCxnSpPr>
-          <p:cNvPr id="32" name="Connector 31"/>
-          <p:cNvCxnSpPr/>
-          <p:nvPr/>
-        </p:nvCxnSpPr>
-        <p:spPr>
-          <a:xfrm>
-            <a:off x="566928" y="6419088"/>
-            <a:ext cx="11018520" cy="0"/>
-          </a:xfrm>
-          <a:prstGeom prst="line">
-            <a:avLst/>
-          </a:prstGeom>
-          <a:ln w="8890">
-            <a:solidFill>
-              <a:srgbClr val="D9D9D9"/>
-            </a:solidFill>
-          </a:ln>
-        </p:spPr>
-        <p:style>
-          <a:lnRef idx="2">
-            <a:schemeClr val="accent1"/>
-          </a:lnRef>
-          <a:fillRef idx="0">
-            <a:schemeClr val="accent1"/>
-          </a:fillRef>
-          <a:effectRef idx="1">
-            <a:schemeClr val="accent1"/>
-          </a:effectRef>
-          <a:fontRef idx="minor">
-            <a:schemeClr val="tx1"/>
-          </a:fontRef>
-        </p:style>
-      </p:cxnSp>
-      <p:sp>
-        <p:nvSpPr>
-          <p:cNvPr id="33" name="TextBox 32"/>
+      <p:sp>
+        <p:nvSpPr>
+          <p:cNvPr id="15" name="TextBox 14"/>
           <p:cNvSpPr txBox="1"/>
           <p:nvPr/>
         </p:nvSpPr>
@@ -27058,7 +27058,7 @@
       </p:sp>
       <p:sp>
         <p:nvSpPr>
-          <p:cNvPr id="34" name="TextBox 33"/>
+          <p:cNvPr id="16" name="TextBox 15"/>
           <p:cNvSpPr txBox="1"/>
           <p:nvPr/>
         </p:nvSpPr>
@@ -27096,14 +27096,14 @@
                 </a:solidFill>
                 <a:latin typeface="Arial"/>
               </a:rPr>
-              <a:t>Two separately trained versions of the learned system</a:t>
-            </a:r>
-          </a:p>
-        </p:txBody>
-      </p:sp>
-      <p:sp>
-        <p:nvSpPr>
-          <p:cNvPr id="35" name="TextBox 34"/>
+              <a:t>Quarter rate against half rate · compare within each panel</a:t>
+            </a:r>
+          </a:p>
+        </p:txBody>
+      </p:sp>
+      <p:sp>
+        <p:nvSpPr>
+          <p:cNvPr id="17" name="TextBox 16"/>
           <p:cNvSpPr txBox="1"/>
           <p:nvPr/>
         </p:nvSpPr>

--- a/deliverables/review-2/semantic-communication-second-review.pptx
+++ b/deliverables/review-2/semantic-communication-second-review.pptx
@@ -4252,7 +4252,7 @@
                 </a:solidFill>
                 <a:latin typeface="Arial"/>
               </a:rPr>
-              <a:t>What happens when we quarter the radio time</a:t>
+              <a:t>What happens when we cut the radio time fourfold</a:t>
             </a:r>
           </a:p>
         </p:txBody>
@@ -4332,7 +4332,7 @@
                 </a:solidFill>
                 <a:latin typeface="Arial"/>
               </a:rPr>
-              <a:t>On a quarter of the radio time, the digital system loses far more at the weak end than the learned one does.</a:t>
+              <a:t>With four times less radio time, the digital system loses far more at the weak end than the learned one does.</a:t>
             </a:r>
           </a:p>
         </p:txBody>
@@ -4446,7 +4446,7 @@
                 </a:solidFill>
                 <a:latin typeface="Arial"/>
               </a:rPr>
-              <a:t>Going from half to quarter rate drops the learned system from 72.8% to 49.4%.</a:t>
+              <a:t>Cutting from 1/6 to 1/24 rate drops the learned system from 72.8% to 49.4%.</a:t>
             </a:r>
           </a:p>
         </p:txBody>
@@ -4526,7 +4526,7 @@
                 </a:solidFill>
                 <a:latin typeface="Arial"/>
               </a:rPr>
-              <a:t>At 0 dB, quarter rate</a:t>
+              <a:t>At 0 dB, 1/24 rate</a:t>
             </a:r>
           </a:p>
         </p:txBody>
@@ -4821,7 +4821,7 @@
                 </a:solidFill>
                 <a:latin typeface="Arial"/>
               </a:rPr>
-              <a:t>Quarter rate against half rate · compare within each panel</a:t>
+              <a:t>1/24 rate against 1/6 rate · compare within each panel</a:t>
             </a:r>
           </a:p>
         </p:txBody>
@@ -9067,7 +9067,7 @@
                 </a:solidFill>
                 <a:latin typeface="Arial"/>
               </a:rPr>
-              <a:t>Half rate — 12,800 uses of the radio</a:t>
+              <a:t>1/6 rate — 12,800 uses of the radio</a:t>
             </a:r>
           </a:p>
         </p:txBody>
@@ -11482,7 +11482,7 @@
                 </a:solidFill>
                 <a:latin typeface="Arial"/>
               </a:rPr>
-              <a:t>Quarter rate — 3,200 uses of the radio</a:t>
+              <a:t>1/24 rate — 3,200 uses of the radio</a:t>
             </a:r>
           </a:p>
         </p:txBody>
@@ -12862,7 +12862,7 @@
                 </a:solidFill>
                 <a:latin typeface="Arial"/>
               </a:rPr>
-              <a:t>At half rate, which system is ahead flips between −5 dB and −4 dB. We decided the crossing question on exactly that, before seeing the answer.</a:t>
+              <a:t>At 1/6 rate, which system is ahead flips between −5 dB and −4 dB. We decided the crossing question on exactly that, before seeing the answer.</a:t>
             </a:r>
           </a:p>
         </p:txBody>
@@ -12987,7 +12987,7 @@
                 </a:solidFill>
                 <a:latin typeface="Arial"/>
               </a:rPr>
-              <a:t>Each column is one signal strength; each cell is the number of correct labels out of the same 1,000 held-back pictures. At half rate the learned row leads up to −5 dB and the digital row leads from −4 dB. At quarter rate the digital row stays on the fallback floor four dB longer, then climbs past the learned row from +4 dB. The difference between the two tables is the effect of cutting radio time fourfold.</a:t>
+              <a:t>Each column is one signal strength; each cell is the number of correct labels out of the same 1,000 held-back pictures. At 1/6 rate the learned row leads up to −5 dB and the digital row leads from −4 dB. At 1/24 rate the digital row stays on the fallback floor four dB longer, then climbs past the learned row from +4 dB. The difference between the two tables is the effect of cutting radio time fourfold.</a:t>
             </a:r>
           </a:p>
         </p:txBody>
@@ -14254,7 +14254,7 @@
                 </a:solidFill>
                 <a:latin typeface="Arial"/>
               </a:rPr>
-              <a:t>Four changes we made after the measurements started coming in.</a:t>
+              <a:t>Each one was a decision we would have got wrong on paper.</a:t>
             </a:r>
           </a:p>
         </p:txBody>
@@ -15194,7 +15194,7 @@
                 </a:solidFill>
                 <a:latin typeface="Arial"/>
               </a:rPr>
-              <a:t>Twenty-two further changes were made during the project, including three checks that turned out to be wrong and were repaired.</a:t>
+              <a:t>Twenty-two more changes were made during the project, three of them repairs to checks that were themselves wrong.</a:t>
             </a:r>
           </a:p>
         </p:txBody>
@@ -19087,7 +19087,7 @@
                 </a:solidFill>
                 <a:latin typeface="Arial"/>
               </a:rPr>
-              <a:t>Training loop built, models trained at several seeds. Three of them are frozen at half rate.</a:t>
+              <a:t>Training loop built, models trained at several seeds. Three of them are frozen at 1/6 rate.</a:t>
             </a:r>
           </a:p>
         </p:txBody>
@@ -20668,7 +20668,7 @@
                 </a:solidFill>
                 <a:latin typeface="Arial"/>
               </a:rPr>
-              <a:t>Questions on the method or the numbers. The per-picture records behind every point are available on request, and the exam set stays sealed until week 11.</a:t>
+              <a:t>Questions on the method or the numbers. The per-picture records behind any point here are available on request. The exam set stays sealed until week 11.</a:t>
             </a:r>
           </a:p>
         </p:txBody>
@@ -22125,7 +22125,7 @@
                 </a:solidFill>
                 <a:latin typeface="Arial"/>
               </a:rPr>
-              <a:t>Every chart in this deck runs from a very weak radio signal on the left to a clean one on the right.</a:t>
+              <a:t>Every chart in this deck runs from a weak radio signal on the left to a clean one on the right.</a:t>
             </a:r>
           </a:p>
         </p:txBody>
@@ -23331,7 +23331,7 @@
                 </a:solidFill>
                 <a:latin typeface="Arial"/>
               </a:rPr>
-              <a:t>The digital system got almost nothing through, so every picture fell back to one fixed answer. That answer happens to be right 100 times out of 1,000. So 10%.</a:t>
+              <a:t>The digital system got almost nothing through, so every picture fell back to the same fixed answer. That answer is right 100 times out of 1,000, which is the 10%.</a:t>
             </a:r>
           </a:p>
         </p:txBody>
@@ -23536,7 +23536,7 @@
                 </a:solidFill>
                 <a:latin typeface="Arial"/>
               </a:rPr>
-              <a:t>Plain language. The next fourteen slides depend on it.</a:t>
+              <a:t>Plain language. Everything after this slide depends on it.</a:t>
             </a:r>
           </a:p>
         </p:txBody>
@@ -24452,7 +24452,7 @@
                 </a:solidFill>
                 <a:latin typeface="Arial"/>
               </a:rPr>
-              <a:t>From very weak to very clean</a:t>
+              <a:t>From weak to clean</a:t>
             </a:r>
           </a:p>
         </p:txBody>
@@ -25052,7 +25052,7 @@
                 </a:solidFill>
                 <a:latin typeface="Arial"/>
               </a:rPr>
-              <a:t>Half rate uses the radio 12,800 times per picture; quarter rate uses it 3,200 times. Within one rate both systems get exactly the same amount of radio time.</a:t>
+              <a:t>1/6 rate uses the radio 12,800 times per picture; 1/24 rate uses it 3,200 times. Within one rate both systems get exactly the same amount of radio time.</a:t>
             </a:r>
           </a:p>
         </p:txBody>
@@ -26353,7 +26353,7 @@
                 </a:solidFill>
                 <a:latin typeface="Arial"/>
               </a:rPr>
-              <a:t>8 complex symbols per use at half rate</a:t>
+              <a:t>8 complex symbols per position, 1,600 positions</a:t>
             </a:r>
           </a:p>
         </p:txBody>
@@ -26488,7 +26488,7 @@
                 </a:solidFill>
                 <a:latin typeface="Arial"/>
               </a:rPr>
-              <a:t>1.64 M at the widest rate</a:t>
+              <a:t>1.57 M at the 1/6 rate reported here</a:t>
             </a:r>
           </a:p>
         </p:txBody>
@@ -28348,7 +28348,7 @@
                 </a:solidFill>
                 <a:latin typeface="Arial"/>
               </a:rPr>
-              <a:t>Half rate · all 21 measured signal strengths · held-back pictures</a:t>
+              <a:t>1/6 rate · all 21 measured signal strengths · held-back pictures</a:t>
             </a:r>
           </a:p>
         </p:txBody>

--- a/deliverables/review-2/semantic-communication-second-review.pptx
+++ b/deliverables/review-2/semantic-communication-second-review.pptx
@@ -5,28 +5,28 @@
     <p:sldMasterId id="2147483648" r:id="rId1"/>
   </p:sldMasterIdLst>
   <p:sldIdLst>
-    <p:sldId id="256" r:id="rId7"/>
-    <p:sldId id="257" r:id="rId8"/>
-    <p:sldId id="258" r:id="rId9"/>
-    <p:sldId id="259" r:id="rId10"/>
-    <p:sldId id="260" r:id="rId11"/>
-    <p:sldId id="261" r:id="rId12"/>
-    <p:sldId id="262" r:id="rId13"/>
-    <p:sldId id="263" r:id="rId14"/>
-    <p:sldId id="264" r:id="rId15"/>
-    <p:sldId id="265" r:id="rId16"/>
-    <p:sldId id="266" r:id="rId17"/>
-    <p:sldId id="267" r:id="rId18"/>
-    <p:sldId id="268" r:id="rId19"/>
-    <p:sldId id="269" r:id="rId20"/>
-    <p:sldId id="270" r:id="rId21"/>
-    <p:sldId id="271" r:id="rId22"/>
-    <p:sldId id="272" r:id="rId23"/>
-    <p:sldId id="273" r:id="rId24"/>
-    <p:sldId id="274" r:id="rId25"/>
-    <p:sldId id="275" r:id="rId26"/>
+    <p:sldId id="256" r:id="rId2"/>
+    <p:sldId id="257" r:id="rId3"/>
+    <p:sldId id="258" r:id="rId4"/>
+    <p:sldId id="259" r:id="rId5"/>
+    <p:sldId id="260" r:id="rId6"/>
+    <p:sldId id="261" r:id="rId7"/>
+    <p:sldId id="262" r:id="rId8"/>
+    <p:sldId id="263" r:id="rId9"/>
+    <p:sldId id="264" r:id="rId10"/>
+    <p:sldId id="265" r:id="rId11"/>
+    <p:sldId id="266" r:id="rId12"/>
+    <p:sldId id="267" r:id="rId13"/>
+    <p:sldId id="268" r:id="rId14"/>
+    <p:sldId id="269" r:id="rId15"/>
+    <p:sldId id="270" r:id="rId16"/>
+    <p:sldId id="271" r:id="rId17"/>
+    <p:sldId id="272" r:id="rId18"/>
+    <p:sldId id="273" r:id="rId19"/>
+    <p:sldId id="274" r:id="rId20"/>
+    <p:sldId id="275" r:id="rId21"/>
   </p:sldIdLst>
-  <p:sldSz cx="12191695" cy="6858000" type="screen4x3"/>
+  <p:sldSz cx="12192000" cy="6858000"/>
   <p:notesSz cx="6858000" cy="9144000"/>
   <p:defaultTextStyle>
     <a:defPPr>
@@ -123,6 +123,22 @@
       </a:defRPr>
     </a:lvl9pPr>
   </p:defaultTextStyle>
+  <p:extLst>
+    <p:ext uri="{EFAFB233-063F-42B5-8137-9DF3F51BA10A}">
+      <p15:sldGuideLst xmlns:p15="http://schemas.microsoft.com/office/powerpoint/2012/main">
+        <p15:guide id="1" orient="horz" pos="2160">
+          <p15:clr>
+            <a:srgbClr val="A4A3A4"/>
+          </p15:clr>
+        </p15:guide>
+        <p15:guide id="2" pos="2880">
+          <p15:clr>
+            <a:srgbClr val="A4A3A4"/>
+          </p15:clr>
+        </p15:guide>
+      </p15:sldGuideLst>
+    </p:ext>
+  </p:extLst>
 </p:presentation>
 </file>
 
@@ -164,10 +180,9 @@
           <a:lstStyle/>
           <a:p>
             <a:r>
-              <a:rPr lang="en-US" smtClean="0"/>
+              <a:rPr lang="en-US"/>
               <a:t>Click to edit Master title style</a:t>
             </a:r>
-            <a:endParaRPr lang="en-US"/>
           </a:p>
         </p:txBody>
       </p:sp>
@@ -283,10 +298,9 @@
           </a:lstStyle>
           <a:p>
             <a:r>
-              <a:rPr lang="en-US" smtClean="0"/>
+              <a:rPr lang="en-US"/>
               <a:t>Click to edit Master subtitle style</a:t>
             </a:r>
-            <a:endParaRPr lang="en-US"/>
           </a:p>
         </p:txBody>
       </p:sp>
@@ -307,7 +321,7 @@
           <a:p>
             <a:fld id="{5BCAD085-E8A6-8845-BD4E-CB4CCA059FC4}" type="datetimeFigureOut">
               <a:rPr lang="en-US" smtClean="0"/>
-              <a:t>1/27/13</a:t>
+              <a:t>9/30/2026</a:t>
             </a:fld>
             <a:endParaRPr lang="en-US"/>
           </a:p>
@@ -401,10 +415,9 @@
           <a:lstStyle/>
           <a:p>
             <a:r>
-              <a:rPr lang="en-US" smtClean="0"/>
+              <a:rPr lang="en-US"/>
               <a:t>Click to edit Master title style</a:t>
             </a:r>
-            <a:endParaRPr lang="en-US"/>
           </a:p>
         </p:txBody>
       </p:sp>
@@ -425,38 +438,37 @@
           <a:p>
             <a:pPr lvl="0"/>
             <a:r>
-              <a:rPr lang="en-US" smtClean="0"/>
+              <a:rPr lang="en-US"/>
               <a:t>Click to edit Master text styles</a:t>
             </a:r>
           </a:p>
           <a:p>
             <a:pPr lvl="1"/>
             <a:r>
-              <a:rPr lang="en-US" smtClean="0"/>
+              <a:rPr lang="en-US"/>
               <a:t>Second level</a:t>
             </a:r>
           </a:p>
           <a:p>
             <a:pPr lvl="2"/>
             <a:r>
-              <a:rPr lang="en-US" smtClean="0"/>
+              <a:rPr lang="en-US"/>
               <a:t>Third level</a:t>
             </a:r>
           </a:p>
           <a:p>
             <a:pPr lvl="3"/>
             <a:r>
-              <a:rPr lang="en-US" smtClean="0"/>
+              <a:rPr lang="en-US"/>
               <a:t>Fourth level</a:t>
             </a:r>
           </a:p>
           <a:p>
             <a:pPr lvl="4"/>
             <a:r>
-              <a:rPr lang="en-US" smtClean="0"/>
+              <a:rPr lang="en-US"/>
               <a:t>Fifth level</a:t>
             </a:r>
-            <a:endParaRPr lang="en-US"/>
           </a:p>
         </p:txBody>
       </p:sp>
@@ -477,7 +489,7 @@
           <a:p>
             <a:fld id="{5BCAD085-E8A6-8845-BD4E-CB4CCA059FC4}" type="datetimeFigureOut">
               <a:rPr lang="en-US" smtClean="0"/>
-              <a:t>1/27/13</a:t>
+              <a:t>9/30/2026</a:t>
             </a:fld>
             <a:endParaRPr lang="en-US"/>
           </a:p>
@@ -576,10 +588,9 @@
           <a:lstStyle/>
           <a:p>
             <a:r>
-              <a:rPr lang="en-US" smtClean="0"/>
+              <a:rPr lang="en-US"/>
               <a:t>Click to edit Master title style</a:t>
             </a:r>
-            <a:endParaRPr lang="en-US"/>
           </a:p>
         </p:txBody>
       </p:sp>
@@ -605,38 +616,37 @@
           <a:p>
             <a:pPr lvl="0"/>
             <a:r>
-              <a:rPr lang="en-US" smtClean="0"/>
+              <a:rPr lang="en-US"/>
               <a:t>Click to edit Master text styles</a:t>
             </a:r>
           </a:p>
           <a:p>
             <a:pPr lvl="1"/>
             <a:r>
-              <a:rPr lang="en-US" smtClean="0"/>
+              <a:rPr lang="en-US"/>
               <a:t>Second level</a:t>
             </a:r>
           </a:p>
           <a:p>
             <a:pPr lvl="2"/>
             <a:r>
-              <a:rPr lang="en-US" smtClean="0"/>
+              <a:rPr lang="en-US"/>
               <a:t>Third level</a:t>
             </a:r>
           </a:p>
           <a:p>
             <a:pPr lvl="3"/>
             <a:r>
-              <a:rPr lang="en-US" smtClean="0"/>
+              <a:rPr lang="en-US"/>
               <a:t>Fourth level</a:t>
             </a:r>
           </a:p>
           <a:p>
             <a:pPr lvl="4"/>
             <a:r>
-              <a:rPr lang="en-US" smtClean="0"/>
+              <a:rPr lang="en-US"/>
               <a:t>Fifth level</a:t>
             </a:r>
-            <a:endParaRPr lang="en-US"/>
           </a:p>
         </p:txBody>
       </p:sp>
@@ -657,7 +667,7 @@
           <a:p>
             <a:fld id="{5BCAD085-E8A6-8845-BD4E-CB4CCA059FC4}" type="datetimeFigureOut">
               <a:rPr lang="en-US" smtClean="0"/>
-              <a:t>1/27/13</a:t>
+              <a:t>9/30/2026</a:t>
             </a:fld>
             <a:endParaRPr lang="en-US"/>
           </a:p>
@@ -751,10 +761,9 @@
           <a:lstStyle/>
           <a:p>
             <a:r>
-              <a:rPr lang="en-US" smtClean="0"/>
+              <a:rPr lang="en-US"/>
               <a:t>Click to edit Master title style</a:t>
             </a:r>
-            <a:endParaRPr lang="en-US"/>
           </a:p>
         </p:txBody>
       </p:sp>
@@ -775,38 +784,37 @@
           <a:p>
             <a:pPr lvl="0"/>
             <a:r>
-              <a:rPr lang="en-US" smtClean="0"/>
+              <a:rPr lang="en-US"/>
               <a:t>Click to edit Master text styles</a:t>
             </a:r>
           </a:p>
           <a:p>
             <a:pPr lvl="1"/>
             <a:r>
-              <a:rPr lang="en-US" smtClean="0"/>
+              <a:rPr lang="en-US"/>
               <a:t>Second level</a:t>
             </a:r>
           </a:p>
           <a:p>
             <a:pPr lvl="2"/>
             <a:r>
-              <a:rPr lang="en-US" smtClean="0"/>
+              <a:rPr lang="en-US"/>
               <a:t>Third level</a:t>
             </a:r>
           </a:p>
           <a:p>
             <a:pPr lvl="3"/>
             <a:r>
-              <a:rPr lang="en-US" smtClean="0"/>
+              <a:rPr lang="en-US"/>
               <a:t>Fourth level</a:t>
             </a:r>
           </a:p>
           <a:p>
             <a:pPr lvl="4"/>
             <a:r>
-              <a:rPr lang="en-US" smtClean="0"/>
+              <a:rPr lang="en-US"/>
               <a:t>Fifth level</a:t>
             </a:r>
-            <a:endParaRPr lang="en-US"/>
           </a:p>
         </p:txBody>
       </p:sp>
@@ -827,7 +835,7 @@
           <a:p>
             <a:fld id="{5BCAD085-E8A6-8845-BD4E-CB4CCA059FC4}" type="datetimeFigureOut">
               <a:rPr lang="en-US" smtClean="0"/>
-              <a:t>1/27/13</a:t>
+              <a:t>9/30/2026</a:t>
             </a:fld>
             <a:endParaRPr lang="en-US"/>
           </a:p>
@@ -930,10 +938,9 @@
           </a:lstStyle>
           <a:p>
             <a:r>
-              <a:rPr lang="en-US" smtClean="0"/>
+              <a:rPr lang="en-US"/>
               <a:t>Click to edit Master title style</a:t>
             </a:r>
-            <a:endParaRPr lang="en-US"/>
           </a:p>
         </p:txBody>
       </p:sp>
@@ -1050,7 +1057,7 @@
           <a:p>
             <a:pPr lvl="0"/>
             <a:r>
-              <a:rPr lang="en-US" smtClean="0"/>
+              <a:rPr lang="en-US"/>
               <a:t>Click to edit Master text styles</a:t>
             </a:r>
           </a:p>
@@ -1073,7 +1080,7 @@
           <a:p>
             <a:fld id="{5BCAD085-E8A6-8845-BD4E-CB4CCA059FC4}" type="datetimeFigureOut">
               <a:rPr lang="en-US" smtClean="0"/>
-              <a:t>1/27/13</a:t>
+              <a:t>9/30/2026</a:t>
             </a:fld>
             <a:endParaRPr lang="en-US"/>
           </a:p>
@@ -1167,10 +1174,9 @@
           <a:lstStyle/>
           <a:p>
             <a:r>
-              <a:rPr lang="en-US" smtClean="0"/>
+              <a:rPr lang="en-US"/>
               <a:t>Click to edit Master title style</a:t>
             </a:r>
-            <a:endParaRPr lang="en-US"/>
           </a:p>
         </p:txBody>
       </p:sp>
@@ -1224,38 +1230,37 @@
           <a:p>
             <a:pPr lvl="0"/>
             <a:r>
-              <a:rPr lang="en-US" smtClean="0"/>
+              <a:rPr lang="en-US"/>
               <a:t>Click to edit Master text styles</a:t>
             </a:r>
           </a:p>
           <a:p>
             <a:pPr lvl="1"/>
             <a:r>
-              <a:rPr lang="en-US" smtClean="0"/>
+              <a:rPr lang="en-US"/>
               <a:t>Second level</a:t>
             </a:r>
           </a:p>
           <a:p>
             <a:pPr lvl="2"/>
             <a:r>
-              <a:rPr lang="en-US" smtClean="0"/>
+              <a:rPr lang="en-US"/>
               <a:t>Third level</a:t>
             </a:r>
           </a:p>
           <a:p>
             <a:pPr lvl="3"/>
             <a:r>
-              <a:rPr lang="en-US" smtClean="0"/>
+              <a:rPr lang="en-US"/>
               <a:t>Fourth level</a:t>
             </a:r>
           </a:p>
           <a:p>
             <a:pPr lvl="4"/>
             <a:r>
-              <a:rPr lang="en-US" smtClean="0"/>
+              <a:rPr lang="en-US"/>
               <a:t>Fifth level</a:t>
             </a:r>
-            <a:endParaRPr lang="en-US"/>
           </a:p>
         </p:txBody>
       </p:sp>
@@ -1309,38 +1314,37 @@
           <a:p>
             <a:pPr lvl="0"/>
             <a:r>
-              <a:rPr lang="en-US" smtClean="0"/>
+              <a:rPr lang="en-US"/>
               <a:t>Click to edit Master text styles</a:t>
             </a:r>
           </a:p>
           <a:p>
             <a:pPr lvl="1"/>
             <a:r>
-              <a:rPr lang="en-US" smtClean="0"/>
+              <a:rPr lang="en-US"/>
               <a:t>Second level</a:t>
             </a:r>
           </a:p>
           <a:p>
             <a:pPr lvl="2"/>
             <a:r>
-              <a:rPr lang="en-US" smtClean="0"/>
+              <a:rPr lang="en-US"/>
               <a:t>Third level</a:t>
             </a:r>
           </a:p>
           <a:p>
             <a:pPr lvl="3"/>
             <a:r>
-              <a:rPr lang="en-US" smtClean="0"/>
+              <a:rPr lang="en-US"/>
               <a:t>Fourth level</a:t>
             </a:r>
           </a:p>
           <a:p>
             <a:pPr lvl="4"/>
             <a:r>
-              <a:rPr lang="en-US" smtClean="0"/>
+              <a:rPr lang="en-US"/>
               <a:t>Fifth level</a:t>
             </a:r>
-            <a:endParaRPr lang="en-US"/>
           </a:p>
         </p:txBody>
       </p:sp>
@@ -1361,7 +1365,7 @@
           <a:p>
             <a:fld id="{5BCAD085-E8A6-8845-BD4E-CB4CCA059FC4}" type="datetimeFigureOut">
               <a:rPr lang="en-US" smtClean="0"/>
-              <a:t>1/27/13</a:t>
+              <a:t>9/30/2026</a:t>
             </a:fld>
             <a:endParaRPr lang="en-US"/>
           </a:p>
@@ -1459,10 +1463,9 @@
           </a:lstStyle>
           <a:p>
             <a:r>
-              <a:rPr lang="en-US" smtClean="0"/>
+              <a:rPr lang="en-US"/>
               <a:t>Click to edit Master title style</a:t>
             </a:r>
-            <a:endParaRPr lang="en-US"/>
           </a:p>
         </p:txBody>
       </p:sp>
@@ -1525,7 +1528,7 @@
           <a:p>
             <a:pPr lvl="0"/>
             <a:r>
-              <a:rPr lang="en-US" smtClean="0"/>
+              <a:rPr lang="en-US"/>
               <a:t>Click to edit Master text styles</a:t>
             </a:r>
           </a:p>
@@ -1581,38 +1584,37 @@
           <a:p>
             <a:pPr lvl="0"/>
             <a:r>
-              <a:rPr lang="en-US" smtClean="0"/>
+              <a:rPr lang="en-US"/>
               <a:t>Click to edit Master text styles</a:t>
             </a:r>
           </a:p>
           <a:p>
             <a:pPr lvl="1"/>
             <a:r>
-              <a:rPr lang="en-US" smtClean="0"/>
+              <a:rPr lang="en-US"/>
               <a:t>Second level</a:t>
             </a:r>
           </a:p>
           <a:p>
             <a:pPr lvl="2"/>
             <a:r>
-              <a:rPr lang="en-US" smtClean="0"/>
+              <a:rPr lang="en-US"/>
               <a:t>Third level</a:t>
             </a:r>
           </a:p>
           <a:p>
             <a:pPr lvl="3"/>
             <a:r>
-              <a:rPr lang="en-US" smtClean="0"/>
+              <a:rPr lang="en-US"/>
               <a:t>Fourth level</a:t>
             </a:r>
           </a:p>
           <a:p>
             <a:pPr lvl="4"/>
             <a:r>
-              <a:rPr lang="en-US" smtClean="0"/>
+              <a:rPr lang="en-US"/>
               <a:t>Fifth level</a:t>
             </a:r>
-            <a:endParaRPr lang="en-US"/>
           </a:p>
         </p:txBody>
       </p:sp>
@@ -1675,7 +1677,7 @@
           <a:p>
             <a:pPr lvl="0"/>
             <a:r>
-              <a:rPr lang="en-US" smtClean="0"/>
+              <a:rPr lang="en-US"/>
               <a:t>Click to edit Master text styles</a:t>
             </a:r>
           </a:p>
@@ -1731,38 +1733,37 @@
           <a:p>
             <a:pPr lvl="0"/>
             <a:r>
-              <a:rPr lang="en-US" smtClean="0"/>
+              <a:rPr lang="en-US"/>
               <a:t>Click to edit Master text styles</a:t>
             </a:r>
           </a:p>
           <a:p>
             <a:pPr lvl="1"/>
             <a:r>
-              <a:rPr lang="en-US" smtClean="0"/>
+              <a:rPr lang="en-US"/>
               <a:t>Second level</a:t>
             </a:r>
           </a:p>
           <a:p>
             <a:pPr lvl="2"/>
             <a:r>
-              <a:rPr lang="en-US" smtClean="0"/>
+              <a:rPr lang="en-US"/>
               <a:t>Third level</a:t>
             </a:r>
           </a:p>
           <a:p>
             <a:pPr lvl="3"/>
             <a:r>
-              <a:rPr lang="en-US" smtClean="0"/>
+              <a:rPr lang="en-US"/>
               <a:t>Fourth level</a:t>
             </a:r>
           </a:p>
           <a:p>
             <a:pPr lvl="4"/>
             <a:r>
-              <a:rPr lang="en-US" smtClean="0"/>
+              <a:rPr lang="en-US"/>
               <a:t>Fifth level</a:t>
             </a:r>
-            <a:endParaRPr lang="en-US"/>
           </a:p>
         </p:txBody>
       </p:sp>
@@ -1783,7 +1784,7 @@
           <a:p>
             <a:fld id="{5BCAD085-E8A6-8845-BD4E-CB4CCA059FC4}" type="datetimeFigureOut">
               <a:rPr lang="en-US" smtClean="0"/>
-              <a:t>1/27/13</a:t>
+              <a:t>9/30/2026</a:t>
             </a:fld>
             <a:endParaRPr lang="en-US"/>
           </a:p>
@@ -1877,10 +1878,9 @@
           <a:lstStyle/>
           <a:p>
             <a:r>
-              <a:rPr lang="en-US" smtClean="0"/>
+              <a:rPr lang="en-US"/>
               <a:t>Click to edit Master title style</a:t>
             </a:r>
-            <a:endParaRPr lang="en-US"/>
           </a:p>
         </p:txBody>
       </p:sp>
@@ -1901,7 +1901,7 @@
           <a:p>
             <a:fld id="{5BCAD085-E8A6-8845-BD4E-CB4CCA059FC4}" type="datetimeFigureOut">
               <a:rPr lang="en-US" smtClean="0"/>
-              <a:t>1/27/13</a:t>
+              <a:t>9/30/2026</a:t>
             </a:fld>
             <a:endParaRPr lang="en-US"/>
           </a:p>
@@ -1996,7 +1996,7 @@
           <a:p>
             <a:fld id="{5BCAD085-E8A6-8845-BD4E-CB4CCA059FC4}" type="datetimeFigureOut">
               <a:rPr lang="en-US" smtClean="0"/>
-              <a:t>1/27/13</a:t>
+              <a:t>9/30/2026</a:t>
             </a:fld>
             <a:endParaRPr lang="en-US"/>
           </a:p>
@@ -2099,10 +2099,9 @@
           </a:lstStyle>
           <a:p>
             <a:r>
-              <a:rPr lang="en-US" smtClean="0"/>
+              <a:rPr lang="en-US"/>
               <a:t>Click to edit Master title style</a:t>
             </a:r>
-            <a:endParaRPr lang="en-US"/>
           </a:p>
         </p:txBody>
       </p:sp>
@@ -2156,38 +2155,37 @@
           <a:p>
             <a:pPr lvl="0"/>
             <a:r>
-              <a:rPr lang="en-US" smtClean="0"/>
+              <a:rPr lang="en-US"/>
               <a:t>Click to edit Master text styles</a:t>
             </a:r>
           </a:p>
           <a:p>
             <a:pPr lvl="1"/>
             <a:r>
-              <a:rPr lang="en-US" smtClean="0"/>
+              <a:rPr lang="en-US"/>
               <a:t>Second level</a:t>
             </a:r>
           </a:p>
           <a:p>
             <a:pPr lvl="2"/>
             <a:r>
-              <a:rPr lang="en-US" smtClean="0"/>
+              <a:rPr lang="en-US"/>
               <a:t>Third level</a:t>
             </a:r>
           </a:p>
           <a:p>
             <a:pPr lvl="3"/>
             <a:r>
-              <a:rPr lang="en-US" smtClean="0"/>
+              <a:rPr lang="en-US"/>
               <a:t>Fourth level</a:t>
             </a:r>
           </a:p>
           <a:p>
             <a:pPr lvl="4"/>
             <a:r>
-              <a:rPr lang="en-US" smtClean="0"/>
+              <a:rPr lang="en-US"/>
               <a:t>Fifth level</a:t>
             </a:r>
-            <a:endParaRPr lang="en-US"/>
           </a:p>
         </p:txBody>
       </p:sp>
@@ -2250,7 +2248,7 @@
           <a:p>
             <a:pPr lvl="0"/>
             <a:r>
-              <a:rPr lang="en-US" smtClean="0"/>
+              <a:rPr lang="en-US"/>
               <a:t>Click to edit Master text styles</a:t>
             </a:r>
           </a:p>
@@ -2273,7 +2271,7 @@
           <a:p>
             <a:fld id="{5BCAD085-E8A6-8845-BD4E-CB4CCA059FC4}" type="datetimeFigureOut">
               <a:rPr lang="en-US" smtClean="0"/>
-              <a:t>1/27/13</a:t>
+              <a:t>9/30/2026</a:t>
             </a:fld>
             <a:endParaRPr lang="en-US"/>
           </a:p>
@@ -2376,10 +2374,9 @@
           </a:lstStyle>
           <a:p>
             <a:r>
-              <a:rPr lang="en-US" smtClean="0"/>
+              <a:rPr lang="en-US"/>
               <a:t>Click to edit Master title style</a:t>
             </a:r>
-            <a:endParaRPr lang="en-US"/>
           </a:p>
         </p:txBody>
       </p:sp>
@@ -2503,7 +2500,7 @@
           <a:p>
             <a:pPr lvl="0"/>
             <a:r>
-              <a:rPr lang="en-US" smtClean="0"/>
+              <a:rPr lang="en-US"/>
               <a:t>Click to edit Master text styles</a:t>
             </a:r>
           </a:p>
@@ -2526,7 +2523,7 @@
           <a:p>
             <a:fld id="{5BCAD085-E8A6-8845-BD4E-CB4CCA059FC4}" type="datetimeFigureOut">
               <a:rPr lang="en-US" smtClean="0"/>
-              <a:t>1/27/13</a:t>
+              <a:t>9/30/2026</a:t>
             </a:fld>
             <a:endParaRPr lang="en-US"/>
           </a:p>
@@ -2635,10 +2632,9 @@
           <a:lstStyle/>
           <a:p>
             <a:r>
-              <a:rPr lang="en-US" smtClean="0"/>
+              <a:rPr lang="en-US"/>
               <a:t>Click to edit Master title style</a:t>
             </a:r>
-            <a:endParaRPr lang="en-US"/>
           </a:p>
         </p:txBody>
       </p:sp>
@@ -2669,38 +2665,37 @@
           <a:p>
             <a:pPr lvl="0"/>
             <a:r>
-              <a:rPr lang="en-US" smtClean="0"/>
+              <a:rPr lang="en-US"/>
               <a:t>Click to edit Master text styles</a:t>
             </a:r>
           </a:p>
           <a:p>
             <a:pPr lvl="1"/>
             <a:r>
-              <a:rPr lang="en-US" smtClean="0"/>
+              <a:rPr lang="en-US"/>
               <a:t>Second level</a:t>
             </a:r>
           </a:p>
           <a:p>
             <a:pPr lvl="2"/>
             <a:r>
-              <a:rPr lang="en-US" smtClean="0"/>
+              <a:rPr lang="en-US"/>
               <a:t>Third level</a:t>
             </a:r>
           </a:p>
           <a:p>
             <a:pPr lvl="3"/>
             <a:r>
-              <a:rPr lang="en-US" smtClean="0"/>
+              <a:rPr lang="en-US"/>
               <a:t>Fourth level</a:t>
             </a:r>
           </a:p>
           <a:p>
             <a:pPr lvl="4"/>
             <a:r>
-              <a:rPr lang="en-US" smtClean="0"/>
+              <a:rPr lang="en-US"/>
               <a:t>Fifth level</a:t>
             </a:r>
-            <a:endParaRPr lang="en-US"/>
           </a:p>
         </p:txBody>
       </p:sp>
@@ -2739,7 +2734,7 @@
           <a:p>
             <a:fld id="{5BCAD085-E8A6-8845-BD4E-CB4CCA059FC4}" type="datetimeFigureOut">
               <a:rPr lang="en-US" smtClean="0"/>
-              <a:t>1/27/13</a:t>
+              <a:t>9/30/2026</a:t>
             </a:fld>
             <a:endParaRPr lang="en-US"/>
           </a:p>
@@ -3098,7 +3093,7 @@
 </file>
 
 <file path=ppt/slides/slide1.xml><?xml version="1.0" encoding="utf-8"?>
-<p:sld xmlns:a="http://schemas.openxmlformats.org/drawingml/2006/main" xmlns:p="http://schemas.openxmlformats.org/presentationml/2006/main" xmlns:r="http://schemas.openxmlformats.org/officeDocument/2006/relationships">
+<p:sld xmlns:a="http://schemas.openxmlformats.org/drawingml/2006/main" xmlns:r="http://schemas.openxmlformats.org/officeDocument/2006/relationships" xmlns:p="http://schemas.openxmlformats.org/presentationml/2006/main">
   <p:cSld>
     <p:bg>
       <p:bgPr>
@@ -3114,7 +3109,14 @@
         <p:cNvGrpSpPr/>
         <p:nvPr/>
       </p:nvGrpSpPr>
-      <p:grpSpPr/>
+      <p:grpSpPr>
+        <a:xfrm>
+          <a:off x="0" y="0"/>
+          <a:ext cx="0" cy="0"/>
+          <a:chOff x="0" y="0"/>
+          <a:chExt cx="0" cy="0"/>
+        </a:xfrm>
+      </p:grpSpPr>
       <p:sp>
         <p:nvSpPr>
           <p:cNvPr id="2" name="TextBox 1"/>
@@ -3149,14 +3151,47 @@
               </a:spcAft>
             </a:pPr>
             <a:r>
-              <a:rPr sz="2700" b="1" i="0">
+              <a:rPr sz="2700" b="1" i="0" dirty="0">
                 <a:solidFill>
                   <a:srgbClr val="111111"/>
                 </a:solidFill>
                 <a:latin typeface="Arial"/>
               </a:rPr>
-              <a:t>Task-Oriented Deep Joint Source–Channel Coding</a:t>
-            </a:r>
+              <a:t>Task-Oriented </a:t>
+            </a:r>
+            <a:r>
+              <a:rPr sz="2700" b="1" i="0" dirty="0" err="1">
+                <a:solidFill>
+                  <a:srgbClr val="111111"/>
+                </a:solidFill>
+                <a:latin typeface="Arial"/>
+              </a:rPr>
+              <a:t>Deep</a:t>
+            </a:r>
+            <a:r>
+              <a:rPr lang="en-US" sz="2700" b="1" i="0" dirty="0" err="1">
+                <a:solidFill>
+                  <a:srgbClr val="111111"/>
+                </a:solidFill>
+                <a:latin typeface="Arial"/>
+              </a:rPr>
+              <a:t>JSCC</a:t>
+            </a:r>
+            <a:r>
+              <a:rPr lang="en-US" sz="2700" b="1" i="0" dirty="0">
+                <a:solidFill>
+                  <a:srgbClr val="111111"/>
+                </a:solidFill>
+                <a:latin typeface="Arial"/>
+              </a:rPr>
+              <a:t> Based Semantic Communication</a:t>
+            </a:r>
+            <a:endParaRPr sz="2700" b="1" i="0" dirty="0">
+              <a:solidFill>
+                <a:srgbClr val="111111"/>
+              </a:solidFill>
+              <a:latin typeface="Arial"/>
+            </a:endParaRPr>
           </a:p>
         </p:txBody>
       </p:sp>
@@ -3229,7 +3264,7 @@
               </a:spcAft>
             </a:pPr>
             <a:r>
-              <a:rPr sz="2000" b="0" i="1">
+              <a:rPr sz="2000" b="0" i="1" dirty="0">
                 <a:solidFill>
                   <a:srgbClr val="111111"/>
                 </a:solidFill>
@@ -3282,6 +3317,7 @@
           <a:lstStyle/>
           <a:p>
             <a:pPr algn="ctr"/>
+            <a:endParaRPr/>
           </a:p>
         </p:txBody>
       </p:sp>
@@ -3319,7 +3355,7 @@
               </a:spcAft>
             </a:pPr>
             <a:r>
-              <a:rPr sz="1400" b="1" i="0">
+              <a:rPr sz="1400" b="1" i="0" dirty="0">
                 <a:solidFill>
                   <a:srgbClr val="111111"/>
                 </a:solidFill>
@@ -3417,6 +3453,7 @@
           <a:lstStyle/>
           <a:p>
             <a:pPr algn="ctr"/>
+            <a:endParaRPr/>
           </a:p>
         </p:txBody>
       </p:sp>
@@ -3552,6 +3589,7 @@
           <a:lstStyle/>
           <a:p>
             <a:pPr algn="ctr"/>
+            <a:endParaRPr/>
           </a:p>
         </p:txBody>
       </p:sp>
@@ -3720,6 +3758,7 @@
           <a:lstStyle/>
           <a:p>
             <a:pPr algn="ctr"/>
+            <a:endParaRPr/>
           </a:p>
         </p:txBody>
       </p:sp>
@@ -3798,6 +3837,7 @@
           <a:lstStyle/>
           <a:p>
             <a:pPr algn="ctr"/>
+            <a:endParaRPr/>
           </a:p>
         </p:txBody>
       </p:sp>
@@ -3843,6 +3883,7 @@
           <a:lstStyle/>
           <a:p>
             <a:pPr algn="ctr"/>
+            <a:endParaRPr/>
           </a:p>
         </p:txBody>
       </p:sp>
@@ -4195,7 +4236,7 @@
 </file>
 
 <file path=ppt/slides/slide10.xml><?xml version="1.0" encoding="utf-8"?>
-<p:sld xmlns:a="http://schemas.openxmlformats.org/drawingml/2006/main" xmlns:p="http://schemas.openxmlformats.org/presentationml/2006/main" xmlns:r="http://schemas.openxmlformats.org/officeDocument/2006/relationships">
+<p:sld xmlns:a="http://schemas.openxmlformats.org/drawingml/2006/main" xmlns:r="http://schemas.openxmlformats.org/officeDocument/2006/relationships" xmlns:p="http://schemas.openxmlformats.org/presentationml/2006/main">
   <p:cSld>
     <p:bg>
       <p:bgPr>
@@ -4211,7 +4252,14 @@
         <p:cNvGrpSpPr/>
         <p:nvPr/>
       </p:nvGrpSpPr>
-      <p:grpSpPr/>
+      <p:grpSpPr>
+        <a:xfrm>
+          <a:off x="0" y="0"/>
+          <a:ext cx="0" cy="0"/>
+          <a:chOff x="0" y="0"/>
+          <a:chExt cx="0" cy="0"/>
+        </a:xfrm>
+      </p:grpSpPr>
       <p:sp>
         <p:nvSpPr>
           <p:cNvPr id="2" name="TextBox 1"/>
@@ -4880,7 +4928,7 @@
 </file>
 
 <file path=ppt/slides/slide11.xml><?xml version="1.0" encoding="utf-8"?>
-<p:sld xmlns:a="http://schemas.openxmlformats.org/drawingml/2006/main" xmlns:p="http://schemas.openxmlformats.org/presentationml/2006/main" xmlns:r="http://schemas.openxmlformats.org/officeDocument/2006/relationships">
+<p:sld xmlns:a="http://schemas.openxmlformats.org/drawingml/2006/main" xmlns:r="http://schemas.openxmlformats.org/officeDocument/2006/relationships" xmlns:p="http://schemas.openxmlformats.org/presentationml/2006/main">
   <p:cSld>
     <p:bg>
       <p:bgPr>
@@ -4896,7 +4944,14 @@
         <p:cNvGrpSpPr/>
         <p:nvPr/>
       </p:nvGrpSpPr>
-      <p:grpSpPr/>
+      <p:grpSpPr>
+        <a:xfrm>
+          <a:off x="0" y="0"/>
+          <a:ext cx="0" cy="0"/>
+          <a:chOff x="0" y="0"/>
+          <a:chExt cx="0" cy="0"/>
+        </a:xfrm>
+      </p:grpSpPr>
       <p:sp>
         <p:nvSpPr>
           <p:cNvPr id="2" name="TextBox 1"/>
@@ -5088,6 +5143,7 @@
           <a:lstStyle/>
           <a:p>
             <a:pPr algn="ctr"/>
+            <a:endParaRPr/>
           </a:p>
         </p:txBody>
       </p:sp>
@@ -5403,6 +5459,7 @@
           <a:lstStyle/>
           <a:p>
             <a:pPr algn="ctr"/>
+            <a:endParaRPr/>
           </a:p>
         </p:txBody>
       </p:sp>
@@ -5718,6 +5775,7 @@
           <a:lstStyle/>
           <a:p>
             <a:pPr algn="ctr"/>
+            <a:endParaRPr/>
           </a:p>
         </p:txBody>
       </p:sp>
@@ -6345,7 +6403,7 @@
 </file>
 
 <file path=ppt/slides/slide12.xml><?xml version="1.0" encoding="utf-8"?>
-<p:sld xmlns:a="http://schemas.openxmlformats.org/drawingml/2006/main" xmlns:p="http://schemas.openxmlformats.org/presentationml/2006/main" xmlns:r="http://schemas.openxmlformats.org/officeDocument/2006/relationships">
+<p:sld xmlns:a="http://schemas.openxmlformats.org/drawingml/2006/main" xmlns:r="http://schemas.openxmlformats.org/officeDocument/2006/relationships" xmlns:p="http://schemas.openxmlformats.org/presentationml/2006/main">
   <p:cSld>
     <p:bg>
       <p:bgPr>
@@ -6361,7 +6419,14 @@
         <p:cNvGrpSpPr/>
         <p:nvPr/>
       </p:nvGrpSpPr>
-      <p:grpSpPr/>
+      <p:grpSpPr>
+        <a:xfrm>
+          <a:off x="0" y="0"/>
+          <a:ext cx="0" cy="0"/>
+          <a:chOff x="0" y="0"/>
+          <a:chExt cx="0" cy="0"/>
+        </a:xfrm>
+      </p:grpSpPr>
       <p:sp>
         <p:nvSpPr>
           <p:cNvPr id="2" name="TextBox 1"/>
@@ -6905,7 +6970,7 @@
 </file>
 
 <file path=ppt/slides/slide13.xml><?xml version="1.0" encoding="utf-8"?>
-<p:sld xmlns:a="http://schemas.openxmlformats.org/drawingml/2006/main" xmlns:p="http://schemas.openxmlformats.org/presentationml/2006/main" xmlns:r="http://schemas.openxmlformats.org/officeDocument/2006/relationships">
+<p:sld xmlns:a="http://schemas.openxmlformats.org/drawingml/2006/main" xmlns:r="http://schemas.openxmlformats.org/officeDocument/2006/relationships" xmlns:p="http://schemas.openxmlformats.org/presentationml/2006/main">
   <p:cSld>
     <p:bg>
       <p:bgPr>
@@ -6921,7 +6986,14 @@
         <p:cNvGrpSpPr/>
         <p:nvPr/>
       </p:nvGrpSpPr>
-      <p:grpSpPr/>
+      <p:grpSpPr>
+        <a:xfrm>
+          <a:off x="0" y="0"/>
+          <a:ext cx="0" cy="0"/>
+          <a:chOff x="0" y="0"/>
+          <a:chExt cx="0" cy="0"/>
+        </a:xfrm>
+      </p:grpSpPr>
       <p:sp>
         <p:nvSpPr>
           <p:cNvPr id="2" name="TextBox 1"/>
@@ -7158,6 +7230,7 @@
           <a:lstStyle/>
           <a:p>
             <a:pPr algn="ctr"/>
+            <a:endParaRPr/>
           </a:p>
         </p:txBody>
       </p:sp>
@@ -7383,6 +7456,7 @@
           <a:lstStyle/>
           <a:p>
             <a:pPr algn="ctr"/>
+            <a:endParaRPr/>
           </a:p>
         </p:txBody>
       </p:sp>
@@ -7608,6 +7682,7 @@
           <a:lstStyle/>
           <a:p>
             <a:pPr algn="ctr"/>
+            <a:endParaRPr/>
           </a:p>
         </p:txBody>
       </p:sp>
@@ -8075,7 +8150,7 @@
 </file>
 
 <file path=ppt/slides/slide14.xml><?xml version="1.0" encoding="utf-8"?>
-<p:sld xmlns:a="http://schemas.openxmlformats.org/drawingml/2006/main" xmlns:p="http://schemas.openxmlformats.org/presentationml/2006/main" xmlns:r="http://schemas.openxmlformats.org/officeDocument/2006/relationships">
+<p:sld xmlns:a="http://schemas.openxmlformats.org/drawingml/2006/main" xmlns:r="http://schemas.openxmlformats.org/officeDocument/2006/relationships" xmlns:p="http://schemas.openxmlformats.org/presentationml/2006/main">
   <p:cSld>
     <p:bg>
       <p:bgPr>
@@ -8091,7 +8166,14 @@
         <p:cNvGrpSpPr/>
         <p:nvPr/>
       </p:nvGrpSpPr>
-      <p:grpSpPr/>
+      <p:grpSpPr>
+        <a:xfrm>
+          <a:off x="0" y="0"/>
+          <a:ext cx="0" cy="0"/>
+          <a:chOff x="0" y="0"/>
+          <a:chExt cx="0" cy="0"/>
+        </a:xfrm>
+      </p:grpSpPr>
       <p:sp>
         <p:nvSpPr>
           <p:cNvPr id="2" name="TextBox 1"/>
@@ -8885,7 +8967,7 @@
 </file>
 
 <file path=ppt/slides/slide15.xml><?xml version="1.0" encoding="utf-8"?>
-<p:sld xmlns:a="http://schemas.openxmlformats.org/drawingml/2006/main" xmlns:p="http://schemas.openxmlformats.org/presentationml/2006/main" xmlns:r="http://schemas.openxmlformats.org/officeDocument/2006/relationships">
+<p:sld xmlns:a="http://schemas.openxmlformats.org/drawingml/2006/main" xmlns:r="http://schemas.openxmlformats.org/officeDocument/2006/relationships" xmlns:p="http://schemas.openxmlformats.org/presentationml/2006/main">
   <p:cSld>
     <p:bg>
       <p:bgPr>
@@ -8901,7 +8983,14 @@
         <p:cNvGrpSpPr/>
         <p:nvPr/>
       </p:nvGrpSpPr>
-      <p:grpSpPr/>
+      <p:grpSpPr>
+        <a:xfrm>
+          <a:off x="0" y="0"/>
+          <a:ext cx="0" cy="0"/>
+          <a:chOff x="0" y="0"/>
+          <a:chExt cx="0" cy="0"/>
+        </a:xfrm>
+      </p:grpSpPr>
       <p:sp>
         <p:nvSpPr>
           <p:cNvPr id="2" name="TextBox 1"/>
@@ -9114,6 +9203,7 @@
           <a:lstStyle/>
           <a:p>
             <a:pPr algn="ctr"/>
+            <a:endParaRPr/>
           </a:p>
         </p:txBody>
       </p:sp>
@@ -9474,6 +9564,7 @@
           <a:lstStyle/>
           <a:p>
             <a:pPr algn="ctr"/>
+            <a:endParaRPr/>
           </a:p>
         </p:txBody>
       </p:sp>
@@ -9834,6 +9925,7 @@
           <a:lstStyle/>
           <a:p>
             <a:pPr algn="ctr"/>
+            <a:endParaRPr/>
           </a:p>
         </p:txBody>
       </p:sp>
@@ -10194,6 +10286,7 @@
           <a:lstStyle/>
           <a:p>
             <a:pPr algn="ctr"/>
+            <a:endParaRPr/>
           </a:p>
         </p:txBody>
       </p:sp>
@@ -10554,6 +10647,7 @@
           <a:lstStyle/>
           <a:p>
             <a:pPr algn="ctr"/>
+            <a:endParaRPr/>
           </a:p>
         </p:txBody>
       </p:sp>
@@ -10914,6 +11008,7 @@
           <a:lstStyle/>
           <a:p>
             <a:pPr algn="ctr"/>
+            <a:endParaRPr/>
           </a:p>
         </p:txBody>
       </p:sp>
@@ -11529,6 +11624,7 @@
           <a:lstStyle/>
           <a:p>
             <a:pPr algn="ctr"/>
+            <a:endParaRPr/>
           </a:p>
         </p:txBody>
       </p:sp>
@@ -11889,6 +11985,7 @@
           <a:lstStyle/>
           <a:p>
             <a:pPr algn="ctr"/>
+            <a:endParaRPr/>
           </a:p>
         </p:txBody>
       </p:sp>
@@ -12249,6 +12346,7 @@
           <a:lstStyle/>
           <a:p>
             <a:pPr algn="ctr"/>
+            <a:endParaRPr/>
           </a:p>
         </p:txBody>
       </p:sp>
@@ -13171,7 +13269,7 @@
 </file>
 
 <file path=ppt/slides/slide16.xml><?xml version="1.0" encoding="utf-8"?>
-<p:sld xmlns:a="http://schemas.openxmlformats.org/drawingml/2006/main" xmlns:p="http://schemas.openxmlformats.org/presentationml/2006/main" xmlns:r="http://schemas.openxmlformats.org/officeDocument/2006/relationships">
+<p:sld xmlns:a="http://schemas.openxmlformats.org/drawingml/2006/main" xmlns:r="http://schemas.openxmlformats.org/officeDocument/2006/relationships" xmlns:p="http://schemas.openxmlformats.org/presentationml/2006/main">
   <p:cSld>
     <p:bg>
       <p:bgPr>
@@ -13187,7 +13285,14 @@
         <p:cNvGrpSpPr/>
         <p:nvPr/>
       </p:nvGrpSpPr>
-      <p:grpSpPr/>
+      <p:grpSpPr>
+        <a:xfrm>
+          <a:off x="0" y="0"/>
+          <a:ext cx="0" cy="0"/>
+          <a:chOff x="0" y="0"/>
+          <a:chExt cx="0" cy="0"/>
+        </a:xfrm>
+      </p:grpSpPr>
       <p:sp>
         <p:nvSpPr>
           <p:cNvPr id="2" name="TextBox 1"/>
@@ -14117,7 +14222,7 @@
 </file>
 
 <file path=ppt/slides/slide17.xml><?xml version="1.0" encoding="utf-8"?>
-<p:sld xmlns:a="http://schemas.openxmlformats.org/drawingml/2006/main" xmlns:p="http://schemas.openxmlformats.org/presentationml/2006/main" xmlns:r="http://schemas.openxmlformats.org/officeDocument/2006/relationships">
+<p:sld xmlns:a="http://schemas.openxmlformats.org/drawingml/2006/main" xmlns:r="http://schemas.openxmlformats.org/officeDocument/2006/relationships" xmlns:p="http://schemas.openxmlformats.org/presentationml/2006/main">
   <p:cSld>
     <p:bg>
       <p:bgPr>
@@ -14133,7 +14238,14 @@
         <p:cNvGrpSpPr/>
         <p:nvPr/>
       </p:nvGrpSpPr>
-      <p:grpSpPr/>
+      <p:grpSpPr>
+        <a:xfrm>
+          <a:off x="0" y="0"/>
+          <a:ext cx="0" cy="0"/>
+          <a:chOff x="0" y="0"/>
+          <a:chExt cx="0" cy="0"/>
+        </a:xfrm>
+      </p:grpSpPr>
       <p:sp>
         <p:nvSpPr>
           <p:cNvPr id="2" name="TextBox 1"/>
@@ -14301,6 +14413,7 @@
           <a:lstStyle/>
           <a:p>
             <a:pPr algn="ctr"/>
+            <a:endParaRPr/>
           </a:p>
         </p:txBody>
       </p:sp>
@@ -14516,6 +14629,7 @@
           <a:lstStyle/>
           <a:p>
             <a:pPr algn="ctr"/>
+            <a:endParaRPr/>
           </a:p>
         </p:txBody>
       </p:sp>
@@ -14731,6 +14845,7 @@
           <a:lstStyle/>
           <a:p>
             <a:pPr algn="ctr"/>
+            <a:endParaRPr/>
           </a:p>
         </p:txBody>
       </p:sp>
@@ -14946,6 +15061,7 @@
           <a:lstStyle/>
           <a:p>
             <a:pPr algn="ctr"/>
+            <a:endParaRPr/>
           </a:p>
         </p:txBody>
       </p:sp>
@@ -15378,7 +15494,7 @@
 </file>
 
 <file path=ppt/slides/slide18.xml><?xml version="1.0" encoding="utf-8"?>
-<p:sld xmlns:a="http://schemas.openxmlformats.org/drawingml/2006/main" xmlns:p="http://schemas.openxmlformats.org/presentationml/2006/main" xmlns:r="http://schemas.openxmlformats.org/officeDocument/2006/relationships">
+<p:sld xmlns:a="http://schemas.openxmlformats.org/drawingml/2006/main" xmlns:r="http://schemas.openxmlformats.org/officeDocument/2006/relationships" xmlns:p="http://schemas.openxmlformats.org/presentationml/2006/main">
   <p:cSld>
     <p:bg>
       <p:bgPr>
@@ -15394,7 +15510,14 @@
         <p:cNvGrpSpPr/>
         <p:nvPr/>
       </p:nvGrpSpPr>
-      <p:grpSpPr/>
+      <p:grpSpPr>
+        <a:xfrm>
+          <a:off x="0" y="0"/>
+          <a:ext cx="0" cy="0"/>
+          <a:chOff x="0" y="0"/>
+          <a:chExt cx="0" cy="0"/>
+        </a:xfrm>
+      </p:grpSpPr>
       <p:sp>
         <p:nvSpPr>
           <p:cNvPr id="2" name="TextBox 1"/>
@@ -15517,6 +15640,7 @@
           <a:lstStyle/>
           <a:p>
             <a:pPr algn="ctr"/>
+            <a:endParaRPr/>
           </a:p>
         </p:txBody>
       </p:sp>
@@ -15732,6 +15856,7 @@
           <a:lstStyle/>
           <a:p>
             <a:pPr algn="ctr"/>
+            <a:endParaRPr/>
           </a:p>
         </p:txBody>
       </p:sp>
@@ -16659,7 +16784,7 @@
 </file>
 
 <file path=ppt/slides/slide19.xml><?xml version="1.0" encoding="utf-8"?>
-<p:sld xmlns:a="http://schemas.openxmlformats.org/drawingml/2006/main" xmlns:p="http://schemas.openxmlformats.org/presentationml/2006/main" xmlns:r="http://schemas.openxmlformats.org/officeDocument/2006/relationships">
+<p:sld xmlns:a="http://schemas.openxmlformats.org/drawingml/2006/main" xmlns:r="http://schemas.openxmlformats.org/officeDocument/2006/relationships" xmlns:p="http://schemas.openxmlformats.org/presentationml/2006/main">
   <p:cSld>
     <p:bg>
       <p:bgPr>
@@ -16675,7 +16800,14 @@
         <p:cNvGrpSpPr/>
         <p:nvPr/>
       </p:nvGrpSpPr>
-      <p:grpSpPr/>
+      <p:grpSpPr>
+        <a:xfrm>
+          <a:off x="0" y="0"/>
+          <a:ext cx="0" cy="0"/>
+          <a:chOff x="0" y="0"/>
+          <a:chExt cx="0" cy="0"/>
+        </a:xfrm>
+      </p:grpSpPr>
       <p:sp>
         <p:nvSpPr>
           <p:cNvPr id="2" name="TextBox 1"/>
@@ -18735,7 +18867,7 @@
 </file>
 
 <file path=ppt/slides/slide2.xml><?xml version="1.0" encoding="utf-8"?>
-<p:sld xmlns:a="http://schemas.openxmlformats.org/drawingml/2006/main" xmlns:p="http://schemas.openxmlformats.org/presentationml/2006/main" xmlns:r="http://schemas.openxmlformats.org/officeDocument/2006/relationships">
+<p:sld xmlns:a="http://schemas.openxmlformats.org/drawingml/2006/main" xmlns:r="http://schemas.openxmlformats.org/officeDocument/2006/relationships" xmlns:p="http://schemas.openxmlformats.org/presentationml/2006/main">
   <p:cSld>
     <p:bg>
       <p:bgPr>
@@ -18751,7 +18883,14 @@
         <p:cNvGrpSpPr/>
         <p:nvPr/>
       </p:nvGrpSpPr>
-      <p:grpSpPr/>
+      <p:grpSpPr>
+        <a:xfrm>
+          <a:off x="0" y="0"/>
+          <a:ext cx="0" cy="0"/>
+          <a:chOff x="0" y="0"/>
+          <a:chExt cx="0" cy="0"/>
+        </a:xfrm>
+      </p:grpSpPr>
       <p:sp>
         <p:nvSpPr>
           <p:cNvPr id="2" name="TextBox 1"/>
@@ -18786,14 +18925,38 @@
               </a:spcAft>
             </a:pPr>
             <a:r>
-              <a:rPr sz="2700" b="1" i="0">
+              <a:rPr lang="en-US" sz="2700" b="1" dirty="0">
                 <a:solidFill>
                   <a:srgbClr val="111111"/>
                 </a:solidFill>
                 <a:latin typeface="Arial"/>
               </a:rPr>
-              <a:t>What has changed since the first review</a:t>
-            </a:r>
+              <a:t>Progress </a:t>
+            </a:r>
+            <a:r>
+              <a:rPr lang="en-US" sz="2700" b="1" dirty="0" err="1">
+                <a:solidFill>
+                  <a:srgbClr val="111111"/>
+                </a:solidFill>
+                <a:latin typeface="Arial"/>
+              </a:rPr>
+              <a:t>upto</a:t>
+            </a:r>
+            <a:r>
+              <a:rPr lang="en-US" sz="2700" b="1" dirty="0">
+                <a:solidFill>
+                  <a:srgbClr val="111111"/>
+                </a:solidFill>
+                <a:latin typeface="Arial"/>
+              </a:rPr>
+              <a:t> Sep. 30th</a:t>
+            </a:r>
+            <a:endParaRPr sz="2700" b="1" i="0" dirty="0">
+              <a:solidFill>
+                <a:srgbClr val="111111"/>
+              </a:solidFill>
+              <a:latin typeface="Arial"/>
+            </a:endParaRPr>
           </a:p>
         </p:txBody>
       </p:sp>
@@ -18866,14 +19029,20 @@
               </a:spcAft>
             </a:pPr>
             <a:r>
-              <a:rPr sz="1400" b="0" i="0">
+              <a:rPr lang="en-US" sz="1400" b="0" i="0" dirty="0">
                 <a:solidFill>
                   <a:srgbClr val="555555"/>
                 </a:solidFill>
                 <a:latin typeface="Arial"/>
               </a:rPr>
-              <a:t>In August the digital system was working. The learned models are trained now.</a:t>
-            </a:r>
+              <a:t>All learned models are trained now.</a:t>
+            </a:r>
+            <a:endParaRPr sz="1400" b="0" i="0" dirty="0">
+              <a:solidFill>
+                <a:srgbClr val="555555"/>
+              </a:solidFill>
+              <a:latin typeface="Arial"/>
+            </a:endParaRPr>
           </a:p>
         </p:txBody>
       </p:sp>
@@ -18956,7 +19125,7 @@
               </a:spcAft>
             </a:pPr>
             <a:r>
-              <a:rPr sz="1100" b="0" i="0">
+              <a:rPr sz="1100" b="0" i="0" dirty="0">
                 <a:solidFill>
                   <a:srgbClr val="555555"/>
                 </a:solidFill>
@@ -19081,7 +19250,7 @@
               </a:spcAft>
             </a:pPr>
             <a:r>
-              <a:rPr sz="1100" b="0" i="0">
+              <a:rPr sz="1100" b="0" i="0" dirty="0">
                 <a:solidFill>
                   <a:srgbClr val="555555"/>
                 </a:solidFill>
@@ -19206,7 +19375,7 @@
               </a:spcAft>
             </a:pPr>
             <a:r>
-              <a:rPr sz="1100" b="0" i="0">
+              <a:rPr sz="1100" b="0" i="0" dirty="0">
                 <a:solidFill>
                   <a:srgbClr val="555555"/>
                 </a:solidFill>
@@ -19331,7 +19500,7 @@
               </a:spcAft>
             </a:pPr>
             <a:r>
-              <a:rPr sz="1100" b="0" i="0">
+              <a:rPr sz="1100" b="0" i="0" dirty="0">
                 <a:solidFill>
                   <a:srgbClr val="555555"/>
                 </a:solidFill>
@@ -19456,14 +19625,29 @@
               </a:spcAft>
             </a:pPr>
             <a:r>
-              <a:rPr sz="1100" b="0" i="0">
+              <a:rPr sz="1100" b="0" i="0" dirty="0">
                 <a:solidFill>
                   <a:srgbClr val="555555"/>
                 </a:solidFill>
                 <a:latin typeface="Arial"/>
               </a:rPr>
-              <a:t>Decided it on held-back pictures before seeing the answer: the two lines cross between −5 and −4 dB.</a:t>
-            </a:r>
+              <a:t>Decided it on held-back pictures before seeing the answer: the two lines cross between −5 and −4 </a:t>
+            </a:r>
+            <a:r>
+              <a:rPr sz="1100" b="0" i="0" dirty="0" err="1">
+                <a:solidFill>
+                  <a:srgbClr val="555555"/>
+                </a:solidFill>
+                <a:latin typeface="Arial"/>
+              </a:rPr>
+              <a:t>dB.</a:t>
+            </a:r>
+            <a:endParaRPr sz="1100" b="0" i="0" dirty="0">
+              <a:solidFill>
+                <a:srgbClr val="555555"/>
+              </a:solidFill>
+              <a:latin typeface="Arial"/>
+            </a:endParaRPr>
           </a:p>
         </p:txBody>
       </p:sp>
@@ -19581,7 +19765,7 @@
               </a:spcAft>
             </a:pPr>
             <a:r>
-              <a:rPr sz="1100" b="0" i="0">
+              <a:rPr sz="1100" b="0" i="0" dirty="0">
                 <a:solidFill>
                   <a:srgbClr val="555555"/>
                 </a:solidFill>
@@ -20021,7 +20205,7 @@
 </file>
 
 <file path=ppt/slides/slide20.xml><?xml version="1.0" encoding="utf-8"?>
-<p:sld xmlns:a="http://schemas.openxmlformats.org/drawingml/2006/main" xmlns:p="http://schemas.openxmlformats.org/presentationml/2006/main" xmlns:r="http://schemas.openxmlformats.org/officeDocument/2006/relationships">
+<p:sld xmlns:a="http://schemas.openxmlformats.org/drawingml/2006/main" xmlns:r="http://schemas.openxmlformats.org/officeDocument/2006/relationships" xmlns:p="http://schemas.openxmlformats.org/presentationml/2006/main">
   <p:cSld>
     <p:bg>
       <p:bgPr>
@@ -20037,7 +20221,14 @@
         <p:cNvGrpSpPr/>
         <p:nvPr/>
       </p:nvGrpSpPr>
-      <p:grpSpPr/>
+      <p:grpSpPr>
+        <a:xfrm>
+          <a:off x="0" y="0"/>
+          <a:ext cx="0" cy="0"/>
+          <a:chOff x="0" y="0"/>
+          <a:chExt cx="0" cy="0"/>
+        </a:xfrm>
+      </p:grpSpPr>
       <p:sp>
         <p:nvSpPr>
           <p:cNvPr id="2" name="TextBox 1"/>
@@ -20160,6 +20351,7 @@
           <a:lstStyle/>
           <a:p>
             <a:pPr algn="ctr"/>
+            <a:endParaRPr/>
           </a:p>
         </p:txBody>
       </p:sp>
@@ -20852,7 +21044,7 @@
 </file>
 
 <file path=ppt/slides/slide3.xml><?xml version="1.0" encoding="utf-8"?>
-<p:sld xmlns:a="http://schemas.openxmlformats.org/drawingml/2006/main" xmlns:p="http://schemas.openxmlformats.org/presentationml/2006/main" xmlns:r="http://schemas.openxmlformats.org/officeDocument/2006/relationships">
+<p:sld xmlns:a="http://schemas.openxmlformats.org/drawingml/2006/main" xmlns:r="http://schemas.openxmlformats.org/officeDocument/2006/relationships" xmlns:p="http://schemas.openxmlformats.org/presentationml/2006/main">
   <p:cSld>
     <p:bg>
       <p:bgPr>
@@ -20868,7 +21060,14 @@
         <p:cNvGrpSpPr/>
         <p:nvPr/>
       </p:nvGrpSpPr>
-      <p:grpSpPr/>
+      <p:grpSpPr>
+        <a:xfrm>
+          <a:off x="0" y="0"/>
+          <a:ext cx="0" cy="0"/>
+          <a:chOff x="0" y="0"/>
+          <a:chExt cx="0" cy="0"/>
+        </a:xfrm>
+      </p:grpSpPr>
       <p:sp>
         <p:nvSpPr>
           <p:cNvPr id="2" name="TextBox 1"/>
@@ -20903,14 +21102,29 @@
               </a:spcAft>
             </a:pPr>
             <a:r>
-              <a:rPr sz="2700" b="1" i="0">
+              <a:rPr sz="2700" b="1" i="0" dirty="0">
                 <a:solidFill>
                   <a:srgbClr val="111111"/>
                 </a:solidFill>
                 <a:latin typeface="Arial"/>
               </a:rPr>
-              <a:t>Objectives, stated as completion criteria</a:t>
-            </a:r>
+              <a:t>Objective</a:t>
+            </a:r>
+            <a:r>
+              <a:rPr lang="en-US" sz="2700" b="1" dirty="0">
+                <a:solidFill>
+                  <a:srgbClr val="111111"/>
+                </a:solidFill>
+                <a:latin typeface="Arial"/>
+              </a:rPr>
+              <a:t>s</a:t>
+            </a:r>
+            <a:endParaRPr sz="2700" b="1" i="0" dirty="0">
+              <a:solidFill>
+                <a:srgbClr val="111111"/>
+              </a:solidFill>
+              <a:latin typeface="Arial"/>
+            </a:endParaRPr>
           </a:p>
         </p:txBody>
       </p:sp>
@@ -20951,14 +21165,14 @@
       </p:cxnSp>
       <p:sp>
         <p:nvSpPr>
-          <p:cNvPr id="4" name="TextBox 3"/>
-          <p:cNvSpPr txBox="1"/>
-          <p:nvPr/>
-        </p:nvSpPr>
-        <p:spPr>
-          <a:xfrm>
-            <a:off x="566928" y="1225296"/>
-            <a:ext cx="11018520" cy="310896"/>
+          <p:cNvPr id="5" name="TextBox 4"/>
+          <p:cNvSpPr txBox="1"/>
+          <p:nvPr/>
+        </p:nvSpPr>
+        <p:spPr>
+          <a:xfrm>
+            <a:off x="2834640" y="1458468"/>
+            <a:ext cx="6309360" cy="256032"/>
           </a:xfrm>
           <a:prstGeom prst="rect">
             <a:avLst/>
@@ -20971,39 +21185,39 @@
           </a:bodyPr>
           <a:lstStyle/>
           <a:p>
-            <a:pPr algn="ctr">
-              <a:lnSpc>
-                <a:spcPct val="100000"/>
-              </a:lnSpc>
-              <a:spcBef>
-                <a:spcPts val="0"/>
-              </a:spcBef>
-              <a:spcAft>
-                <a:spcPts val="0"/>
-              </a:spcAft>
-            </a:pPr>
-            <a:r>
-              <a:rPr sz="1250" b="0" i="0">
-                <a:solidFill>
-                  <a:srgbClr val="555555"/>
-                </a:solidFill>
-                <a:latin typeface="Arial"/>
-              </a:rPr>
-              <a:t>Five things we set out to build. Each one is checkable.</a:t>
-            </a:r>
-          </a:p>
-        </p:txBody>
-      </p:sp>
-      <p:sp>
-        <p:nvSpPr>
-          <p:cNvPr id="5" name="TextBox 4"/>
-          <p:cNvSpPr txBox="1"/>
-          <p:nvPr/>
-        </p:nvSpPr>
-        <p:spPr>
-          <a:xfrm>
-            <a:off x="658368" y="1700784"/>
-            <a:ext cx="6309360" cy="256032"/>
+            <a:pPr algn="l">
+              <a:lnSpc>
+                <a:spcPct val="100000"/>
+              </a:lnSpc>
+              <a:spcBef>
+                <a:spcPts val="0"/>
+              </a:spcBef>
+              <a:spcAft>
+                <a:spcPts val="0"/>
+              </a:spcAft>
+            </a:pPr>
+            <a:r>
+              <a:rPr sz="1300" b="1" i="0">
+                <a:solidFill>
+                  <a:srgbClr val="111111"/>
+                </a:solidFill>
+                <a:latin typeface="Arial"/>
+              </a:rPr>
+              <a:t>What we set out to do</a:t>
+            </a:r>
+          </a:p>
+        </p:txBody>
+      </p:sp>
+      <p:sp>
+        <p:nvSpPr>
+          <p:cNvPr id="6" name="TextBox 5"/>
+          <p:cNvSpPr txBox="1"/>
+          <p:nvPr/>
+        </p:nvSpPr>
+        <p:spPr>
+          <a:xfrm>
+            <a:off x="2834640" y="1860804"/>
+            <a:ext cx="2103120" cy="274320"/>
           </a:xfrm>
           <a:prstGeom prst="rect">
             <a:avLst/>
@@ -21028,27 +21242,27 @@
               </a:spcAft>
             </a:pPr>
             <a:r>
-              <a:rPr sz="1300" b="1" i="0">
+              <a:rPr sz="1200" b="1" i="0">
                 <a:solidFill>
                   <a:srgbClr val="111111"/>
                 </a:solidFill>
                 <a:latin typeface="Arial"/>
               </a:rPr>
-              <a:t>What we set out to do</a:t>
-            </a:r>
-          </a:p>
-        </p:txBody>
-      </p:sp>
-      <p:sp>
-        <p:nvSpPr>
-          <p:cNvPr id="6" name="TextBox 5"/>
-          <p:cNvSpPr txBox="1"/>
-          <p:nvPr/>
-        </p:nvSpPr>
-        <p:spPr>
-          <a:xfrm>
-            <a:off x="658368" y="2103120"/>
-            <a:ext cx="2103120" cy="274320"/>
+              <a:t>1.  Build it</a:t>
+            </a:r>
+          </a:p>
+        </p:txBody>
+      </p:sp>
+      <p:sp>
+        <p:nvSpPr>
+          <p:cNvPr id="7" name="TextBox 6"/>
+          <p:cNvSpPr txBox="1"/>
+          <p:nvPr/>
+        </p:nvSpPr>
+        <p:spPr>
+          <a:xfrm>
+            <a:off x="5010912" y="1842515"/>
+            <a:ext cx="4133087" cy="603504"/>
           </a:xfrm>
           <a:prstGeom prst="rect">
             <a:avLst/>
@@ -21073,52 +21287,7 @@
               </a:spcAft>
             </a:pPr>
             <a:r>
-              <a:rPr sz="1200" b="1" i="0">
-                <a:solidFill>
-                  <a:srgbClr val="111111"/>
-                </a:solidFill>
-                <a:latin typeface="Arial"/>
-              </a:rPr>
-              <a:t>1.  Build it</a:t>
-            </a:r>
-          </a:p>
-        </p:txBody>
-      </p:sp>
-      <p:sp>
-        <p:nvSpPr>
-          <p:cNvPr id="7" name="TextBox 6"/>
-          <p:cNvSpPr txBox="1"/>
-          <p:nvPr/>
-        </p:nvSpPr>
-        <p:spPr>
-          <a:xfrm>
-            <a:off x="2834640" y="2084831"/>
-            <a:ext cx="4133087" cy="603504"/>
-          </a:xfrm>
-          <a:prstGeom prst="rect">
-            <a:avLst/>
-          </a:prstGeom>
-          <a:noFill/>
-        </p:spPr>
-        <p:txBody>
-          <a:bodyPr wrap="square" lIns="45720" rIns="45720" anchor="t">
-            <a:spAutoFit/>
-          </a:bodyPr>
-          <a:lstStyle/>
-          <a:p>
-            <a:pPr algn="l">
-              <a:lnSpc>
-                <a:spcPct val="100000"/>
-              </a:lnSpc>
-              <a:spcBef>
-                <a:spcPts val="0"/>
-              </a:spcBef>
-              <a:spcAft>
-                <a:spcPts val="0"/>
-              </a:spcAft>
-            </a:pPr>
-            <a:r>
-              <a:rPr sz="1100" b="0" i="0">
+              <a:rPr sz="1100" b="0" i="0" dirty="0">
                 <a:solidFill>
                   <a:srgbClr val="555555"/>
                 </a:solidFill>
@@ -21137,7 +21306,7 @@
         </p:nvCxnSpPr>
         <p:spPr>
           <a:xfrm>
-            <a:off x="658368" y="2670048"/>
+            <a:off x="2834640" y="2427732"/>
             <a:ext cx="6309360" cy="0"/>
           </a:xfrm>
           <a:prstGeom prst="line">
@@ -21172,7 +21341,7 @@
         </p:nvSpPr>
         <p:spPr>
           <a:xfrm>
-            <a:off x="658368" y="2816352"/>
+            <a:off x="2834640" y="2574036"/>
             <a:ext cx="2103120" cy="274320"/>
           </a:xfrm>
           <a:prstGeom prst="rect">
@@ -21217,7 +21386,7 @@
         </p:nvSpPr>
         <p:spPr>
           <a:xfrm>
-            <a:off x="2834640" y="2798064"/>
+            <a:off x="5010912" y="2555748"/>
             <a:ext cx="4133087" cy="603504"/>
           </a:xfrm>
           <a:prstGeom prst="rect">
@@ -21262,7 +21431,7 @@
         </p:nvCxnSpPr>
         <p:spPr>
           <a:xfrm>
-            <a:off x="658368" y="3383280"/>
+            <a:off x="2834640" y="3140964"/>
             <a:ext cx="6309360" cy="0"/>
           </a:xfrm>
           <a:prstGeom prst="line">
@@ -21297,7 +21466,7 @@
         </p:nvSpPr>
         <p:spPr>
           <a:xfrm>
-            <a:off x="658368" y="3529584"/>
+            <a:off x="2834640" y="3287268"/>
             <a:ext cx="2103120" cy="274320"/>
           </a:xfrm>
           <a:prstGeom prst="rect">
@@ -21342,7 +21511,7 @@
         </p:nvSpPr>
         <p:spPr>
           <a:xfrm>
-            <a:off x="2834640" y="3511296"/>
+            <a:off x="5010912" y="3268980"/>
             <a:ext cx="4133087" cy="603504"/>
           </a:xfrm>
           <a:prstGeom prst="rect">
@@ -21368,7 +21537,7 @@
               </a:spcAft>
             </a:pPr>
             <a:r>
-              <a:rPr sz="1100" b="0" i="0">
+              <a:rPr sz="1100" b="0" i="0" dirty="0">
                 <a:solidFill>
                   <a:srgbClr val="555555"/>
                 </a:solidFill>
@@ -21387,7 +21556,7 @@
         </p:nvCxnSpPr>
         <p:spPr>
           <a:xfrm>
-            <a:off x="658368" y="4096511"/>
+            <a:off x="2834640" y="3854195"/>
             <a:ext cx="6309360" cy="0"/>
           </a:xfrm>
           <a:prstGeom prst="line">
@@ -21422,7 +21591,7 @@
         </p:nvSpPr>
         <p:spPr>
           <a:xfrm>
-            <a:off x="658368" y="4242816"/>
+            <a:off x="2834640" y="4000500"/>
             <a:ext cx="2103120" cy="274320"/>
           </a:xfrm>
           <a:prstGeom prst="rect">
@@ -21467,7 +21636,7 @@
         </p:nvSpPr>
         <p:spPr>
           <a:xfrm>
-            <a:off x="2834640" y="4224528"/>
+            <a:off x="5010912" y="3982212"/>
             <a:ext cx="4133087" cy="603504"/>
           </a:xfrm>
           <a:prstGeom prst="rect">
@@ -21512,7 +21681,7 @@
         </p:nvCxnSpPr>
         <p:spPr>
           <a:xfrm>
-            <a:off x="658368" y="4809744"/>
+            <a:off x="2834640" y="4567428"/>
             <a:ext cx="6309360" cy="0"/>
           </a:xfrm>
           <a:prstGeom prst="line">
@@ -21547,7 +21716,7 @@
         </p:nvSpPr>
         <p:spPr>
           <a:xfrm>
-            <a:off x="658368" y="4956048"/>
+            <a:off x="2834640" y="4713732"/>
             <a:ext cx="2103120" cy="274320"/>
           </a:xfrm>
           <a:prstGeom prst="rect">
@@ -21592,7 +21761,7 @@
         </p:nvSpPr>
         <p:spPr>
           <a:xfrm>
-            <a:off x="2834640" y="4937760"/>
+            <a:off x="5010912" y="4695444"/>
             <a:ext cx="4133087" cy="603504"/>
           </a:xfrm>
           <a:prstGeom prst="rect">
@@ -21625,186 +21794,6 @@
                 <a:latin typeface="Arial"/>
               </a:rPr>
               <a:t>Every row records what happened to one picture, including those that failed to arrive.</a:t>
-            </a:r>
-          </a:p>
-        </p:txBody>
-      </p:sp>
-      <p:sp>
-        <p:nvSpPr>
-          <p:cNvPr id="20" name="Rectangle 19"/>
-          <p:cNvSpPr/>
-          <p:nvPr/>
-        </p:nvSpPr>
-        <p:spPr>
-          <a:xfrm>
-            <a:off x="7260336" y="1700784"/>
-            <a:ext cx="4279392" cy="3840480"/>
-          </a:xfrm>
-          <a:prstGeom prst="rect">
-            <a:avLst/>
-          </a:prstGeom>
-          <a:solidFill>
-            <a:srgbClr val="FFFFFF"/>
-          </a:solidFill>
-          <a:ln w="11430">
-            <a:solidFill>
-              <a:srgbClr val="777777"/>
-            </a:solidFill>
-          </a:ln>
-        </p:spPr>
-        <p:style>
-          <a:lnRef idx="1">
-            <a:schemeClr val="accent1"/>
-          </a:lnRef>
-          <a:fillRef idx="3">
-            <a:schemeClr val="accent1"/>
-          </a:fillRef>
-          <a:effectRef idx="2">
-            <a:schemeClr val="accent1"/>
-          </a:effectRef>
-          <a:fontRef idx="minor">
-            <a:schemeClr val="lt1"/>
-          </a:fontRef>
-        </p:style>
-        <p:txBody>
-          <a:bodyPr rtlCol="0" anchor="ctr"/>
-          <a:lstStyle/>
-          <a:p>
-            <a:pPr algn="ctr"/>
-          </a:p>
-        </p:txBody>
-      </p:sp>
-      <p:sp>
-        <p:nvSpPr>
-          <p:cNvPr id="21" name="TextBox 20"/>
-          <p:cNvSpPr txBox="1"/>
-          <p:nvPr/>
-        </p:nvSpPr>
-        <p:spPr>
-          <a:xfrm>
-            <a:off x="7479792" y="1883664"/>
-            <a:ext cx="3840480" cy="256032"/>
-          </a:xfrm>
-          <a:prstGeom prst="rect">
-            <a:avLst/>
-          </a:prstGeom>
-          <a:noFill/>
-        </p:spPr>
-        <p:txBody>
-          <a:bodyPr wrap="square" lIns="45720" rIns="45720" anchor="t">
-            <a:spAutoFit/>
-          </a:bodyPr>
-          <a:lstStyle/>
-          <a:p>
-            <a:pPr algn="l">
-              <a:lnSpc>
-                <a:spcPct val="100000"/>
-              </a:lnSpc>
-              <a:spcBef>
-                <a:spcPts val="0"/>
-              </a:spcBef>
-              <a:spcAft>
-                <a:spcPts val="0"/>
-              </a:spcAft>
-            </a:pPr>
-            <a:r>
-              <a:rPr sz="1300" b="1" i="0">
-                <a:solidFill>
-                  <a:srgbClr val="111111"/>
-                </a:solidFill>
-                <a:latin typeface="Arial"/>
-              </a:rPr>
-              <a:t>How these are scored</a:t>
-            </a:r>
-          </a:p>
-        </p:txBody>
-      </p:sp>
-      <p:sp>
-        <p:nvSpPr>
-          <p:cNvPr id="22" name="TextBox 21"/>
-          <p:cNvSpPr txBox="1"/>
-          <p:nvPr/>
-        </p:nvSpPr>
-        <p:spPr>
-          <a:xfrm>
-            <a:off x="7479792" y="2286000"/>
-            <a:ext cx="3840480" cy="914400"/>
-          </a:xfrm>
-          <a:prstGeom prst="rect">
-            <a:avLst/>
-          </a:prstGeom>
-          <a:noFill/>
-        </p:spPr>
-        <p:txBody>
-          <a:bodyPr wrap="square" lIns="45720" rIns="45720" anchor="t">
-            <a:spAutoFit/>
-          </a:bodyPr>
-          <a:lstStyle/>
-          <a:p>
-            <a:pPr algn="l">
-              <a:lnSpc>
-                <a:spcPct val="100000"/>
-              </a:lnSpc>
-              <a:spcBef>
-                <a:spcPts val="0"/>
-              </a:spcBef>
-              <a:spcAft>
-                <a:spcPts val="0"/>
-              </a:spcAft>
-            </a:pPr>
-            <a:r>
-              <a:rPr sz="1600" b="1" i="0">
-                <a:solidFill>
-                  <a:srgbClr val="111111"/>
-                </a:solidFill>
-                <a:latin typeface="Arial"/>
-              </a:rPr>
-              <a:t>The rubric scores whether this list was completed.</a:t>
-            </a:r>
-          </a:p>
-        </p:txBody>
-      </p:sp>
-      <p:sp>
-        <p:nvSpPr>
-          <p:cNvPr id="23" name="TextBox 22"/>
-          <p:cNvSpPr txBox="1"/>
-          <p:nvPr/>
-        </p:nvSpPr>
-        <p:spPr>
-          <a:xfrm>
-            <a:off x="7479792" y="3310128"/>
-            <a:ext cx="3840480" cy="1737360"/>
-          </a:xfrm>
-          <a:prstGeom prst="rect">
-            <a:avLst/>
-          </a:prstGeom>
-          <a:noFill/>
-        </p:spPr>
-        <p:txBody>
-          <a:bodyPr wrap="square" lIns="45720" rIns="45720" anchor="t">
-            <a:spAutoFit/>
-          </a:bodyPr>
-          <a:lstStyle/>
-          <a:p>
-            <a:pPr algn="l">
-              <a:lnSpc>
-                <a:spcPct val="100000"/>
-              </a:lnSpc>
-              <a:spcBef>
-                <a:spcPts val="0"/>
-              </a:spcBef>
-              <a:spcAft>
-                <a:spcPts val="0"/>
-              </a:spcAft>
-            </a:pPr>
-            <a:r>
-              <a:rPr sz="1100" b="0" i="0">
-                <a:solidFill>
-                  <a:srgbClr val="555555"/>
-                </a:solidFill>
-                <a:latin typeface="Arial"/>
-              </a:rPr>
-              <a:t>Completion is independent of which way the curve went. A crossing and the learned system winning everywhere both finish the list on the left.</a:t>
             </a:r>
           </a:p>
         </p:txBody>
@@ -21988,7 +21977,7 @@
 </file>
 
 <file path=ppt/slides/slide4.xml><?xml version="1.0" encoding="utf-8"?>
-<p:sld xmlns:a="http://schemas.openxmlformats.org/drawingml/2006/main" xmlns:p="http://schemas.openxmlformats.org/presentationml/2006/main" xmlns:r="http://schemas.openxmlformats.org/officeDocument/2006/relationships">
+<p:sld xmlns:a="http://schemas.openxmlformats.org/drawingml/2006/main" xmlns:r="http://schemas.openxmlformats.org/officeDocument/2006/relationships" xmlns:p="http://schemas.openxmlformats.org/presentationml/2006/main" show="0">
   <p:cSld>
     <p:bg>
       <p:bgPr>
@@ -22004,7 +21993,14 @@
         <p:cNvGrpSpPr/>
         <p:nvPr/>
       </p:nvGrpSpPr>
-      <p:grpSpPr/>
+      <p:grpSpPr>
+        <a:xfrm>
+          <a:off x="0" y="0"/>
+          <a:ext cx="0" cy="0"/>
+          <a:chOff x="0" y="0"/>
+          <a:chExt cx="0" cy="0"/>
+        </a:xfrm>
+      </p:grpSpPr>
       <p:sp>
         <p:nvSpPr>
           <p:cNvPr id="2" name="TextBox 1"/>
@@ -22039,14 +22035,20 @@
               </a:spcAft>
             </a:pPr>
             <a:r>
-              <a:rPr sz="2700" b="1" i="0">
+              <a:rPr lang="en-US" sz="2700" b="1" i="0" dirty="0">
                 <a:solidFill>
                   <a:srgbClr val="111111"/>
                 </a:solidFill>
                 <a:latin typeface="Arial"/>
               </a:rPr>
-              <a:t>Before the numbers, one picture</a:t>
-            </a:r>
+              <a:t>Terminology</a:t>
+            </a:r>
+            <a:endParaRPr sz="2700" b="1" i="0" dirty="0">
+              <a:solidFill>
+                <a:srgbClr val="111111"/>
+              </a:solidFill>
+              <a:latin typeface="Arial"/>
+            </a:endParaRPr>
           </a:p>
         </p:txBody>
       </p:sp>
@@ -22172,6 +22174,7 @@
           <a:lstStyle/>
           <a:p>
             <a:pPr algn="ctr"/>
+            <a:endParaRPr/>
           </a:p>
         </p:txBody>
       </p:sp>
@@ -22352,6 +22355,7 @@
           <a:lstStyle/>
           <a:p>
             <a:pPr algn="ctr"/>
+            <a:endParaRPr/>
           </a:p>
         </p:txBody>
       </p:sp>
@@ -22532,6 +22536,7 @@
           <a:lstStyle/>
           <a:p>
             <a:pPr algn="ctr"/>
+            <a:endParaRPr/>
           </a:p>
         </p:txBody>
       </p:sp>
@@ -22712,6 +22717,7 @@
           <a:lstStyle/>
           <a:p>
             <a:pPr algn="ctr"/>
+            <a:endParaRPr/>
           </a:p>
         </p:txBody>
       </p:sp>
@@ -22892,6 +22898,7 @@
           <a:lstStyle/>
           <a:p>
             <a:pPr algn="ctr"/>
+            <a:endParaRPr/>
           </a:p>
         </p:txBody>
       </p:sp>
@@ -23108,7 +23115,7 @@
         </p:nvSpPr>
         <p:spPr>
           <a:xfrm>
-            <a:off x="658368" y="3968496"/>
+            <a:off x="658368" y="4160520"/>
             <a:ext cx="7818120" cy="256032"/>
           </a:xfrm>
           <a:prstGeom prst="rect">
@@ -23134,7 +23141,7 @@
               </a:spcAft>
             </a:pPr>
             <a:r>
-              <a:rPr sz="1150" b="1" i="0">
+              <a:rPr sz="1150" b="1" i="0" dirty="0">
                 <a:solidFill>
                   <a:srgbClr val="111111"/>
                 </a:solidFill>
@@ -23187,6 +23194,7 @@
           <a:lstStyle/>
           <a:p>
             <a:pPr algn="ctr"/>
+            <a:endParaRPr/>
           </a:p>
         </p:txBody>
       </p:sp>
@@ -23595,7 +23603,7 @@
 </file>
 
 <file path=ppt/slides/slide5.xml><?xml version="1.0" encoding="utf-8"?>
-<p:sld xmlns:a="http://schemas.openxmlformats.org/drawingml/2006/main" xmlns:p="http://schemas.openxmlformats.org/presentationml/2006/main" xmlns:r="http://schemas.openxmlformats.org/officeDocument/2006/relationships">
+<p:sld xmlns:a="http://schemas.openxmlformats.org/drawingml/2006/main" xmlns:r="http://schemas.openxmlformats.org/officeDocument/2006/relationships" xmlns:p="http://schemas.openxmlformats.org/presentationml/2006/main">
   <p:cSld>
     <p:bg>
       <p:bgPr>
@@ -23611,7 +23619,14 @@
         <p:cNvGrpSpPr/>
         <p:nvPr/>
       </p:nvGrpSpPr>
-      <p:grpSpPr/>
+      <p:grpSpPr>
+        <a:xfrm>
+          <a:off x="0" y="0"/>
+          <a:ext cx="0" cy="0"/>
+          <a:chOff x="0" y="0"/>
+          <a:chExt cx="0" cy="0"/>
+        </a:xfrm>
+      </p:grpSpPr>
       <p:sp>
         <p:nvSpPr>
           <p:cNvPr id="2" name="TextBox 1"/>
@@ -23779,6 +23794,7 @@
           <a:lstStyle/>
           <a:p>
             <a:pPr algn="ctr"/>
+            <a:endParaRPr/>
           </a:p>
         </p:txBody>
       </p:sp>
@@ -23959,6 +23975,7 @@
           <a:lstStyle/>
           <a:p>
             <a:pPr algn="ctr"/>
+            <a:endParaRPr/>
           </a:p>
         </p:txBody>
       </p:sp>
@@ -24139,6 +24156,7 @@
           <a:lstStyle/>
           <a:p>
             <a:pPr algn="ctr"/>
+            <a:endParaRPr/>
           </a:p>
         </p:txBody>
       </p:sp>
@@ -24319,6 +24337,7 @@
           <a:lstStyle/>
           <a:p>
             <a:pPr algn="ctr"/>
+            <a:endParaRPr/>
           </a:p>
         </p:txBody>
       </p:sp>
@@ -24499,6 +24518,7 @@
           <a:lstStyle/>
           <a:p>
             <a:pPr algn="ctr"/>
+            <a:endParaRPr/>
           </a:p>
         </p:txBody>
       </p:sp>
@@ -24679,6 +24699,7 @@
           <a:lstStyle/>
           <a:p>
             <a:pPr algn="ctr"/>
+            <a:endParaRPr/>
           </a:p>
         </p:txBody>
       </p:sp>
@@ -25361,7 +25382,7 @@
 </file>
 
 <file path=ppt/slides/slide6.xml><?xml version="1.0" encoding="utf-8"?>
-<p:sld xmlns:a="http://schemas.openxmlformats.org/drawingml/2006/main" xmlns:p="http://schemas.openxmlformats.org/presentationml/2006/main" xmlns:r="http://schemas.openxmlformats.org/officeDocument/2006/relationships">
+<p:sld xmlns:a="http://schemas.openxmlformats.org/drawingml/2006/main" xmlns:r="http://schemas.openxmlformats.org/officeDocument/2006/relationships" xmlns:p="http://schemas.openxmlformats.org/presentationml/2006/main">
   <p:cSld>
     <p:bg>
       <p:bgPr>
@@ -25377,7 +25398,14 @@
         <p:cNvGrpSpPr/>
         <p:nvPr/>
       </p:nvGrpSpPr>
-      <p:grpSpPr/>
+      <p:grpSpPr>
+        <a:xfrm>
+          <a:off x="0" y="0"/>
+          <a:ext cx="0" cy="0"/>
+          <a:chOff x="0" y="0"/>
+          <a:chExt cx="0" cy="0"/>
+        </a:xfrm>
+      </p:grpSpPr>
       <p:sp>
         <p:nvSpPr>
           <p:cNvPr id="2" name="TextBox 1"/>
@@ -25590,6 +25618,7 @@
           <a:lstStyle/>
           <a:p>
             <a:pPr algn="ctr"/>
+            <a:endParaRPr/>
           </a:p>
         </p:txBody>
       </p:sp>
@@ -25725,6 +25754,7 @@
           <a:lstStyle/>
           <a:p>
             <a:pPr algn="ctr"/>
+            <a:endParaRPr/>
           </a:p>
         </p:txBody>
       </p:sp>
@@ -25860,6 +25890,7 @@
           <a:lstStyle/>
           <a:p>
             <a:pPr algn="ctr"/>
+            <a:endParaRPr/>
           </a:p>
         </p:txBody>
       </p:sp>
@@ -25995,6 +26026,7 @@
           <a:lstStyle/>
           <a:p>
             <a:pPr algn="ctr"/>
+            <a:endParaRPr/>
           </a:p>
         </p:txBody>
       </p:sp>
@@ -26130,6 +26162,7 @@
           <a:lstStyle/>
           <a:p>
             <a:pPr algn="ctr"/>
+            <a:endParaRPr/>
           </a:p>
         </p:txBody>
       </p:sp>
@@ -26265,6 +26298,7 @@
           <a:lstStyle/>
           <a:p>
             <a:pPr algn="ctr"/>
+            <a:endParaRPr/>
           </a:p>
         </p:txBody>
       </p:sp>
@@ -26400,6 +26434,7 @@
           <a:lstStyle/>
           <a:p>
             <a:pPr algn="ctr"/>
+            <a:endParaRPr/>
           </a:p>
         </p:txBody>
       </p:sp>
@@ -26615,6 +26650,7 @@
           <a:lstStyle/>
           <a:p>
             <a:pPr algn="ctr"/>
+            <a:endParaRPr/>
           </a:p>
         </p:txBody>
       </p:sp>
@@ -26750,6 +26786,7 @@
           <a:lstStyle/>
           <a:p>
             <a:pPr algn="ctr"/>
+            <a:endParaRPr/>
           </a:p>
         </p:txBody>
       </p:sp>
@@ -26885,6 +26922,7 @@
           <a:lstStyle/>
           <a:p>
             <a:pPr algn="ctr"/>
+            <a:endParaRPr/>
           </a:p>
         </p:txBody>
       </p:sp>
@@ -27020,6 +27058,7 @@
           <a:lstStyle/>
           <a:p>
             <a:pPr algn="ctr"/>
+            <a:endParaRPr/>
           </a:p>
         </p:txBody>
       </p:sp>
@@ -27155,6 +27194,7 @@
           <a:lstStyle/>
           <a:p>
             <a:pPr algn="ctr"/>
+            <a:endParaRPr/>
           </a:p>
         </p:txBody>
       </p:sp>
@@ -27290,6 +27330,7 @@
           <a:lstStyle/>
           <a:p>
             <a:pPr algn="ctr"/>
+            <a:endParaRPr/>
           </a:p>
         </p:txBody>
       </p:sp>
@@ -27425,6 +27466,7 @@
           <a:lstStyle/>
           <a:p>
             <a:pPr algn="ctr"/>
+            <a:endParaRPr/>
           </a:p>
         </p:txBody>
       </p:sp>
@@ -27982,7 +28024,7 @@
 </file>
 
 <file path=ppt/slides/slide7.xml><?xml version="1.0" encoding="utf-8"?>
-<p:sld xmlns:a="http://schemas.openxmlformats.org/drawingml/2006/main" xmlns:p="http://schemas.openxmlformats.org/presentationml/2006/main" xmlns:r="http://schemas.openxmlformats.org/officeDocument/2006/relationships">
+<p:sld xmlns:a="http://schemas.openxmlformats.org/drawingml/2006/main" xmlns:r="http://schemas.openxmlformats.org/officeDocument/2006/relationships" xmlns:p="http://schemas.openxmlformats.org/presentationml/2006/main">
   <p:cSld>
     <p:bg>
       <p:bgPr>
@@ -27998,7 +28040,14 @@
         <p:cNvGrpSpPr/>
         <p:nvPr/>
       </p:nvGrpSpPr>
-      <p:grpSpPr/>
+      <p:grpSpPr>
+        <a:xfrm>
+          <a:off x="0" y="0"/>
+          <a:ext cx="0" cy="0"/>
+          <a:chOff x="0" y="0"/>
+          <a:chExt cx="0" cy="0"/>
+        </a:xfrm>
+      </p:grpSpPr>
       <p:sp>
         <p:nvSpPr>
           <p:cNvPr id="2" name="TextBox 1"/>
@@ -28407,7 +28456,7 @@
 </file>
 
 <file path=ppt/slides/slide8.xml><?xml version="1.0" encoding="utf-8"?>
-<p:sld xmlns:a="http://schemas.openxmlformats.org/drawingml/2006/main" xmlns:p="http://schemas.openxmlformats.org/presentationml/2006/main" xmlns:r="http://schemas.openxmlformats.org/officeDocument/2006/relationships">
+<p:sld xmlns:a="http://schemas.openxmlformats.org/drawingml/2006/main" xmlns:r="http://schemas.openxmlformats.org/officeDocument/2006/relationships" xmlns:p="http://schemas.openxmlformats.org/presentationml/2006/main">
   <p:cSld>
     <p:bg>
       <p:bgPr>
@@ -28423,7 +28472,14 @@
         <p:cNvGrpSpPr/>
         <p:nvPr/>
       </p:nvGrpSpPr>
-      <p:grpSpPr/>
+      <p:grpSpPr>
+        <a:xfrm>
+          <a:off x="0" y="0"/>
+          <a:ext cx="0" cy="0"/>
+          <a:chOff x="0" y="0"/>
+          <a:chExt cx="0" cy="0"/>
+        </a:xfrm>
+      </p:grpSpPr>
       <p:sp>
         <p:nvSpPr>
           <p:cNvPr id="2" name="TextBox 1"/>
@@ -29092,7 +29148,7 @@
 </file>
 
 <file path=ppt/slides/slide9.xml><?xml version="1.0" encoding="utf-8"?>
-<p:sld xmlns:a="http://schemas.openxmlformats.org/drawingml/2006/main" xmlns:p="http://schemas.openxmlformats.org/presentationml/2006/main" xmlns:r="http://schemas.openxmlformats.org/officeDocument/2006/relationships">
+<p:sld xmlns:a="http://schemas.openxmlformats.org/drawingml/2006/main" xmlns:r="http://schemas.openxmlformats.org/officeDocument/2006/relationships" xmlns:p="http://schemas.openxmlformats.org/presentationml/2006/main">
   <p:cSld>
     <p:bg>
       <p:bgPr>
@@ -29108,7 +29164,14 @@
         <p:cNvGrpSpPr/>
         <p:nvPr/>
       </p:nvGrpSpPr>
-      <p:grpSpPr/>
+      <p:grpSpPr>
+        <a:xfrm>
+          <a:off x="0" y="0"/>
+          <a:ext cx="0" cy="0"/>
+          <a:chOff x="0" y="0"/>
+          <a:chExt cx="0" cy="0"/>
+        </a:xfrm>
+      </p:grpSpPr>
       <p:sp>
         <p:nvSpPr>
           <p:cNvPr id="2" name="TextBox 1"/>

--- a/deliverables/review-2/semantic-communication-second-review.pptx
+++ b/deliverables/review-2/semantic-communication-second-review.pptx
@@ -6547,7 +6547,7 @@
                 </a:solidFill>
                 <a:latin typeface="Arial"/>
               </a:rPr>
-              <a:t>A JPEG image is an easy thing to beat. This system is harder, and it is the one worth reporting.</a:t>
+              <a:t>A compressed image is one kind of digital system. This one sends what the task needs, so it is the harder test.</a:t>
             </a:r>
           </a:p>
         </p:txBody>
@@ -7545,7 +7545,7 @@
                 </a:solidFill>
                 <a:latin typeface="Arial"/>
               </a:rPr>
-              <a:t>3.000002 dB</a:t>
+              <a:t>3.0 dB</a:t>
             </a:r>
           </a:p>
         </p:txBody>
@@ -7771,7 +7771,7 @@
                 </a:solidFill>
                 <a:latin typeface="Arial"/>
               </a:rPr>
-              <a:t>20.059284 dB</a:t>
+              <a:t>20.1 dB</a:t>
             </a:r>
           </a:p>
         </p:txBody>
@@ -9269,7 +9269,7 @@
           <a:noFill/>
         </p:spPr>
         <p:txBody>
-          <a:bodyPr wrap="square" lIns="45720" rIns="45720" anchor="ctr">
+          <a:bodyPr wrap="none" lIns="0" rIns="0" anchor="ctr">
             <a:spAutoFit/>
           </a:bodyPr>
           <a:lstStyle/>
@@ -9314,7 +9314,7 @@
           <a:noFill/>
         </p:spPr>
         <p:txBody>
-          <a:bodyPr wrap="square" lIns="45720" rIns="45720" anchor="ctr">
+          <a:bodyPr wrap="none" lIns="0" rIns="0" anchor="ctr">
             <a:spAutoFit/>
           </a:bodyPr>
           <a:lstStyle/>
@@ -9359,7 +9359,7 @@
           <a:noFill/>
         </p:spPr>
         <p:txBody>
-          <a:bodyPr wrap="square" lIns="45720" rIns="45720" anchor="ctr">
+          <a:bodyPr wrap="none" lIns="0" rIns="0" anchor="ctr">
             <a:spAutoFit/>
           </a:bodyPr>
           <a:lstStyle/>
@@ -9404,7 +9404,7 @@
           <a:noFill/>
         </p:spPr>
         <p:txBody>
-          <a:bodyPr wrap="square" lIns="45720" rIns="45720" anchor="ctr">
+          <a:bodyPr wrap="none" lIns="0" rIns="0" anchor="ctr">
             <a:spAutoFit/>
           </a:bodyPr>
           <a:lstStyle/>
@@ -9449,7 +9449,7 @@
           <a:noFill/>
         </p:spPr>
         <p:txBody>
-          <a:bodyPr wrap="square" lIns="45720" rIns="45720" anchor="ctr">
+          <a:bodyPr wrap="none" lIns="0" rIns="0" anchor="ctr">
             <a:spAutoFit/>
           </a:bodyPr>
           <a:lstStyle/>
@@ -9494,7 +9494,7 @@
           <a:noFill/>
         </p:spPr>
         <p:txBody>
-          <a:bodyPr wrap="square" lIns="45720" rIns="45720" anchor="ctr">
+          <a:bodyPr wrap="none" lIns="0" rIns="0" anchor="ctr">
             <a:spAutoFit/>
           </a:bodyPr>
           <a:lstStyle/>
@@ -9630,7 +9630,7 @@
           <a:noFill/>
         </p:spPr>
         <p:txBody>
-          <a:bodyPr wrap="square" lIns="45720" rIns="45720" anchor="ctr">
+          <a:bodyPr wrap="none" lIns="0" rIns="0" anchor="ctr">
             <a:spAutoFit/>
           </a:bodyPr>
           <a:lstStyle/>
@@ -9675,7 +9675,7 @@
           <a:noFill/>
         </p:spPr>
         <p:txBody>
-          <a:bodyPr wrap="square" lIns="45720" rIns="45720" anchor="ctr">
+          <a:bodyPr wrap="none" lIns="0" rIns="0" anchor="ctr">
             <a:spAutoFit/>
           </a:bodyPr>
           <a:lstStyle/>
@@ -9720,7 +9720,7 @@
           <a:noFill/>
         </p:spPr>
         <p:txBody>
-          <a:bodyPr wrap="square" lIns="45720" rIns="45720" anchor="ctr">
+          <a:bodyPr wrap="none" lIns="0" rIns="0" anchor="ctr">
             <a:spAutoFit/>
           </a:bodyPr>
           <a:lstStyle/>
@@ -9765,7 +9765,7 @@
           <a:noFill/>
         </p:spPr>
         <p:txBody>
-          <a:bodyPr wrap="square" lIns="45720" rIns="45720" anchor="ctr">
+          <a:bodyPr wrap="none" lIns="0" rIns="0" anchor="ctr">
             <a:spAutoFit/>
           </a:bodyPr>
           <a:lstStyle/>
@@ -9810,7 +9810,7 @@
           <a:noFill/>
         </p:spPr>
         <p:txBody>
-          <a:bodyPr wrap="square" lIns="45720" rIns="45720" anchor="ctr">
+          <a:bodyPr wrap="none" lIns="0" rIns="0" anchor="ctr">
             <a:spAutoFit/>
           </a:bodyPr>
           <a:lstStyle/>
@@ -9855,7 +9855,7 @@
           <a:noFill/>
         </p:spPr>
         <p:txBody>
-          <a:bodyPr wrap="square" lIns="45720" rIns="45720" anchor="ctr">
+          <a:bodyPr wrap="none" lIns="0" rIns="0" anchor="ctr">
             <a:spAutoFit/>
           </a:bodyPr>
           <a:lstStyle/>
@@ -9991,7 +9991,7 @@
           <a:noFill/>
         </p:spPr>
         <p:txBody>
-          <a:bodyPr wrap="square" lIns="45720" rIns="45720" anchor="ctr">
+          <a:bodyPr wrap="none" lIns="0" rIns="0" anchor="ctr">
             <a:spAutoFit/>
           </a:bodyPr>
           <a:lstStyle/>
@@ -10036,7 +10036,7 @@
           <a:noFill/>
         </p:spPr>
         <p:txBody>
-          <a:bodyPr wrap="square" lIns="45720" rIns="45720" anchor="ctr">
+          <a:bodyPr wrap="none" lIns="0" rIns="0" anchor="ctr">
             <a:spAutoFit/>
           </a:bodyPr>
           <a:lstStyle/>
@@ -10081,7 +10081,7 @@
           <a:noFill/>
         </p:spPr>
         <p:txBody>
-          <a:bodyPr wrap="square" lIns="45720" rIns="45720" anchor="ctr">
+          <a:bodyPr wrap="none" lIns="0" rIns="0" anchor="ctr">
             <a:spAutoFit/>
           </a:bodyPr>
           <a:lstStyle/>
@@ -10126,7 +10126,7 @@
           <a:noFill/>
         </p:spPr>
         <p:txBody>
-          <a:bodyPr wrap="square" lIns="45720" rIns="45720" anchor="ctr">
+          <a:bodyPr wrap="none" lIns="0" rIns="0" anchor="ctr">
             <a:spAutoFit/>
           </a:bodyPr>
           <a:lstStyle/>
@@ -10171,7 +10171,7 @@
           <a:noFill/>
         </p:spPr>
         <p:txBody>
-          <a:bodyPr wrap="square" lIns="45720" rIns="45720" anchor="ctr">
+          <a:bodyPr wrap="none" lIns="0" rIns="0" anchor="ctr">
             <a:spAutoFit/>
           </a:bodyPr>
           <a:lstStyle/>
@@ -10216,7 +10216,7 @@
           <a:noFill/>
         </p:spPr>
         <p:txBody>
-          <a:bodyPr wrap="square" lIns="45720" rIns="45720" anchor="ctr">
+          <a:bodyPr wrap="none" lIns="0" rIns="0" anchor="ctr">
             <a:spAutoFit/>
           </a:bodyPr>
           <a:lstStyle/>
@@ -10352,7 +10352,7 @@
           <a:noFill/>
         </p:spPr>
         <p:txBody>
-          <a:bodyPr wrap="square" lIns="45720" rIns="45720" anchor="ctr">
+          <a:bodyPr wrap="none" lIns="0" rIns="0" anchor="ctr">
             <a:spAutoFit/>
           </a:bodyPr>
           <a:lstStyle/>
@@ -10397,7 +10397,7 @@
           <a:noFill/>
         </p:spPr>
         <p:txBody>
-          <a:bodyPr wrap="square" lIns="45720" rIns="45720" anchor="ctr">
+          <a:bodyPr wrap="none" lIns="0" rIns="0" anchor="ctr">
             <a:spAutoFit/>
           </a:bodyPr>
           <a:lstStyle/>
@@ -10442,7 +10442,7 @@
           <a:noFill/>
         </p:spPr>
         <p:txBody>
-          <a:bodyPr wrap="square" lIns="45720" rIns="45720" anchor="ctr">
+          <a:bodyPr wrap="none" lIns="0" rIns="0" anchor="ctr">
             <a:spAutoFit/>
           </a:bodyPr>
           <a:lstStyle/>
@@ -10487,7 +10487,7 @@
           <a:noFill/>
         </p:spPr>
         <p:txBody>
-          <a:bodyPr wrap="square" lIns="45720" rIns="45720" anchor="ctr">
+          <a:bodyPr wrap="none" lIns="0" rIns="0" anchor="ctr">
             <a:spAutoFit/>
           </a:bodyPr>
           <a:lstStyle/>
@@ -10532,7 +10532,7 @@
           <a:noFill/>
         </p:spPr>
         <p:txBody>
-          <a:bodyPr wrap="square" lIns="45720" rIns="45720" anchor="ctr">
+          <a:bodyPr wrap="none" lIns="0" rIns="0" anchor="ctr">
             <a:spAutoFit/>
           </a:bodyPr>
           <a:lstStyle/>
@@ -10577,7 +10577,7 @@
           <a:noFill/>
         </p:spPr>
         <p:txBody>
-          <a:bodyPr wrap="square" lIns="45720" rIns="45720" anchor="ctr">
+          <a:bodyPr wrap="none" lIns="0" rIns="0" anchor="ctr">
             <a:spAutoFit/>
           </a:bodyPr>
           <a:lstStyle/>
@@ -10713,7 +10713,7 @@
           <a:noFill/>
         </p:spPr>
         <p:txBody>
-          <a:bodyPr wrap="square" lIns="45720" rIns="45720" anchor="ctr">
+          <a:bodyPr wrap="none" lIns="0" rIns="0" anchor="ctr">
             <a:spAutoFit/>
           </a:bodyPr>
           <a:lstStyle/>
@@ -10758,7 +10758,7 @@
           <a:noFill/>
         </p:spPr>
         <p:txBody>
-          <a:bodyPr wrap="square" lIns="45720" rIns="45720" anchor="ctr">
+          <a:bodyPr wrap="none" lIns="0" rIns="0" anchor="ctr">
             <a:spAutoFit/>
           </a:bodyPr>
           <a:lstStyle/>
@@ -10803,7 +10803,7 @@
           <a:noFill/>
         </p:spPr>
         <p:txBody>
-          <a:bodyPr wrap="square" lIns="45720" rIns="45720" anchor="ctr">
+          <a:bodyPr wrap="none" lIns="0" rIns="0" anchor="ctr">
             <a:spAutoFit/>
           </a:bodyPr>
           <a:lstStyle/>
@@ -10848,7 +10848,7 @@
           <a:noFill/>
         </p:spPr>
         <p:txBody>
-          <a:bodyPr wrap="square" lIns="45720" rIns="45720" anchor="ctr">
+          <a:bodyPr wrap="none" lIns="0" rIns="0" anchor="ctr">
             <a:spAutoFit/>
           </a:bodyPr>
           <a:lstStyle/>
@@ -10893,7 +10893,7 @@
           <a:noFill/>
         </p:spPr>
         <p:txBody>
-          <a:bodyPr wrap="square" lIns="45720" rIns="45720" anchor="ctr">
+          <a:bodyPr wrap="none" lIns="0" rIns="0" anchor="ctr">
             <a:spAutoFit/>
           </a:bodyPr>
           <a:lstStyle/>
@@ -10938,7 +10938,7 @@
           <a:noFill/>
         </p:spPr>
         <p:txBody>
-          <a:bodyPr wrap="square" lIns="45720" rIns="45720" anchor="ctr">
+          <a:bodyPr wrap="none" lIns="0" rIns="0" anchor="ctr">
             <a:spAutoFit/>
           </a:bodyPr>
           <a:lstStyle/>
@@ -11074,7 +11074,7 @@
           <a:noFill/>
         </p:spPr>
         <p:txBody>
-          <a:bodyPr wrap="square" lIns="45720" rIns="45720" anchor="ctr">
+          <a:bodyPr wrap="none" lIns="0" rIns="0" anchor="ctr">
             <a:spAutoFit/>
           </a:bodyPr>
           <a:lstStyle/>
@@ -11119,7 +11119,7 @@
           <a:noFill/>
         </p:spPr>
         <p:txBody>
-          <a:bodyPr wrap="square" lIns="45720" rIns="45720" anchor="ctr">
+          <a:bodyPr wrap="none" lIns="0" rIns="0" anchor="ctr">
             <a:spAutoFit/>
           </a:bodyPr>
           <a:lstStyle/>
@@ -11164,7 +11164,7 @@
           <a:noFill/>
         </p:spPr>
         <p:txBody>
-          <a:bodyPr wrap="square" lIns="45720" rIns="45720" anchor="ctr">
+          <a:bodyPr wrap="none" lIns="0" rIns="0" anchor="ctr">
             <a:spAutoFit/>
           </a:bodyPr>
           <a:lstStyle/>
@@ -11209,7 +11209,7 @@
           <a:noFill/>
         </p:spPr>
         <p:txBody>
-          <a:bodyPr wrap="square" lIns="45720" rIns="45720" anchor="ctr">
+          <a:bodyPr wrap="none" lIns="0" rIns="0" anchor="ctr">
             <a:spAutoFit/>
           </a:bodyPr>
           <a:lstStyle/>
@@ -11254,7 +11254,7 @@
           <a:noFill/>
         </p:spPr>
         <p:txBody>
-          <a:bodyPr wrap="square" lIns="45720" rIns="45720" anchor="ctr">
+          <a:bodyPr wrap="none" lIns="0" rIns="0" anchor="ctr">
             <a:spAutoFit/>
           </a:bodyPr>
           <a:lstStyle/>
@@ -11299,7 +11299,7 @@
           <a:noFill/>
         </p:spPr>
         <p:txBody>
-          <a:bodyPr wrap="square" lIns="45720" rIns="45720" anchor="ctr">
+          <a:bodyPr wrap="none" lIns="0" rIns="0" anchor="ctr">
             <a:spAutoFit/>
           </a:bodyPr>
           <a:lstStyle/>
@@ -11690,7 +11690,7 @@
           <a:noFill/>
         </p:spPr>
         <p:txBody>
-          <a:bodyPr wrap="square" lIns="45720" rIns="45720" anchor="ctr">
+          <a:bodyPr wrap="none" lIns="0" rIns="0" anchor="ctr">
             <a:spAutoFit/>
           </a:bodyPr>
           <a:lstStyle/>
@@ -11735,7 +11735,7 @@
           <a:noFill/>
         </p:spPr>
         <p:txBody>
-          <a:bodyPr wrap="square" lIns="45720" rIns="45720" anchor="ctr">
+          <a:bodyPr wrap="none" lIns="0" rIns="0" anchor="ctr">
             <a:spAutoFit/>
           </a:bodyPr>
           <a:lstStyle/>
@@ -11780,7 +11780,7 @@
           <a:noFill/>
         </p:spPr>
         <p:txBody>
-          <a:bodyPr wrap="square" lIns="45720" rIns="45720" anchor="ctr">
+          <a:bodyPr wrap="none" lIns="0" rIns="0" anchor="ctr">
             <a:spAutoFit/>
           </a:bodyPr>
           <a:lstStyle/>
@@ -11825,7 +11825,7 @@
           <a:noFill/>
         </p:spPr>
         <p:txBody>
-          <a:bodyPr wrap="square" lIns="45720" rIns="45720" anchor="ctr">
+          <a:bodyPr wrap="none" lIns="0" rIns="0" anchor="ctr">
             <a:spAutoFit/>
           </a:bodyPr>
           <a:lstStyle/>
@@ -11870,7 +11870,7 @@
           <a:noFill/>
         </p:spPr>
         <p:txBody>
-          <a:bodyPr wrap="square" lIns="45720" rIns="45720" anchor="ctr">
+          <a:bodyPr wrap="none" lIns="0" rIns="0" anchor="ctr">
             <a:spAutoFit/>
           </a:bodyPr>
           <a:lstStyle/>
@@ -11915,7 +11915,7 @@
           <a:noFill/>
         </p:spPr>
         <p:txBody>
-          <a:bodyPr wrap="square" lIns="45720" rIns="45720" anchor="ctr">
+          <a:bodyPr wrap="none" lIns="0" rIns="0" anchor="ctr">
             <a:spAutoFit/>
           </a:bodyPr>
           <a:lstStyle/>
@@ -12051,7 +12051,7 @@
           <a:noFill/>
         </p:spPr>
         <p:txBody>
-          <a:bodyPr wrap="square" lIns="45720" rIns="45720" anchor="ctr">
+          <a:bodyPr wrap="none" lIns="0" rIns="0" anchor="ctr">
             <a:spAutoFit/>
           </a:bodyPr>
           <a:lstStyle/>
@@ -12096,7 +12096,7 @@
           <a:noFill/>
         </p:spPr>
         <p:txBody>
-          <a:bodyPr wrap="square" lIns="45720" rIns="45720" anchor="ctr">
+          <a:bodyPr wrap="none" lIns="0" rIns="0" anchor="ctr">
             <a:spAutoFit/>
           </a:bodyPr>
           <a:lstStyle/>
@@ -12141,7 +12141,7 @@
           <a:noFill/>
         </p:spPr>
         <p:txBody>
-          <a:bodyPr wrap="square" lIns="45720" rIns="45720" anchor="ctr">
+          <a:bodyPr wrap="none" lIns="0" rIns="0" anchor="ctr">
             <a:spAutoFit/>
           </a:bodyPr>
           <a:lstStyle/>
@@ -12186,7 +12186,7 @@
           <a:noFill/>
         </p:spPr>
         <p:txBody>
-          <a:bodyPr wrap="square" lIns="45720" rIns="45720" anchor="ctr">
+          <a:bodyPr wrap="none" lIns="0" rIns="0" anchor="ctr">
             <a:spAutoFit/>
           </a:bodyPr>
           <a:lstStyle/>
@@ -12231,7 +12231,7 @@
           <a:noFill/>
         </p:spPr>
         <p:txBody>
-          <a:bodyPr wrap="square" lIns="45720" rIns="45720" anchor="ctr">
+          <a:bodyPr wrap="none" lIns="0" rIns="0" anchor="ctr">
             <a:spAutoFit/>
           </a:bodyPr>
           <a:lstStyle/>
@@ -12276,7 +12276,7 @@
           <a:noFill/>
         </p:spPr>
         <p:txBody>
-          <a:bodyPr wrap="square" lIns="45720" rIns="45720" anchor="ctr">
+          <a:bodyPr wrap="none" lIns="0" rIns="0" anchor="ctr">
             <a:spAutoFit/>
           </a:bodyPr>
           <a:lstStyle/>
@@ -12412,7 +12412,7 @@
           <a:noFill/>
         </p:spPr>
         <p:txBody>
-          <a:bodyPr wrap="square" lIns="45720" rIns="45720" anchor="ctr">
+          <a:bodyPr wrap="none" lIns="0" rIns="0" anchor="ctr">
             <a:spAutoFit/>
           </a:bodyPr>
           <a:lstStyle/>
@@ -12457,7 +12457,7 @@
           <a:noFill/>
         </p:spPr>
         <p:txBody>
-          <a:bodyPr wrap="square" lIns="45720" rIns="45720" anchor="ctr">
+          <a:bodyPr wrap="none" lIns="0" rIns="0" anchor="ctr">
             <a:spAutoFit/>
           </a:bodyPr>
           <a:lstStyle/>
@@ -12502,7 +12502,7 @@
           <a:noFill/>
         </p:spPr>
         <p:txBody>
-          <a:bodyPr wrap="square" lIns="45720" rIns="45720" anchor="ctr">
+          <a:bodyPr wrap="none" lIns="0" rIns="0" anchor="ctr">
             <a:spAutoFit/>
           </a:bodyPr>
           <a:lstStyle/>
@@ -12547,7 +12547,7 @@
           <a:noFill/>
         </p:spPr>
         <p:txBody>
-          <a:bodyPr wrap="square" lIns="45720" rIns="45720" anchor="ctr">
+          <a:bodyPr wrap="none" lIns="0" rIns="0" anchor="ctr">
             <a:spAutoFit/>
           </a:bodyPr>
           <a:lstStyle/>
@@ -12592,7 +12592,7 @@
           <a:noFill/>
         </p:spPr>
         <p:txBody>
-          <a:bodyPr wrap="square" lIns="45720" rIns="45720" anchor="ctr">
+          <a:bodyPr wrap="none" lIns="0" rIns="0" anchor="ctr">
             <a:spAutoFit/>
           </a:bodyPr>
           <a:lstStyle/>
@@ -12637,7 +12637,7 @@
           <a:noFill/>
         </p:spPr>
         <p:txBody>
-          <a:bodyPr wrap="square" lIns="45720" rIns="45720" anchor="ctr">
+          <a:bodyPr wrap="none" lIns="0" rIns="0" anchor="ctr">
             <a:spAutoFit/>
           </a:bodyPr>
           <a:lstStyle/>
@@ -13085,7 +13085,7 @@
                 </a:solidFill>
                 <a:latin typeface="Arial"/>
               </a:rPr>
-              <a:t>Each column is one signal strength; each cell is the number of correct labels out of the same 1,000 held-back pictures. At 1/6 rate the learned row leads up to −5 dB and the digital row leads from −4 dB. At 1/24 rate the digital row stays on the fallback floor four dB longer, then climbs past the learned row from +4 dB. The difference between the two tables is the effect of cutting radio time fourfold.</a:t>
+              <a:t>Each column is one signal strength; each cell is the number of correct labels out of the same 1,000 held-back pictures. At 1/6 rate the learned row leads up to −5 dB and the digital row leads from −4 dB. At 1/24 rate the digital row stays on the fallback floor two dB longer, then climbs past the learned row from +4 dB. The difference between the two tables is the effect of cutting radio time fourfold.</a:t>
             </a:r>
           </a:p>
         </p:txBody>
@@ -13833,7 +13833,7 @@
                 </a:solidFill>
                 <a:latin typeface="Arial"/>
               </a:rPr>
-              <a:t>Spike heights are measured on the numbers we send. Real-radio replay is scheduled for late October.</a:t>
+              <a:t>Spike heights are measured on the numbers we send. Real-radio replay is a stretch goal for late October.</a:t>
             </a:r>
           </a:p>
         </p:txBody>
@@ -15310,7 +15310,7 @@
                 </a:solidFill>
                 <a:latin typeface="Arial"/>
               </a:rPr>
-              <a:t>Twenty-two more changes were made during the project, three of them repairs to checks that were themselves wrong.</a:t>
+              <a:t>Every other change made during the project is recorded, with its reason, in the specification's amendment log.</a:t>
             </a:r>
           </a:p>
         </p:txBody>
@@ -15809,7 +15809,7 @@
                 </a:solidFill>
                 <a:latin typeface="Arial"/>
               </a:rPr>
-              <a:t>Prior work reports the gap without this control.</a:t>
+              <a:t>To our knowledge, classification studies report this gap without a matched control.</a:t>
             </a:r>
           </a:p>
         </p:txBody>
@@ -16025,7 +16025,7 @@
                 </a:solidFill>
                 <a:latin typeface="Arial"/>
               </a:rPr>
-              <a:t>Prior work quotes a nominal rate and leaves the overhead uncounted.</a:t>
+              <a:t>Many comparisons quote a nominal rate; here every framing and checksum byte is counted.</a:t>
             </a:r>
           </a:p>
         </p:txBody>
@@ -16848,7 +16848,7 @@
                 </a:solidFill>
                 <a:latin typeface="Arial"/>
               </a:rPr>
-              <a:t>Where the remaining weeks went</a:t>
+              <a:t>Where the remaining weeks go</a:t>
             </a:r>
           </a:p>
         </p:txBody>
@@ -17663,7 +17663,7 @@
                 </a:solidFill>
                 <a:latin typeface="Arial"/>
               </a:rPr>
-              <a:t>Signal-strength slider, both systems side by side, frozen plot</a:t>
+              <a:t>Already built; rehearse it with the frozen results</a:t>
             </a:r>
           </a:p>
         </p:txBody>
@@ -18931,7 +18931,7 @@
                 </a:solidFill>
                 <a:latin typeface="Arial"/>
               </a:rPr>
-              <a:t>Progress </a:t>
+              <a:t>Progress up to Sep. 30th</a:t>
             </a:r>
             <a:r>
               <a:rPr lang="en-US" sz="2700" b="1" dirty="0" err="1">
@@ -18940,7 +18940,7 @@
                 </a:solidFill>
                 <a:latin typeface="Arial"/>
               </a:rPr>
-              <a:t>upto</a:t>
+              <a:t/>
             </a:r>
             <a:r>
               <a:rPr lang="en-US" sz="2700" b="1" dirty="0">
@@ -18949,7 +18949,7 @@
                 </a:solidFill>
                 <a:latin typeface="Arial"/>
               </a:rPr>
-              <a:t> Sep. 30th</a:t>
+              <a:t/>
             </a:r>
             <a:endParaRPr sz="2700" b="1" i="0" dirty="0">
               <a:solidFill>
@@ -19851,7 +19851,7 @@
                 </a:solidFill>
                 <a:latin typeface="Arial"/>
               </a:rPr>
-              <a:t>Oct · Measurements</a:t>
+              <a:t>Sep · Measurements</a:t>
             </a:r>
           </a:p>
         </p:txBody>
@@ -19976,7 +19976,7 @@
                 </a:solidFill>
                 <a:latin typeface="Arial"/>
               </a:rPr>
-              <a:t>Nov · Exam set</a:t>
+              <a:t>Oct · Exam set</a:t>
             </a:r>
           </a:p>
         </p:txBody>
@@ -27715,7 +27715,7 @@
                 </a:solidFill>
                 <a:latin typeface="Arial"/>
               </a:rPr>
-              <a:t>ResNet-18, 11.18 M parameters, trained from scratch. It reads 89.8% of held-back pictures correctly, and that is the ceiling both systems are measured against.</a:t>
+              <a:t>ResNet-18, 11.18 M parameters, trained from scratch. It reads 89.8% of held-back pictures correctly. The digital side is marked by a copy of it retrained on compressed pictures.</a:t>
             </a:r>
           </a:p>
         </p:txBody>
